--- a/entrega2-track-fibra.pptx
+++ b/entrega2-track-fibra.pptx
@@ -16,9 +16,10 @@
     <p:sldId id="264" r:id="rId10"/>
     <p:sldId id="265" r:id="rId11"/>
     <p:sldId id="266" r:id="rId12"/>
+    <p:sldId id="267" r:id="rId13"/>
   </p:sldIdLst>
   <p:notesMasterIdLst>
-    <p:notesMasterId r:id="rId13"/>
+    <p:notesMasterId r:id="rId14"/>
   </p:notesMasterIdLst>
   <p:sldSz cx="9144000" cy="5143500"/>
   <p:notesSz cx="5143500" cy="9144000"/>
@@ -712,6 +713,94 @@
             <a:fld id="{F7021451-1387-4CA6-816F-3879F97B5CBC}" type="slidenum">
               <a:rPr lang="en-US"/>
               <a:t>11</a:t>
+            </a:fld>
+            <a:endParaRPr lang="en-US"/>
+          </a:p>
+        </p:txBody>
+      </p:sp>
+    </p:spTree>
+    <p:extLst>
+      <p:ext uri="{BB962C8B-B14F-4D97-AF65-F5344CB8AC3E}">
+        <p14:creationId xmlns:p14="http://schemas.microsoft.com/office/powerpoint/2010/main" val="1024086991"/>
+      </p:ext>
+    </p:extLst>
+  </p:cSld>
+  <p:clrMapOvr>
+    <a:masterClrMapping/>
+  </p:clrMapOvr>
+</p:notes>
+</file>
+
+<file path=ppt/notesSlides/notesSlide12.xml><?xml version="1.0" encoding="utf-8"?>
+<p:notes xmlns:a="http://schemas.openxmlformats.org/drawingml/2006/main" xmlns:r="http://schemas.openxmlformats.org/officeDocument/2006/relationships" xmlns:p="http://schemas.openxmlformats.org/presentationml/2006/main">
+  <p:cSld>
+    <p:spTree>
+      <p:nvGrpSpPr>
+        <p:cNvPr id="1" name=""/>
+        <p:cNvGrpSpPr/>
+        <p:nvPr/>
+      </p:nvGrpSpPr>
+      <p:grpSpPr>
+        <a:xfrm>
+          <a:off x="0" y="0"/>
+          <a:ext cx="0" cy="0"/>
+          <a:chOff x="0" y="0"/>
+          <a:chExt cx="0" cy="0"/>
+        </a:xfrm>
+      </p:grpSpPr>
+      <p:sp>
+        <p:nvSpPr>
+          <p:cNvPr id="2" name="Slide Image Placeholder 1"/>
+          <p:cNvSpPr>
+            <a:spLocks noGrp="1" noRot="1" noChangeAspect="1"/>
+          </p:cNvSpPr>
+          <p:nvPr>
+            <p:ph type="sldImg"/>
+          </p:nvPr>
+        </p:nvSpPr>
+        <p:spPr/>
+      </p:sp>
+      <p:sp>
+        <p:nvSpPr>
+          <p:cNvPr id="3" name="Notes Placeholder 2"/>
+          <p:cNvSpPr>
+            <a:spLocks noGrp="1"/>
+          </p:cNvSpPr>
+          <p:nvPr>
+            <p:ph type="body" idx="1"/>
+          </p:nvPr>
+        </p:nvSpPr>
+        <p:spPr/>
+        <p:txBody>
+          <a:bodyPr/>
+          <a:lstStyle/>
+          <a:p>
+            <a:r>
+              <a:rPr lang="en-US" dirty="0"/>
+              <a:t/>
+            </a:r>
+            <a:endParaRPr lang="en-US" dirty="0"/>
+          </a:p>
+        </p:txBody>
+      </p:sp>
+      <p:sp>
+        <p:nvSpPr>
+          <p:cNvPr id="4" name="Slide Number Placeholder 3"/>
+          <p:cNvSpPr>
+            <a:spLocks noGrp="1"/>
+          </p:cNvSpPr>
+          <p:nvPr>
+            <p:ph type="sldNum" sz="quarter" idx="10"/>
+          </p:nvPr>
+        </p:nvSpPr>
+        <p:spPr/>
+        <p:txBody>
+          <a:bodyPr/>
+          <a:lstStyle/>
+          <a:p>
+            <a:fld id="{F7021451-1387-4CA6-816F-3879F97B5CBC}" type="slidenum">
+              <a:rPr lang="en-US"/>
+              <a:t>12</a:t>
             </a:fld>
             <a:endParaRPr lang="en-US"/>
           </a:p>
@@ -1773,7 +1862,7 @@
         </p:nvSpPr>
         <p:spPr>
           <a:xfrm>
-            <a:off x="0" y="548640"/>
+            <a:off x="0" y="640080"/>
             <a:ext cx="9144000" cy="914400"/>
           </a:xfrm>
           <a:prstGeom prst="rect">
@@ -1790,17 +1879,17 @@
               <a:buNone/>
             </a:pPr>
             <a:r>
-              <a:rPr lang="en-US" sz="7000" dirty="0">
+              <a:rPr lang="en-US" sz="6400" dirty="0">
                 <a:solidFill>
                   <a:srgbClr val="06B6D4"/>
                 </a:solidFill>
-                <a:latin typeface="Calibri" pitchFamily="34" charset="0"/>
-                <a:ea typeface="Calibri" pitchFamily="34" charset="-122"/>
-                <a:cs typeface="Calibri" pitchFamily="34" charset="-120"/>
+                <a:latin typeface="Arial" pitchFamily="34" charset="0"/>
+                <a:ea typeface="Arial" pitchFamily="34" charset="-122"/>
+                <a:cs typeface="Arial" pitchFamily="34" charset="-120"/>
               </a:rPr>
               <a:t>≋</a:t>
             </a:r>
-            <a:endParaRPr lang="en-US" sz="7000" dirty="0"/>
+            <a:endParaRPr lang="en-US" sz="6400" dirty="0"/>
           </a:p>
         </p:txBody>
       </p:sp>
@@ -1812,8 +1901,8 @@
         </p:nvSpPr>
         <p:spPr>
           <a:xfrm>
-            <a:off x="0" y="1600200"/>
-            <a:ext cx="9144000" cy="822960"/>
+            <a:off x="0" y="1691640"/>
+            <a:ext cx="9144000" cy="868680"/>
           </a:xfrm>
           <a:prstGeom prst="rect">
             <a:avLst/>
@@ -1829,17 +1918,17 @@
               <a:buNone/>
             </a:pPr>
             <a:r>
-              <a:rPr lang="en-US" sz="5200" b="1" dirty="0">
+              <a:rPr lang="en-US" sz="5600" b="1" dirty="0">
                 <a:solidFill>
                   <a:srgbClr val="FFFFFF"/>
                 </a:solidFill>
-                <a:latin typeface="Cambria" pitchFamily="34" charset="0"/>
-                <a:ea typeface="Cambria" pitchFamily="34" charset="-122"/>
-                <a:cs typeface="Cambria" pitchFamily="34" charset="-120"/>
+                <a:latin typeface="Arial" pitchFamily="34" charset="0"/>
+                <a:ea typeface="Arial" pitchFamily="34" charset="-122"/>
+                <a:cs typeface="Arial" pitchFamily="34" charset="-120"/>
               </a:rPr>
               <a:t>Track Fibra</a:t>
             </a:r>
-            <a:endParaRPr lang="en-US" sz="5200" dirty="0"/>
+            <a:endParaRPr lang="en-US" sz="5600" dirty="0"/>
           </a:p>
         </p:txBody>
       </p:sp>
@@ -1851,7 +1940,7 @@
         </p:nvSpPr>
         <p:spPr>
           <a:xfrm>
-            <a:off x="0" y="2468880"/>
+            <a:off x="0" y="2578608"/>
             <a:ext cx="9144000" cy="365760"/>
           </a:xfrm>
           <a:prstGeom prst="rect">
@@ -1872,9 +1961,9 @@
                 <a:solidFill>
                   <a:srgbClr val="CBD5E1"/>
                 </a:solidFill>
-                <a:latin typeface="Calibri" pitchFamily="34" charset="0"/>
-                <a:ea typeface="Calibri" pitchFamily="34" charset="-122"/>
-                <a:cs typeface="Calibri" pitchFamily="34" charset="-120"/>
+                <a:latin typeface="Arial" pitchFamily="34" charset="0"/>
+                <a:ea typeface="Arial" pitchFamily="34" charset="-122"/>
+                <a:cs typeface="Arial" pitchFamily="34" charset="-120"/>
               </a:rPr>
               <a:t>Gestão de chamadas de serviço para provedores de internet</a:t>
             </a:r>
@@ -1890,7 +1979,7 @@
         </p:nvSpPr>
         <p:spPr>
           <a:xfrm>
-            <a:off x="0" y="2852928"/>
+            <a:off x="0" y="2962656"/>
             <a:ext cx="9144000" cy="320040"/>
           </a:xfrm>
           <a:prstGeom prst="rect">
@@ -1911,9 +2000,9 @@
                 <a:solidFill>
                   <a:srgbClr val="06B6D4"/>
                 </a:solidFill>
-                <a:latin typeface="Calibri" pitchFamily="34" charset="0"/>
-                <a:ea typeface="Calibri" pitchFamily="34" charset="-122"/>
-                <a:cs typeface="Calibri" pitchFamily="34" charset="-120"/>
+                <a:latin typeface="Arial" pitchFamily="34" charset="0"/>
+                <a:ea typeface="Arial" pitchFamily="34" charset="-122"/>
+                <a:cs typeface="Arial" pitchFamily="34" charset="-120"/>
               </a:rPr>
               <a:t>App mobile do técnico de campo</a:t>
             </a:r>
@@ -1929,7 +2018,7 @@
         </p:nvSpPr>
         <p:spPr>
           <a:xfrm>
-            <a:off x="914400" y="3703320"/>
+            <a:off x="914400" y="3794760"/>
             <a:ext cx="7315200" cy="365760"/>
           </a:xfrm>
           <a:prstGeom prst="rect">
@@ -1950,11 +2039,11 @@
                 <a:solidFill>
                   <a:srgbClr val="E2E8F0"/>
                 </a:solidFill>
-                <a:latin typeface="Calibri" pitchFamily="34" charset="0"/>
-                <a:ea typeface="Calibri" pitchFamily="34" charset="-122"/>
-                <a:cs typeface="Calibri" pitchFamily="34" charset="-120"/>
-              </a:rPr>
-              <a:t>Kauan Silva Schiavon  ·  Leonardo Hideki Gen Sato  ·  Pedro Henrique Tardivo Rodrigues  ·  Guilherme Fiuza R. P. de Carvalho</a:t>
+                <a:latin typeface="Arial" pitchFamily="34" charset="0"/>
+                <a:ea typeface="Arial" pitchFamily="34" charset="-122"/>
+                <a:cs typeface="Arial" pitchFamily="34" charset="-120"/>
+              </a:rPr>
+              <a:t>Kauan Silva Schiavon   ·   Leonardo Hideki Gen Sato   ·   Pedro Henrique Tardivo Rodrigues   ·   Guilherme Fiuza R. P. de Carvalho</a:t>
             </a:r>
             <a:endParaRPr lang="en-US" sz="1200" dirty="0"/>
           </a:p>
@@ -1968,7 +2057,7 @@
         </p:nvSpPr>
         <p:spPr>
           <a:xfrm>
-            <a:off x="914400" y="4114800"/>
+            <a:off x="914400" y="4206240"/>
             <a:ext cx="7315200" cy="320040"/>
           </a:xfrm>
           <a:prstGeom prst="rect">
@@ -1989,9 +2078,9 @@
                 <a:solidFill>
                   <a:srgbClr val="94A3B8"/>
                 </a:solidFill>
-                <a:latin typeface="Calibri" pitchFamily="34" charset="0"/>
-                <a:ea typeface="Calibri" pitchFamily="34" charset="-122"/>
-                <a:cs typeface="Calibri" pitchFamily="34" charset="-120"/>
+                <a:latin typeface="Arial" pitchFamily="34" charset="0"/>
+                <a:ea typeface="Arial" pitchFamily="34" charset="-122"/>
+                <a:cs typeface="Arial" pitchFamily="34" charset="-120"/>
               </a:rPr>
               <a:t>UTFPR – Campo Mourão · Bacharelado em Ciência da Computação · Interação Humano-Computador · 2026</a:t>
             </a:r>
@@ -2013,7 +2102,7 @@
     <p:bg>
       <p:bgPr>
         <a:solidFill>
-          <a:srgbClr val="FFFFFF"/>
+          <a:srgbClr val="F8FAFC"/>
         </a:solidFill>
       </p:bgPr>
     </p:bg>
@@ -2039,7 +2128,7 @@
         </p:nvSpPr>
         <p:spPr>
           <a:xfrm>
-            <a:off x="502920" y="301752"/>
+            <a:off x="548640" y="329184"/>
             <a:ext cx="8229600" cy="274320"/>
           </a:xfrm>
           <a:prstGeom prst="rect">
@@ -2056,15 +2145,15 @@
               <a:buNone/>
             </a:pPr>
             <a:r>
-              <a:rPr lang="en-US" sz="1200" b="1" spc="300" kern="0" dirty="0">
+              <a:rPr lang="en-US" sz="1200" b="1" spc="400" kern="0" dirty="0">
                 <a:solidFill>
                   <a:srgbClr val="06B6D4"/>
                 </a:solidFill>
-                <a:latin typeface="Calibri" pitchFamily="34" charset="0"/>
-                <a:ea typeface="Calibri" pitchFamily="34" charset="-122"/>
-                <a:cs typeface="Calibri" pitchFamily="34" charset="-120"/>
-              </a:rPr>
-              <a:t>RESULTADOS</a:t>
+                <a:latin typeface="Arial" pitchFamily="34" charset="0"/>
+                <a:ea typeface="Arial" pitchFamily="34" charset="-122"/>
+                <a:cs typeface="Arial" pitchFamily="34" charset="-120"/>
+              </a:rPr>
+              <a:t>MELHORIAS NO PROTÓTIPO</a:t>
             </a:r>
             <a:endParaRPr lang="en-US" sz="1200" dirty="0"/>
           </a:p>
@@ -2078,7 +2167,7 @@
         </p:nvSpPr>
         <p:spPr>
           <a:xfrm>
-            <a:off x="457200" y="548640"/>
+            <a:off x="502920" y="585216"/>
             <a:ext cx="8229600" cy="640080"/>
           </a:xfrm>
           <a:prstGeom prst="rect">
@@ -2095,17 +2184,17 @@
               <a:buNone/>
             </a:pPr>
             <a:r>
-              <a:rPr lang="en-US" sz="3200" b="1" dirty="0">
+              <a:rPr lang="en-US" sz="3400" b="1" dirty="0">
                 <a:solidFill>
                   <a:srgbClr val="0F172A"/>
                 </a:solidFill>
-                <a:latin typeface="Cambria" pitchFamily="34" charset="0"/>
-                <a:ea typeface="Cambria" pitchFamily="34" charset="-122"/>
-                <a:cs typeface="Cambria" pitchFamily="34" charset="-120"/>
-              </a:rPr>
-              <a:t>Avaliação de UX — AttrakDiff</a:t>
-            </a:r>
-            <a:endParaRPr lang="en-US" sz="3200" dirty="0"/>
+                <a:latin typeface="Arial" pitchFamily="34" charset="0"/>
+                <a:ea typeface="Arial" pitchFamily="34" charset="-122"/>
+                <a:cs typeface="Arial" pitchFamily="34" charset="-120"/>
+              </a:rPr>
+              <a:t>Antes → Depois</a:t>
+            </a:r>
+            <a:endParaRPr lang="en-US" sz="3400" dirty="0"/>
           </a:p>
         </p:txBody>
       </p:sp>
@@ -2117,27 +2206,22 @@
         </p:nvSpPr>
         <p:spPr>
           <a:xfrm>
-            <a:off x="457200" y="1463040"/>
-            <a:ext cx="1591056" cy="1783080"/>
+            <a:off x="411480" y="1371600"/>
+            <a:ext cx="2651760" cy="3063240"/>
           </a:xfrm>
           <a:prstGeom prst="roundRect">
             <a:avLst>
-              <a:gd name="adj" fmla="val 4598"/>
+              <a:gd name="adj" fmla="val 4483"/>
             </a:avLst>
           </a:prstGeom>
           <a:solidFill>
-            <a:srgbClr val="F8FAFC"/>
+            <a:srgbClr val="FFFFFF"/>
           </a:solidFill>
-          <a:ln w="12700">
-            <a:solidFill>
-              <a:srgbClr val="E2E8F0"/>
-            </a:solidFill>
-            <a:prstDash val="solid"/>
-          </a:ln>
+          <a:ln/>
           <a:effectLst>
-            <a:outerShdw sx="100000" sy="100000" kx="0" ky="0" algn="bl" rotWithShape="0" blurRad="88900" dist="38100" dir="5400000">
+            <a:outerShdw sx="100000" sy="100000" kx="0" ky="0" algn="bl" rotWithShape="0" blurRad="139700" dist="38100" dir="5400000">
               <a:srgbClr val="0F172A">
-                <a:alpha val="10000"/>
+                <a:alpha val="8000"/>
               </a:srgbClr>
             </a:outerShdw>
           </a:effectLst>
@@ -2151,8 +2235,8 @@
         </p:nvSpPr>
         <p:spPr>
           <a:xfrm>
-            <a:off x="457200" y="1691640"/>
-            <a:ext cx="1591056" cy="731520"/>
+            <a:off x="457200" y="1463040"/>
+            <a:ext cx="2606040" cy="320040"/>
           </a:xfrm>
           <a:prstGeom prst="rect">
             <a:avLst/>
@@ -2168,30 +2252,78 @@
               <a:buNone/>
             </a:pPr>
             <a:r>
-              <a:rPr lang="en-US" sz="3800" b="1" dirty="0">
-                <a:solidFill>
-                  <a:srgbClr val="1D4ED8"/>
-                </a:solidFill>
-                <a:latin typeface="Cambria" pitchFamily="34" charset="0"/>
-                <a:ea typeface="Cambria" pitchFamily="34" charset="-122"/>
-                <a:cs typeface="Cambria" pitchFamily="34" charset="-120"/>
-              </a:rPr>
-              <a:t>+0,1</a:t>
-            </a:r>
-            <a:endParaRPr lang="en-US" sz="3800" dirty="0"/>
-          </a:p>
-        </p:txBody>
-      </p:sp>
-      <p:sp>
-        <p:nvSpPr>
-          <p:cNvPr id="6" name="Text 4"/>
-          <p:cNvSpPr/>
-          <p:nvPr/>
-        </p:nvSpPr>
-        <p:spPr>
-          <a:xfrm>
-            <a:off x="457200" y="2423160"/>
-            <a:ext cx="1591056" cy="320040"/>
+              <a:rPr lang="en-US" sz="1250" b="1" dirty="0">
+                <a:solidFill>
+                  <a:srgbClr val="2563EB"/>
+                </a:solidFill>
+                <a:latin typeface="Arial" pitchFamily="34" charset="0"/>
+                <a:ea typeface="Arial" pitchFamily="34" charset="-122"/>
+                <a:cs typeface="Arial" pitchFamily="34" charset="-120"/>
+              </a:rPr>
+              <a:t>D1 · Confirmação ao finalizar</a:t>
+            </a:r>
+            <a:endParaRPr lang="en-US" sz="1250" dirty="0"/>
+          </a:p>
+        </p:txBody>
+      </p:sp>
+      <p:pic>
+        <p:nvPicPr>
+          <p:cNvPr id="6" name="Image 0" descr="assets/antes-d1-finalizado-sem-desfazer.png">    </p:cNvPr>
+          <p:cNvPicPr>
+            <a:picLocks noChangeAspect="1"/>
+          </p:cNvPicPr>
+          <p:nvPr/>
+        </p:nvPicPr>
+        <p:blipFill>
+          <a:blip r:embed="rId1"/>
+          <a:stretch>
+            <a:fillRect/>
+          </a:stretch>
+        </p:blipFill>
+        <p:spPr>
+          <a:xfrm>
+            <a:off x="576072" y="1874520"/>
+            <a:ext cx="987585" cy="2148840"/>
+          </a:xfrm>
+          <a:prstGeom prst="rect">
+            <a:avLst/>
+          </a:prstGeom>
+        </p:spPr>
+      </p:pic>
+      <p:pic>
+        <p:nvPicPr>
+          <p:cNvPr id="7" name="Image 1" descr="assets/depois-d1-finalizado-com-desfazer.png">    </p:cNvPr>
+          <p:cNvPicPr>
+            <a:picLocks noChangeAspect="1"/>
+          </p:cNvPicPr>
+          <p:nvPr/>
+        </p:nvPicPr>
+        <p:blipFill>
+          <a:blip r:embed="rId2"/>
+          <a:stretch>
+            <a:fillRect/>
+          </a:stretch>
+        </p:blipFill>
+        <p:spPr>
+          <a:xfrm>
+            <a:off x="2062252" y="1874520"/>
+            <a:ext cx="973556" cy="2148840"/>
+          </a:xfrm>
+          <a:prstGeom prst="rect">
+            <a:avLst/>
+          </a:prstGeom>
+        </p:spPr>
+      </p:pic>
+      <p:sp>
+        <p:nvSpPr>
+          <p:cNvPr id="8" name="Text 4"/>
+          <p:cNvSpPr/>
+          <p:nvPr/>
+        </p:nvSpPr>
+        <p:spPr>
+          <a:xfrm>
+            <a:off x="1563657" y="1874520"/>
+            <a:ext cx="498595" cy="2148840"/>
           </a:xfrm>
           <a:prstGeom prst="rect">
             <a:avLst/>
@@ -2207,30 +2339,27 @@
               <a:buNone/>
             </a:pPr>
             <a:r>
-              <a:rPr lang="en-US" sz="1500" b="1" dirty="0">
-                <a:solidFill>
-                  <a:srgbClr val="0F172A"/>
-                </a:solidFill>
-                <a:latin typeface="Calibri" pitchFamily="34" charset="0"/>
-                <a:ea typeface="Calibri" pitchFamily="34" charset="-122"/>
-                <a:cs typeface="Calibri" pitchFamily="34" charset="-120"/>
-              </a:rPr>
-              <a:t>PQ</a:t>
-            </a:r>
-            <a:endParaRPr lang="en-US" sz="1500" dirty="0"/>
-          </a:p>
-        </p:txBody>
-      </p:sp>
-      <p:sp>
-        <p:nvSpPr>
-          <p:cNvPr id="7" name="Text 5"/>
-          <p:cNvSpPr/>
-          <p:nvPr/>
-        </p:nvSpPr>
-        <p:spPr>
-          <a:xfrm>
-            <a:off x="457200" y="2761488"/>
-            <a:ext cx="1591056" cy="320040"/>
+              <a:rPr lang="en-US" sz="2000" b="1" dirty="0">
+                <a:solidFill>
+                  <a:srgbClr val="06B6D4"/>
+                </a:solidFill>
+              </a:rPr>
+              <a:t>→</a:t>
+            </a:r>
+            <a:endParaRPr lang="en-US" sz="2000" dirty="0"/>
+          </a:p>
+        </p:txBody>
+      </p:sp>
+      <p:sp>
+        <p:nvSpPr>
+          <p:cNvPr id="9" name="Text 5"/>
+          <p:cNvSpPr/>
+          <p:nvPr/>
+        </p:nvSpPr>
+        <p:spPr>
+          <a:xfrm>
+            <a:off x="576072" y="4050792"/>
+            <a:ext cx="987585" cy="228600"/>
           </a:xfrm>
           <a:prstGeom prst="rect">
             <a:avLst/>
@@ -2246,49 +2375,83 @@
               <a:buNone/>
             </a:pPr>
             <a:r>
-              <a:rPr lang="en-US" sz="1100" dirty="0">
-                <a:solidFill>
-                  <a:srgbClr val="475569"/>
-                </a:solidFill>
-                <a:latin typeface="Calibri" pitchFamily="34" charset="0"/>
-                <a:ea typeface="Calibri" pitchFamily="34" charset="-122"/>
-                <a:cs typeface="Calibri" pitchFamily="34" charset="-120"/>
-              </a:rPr>
-              <a:t>Pragmática</a:t>
-            </a:r>
-            <a:endParaRPr lang="en-US" sz="1100" dirty="0"/>
-          </a:p>
-        </p:txBody>
-      </p:sp>
-      <p:sp>
-        <p:nvSpPr>
-          <p:cNvPr id="8" name="Shape 6"/>
-          <p:cNvSpPr/>
-          <p:nvPr/>
-        </p:nvSpPr>
-        <p:spPr>
-          <a:xfrm>
-            <a:off x="2221992" y="1463040"/>
-            <a:ext cx="1591056" cy="1783080"/>
+              <a:rPr lang="en-US" sz="900" dirty="0">
+                <a:solidFill>
+                  <a:srgbClr val="64748B"/>
+                </a:solidFill>
+                <a:latin typeface="Arial" pitchFamily="34" charset="0"/>
+                <a:ea typeface="Arial" pitchFamily="34" charset="-122"/>
+                <a:cs typeface="Arial" pitchFamily="34" charset="-120"/>
+              </a:rPr>
+              <a:t>Antes</a:t>
+            </a:r>
+            <a:endParaRPr lang="en-US" sz="900" dirty="0"/>
+          </a:p>
+        </p:txBody>
+      </p:sp>
+      <p:sp>
+        <p:nvSpPr>
+          <p:cNvPr id="10" name="Text 6"/>
+          <p:cNvSpPr/>
+          <p:nvPr/>
+        </p:nvSpPr>
+        <p:spPr>
+          <a:xfrm>
+            <a:off x="2062252" y="4050792"/>
+            <a:ext cx="973556" cy="228600"/>
+          </a:xfrm>
+          <a:prstGeom prst="rect">
+            <a:avLst/>
+          </a:prstGeom>
+          <a:noFill/>
+          <a:ln/>
+        </p:spPr>
+        <p:txBody>
+          <a:bodyPr wrap="square" lIns="0" tIns="0" rIns="0" bIns="0" rtlCol="0" anchor="ctr"/>
+          <a:lstStyle/>
+          <a:p>
+            <a:pPr algn="ctr" indent="0" marL="0">
+              <a:buNone/>
+            </a:pPr>
+            <a:r>
+              <a:rPr lang="en-US" sz="900" b="1" dirty="0">
+                <a:solidFill>
+                  <a:srgbClr val="059669"/>
+                </a:solidFill>
+                <a:latin typeface="Arial" pitchFamily="34" charset="0"/>
+                <a:ea typeface="Arial" pitchFamily="34" charset="-122"/>
+                <a:cs typeface="Arial" pitchFamily="34" charset="-120"/>
+              </a:rPr>
+              <a:t>Depois</a:t>
+            </a:r>
+            <a:endParaRPr lang="en-US" sz="900" dirty="0"/>
+          </a:p>
+        </p:txBody>
+      </p:sp>
+      <p:sp>
+        <p:nvSpPr>
+          <p:cNvPr id="11" name="Shape 7"/>
+          <p:cNvSpPr/>
+          <p:nvPr/>
+        </p:nvSpPr>
+        <p:spPr>
+          <a:xfrm>
+            <a:off x="3154680" y="1371600"/>
+            <a:ext cx="2651760" cy="3063240"/>
           </a:xfrm>
           <a:prstGeom prst="roundRect">
             <a:avLst>
-              <a:gd name="adj" fmla="val 4598"/>
+              <a:gd name="adj" fmla="val 4483"/>
             </a:avLst>
           </a:prstGeom>
           <a:solidFill>
-            <a:srgbClr val="F8FAFC"/>
+            <a:srgbClr val="FFFFFF"/>
           </a:solidFill>
-          <a:ln w="12700">
-            <a:solidFill>
-              <a:srgbClr val="E2E8F0"/>
-            </a:solidFill>
-            <a:prstDash val="solid"/>
-          </a:ln>
+          <a:ln/>
           <a:effectLst>
-            <a:outerShdw sx="100000" sy="100000" kx="0" ky="0" algn="bl" rotWithShape="0" blurRad="88900" dist="38100" dir="5400000">
+            <a:outerShdw sx="100000" sy="100000" kx="0" ky="0" algn="bl" rotWithShape="0" blurRad="139700" dist="38100" dir="5400000">
               <a:srgbClr val="0F172A">
-                <a:alpha val="10000"/>
+                <a:alpha val="8000"/>
               </a:srgbClr>
             </a:outerShdw>
           </a:effectLst>
@@ -2296,14 +2459,14 @@
       </p:sp>
       <p:sp>
         <p:nvSpPr>
-          <p:cNvPr id="9" name="Text 7"/>
-          <p:cNvSpPr/>
-          <p:nvPr/>
-        </p:nvSpPr>
-        <p:spPr>
-          <a:xfrm>
-            <a:off x="2221992" y="1691640"/>
-            <a:ext cx="1591056" cy="731520"/>
+          <p:cNvPr id="12" name="Text 8"/>
+          <p:cNvSpPr/>
+          <p:nvPr/>
+        </p:nvSpPr>
+        <p:spPr>
+          <a:xfrm>
+            <a:off x="3200400" y="1463040"/>
+            <a:ext cx="2606040" cy="320040"/>
           </a:xfrm>
           <a:prstGeom prst="rect">
             <a:avLst/>
@@ -2319,30 +2482,78 @@
               <a:buNone/>
             </a:pPr>
             <a:r>
-              <a:rPr lang="en-US" sz="3800" b="1" dirty="0">
-                <a:solidFill>
-                  <a:srgbClr val="1D4ED8"/>
-                </a:solidFill>
-                <a:latin typeface="Cambria" pitchFamily="34" charset="0"/>
-                <a:ea typeface="Cambria" pitchFamily="34" charset="-122"/>
-                <a:cs typeface="Cambria" pitchFamily="34" charset="-120"/>
-              </a:rPr>
-              <a:t>+0,3</a:t>
-            </a:r>
-            <a:endParaRPr lang="en-US" sz="3800" dirty="0"/>
-          </a:p>
-        </p:txBody>
-      </p:sp>
-      <p:sp>
-        <p:nvSpPr>
-          <p:cNvPr id="10" name="Text 8"/>
-          <p:cNvSpPr/>
-          <p:nvPr/>
-        </p:nvSpPr>
-        <p:spPr>
-          <a:xfrm>
-            <a:off x="2221992" y="2423160"/>
-            <a:ext cx="1591056" cy="320040"/>
+              <a:rPr lang="en-US" sz="1250" b="1" dirty="0">
+                <a:solidFill>
+                  <a:srgbClr val="2563EB"/>
+                </a:solidFill>
+                <a:latin typeface="Arial" pitchFamily="34" charset="0"/>
+                <a:ea typeface="Arial" pitchFamily="34" charset="-122"/>
+                <a:cs typeface="Arial" pitchFamily="34" charset="-120"/>
+              </a:rPr>
+              <a:t>D2 · Telefone clicável</a:t>
+            </a:r>
+            <a:endParaRPr lang="en-US" sz="1250" dirty="0"/>
+          </a:p>
+        </p:txBody>
+      </p:sp>
+      <p:pic>
+        <p:nvPicPr>
+          <p:cNvPr id="13" name="Image 2" descr="assets/antes-d2d3-detalhe-sem-icone-sem-foto.png">    </p:cNvPr>
+          <p:cNvPicPr>
+            <a:picLocks noChangeAspect="1"/>
+          </p:cNvPicPr>
+          <p:nvPr/>
+        </p:nvPicPr>
+        <p:blipFill>
+          <a:blip r:embed="rId3"/>
+          <a:stretch>
+            <a:fillRect/>
+          </a:stretch>
+        </p:blipFill>
+        <p:spPr>
+          <a:xfrm>
+            <a:off x="3319272" y="1874520"/>
+            <a:ext cx="976841" cy="2148840"/>
+          </a:xfrm>
+          <a:prstGeom prst="rect">
+            <a:avLst/>
+          </a:prstGeom>
+        </p:spPr>
+      </p:pic>
+      <p:pic>
+        <p:nvPicPr>
+          <p:cNvPr id="14" name="Image 3" descr="assets/depois-d2-detalhe-com-icone-ligar.png">    </p:cNvPr>
+          <p:cNvPicPr>
+            <a:picLocks noChangeAspect="1"/>
+          </p:cNvPicPr>
+          <p:nvPr/>
+        </p:nvPicPr>
+        <p:blipFill>
+          <a:blip r:embed="rId4"/>
+          <a:stretch>
+            <a:fillRect/>
+          </a:stretch>
+        </p:blipFill>
+        <p:spPr>
+          <a:xfrm>
+            <a:off x="4785871" y="1874520"/>
+            <a:ext cx="993137" cy="2148840"/>
+          </a:xfrm>
+          <a:prstGeom prst="rect">
+            <a:avLst/>
+          </a:prstGeom>
+        </p:spPr>
+      </p:pic>
+      <p:sp>
+        <p:nvSpPr>
+          <p:cNvPr id="15" name="Text 9"/>
+          <p:cNvSpPr/>
+          <p:nvPr/>
+        </p:nvSpPr>
+        <p:spPr>
+          <a:xfrm>
+            <a:off x="4296113" y="1874520"/>
+            <a:ext cx="489759" cy="2148840"/>
           </a:xfrm>
           <a:prstGeom prst="rect">
             <a:avLst/>
@@ -2358,30 +2569,27 @@
               <a:buNone/>
             </a:pPr>
             <a:r>
-              <a:rPr lang="en-US" sz="1500" b="1" dirty="0">
-                <a:solidFill>
-                  <a:srgbClr val="0F172A"/>
-                </a:solidFill>
-                <a:latin typeface="Calibri" pitchFamily="34" charset="0"/>
-                <a:ea typeface="Calibri" pitchFamily="34" charset="-122"/>
-                <a:cs typeface="Calibri" pitchFamily="34" charset="-120"/>
-              </a:rPr>
-              <a:t>HQ-I</a:t>
-            </a:r>
-            <a:endParaRPr lang="en-US" sz="1500" dirty="0"/>
-          </a:p>
-        </p:txBody>
-      </p:sp>
-      <p:sp>
-        <p:nvSpPr>
-          <p:cNvPr id="11" name="Text 9"/>
-          <p:cNvSpPr/>
-          <p:nvPr/>
-        </p:nvSpPr>
-        <p:spPr>
-          <a:xfrm>
-            <a:off x="2221992" y="2761488"/>
-            <a:ext cx="1591056" cy="320040"/>
+              <a:rPr lang="en-US" sz="2000" b="1" dirty="0">
+                <a:solidFill>
+                  <a:srgbClr val="06B6D4"/>
+                </a:solidFill>
+              </a:rPr>
+              <a:t>→</a:t>
+            </a:r>
+            <a:endParaRPr lang="en-US" sz="2000" dirty="0"/>
+          </a:p>
+        </p:txBody>
+      </p:sp>
+      <p:sp>
+        <p:nvSpPr>
+          <p:cNvPr id="16" name="Text 10"/>
+          <p:cNvSpPr/>
+          <p:nvPr/>
+        </p:nvSpPr>
+        <p:spPr>
+          <a:xfrm>
+            <a:off x="3319272" y="4050792"/>
+            <a:ext cx="976841" cy="228600"/>
           </a:xfrm>
           <a:prstGeom prst="rect">
             <a:avLst/>
@@ -2397,49 +2605,83 @@
               <a:buNone/>
             </a:pPr>
             <a:r>
-              <a:rPr lang="en-US" sz="1100" dirty="0">
-                <a:solidFill>
-                  <a:srgbClr val="475569"/>
-                </a:solidFill>
-                <a:latin typeface="Calibri" pitchFamily="34" charset="0"/>
-                <a:ea typeface="Calibri" pitchFamily="34" charset="-122"/>
-                <a:cs typeface="Calibri" pitchFamily="34" charset="-120"/>
-              </a:rPr>
-              <a:t>Identidade</a:t>
-            </a:r>
-            <a:endParaRPr lang="en-US" sz="1100" dirty="0"/>
-          </a:p>
-        </p:txBody>
-      </p:sp>
-      <p:sp>
-        <p:nvSpPr>
-          <p:cNvPr id="12" name="Shape 10"/>
-          <p:cNvSpPr/>
-          <p:nvPr/>
-        </p:nvSpPr>
-        <p:spPr>
-          <a:xfrm>
-            <a:off x="3986784" y="1463040"/>
-            <a:ext cx="1591056" cy="1783080"/>
+              <a:rPr lang="en-US" sz="900" dirty="0">
+                <a:solidFill>
+                  <a:srgbClr val="64748B"/>
+                </a:solidFill>
+                <a:latin typeface="Arial" pitchFamily="34" charset="0"/>
+                <a:ea typeface="Arial" pitchFamily="34" charset="-122"/>
+                <a:cs typeface="Arial" pitchFamily="34" charset="-120"/>
+              </a:rPr>
+              <a:t>Antes</a:t>
+            </a:r>
+            <a:endParaRPr lang="en-US" sz="900" dirty="0"/>
+          </a:p>
+        </p:txBody>
+      </p:sp>
+      <p:sp>
+        <p:nvSpPr>
+          <p:cNvPr id="17" name="Text 11"/>
+          <p:cNvSpPr/>
+          <p:nvPr/>
+        </p:nvSpPr>
+        <p:spPr>
+          <a:xfrm>
+            <a:off x="4785871" y="4050792"/>
+            <a:ext cx="993137" cy="228600"/>
+          </a:xfrm>
+          <a:prstGeom prst="rect">
+            <a:avLst/>
+          </a:prstGeom>
+          <a:noFill/>
+          <a:ln/>
+        </p:spPr>
+        <p:txBody>
+          <a:bodyPr wrap="square" lIns="0" tIns="0" rIns="0" bIns="0" rtlCol="0" anchor="ctr"/>
+          <a:lstStyle/>
+          <a:p>
+            <a:pPr algn="ctr" indent="0" marL="0">
+              <a:buNone/>
+            </a:pPr>
+            <a:r>
+              <a:rPr lang="en-US" sz="900" b="1" dirty="0">
+                <a:solidFill>
+                  <a:srgbClr val="059669"/>
+                </a:solidFill>
+                <a:latin typeface="Arial" pitchFamily="34" charset="0"/>
+                <a:ea typeface="Arial" pitchFamily="34" charset="-122"/>
+                <a:cs typeface="Arial" pitchFamily="34" charset="-120"/>
+              </a:rPr>
+              <a:t>Depois</a:t>
+            </a:r>
+            <a:endParaRPr lang="en-US" sz="900" dirty="0"/>
+          </a:p>
+        </p:txBody>
+      </p:sp>
+      <p:sp>
+        <p:nvSpPr>
+          <p:cNvPr id="18" name="Shape 12"/>
+          <p:cNvSpPr/>
+          <p:nvPr/>
+        </p:nvSpPr>
+        <p:spPr>
+          <a:xfrm>
+            <a:off x="5897880" y="1371600"/>
+            <a:ext cx="2651760" cy="3063240"/>
           </a:xfrm>
           <a:prstGeom prst="roundRect">
             <a:avLst>
-              <a:gd name="adj" fmla="val 4598"/>
+              <a:gd name="adj" fmla="val 4483"/>
             </a:avLst>
           </a:prstGeom>
           <a:solidFill>
-            <a:srgbClr val="F8FAFC"/>
+            <a:srgbClr val="FFFFFF"/>
           </a:solidFill>
-          <a:ln w="12700">
-            <a:solidFill>
-              <a:srgbClr val="E2E8F0"/>
-            </a:solidFill>
-            <a:prstDash val="solid"/>
-          </a:ln>
+          <a:ln/>
           <a:effectLst>
-            <a:outerShdw sx="100000" sy="100000" kx="0" ky="0" algn="bl" rotWithShape="0" blurRad="88900" dist="38100" dir="5400000">
+            <a:outerShdw sx="100000" sy="100000" kx="0" ky="0" algn="bl" rotWithShape="0" blurRad="139700" dist="38100" dir="5400000">
               <a:srgbClr val="0F172A">
-                <a:alpha val="10000"/>
+                <a:alpha val="8000"/>
               </a:srgbClr>
             </a:outerShdw>
           </a:effectLst>
@@ -2447,14 +2689,14 @@
       </p:sp>
       <p:sp>
         <p:nvSpPr>
-          <p:cNvPr id="13" name="Text 11"/>
-          <p:cNvSpPr/>
-          <p:nvPr/>
-        </p:nvSpPr>
-        <p:spPr>
-          <a:xfrm>
-            <a:off x="3986784" y="1691640"/>
-            <a:ext cx="1591056" cy="731520"/>
+          <p:cNvPr id="19" name="Text 13"/>
+          <p:cNvSpPr/>
+          <p:nvPr/>
+        </p:nvSpPr>
+        <p:spPr>
+          <a:xfrm>
+            <a:off x="5943600" y="1463040"/>
+            <a:ext cx="2606040" cy="320040"/>
           </a:xfrm>
           <a:prstGeom prst="rect">
             <a:avLst/>
@@ -2470,30 +2712,78 @@
               <a:buNone/>
             </a:pPr>
             <a:r>
-              <a:rPr lang="en-US" sz="3800" b="1" dirty="0">
-                <a:solidFill>
-                  <a:srgbClr val="DC2626"/>
-                </a:solidFill>
-                <a:latin typeface="Cambria" pitchFamily="34" charset="0"/>
-                <a:ea typeface="Cambria" pitchFamily="34" charset="-122"/>
-                <a:cs typeface="Cambria" pitchFamily="34" charset="-120"/>
-              </a:rPr>
-              <a:t>−0,3</a:t>
-            </a:r>
-            <a:endParaRPr lang="en-US" sz="3800" dirty="0"/>
-          </a:p>
-        </p:txBody>
-      </p:sp>
-      <p:sp>
-        <p:nvSpPr>
-          <p:cNvPr id="14" name="Text 12"/>
-          <p:cNvSpPr/>
-          <p:nvPr/>
-        </p:nvSpPr>
-        <p:spPr>
-          <a:xfrm>
-            <a:off x="3986784" y="2423160"/>
-            <a:ext cx="1591056" cy="320040"/>
+              <a:rPr lang="en-US" sz="1250" b="1" dirty="0">
+                <a:solidFill>
+                  <a:srgbClr val="2563EB"/>
+                </a:solidFill>
+                <a:latin typeface="Arial" pitchFamily="34" charset="0"/>
+                <a:ea typeface="Arial" pitchFamily="34" charset="-122"/>
+                <a:cs typeface="Arial" pitchFamily="34" charset="-120"/>
+              </a:rPr>
+              <a:t>D3 · Adicionar foto</a:t>
+            </a:r>
+            <a:endParaRPr lang="en-US" sz="1250" dirty="0"/>
+          </a:p>
+        </p:txBody>
+      </p:sp>
+      <p:pic>
+        <p:nvPicPr>
+          <p:cNvPr id="20" name="Image 4" descr="assets/antes-d2d3-detalhe-sem-icone-sem-foto.png">    </p:cNvPr>
+          <p:cNvPicPr>
+            <a:picLocks noChangeAspect="1"/>
+          </p:cNvPicPr>
+          <p:nvPr/>
+        </p:nvPicPr>
+        <p:blipFill>
+          <a:blip r:embed="rId5"/>
+          <a:stretch>
+            <a:fillRect/>
+          </a:stretch>
+        </p:blipFill>
+        <p:spPr>
+          <a:xfrm>
+            <a:off x="6062472" y="1874520"/>
+            <a:ext cx="976841" cy="2148840"/>
+          </a:xfrm>
+          <a:prstGeom prst="rect">
+            <a:avLst/>
+          </a:prstGeom>
+        </p:spPr>
+      </p:pic>
+      <p:pic>
+        <p:nvPicPr>
+          <p:cNvPr id="21" name="Image 5" descr="assets/antes-d2-depois-d3-detalhe-com-foto.png">    </p:cNvPr>
+          <p:cNvPicPr>
+            <a:picLocks noChangeAspect="1"/>
+          </p:cNvPicPr>
+          <p:nvPr/>
+        </p:nvPicPr>
+        <p:blipFill>
+          <a:blip r:embed="rId6"/>
+          <a:stretch>
+            <a:fillRect/>
+          </a:stretch>
+        </p:blipFill>
+        <p:spPr>
+          <a:xfrm>
+            <a:off x="7543349" y="1874520"/>
+            <a:ext cx="978859" cy="2148840"/>
+          </a:xfrm>
+          <a:prstGeom prst="rect">
+            <a:avLst/>
+          </a:prstGeom>
+        </p:spPr>
+      </p:pic>
+      <p:sp>
+        <p:nvSpPr>
+          <p:cNvPr id="22" name="Text 14"/>
+          <p:cNvSpPr/>
+          <p:nvPr/>
+        </p:nvSpPr>
+        <p:spPr>
+          <a:xfrm>
+            <a:off x="7039313" y="1874520"/>
+            <a:ext cx="504037" cy="2148840"/>
           </a:xfrm>
           <a:prstGeom prst="rect">
             <a:avLst/>
@@ -2509,30 +2799,27 @@
               <a:buNone/>
             </a:pPr>
             <a:r>
-              <a:rPr lang="en-US" sz="1500" b="1" dirty="0">
-                <a:solidFill>
-                  <a:srgbClr val="0F172A"/>
-                </a:solidFill>
-                <a:latin typeface="Calibri" pitchFamily="34" charset="0"/>
-                <a:ea typeface="Calibri" pitchFamily="34" charset="-122"/>
-                <a:cs typeface="Calibri" pitchFamily="34" charset="-120"/>
-              </a:rPr>
-              <a:t>HQ-S</a:t>
-            </a:r>
-            <a:endParaRPr lang="en-US" sz="1500" dirty="0"/>
-          </a:p>
-        </p:txBody>
-      </p:sp>
-      <p:sp>
-        <p:nvSpPr>
-          <p:cNvPr id="15" name="Text 13"/>
-          <p:cNvSpPr/>
-          <p:nvPr/>
-        </p:nvSpPr>
-        <p:spPr>
-          <a:xfrm>
-            <a:off x="3986784" y="2761488"/>
-            <a:ext cx="1591056" cy="320040"/>
+              <a:rPr lang="en-US" sz="2000" b="1" dirty="0">
+                <a:solidFill>
+                  <a:srgbClr val="06B6D4"/>
+                </a:solidFill>
+              </a:rPr>
+              <a:t>→</a:t>
+            </a:r>
+            <a:endParaRPr lang="en-US" sz="2000" dirty="0"/>
+          </a:p>
+        </p:txBody>
+      </p:sp>
+      <p:sp>
+        <p:nvSpPr>
+          <p:cNvPr id="23" name="Text 15"/>
+          <p:cNvSpPr/>
+          <p:nvPr/>
+        </p:nvSpPr>
+        <p:spPr>
+          <a:xfrm>
+            <a:off x="6062472" y="4050792"/>
+            <a:ext cx="976841" cy="228600"/>
           </a:xfrm>
           <a:prstGeom prst="rect">
             <a:avLst/>
@@ -2548,64 +2835,30 @@
               <a:buNone/>
             </a:pPr>
             <a:r>
-              <a:rPr lang="en-US" sz="1100" dirty="0">
-                <a:solidFill>
-                  <a:srgbClr val="475569"/>
-                </a:solidFill>
-                <a:latin typeface="Calibri" pitchFamily="34" charset="0"/>
-                <a:ea typeface="Calibri" pitchFamily="34" charset="-122"/>
-                <a:cs typeface="Calibri" pitchFamily="34" charset="-120"/>
-              </a:rPr>
-              <a:t>Estimulação</a:t>
-            </a:r>
-            <a:endParaRPr lang="en-US" sz="1100" dirty="0"/>
-          </a:p>
-        </p:txBody>
-      </p:sp>
-      <p:sp>
-        <p:nvSpPr>
-          <p:cNvPr id="16" name="Shape 14"/>
-          <p:cNvSpPr/>
-          <p:nvPr/>
-        </p:nvSpPr>
-        <p:spPr>
-          <a:xfrm>
-            <a:off x="5751576" y="1463040"/>
-            <a:ext cx="1591056" cy="1783080"/>
-          </a:xfrm>
-          <a:prstGeom prst="roundRect">
-            <a:avLst>
-              <a:gd name="adj" fmla="val 4598"/>
-            </a:avLst>
-          </a:prstGeom>
-          <a:solidFill>
-            <a:srgbClr val="F8FAFC"/>
-          </a:solidFill>
-          <a:ln w="12700">
-            <a:solidFill>
-              <a:srgbClr val="E2E8F0"/>
-            </a:solidFill>
-            <a:prstDash val="solid"/>
-          </a:ln>
-          <a:effectLst>
-            <a:outerShdw sx="100000" sy="100000" kx="0" ky="0" algn="bl" rotWithShape="0" blurRad="88900" dist="38100" dir="5400000">
-              <a:srgbClr val="0F172A">
-                <a:alpha val="10000"/>
-              </a:srgbClr>
-            </a:outerShdw>
-          </a:effectLst>
-        </p:spPr>
-      </p:sp>
-      <p:sp>
-        <p:nvSpPr>
-          <p:cNvPr id="17" name="Text 15"/>
-          <p:cNvSpPr/>
-          <p:nvPr/>
-        </p:nvSpPr>
-        <p:spPr>
-          <a:xfrm>
-            <a:off x="5751576" y="1691640"/>
-            <a:ext cx="1591056" cy="731520"/>
+              <a:rPr lang="en-US" sz="900" dirty="0">
+                <a:solidFill>
+                  <a:srgbClr val="64748B"/>
+                </a:solidFill>
+                <a:latin typeface="Arial" pitchFamily="34" charset="0"/>
+                <a:ea typeface="Arial" pitchFamily="34" charset="-122"/>
+                <a:cs typeface="Arial" pitchFamily="34" charset="-120"/>
+              </a:rPr>
+              <a:t>Antes</a:t>
+            </a:r>
+            <a:endParaRPr lang="en-US" sz="900" dirty="0"/>
+          </a:p>
+        </p:txBody>
+      </p:sp>
+      <p:sp>
+        <p:nvSpPr>
+          <p:cNvPr id="24" name="Text 16"/>
+          <p:cNvSpPr/>
+          <p:nvPr/>
+        </p:nvSpPr>
+        <p:spPr>
+          <a:xfrm>
+            <a:off x="7543349" y="4050792"/>
+            <a:ext cx="978859" cy="228600"/>
           </a:xfrm>
           <a:prstGeom prst="rect">
             <a:avLst/>
@@ -2621,297 +2874,29 @@
               <a:buNone/>
             </a:pPr>
             <a:r>
-              <a:rPr lang="en-US" sz="3800" b="1" dirty="0">
-                <a:solidFill>
-                  <a:srgbClr val="1D4ED8"/>
-                </a:solidFill>
-                <a:latin typeface="Cambria" pitchFamily="34" charset="0"/>
-                <a:ea typeface="Cambria" pitchFamily="34" charset="-122"/>
-                <a:cs typeface="Cambria" pitchFamily="34" charset="-120"/>
-              </a:rPr>
-              <a:t>+0,1</a:t>
-            </a:r>
-            <a:endParaRPr lang="en-US" sz="3800" dirty="0"/>
-          </a:p>
-        </p:txBody>
-      </p:sp>
-      <p:sp>
-        <p:nvSpPr>
-          <p:cNvPr id="18" name="Text 16"/>
-          <p:cNvSpPr/>
-          <p:nvPr/>
-        </p:nvSpPr>
-        <p:spPr>
-          <a:xfrm>
-            <a:off x="5751576" y="2423160"/>
-            <a:ext cx="1591056" cy="320040"/>
-          </a:xfrm>
-          <a:prstGeom prst="rect">
-            <a:avLst/>
-          </a:prstGeom>
-          <a:noFill/>
-          <a:ln/>
-        </p:spPr>
-        <p:txBody>
-          <a:bodyPr wrap="square" lIns="0" tIns="0" rIns="0" bIns="0" rtlCol="0" anchor="ctr"/>
-          <a:lstStyle/>
-          <a:p>
-            <a:pPr algn="ctr" indent="0" marL="0">
-              <a:buNone/>
-            </a:pPr>
-            <a:r>
-              <a:rPr lang="en-US" sz="1500" b="1" dirty="0">
-                <a:solidFill>
-                  <a:srgbClr val="0F172A"/>
-                </a:solidFill>
-                <a:latin typeface="Calibri" pitchFamily="34" charset="0"/>
-                <a:ea typeface="Calibri" pitchFamily="34" charset="-122"/>
-                <a:cs typeface="Calibri" pitchFamily="34" charset="-120"/>
-              </a:rPr>
-              <a:t>ATT</a:t>
-            </a:r>
-            <a:endParaRPr lang="en-US" sz="1500" dirty="0"/>
-          </a:p>
-        </p:txBody>
-      </p:sp>
-      <p:sp>
-        <p:nvSpPr>
-          <p:cNvPr id="19" name="Text 17"/>
-          <p:cNvSpPr/>
-          <p:nvPr/>
-        </p:nvSpPr>
-        <p:spPr>
-          <a:xfrm>
-            <a:off x="5751576" y="2761488"/>
-            <a:ext cx="1591056" cy="320040"/>
-          </a:xfrm>
-          <a:prstGeom prst="rect">
-            <a:avLst/>
-          </a:prstGeom>
-          <a:noFill/>
-          <a:ln/>
-        </p:spPr>
-        <p:txBody>
-          <a:bodyPr wrap="square" lIns="0" tIns="0" rIns="0" bIns="0" rtlCol="0" anchor="ctr"/>
-          <a:lstStyle/>
-          <a:p>
-            <a:pPr algn="ctr" indent="0" marL="0">
-              <a:buNone/>
-            </a:pPr>
-            <a:r>
-              <a:rPr lang="en-US" sz="1100" dirty="0">
-                <a:solidFill>
-                  <a:srgbClr val="475569"/>
-                </a:solidFill>
-                <a:latin typeface="Calibri" pitchFamily="34" charset="0"/>
-                <a:ea typeface="Calibri" pitchFamily="34" charset="-122"/>
-                <a:cs typeface="Calibri" pitchFamily="34" charset="-120"/>
-              </a:rPr>
-              <a:t>Atratividade</a:t>
-            </a:r>
-            <a:endParaRPr lang="en-US" sz="1100" dirty="0"/>
-          </a:p>
-        </p:txBody>
-      </p:sp>
-      <p:sp>
-        <p:nvSpPr>
-          <p:cNvPr id="20" name="Shape 18"/>
-          <p:cNvSpPr/>
-          <p:nvPr/>
-        </p:nvSpPr>
-        <p:spPr>
-          <a:xfrm>
-            <a:off x="7516368" y="1463040"/>
-            <a:ext cx="1591056" cy="1783080"/>
-          </a:xfrm>
-          <a:prstGeom prst="roundRect">
-            <a:avLst>
-              <a:gd name="adj" fmla="val 4598"/>
-            </a:avLst>
-          </a:prstGeom>
-          <a:solidFill>
-            <a:srgbClr val="EFF6FF"/>
-          </a:solidFill>
-          <a:ln w="12700">
-            <a:solidFill>
-              <a:srgbClr val="E2E8F0"/>
-            </a:solidFill>
-            <a:prstDash val="solid"/>
-          </a:ln>
-          <a:effectLst>
-            <a:outerShdw sx="100000" sy="100000" kx="0" ky="0" algn="bl" rotWithShape="0" blurRad="88900" dist="38100" dir="5400000">
-              <a:srgbClr val="0F172A">
-                <a:alpha val="10000"/>
-              </a:srgbClr>
-            </a:outerShdw>
-          </a:effectLst>
-        </p:spPr>
-      </p:sp>
-      <p:sp>
-        <p:nvSpPr>
-          <p:cNvPr id="21" name="Text 19"/>
-          <p:cNvSpPr/>
-          <p:nvPr/>
-        </p:nvSpPr>
-        <p:spPr>
-          <a:xfrm>
-            <a:off x="7516368" y="1691640"/>
-            <a:ext cx="1591056" cy="731520"/>
-          </a:xfrm>
-          <a:prstGeom prst="rect">
-            <a:avLst/>
-          </a:prstGeom>
-          <a:noFill/>
-          <a:ln/>
-        </p:spPr>
-        <p:txBody>
-          <a:bodyPr wrap="square" lIns="0" tIns="0" rIns="0" bIns="0" rtlCol="0" anchor="ctr"/>
-          <a:lstStyle/>
-          <a:p>
-            <a:pPr algn="ctr" indent="0" marL="0">
-              <a:buNone/>
-            </a:pPr>
-            <a:r>
-              <a:rPr lang="en-US" sz="3800" b="1" dirty="0">
-                <a:solidFill>
-                  <a:srgbClr val="0B1220"/>
-                </a:solidFill>
-                <a:latin typeface="Cambria" pitchFamily="34" charset="0"/>
-                <a:ea typeface="Cambria" pitchFamily="34" charset="-122"/>
-                <a:cs typeface="Cambria" pitchFamily="34" charset="-120"/>
-              </a:rPr>
-              <a:t>+0,1</a:t>
-            </a:r>
-            <a:endParaRPr lang="en-US" sz="3800" dirty="0"/>
-          </a:p>
-        </p:txBody>
-      </p:sp>
-      <p:sp>
-        <p:nvSpPr>
-          <p:cNvPr id="22" name="Text 20"/>
-          <p:cNvSpPr/>
-          <p:nvPr/>
-        </p:nvSpPr>
-        <p:spPr>
-          <a:xfrm>
-            <a:off x="7516368" y="2423160"/>
-            <a:ext cx="1591056" cy="320040"/>
-          </a:xfrm>
-          <a:prstGeom prst="rect">
-            <a:avLst/>
-          </a:prstGeom>
-          <a:noFill/>
-          <a:ln/>
-        </p:spPr>
-        <p:txBody>
-          <a:bodyPr wrap="square" lIns="0" tIns="0" rIns="0" bIns="0" rtlCol="0" anchor="ctr"/>
-          <a:lstStyle/>
-          <a:p>
-            <a:pPr algn="ctr" indent="0" marL="0">
-              <a:buNone/>
-            </a:pPr>
-            <a:r>
-              <a:rPr lang="en-US" sz="1500" b="1" dirty="0">
-                <a:solidFill>
-                  <a:srgbClr val="0F172A"/>
-                </a:solidFill>
-                <a:latin typeface="Calibri" pitchFamily="34" charset="0"/>
-                <a:ea typeface="Calibri" pitchFamily="34" charset="-122"/>
-                <a:cs typeface="Calibri" pitchFamily="34" charset="-120"/>
-              </a:rPr>
-              <a:t>Geral</a:t>
-            </a:r>
-            <a:endParaRPr lang="en-US" sz="1500" dirty="0"/>
-          </a:p>
-        </p:txBody>
-      </p:sp>
-      <p:sp>
-        <p:nvSpPr>
-          <p:cNvPr id="23" name="Text 21"/>
-          <p:cNvSpPr/>
-          <p:nvPr/>
-        </p:nvSpPr>
-        <p:spPr>
-          <a:xfrm>
-            <a:off x="7516368" y="2761488"/>
-            <a:ext cx="1591056" cy="320040"/>
-          </a:xfrm>
-          <a:prstGeom prst="rect">
-            <a:avLst/>
-          </a:prstGeom>
-          <a:noFill/>
-          <a:ln/>
-        </p:spPr>
-        <p:txBody>
-          <a:bodyPr wrap="square" lIns="0" tIns="0" rIns="0" bIns="0" rtlCol="0" anchor="ctr"/>
-          <a:lstStyle/>
-          <a:p>
-            <a:pPr algn="ctr" indent="0" marL="0">
-              <a:buNone/>
-            </a:pPr>
-            <a:r>
-              <a:rPr lang="en-US" sz="1100" dirty="0">
-                <a:solidFill>
-                  <a:srgbClr val="475569"/>
-                </a:solidFill>
-                <a:latin typeface="Calibri" pitchFamily="34" charset="0"/>
-                <a:ea typeface="Calibri" pitchFamily="34" charset="-122"/>
-                <a:cs typeface="Calibri" pitchFamily="34" charset="-120"/>
-              </a:rPr>
-              <a:t>Média global</a:t>
-            </a:r>
-            <a:endParaRPr lang="en-US" sz="1100" dirty="0"/>
-          </a:p>
-        </p:txBody>
-      </p:sp>
-      <p:sp>
-        <p:nvSpPr>
-          <p:cNvPr id="24" name="Text 22"/>
-          <p:cNvSpPr/>
-          <p:nvPr/>
-        </p:nvSpPr>
-        <p:spPr>
-          <a:xfrm>
-            <a:off x="502920" y="3474720"/>
-            <a:ext cx="8138160" cy="914400"/>
-          </a:xfrm>
-          <a:prstGeom prst="rect">
-            <a:avLst/>
-          </a:prstGeom>
-          <a:noFill/>
-          <a:ln/>
-        </p:spPr>
-        <p:txBody>
-          <a:bodyPr wrap="square" lIns="0" tIns="0" rIns="0" bIns="0" rtlCol="0" anchor="ctr"/>
-          <a:lstStyle/>
-          <a:p>
-            <a:pPr indent="0" marL="0">
-              <a:buNone/>
-            </a:pPr>
-            <a:r>
-              <a:rPr lang="en-US" sz="1250" dirty="0">
-                <a:solidFill>
-                  <a:srgbClr val="475569"/>
-                </a:solidFill>
-                <a:latin typeface="Calibri" pitchFamily="34" charset="0"/>
-                <a:ea typeface="Calibri" pitchFamily="34" charset="-122"/>
-                <a:cs typeface="Calibri" pitchFamily="34" charset="-120"/>
-              </a:rPr>
-              <a:t>Escala −3 a +3 (3 participantes). Resultado neutro-positivo: o produto cumpre sua proposta (PQ, ATT e identidade positivos). A estimulação levemente negativa indica oportunidade de diferenciação em versões futuras — comum em apps utilitários de campo.</a:t>
-            </a:r>
-            <a:endParaRPr lang="en-US" sz="1250" dirty="0"/>
-          </a:p>
-        </p:txBody>
-      </p:sp>
-      <p:sp>
-        <p:nvSpPr>
-          <p:cNvPr id="25" name="Text 23"/>
-          <p:cNvSpPr/>
-          <p:nvPr/>
-        </p:nvSpPr>
-        <p:spPr>
-          <a:xfrm>
-            <a:off x="457200" y="4759452"/>
+              <a:rPr lang="en-US" sz="900" b="1" dirty="0">
+                <a:solidFill>
+                  <a:srgbClr val="059669"/>
+                </a:solidFill>
+                <a:latin typeface="Arial" pitchFamily="34" charset="0"/>
+                <a:ea typeface="Arial" pitchFamily="34" charset="-122"/>
+                <a:cs typeface="Arial" pitchFamily="34" charset="-120"/>
+              </a:rPr>
+              <a:t>Depois</a:t>
+            </a:r>
+            <a:endParaRPr lang="en-US" sz="900" dirty="0"/>
+          </a:p>
+        </p:txBody>
+      </p:sp>
+      <p:sp>
+        <p:nvSpPr>
+          <p:cNvPr id="25" name="Text 17"/>
+          <p:cNvSpPr/>
+          <p:nvPr/>
+        </p:nvSpPr>
+        <p:spPr>
+          <a:xfrm>
+            <a:off x="502920" y="4777740"/>
             <a:ext cx="5486400" cy="274320"/>
           </a:xfrm>
           <a:prstGeom prst="rect">
@@ -2921,7 +2906,7 @@
           <a:ln/>
         </p:spPr>
         <p:txBody>
-          <a:bodyPr wrap="square" rtlCol="0" anchor="ctr"/>
+          <a:bodyPr wrap="square" lIns="0" tIns="0" rIns="0" bIns="0" rtlCol="0" anchor="ctr"/>
           <a:lstStyle/>
           <a:p>
             <a:pPr algn="l" indent="0" marL="0">
@@ -2932,9 +2917,9 @@
                 <a:solidFill>
                   <a:srgbClr val="64748B"/>
                 </a:solidFill>
-                <a:latin typeface="Calibri" pitchFamily="34" charset="0"/>
-                <a:ea typeface="Calibri" pitchFamily="34" charset="-122"/>
-                <a:cs typeface="Calibri" pitchFamily="34" charset="-120"/>
+                <a:latin typeface="Arial" pitchFamily="34" charset="0"/>
+                <a:ea typeface="Arial" pitchFamily="34" charset="-122"/>
+                <a:cs typeface="Arial" pitchFamily="34" charset="-120"/>
               </a:rPr>
               <a:t>Track Fibra · IHC — UTFPR Campo Mourão</a:t>
             </a:r>
@@ -2944,13 +2929,13 @@
       </p:sp>
       <p:sp>
         <p:nvSpPr>
-          <p:cNvPr id="26" name="Text 24"/>
-          <p:cNvSpPr/>
-          <p:nvPr/>
-        </p:nvSpPr>
-        <p:spPr>
-          <a:xfrm>
-            <a:off x="7772400" y="4759452"/>
+          <p:cNvPr id="26" name="Text 18"/>
+          <p:cNvSpPr/>
+          <p:nvPr/>
+        </p:nvSpPr>
+        <p:spPr>
+          <a:xfrm>
+            <a:off x="7726680" y="4777740"/>
             <a:ext cx="914400" cy="274320"/>
           </a:xfrm>
           <a:prstGeom prst="rect">
@@ -2960,7 +2945,7 @@
           <a:ln/>
         </p:spPr>
         <p:txBody>
-          <a:bodyPr wrap="square" rtlCol="0" anchor="ctr"/>
+          <a:bodyPr wrap="square" lIns="0" tIns="0" rIns="0" bIns="0" rtlCol="0" anchor="ctr"/>
           <a:lstStyle/>
           <a:p>
             <a:pPr algn="r" indent="0" marL="0">
@@ -2971,11 +2956,11 @@
                 <a:solidFill>
                   <a:srgbClr val="64748B"/>
                 </a:solidFill>
-                <a:latin typeface="Calibri" pitchFamily="34" charset="0"/>
-                <a:ea typeface="Calibri" pitchFamily="34" charset="-122"/>
-                <a:cs typeface="Calibri" pitchFamily="34" charset="-120"/>
-              </a:rPr>
-              <a:t>10 / 11</a:t>
+                <a:latin typeface="Arial" pitchFamily="34" charset="0"/>
+                <a:ea typeface="Arial" pitchFamily="34" charset="-122"/>
+                <a:cs typeface="Arial" pitchFamily="34" charset="-120"/>
+              </a:rPr>
+              <a:t>10 / 12</a:t>
             </a:r>
             <a:endParaRPr lang="en-US" sz="900" dirty="0"/>
           </a:p>
@@ -2992,6 +2977,963 @@
 <file path=ppt/slides/slide11.xml><?xml version="1.0" encoding="utf-8"?>
 <p:sld xmlns:a="http://schemas.openxmlformats.org/drawingml/2006/main" xmlns:r="http://schemas.openxmlformats.org/officeDocument/2006/relationships" xmlns:p="http://schemas.openxmlformats.org/presentationml/2006/main">
   <p:cSld name="Slide 11">
+    <p:bg>
+      <p:bgPr>
+        <a:solidFill>
+          <a:srgbClr val="F8FAFC"/>
+        </a:solidFill>
+      </p:bgPr>
+    </p:bg>
+    <p:spTree>
+      <p:nvGrpSpPr>
+        <p:cNvPr id="1" name=""/>
+        <p:cNvGrpSpPr/>
+        <p:nvPr/>
+      </p:nvGrpSpPr>
+      <p:grpSpPr>
+        <a:xfrm>
+          <a:off x="0" y="0"/>
+          <a:ext cx="0" cy="0"/>
+          <a:chOff x="0" y="0"/>
+          <a:chExt cx="0" cy="0"/>
+        </a:xfrm>
+      </p:grpSpPr>
+      <p:sp>
+        <p:nvSpPr>
+          <p:cNvPr id="2" name="Text 0"/>
+          <p:cNvSpPr/>
+          <p:nvPr/>
+        </p:nvSpPr>
+        <p:spPr>
+          <a:xfrm>
+            <a:off x="548640" y="329184"/>
+            <a:ext cx="8229600" cy="274320"/>
+          </a:xfrm>
+          <a:prstGeom prst="rect">
+            <a:avLst/>
+          </a:prstGeom>
+          <a:noFill/>
+          <a:ln/>
+        </p:spPr>
+        <p:txBody>
+          <a:bodyPr wrap="square" lIns="0" tIns="0" rIns="0" bIns="0" rtlCol="0" anchor="ctr"/>
+          <a:lstStyle/>
+          <a:p>
+            <a:pPr indent="0" marL="0">
+              <a:buNone/>
+            </a:pPr>
+            <a:r>
+              <a:rPr lang="en-US" sz="1200" b="1" spc="400" kern="0" dirty="0">
+                <a:solidFill>
+                  <a:srgbClr val="06B6D4"/>
+                </a:solidFill>
+                <a:latin typeface="Arial" pitchFamily="34" charset="0"/>
+                <a:ea typeface="Arial" pitchFamily="34" charset="-122"/>
+                <a:cs typeface="Arial" pitchFamily="34" charset="-120"/>
+              </a:rPr>
+              <a:t>RESULTADOS</a:t>
+            </a:r>
+            <a:endParaRPr lang="en-US" sz="1200" dirty="0"/>
+          </a:p>
+        </p:txBody>
+      </p:sp>
+      <p:sp>
+        <p:nvSpPr>
+          <p:cNvPr id="3" name="Text 1"/>
+          <p:cNvSpPr/>
+          <p:nvPr/>
+        </p:nvSpPr>
+        <p:spPr>
+          <a:xfrm>
+            <a:off x="502920" y="585216"/>
+            <a:ext cx="8229600" cy="640080"/>
+          </a:xfrm>
+          <a:prstGeom prst="rect">
+            <a:avLst/>
+          </a:prstGeom>
+          <a:noFill/>
+          <a:ln/>
+        </p:spPr>
+        <p:txBody>
+          <a:bodyPr wrap="square" lIns="0" tIns="0" rIns="0" bIns="0" rtlCol="0" anchor="ctr"/>
+          <a:lstStyle/>
+          <a:p>
+            <a:pPr indent="0" marL="0">
+              <a:buNone/>
+            </a:pPr>
+            <a:r>
+              <a:rPr lang="en-US" sz="3400" b="1" dirty="0">
+                <a:solidFill>
+                  <a:srgbClr val="0F172A"/>
+                </a:solidFill>
+                <a:latin typeface="Arial" pitchFamily="34" charset="0"/>
+                <a:ea typeface="Arial" pitchFamily="34" charset="-122"/>
+                <a:cs typeface="Arial" pitchFamily="34" charset="-120"/>
+              </a:rPr>
+              <a:t>Avaliação de UX — AttrakDiff</a:t>
+            </a:r>
+            <a:endParaRPr lang="en-US" sz="3400" dirty="0"/>
+          </a:p>
+        </p:txBody>
+      </p:sp>
+      <p:sp>
+        <p:nvSpPr>
+          <p:cNvPr id="4" name="Shape 2"/>
+          <p:cNvSpPr/>
+          <p:nvPr/>
+        </p:nvSpPr>
+        <p:spPr>
+          <a:xfrm>
+            <a:off x="502920" y="1508760"/>
+            <a:ext cx="1591056" cy="1828800"/>
+          </a:xfrm>
+          <a:prstGeom prst="roundRect">
+            <a:avLst>
+              <a:gd name="adj" fmla="val 7471"/>
+            </a:avLst>
+          </a:prstGeom>
+          <a:solidFill>
+            <a:srgbClr val="FFFFFF"/>
+          </a:solidFill>
+          <a:ln/>
+          <a:effectLst>
+            <a:outerShdw sx="100000" sy="100000" kx="0" ky="0" algn="bl" rotWithShape="0" blurRad="139700" dist="38100" dir="5400000">
+              <a:srgbClr val="0F172A">
+                <a:alpha val="8000"/>
+              </a:srgbClr>
+            </a:outerShdw>
+          </a:effectLst>
+        </p:spPr>
+      </p:sp>
+      <p:sp>
+        <p:nvSpPr>
+          <p:cNvPr id="5" name="Text 3"/>
+          <p:cNvSpPr/>
+          <p:nvPr/>
+        </p:nvSpPr>
+        <p:spPr>
+          <a:xfrm>
+            <a:off x="502920" y="1764792"/>
+            <a:ext cx="1591056" cy="731520"/>
+          </a:xfrm>
+          <a:prstGeom prst="rect">
+            <a:avLst/>
+          </a:prstGeom>
+          <a:noFill/>
+          <a:ln/>
+        </p:spPr>
+        <p:txBody>
+          <a:bodyPr wrap="square" lIns="0" tIns="0" rIns="0" bIns="0" rtlCol="0" anchor="ctr"/>
+          <a:lstStyle/>
+          <a:p>
+            <a:pPr algn="ctr" indent="0" marL="0">
+              <a:buNone/>
+            </a:pPr>
+            <a:r>
+              <a:rPr lang="en-US" sz="4000" b="1" dirty="0">
+                <a:solidFill>
+                  <a:srgbClr val="2563EB"/>
+                </a:solidFill>
+                <a:latin typeface="Arial" pitchFamily="34" charset="0"/>
+                <a:ea typeface="Arial" pitchFamily="34" charset="-122"/>
+                <a:cs typeface="Arial" pitchFamily="34" charset="-120"/>
+              </a:rPr>
+              <a:t>+0,1</a:t>
+            </a:r>
+            <a:endParaRPr lang="en-US" sz="4000" dirty="0"/>
+          </a:p>
+        </p:txBody>
+      </p:sp>
+      <p:sp>
+        <p:nvSpPr>
+          <p:cNvPr id="6" name="Text 4"/>
+          <p:cNvSpPr/>
+          <p:nvPr/>
+        </p:nvSpPr>
+        <p:spPr>
+          <a:xfrm>
+            <a:off x="502920" y="2532888"/>
+            <a:ext cx="1591056" cy="320040"/>
+          </a:xfrm>
+          <a:prstGeom prst="rect">
+            <a:avLst/>
+          </a:prstGeom>
+          <a:noFill/>
+          <a:ln/>
+        </p:spPr>
+        <p:txBody>
+          <a:bodyPr wrap="square" lIns="0" tIns="0" rIns="0" bIns="0" rtlCol="0" anchor="ctr"/>
+          <a:lstStyle/>
+          <a:p>
+            <a:pPr algn="ctr" indent="0" marL="0">
+              <a:buNone/>
+            </a:pPr>
+            <a:r>
+              <a:rPr lang="en-US" sz="1500" b="1" dirty="0">
+                <a:solidFill>
+                  <a:srgbClr val="0F172A"/>
+                </a:solidFill>
+                <a:latin typeface="Arial" pitchFamily="34" charset="0"/>
+                <a:ea typeface="Arial" pitchFamily="34" charset="-122"/>
+                <a:cs typeface="Arial" pitchFamily="34" charset="-120"/>
+              </a:rPr>
+              <a:t>PQ</a:t>
+            </a:r>
+            <a:endParaRPr lang="en-US" sz="1500" dirty="0"/>
+          </a:p>
+        </p:txBody>
+      </p:sp>
+      <p:sp>
+        <p:nvSpPr>
+          <p:cNvPr id="7" name="Text 5"/>
+          <p:cNvSpPr/>
+          <p:nvPr/>
+        </p:nvSpPr>
+        <p:spPr>
+          <a:xfrm>
+            <a:off x="502920" y="2862072"/>
+            <a:ext cx="1591056" cy="320040"/>
+          </a:xfrm>
+          <a:prstGeom prst="rect">
+            <a:avLst/>
+          </a:prstGeom>
+          <a:noFill/>
+          <a:ln/>
+        </p:spPr>
+        <p:txBody>
+          <a:bodyPr wrap="square" lIns="0" tIns="0" rIns="0" bIns="0" rtlCol="0" anchor="ctr"/>
+          <a:lstStyle/>
+          <a:p>
+            <a:pPr algn="ctr" indent="0" marL="0">
+              <a:buNone/>
+            </a:pPr>
+            <a:r>
+              <a:rPr lang="en-US" sz="1100" dirty="0">
+                <a:solidFill>
+                  <a:srgbClr val="475569"/>
+                </a:solidFill>
+                <a:latin typeface="Arial" pitchFamily="34" charset="0"/>
+                <a:ea typeface="Arial" pitchFamily="34" charset="-122"/>
+                <a:cs typeface="Arial" pitchFamily="34" charset="-120"/>
+              </a:rPr>
+              <a:t>Pragmática</a:t>
+            </a:r>
+            <a:endParaRPr lang="en-US" sz="1100" dirty="0"/>
+          </a:p>
+        </p:txBody>
+      </p:sp>
+      <p:sp>
+        <p:nvSpPr>
+          <p:cNvPr id="8" name="Shape 6"/>
+          <p:cNvSpPr/>
+          <p:nvPr/>
+        </p:nvSpPr>
+        <p:spPr>
+          <a:xfrm>
+            <a:off x="2258568" y="1508760"/>
+            <a:ext cx="1591056" cy="1828800"/>
+          </a:xfrm>
+          <a:prstGeom prst="roundRect">
+            <a:avLst>
+              <a:gd name="adj" fmla="val 7471"/>
+            </a:avLst>
+          </a:prstGeom>
+          <a:solidFill>
+            <a:srgbClr val="FFFFFF"/>
+          </a:solidFill>
+          <a:ln/>
+          <a:effectLst>
+            <a:outerShdw sx="100000" sy="100000" kx="0" ky="0" algn="bl" rotWithShape="0" blurRad="139700" dist="38100" dir="5400000">
+              <a:srgbClr val="0F172A">
+                <a:alpha val="8000"/>
+              </a:srgbClr>
+            </a:outerShdw>
+          </a:effectLst>
+        </p:spPr>
+      </p:sp>
+      <p:sp>
+        <p:nvSpPr>
+          <p:cNvPr id="9" name="Text 7"/>
+          <p:cNvSpPr/>
+          <p:nvPr/>
+        </p:nvSpPr>
+        <p:spPr>
+          <a:xfrm>
+            <a:off x="2258568" y="1764792"/>
+            <a:ext cx="1591056" cy="731520"/>
+          </a:xfrm>
+          <a:prstGeom prst="rect">
+            <a:avLst/>
+          </a:prstGeom>
+          <a:noFill/>
+          <a:ln/>
+        </p:spPr>
+        <p:txBody>
+          <a:bodyPr wrap="square" lIns="0" tIns="0" rIns="0" bIns="0" rtlCol="0" anchor="ctr"/>
+          <a:lstStyle/>
+          <a:p>
+            <a:pPr algn="ctr" indent="0" marL="0">
+              <a:buNone/>
+            </a:pPr>
+            <a:r>
+              <a:rPr lang="en-US" sz="4000" b="1" dirty="0">
+                <a:solidFill>
+                  <a:srgbClr val="2563EB"/>
+                </a:solidFill>
+                <a:latin typeface="Arial" pitchFamily="34" charset="0"/>
+                <a:ea typeface="Arial" pitchFamily="34" charset="-122"/>
+                <a:cs typeface="Arial" pitchFamily="34" charset="-120"/>
+              </a:rPr>
+              <a:t>+0,3</a:t>
+            </a:r>
+            <a:endParaRPr lang="en-US" sz="4000" dirty="0"/>
+          </a:p>
+        </p:txBody>
+      </p:sp>
+      <p:sp>
+        <p:nvSpPr>
+          <p:cNvPr id="10" name="Text 8"/>
+          <p:cNvSpPr/>
+          <p:nvPr/>
+        </p:nvSpPr>
+        <p:spPr>
+          <a:xfrm>
+            <a:off x="2258568" y="2532888"/>
+            <a:ext cx="1591056" cy="320040"/>
+          </a:xfrm>
+          <a:prstGeom prst="rect">
+            <a:avLst/>
+          </a:prstGeom>
+          <a:noFill/>
+          <a:ln/>
+        </p:spPr>
+        <p:txBody>
+          <a:bodyPr wrap="square" lIns="0" tIns="0" rIns="0" bIns="0" rtlCol="0" anchor="ctr"/>
+          <a:lstStyle/>
+          <a:p>
+            <a:pPr algn="ctr" indent="0" marL="0">
+              <a:buNone/>
+            </a:pPr>
+            <a:r>
+              <a:rPr lang="en-US" sz="1500" b="1" dirty="0">
+                <a:solidFill>
+                  <a:srgbClr val="0F172A"/>
+                </a:solidFill>
+                <a:latin typeface="Arial" pitchFamily="34" charset="0"/>
+                <a:ea typeface="Arial" pitchFamily="34" charset="-122"/>
+                <a:cs typeface="Arial" pitchFamily="34" charset="-120"/>
+              </a:rPr>
+              <a:t>HQ-I</a:t>
+            </a:r>
+            <a:endParaRPr lang="en-US" sz="1500" dirty="0"/>
+          </a:p>
+        </p:txBody>
+      </p:sp>
+      <p:sp>
+        <p:nvSpPr>
+          <p:cNvPr id="11" name="Text 9"/>
+          <p:cNvSpPr/>
+          <p:nvPr/>
+        </p:nvSpPr>
+        <p:spPr>
+          <a:xfrm>
+            <a:off x="2258568" y="2862072"/>
+            <a:ext cx="1591056" cy="320040"/>
+          </a:xfrm>
+          <a:prstGeom prst="rect">
+            <a:avLst/>
+          </a:prstGeom>
+          <a:noFill/>
+          <a:ln/>
+        </p:spPr>
+        <p:txBody>
+          <a:bodyPr wrap="square" lIns="0" tIns="0" rIns="0" bIns="0" rtlCol="0" anchor="ctr"/>
+          <a:lstStyle/>
+          <a:p>
+            <a:pPr algn="ctr" indent="0" marL="0">
+              <a:buNone/>
+            </a:pPr>
+            <a:r>
+              <a:rPr lang="en-US" sz="1100" dirty="0">
+                <a:solidFill>
+                  <a:srgbClr val="475569"/>
+                </a:solidFill>
+                <a:latin typeface="Arial" pitchFamily="34" charset="0"/>
+                <a:ea typeface="Arial" pitchFamily="34" charset="-122"/>
+                <a:cs typeface="Arial" pitchFamily="34" charset="-120"/>
+              </a:rPr>
+              <a:t>Identidade</a:t>
+            </a:r>
+            <a:endParaRPr lang="en-US" sz="1100" dirty="0"/>
+          </a:p>
+        </p:txBody>
+      </p:sp>
+      <p:sp>
+        <p:nvSpPr>
+          <p:cNvPr id="12" name="Shape 10"/>
+          <p:cNvSpPr/>
+          <p:nvPr/>
+        </p:nvSpPr>
+        <p:spPr>
+          <a:xfrm>
+            <a:off x="4014216" y="1508760"/>
+            <a:ext cx="1591056" cy="1828800"/>
+          </a:xfrm>
+          <a:prstGeom prst="roundRect">
+            <a:avLst>
+              <a:gd name="adj" fmla="val 7471"/>
+            </a:avLst>
+          </a:prstGeom>
+          <a:solidFill>
+            <a:srgbClr val="FFFFFF"/>
+          </a:solidFill>
+          <a:ln/>
+          <a:effectLst>
+            <a:outerShdw sx="100000" sy="100000" kx="0" ky="0" algn="bl" rotWithShape="0" blurRad="139700" dist="38100" dir="5400000">
+              <a:srgbClr val="0F172A">
+                <a:alpha val="8000"/>
+              </a:srgbClr>
+            </a:outerShdw>
+          </a:effectLst>
+        </p:spPr>
+      </p:sp>
+      <p:sp>
+        <p:nvSpPr>
+          <p:cNvPr id="13" name="Text 11"/>
+          <p:cNvSpPr/>
+          <p:nvPr/>
+        </p:nvSpPr>
+        <p:spPr>
+          <a:xfrm>
+            <a:off x="4014216" y="1764792"/>
+            <a:ext cx="1591056" cy="731520"/>
+          </a:xfrm>
+          <a:prstGeom prst="rect">
+            <a:avLst/>
+          </a:prstGeom>
+          <a:noFill/>
+          <a:ln/>
+        </p:spPr>
+        <p:txBody>
+          <a:bodyPr wrap="square" lIns="0" tIns="0" rIns="0" bIns="0" rtlCol="0" anchor="ctr"/>
+          <a:lstStyle/>
+          <a:p>
+            <a:pPr algn="ctr" indent="0" marL="0">
+              <a:buNone/>
+            </a:pPr>
+            <a:r>
+              <a:rPr lang="en-US" sz="4000" b="1" dirty="0">
+                <a:solidFill>
+                  <a:srgbClr val="E11D48"/>
+                </a:solidFill>
+                <a:latin typeface="Arial" pitchFamily="34" charset="0"/>
+                <a:ea typeface="Arial" pitchFamily="34" charset="-122"/>
+                <a:cs typeface="Arial" pitchFamily="34" charset="-120"/>
+              </a:rPr>
+              <a:t>−0,3</a:t>
+            </a:r>
+            <a:endParaRPr lang="en-US" sz="4000" dirty="0"/>
+          </a:p>
+        </p:txBody>
+      </p:sp>
+      <p:sp>
+        <p:nvSpPr>
+          <p:cNvPr id="14" name="Text 12"/>
+          <p:cNvSpPr/>
+          <p:nvPr/>
+        </p:nvSpPr>
+        <p:spPr>
+          <a:xfrm>
+            <a:off x="4014216" y="2532888"/>
+            <a:ext cx="1591056" cy="320040"/>
+          </a:xfrm>
+          <a:prstGeom prst="rect">
+            <a:avLst/>
+          </a:prstGeom>
+          <a:noFill/>
+          <a:ln/>
+        </p:spPr>
+        <p:txBody>
+          <a:bodyPr wrap="square" lIns="0" tIns="0" rIns="0" bIns="0" rtlCol="0" anchor="ctr"/>
+          <a:lstStyle/>
+          <a:p>
+            <a:pPr algn="ctr" indent="0" marL="0">
+              <a:buNone/>
+            </a:pPr>
+            <a:r>
+              <a:rPr lang="en-US" sz="1500" b="1" dirty="0">
+                <a:solidFill>
+                  <a:srgbClr val="0F172A"/>
+                </a:solidFill>
+                <a:latin typeface="Arial" pitchFamily="34" charset="0"/>
+                <a:ea typeface="Arial" pitchFamily="34" charset="-122"/>
+                <a:cs typeface="Arial" pitchFamily="34" charset="-120"/>
+              </a:rPr>
+              <a:t>HQ-S</a:t>
+            </a:r>
+            <a:endParaRPr lang="en-US" sz="1500" dirty="0"/>
+          </a:p>
+        </p:txBody>
+      </p:sp>
+      <p:sp>
+        <p:nvSpPr>
+          <p:cNvPr id="15" name="Text 13"/>
+          <p:cNvSpPr/>
+          <p:nvPr/>
+        </p:nvSpPr>
+        <p:spPr>
+          <a:xfrm>
+            <a:off x="4014216" y="2862072"/>
+            <a:ext cx="1591056" cy="320040"/>
+          </a:xfrm>
+          <a:prstGeom prst="rect">
+            <a:avLst/>
+          </a:prstGeom>
+          <a:noFill/>
+          <a:ln/>
+        </p:spPr>
+        <p:txBody>
+          <a:bodyPr wrap="square" lIns="0" tIns="0" rIns="0" bIns="0" rtlCol="0" anchor="ctr"/>
+          <a:lstStyle/>
+          <a:p>
+            <a:pPr algn="ctr" indent="0" marL="0">
+              <a:buNone/>
+            </a:pPr>
+            <a:r>
+              <a:rPr lang="en-US" sz="1100" dirty="0">
+                <a:solidFill>
+                  <a:srgbClr val="475569"/>
+                </a:solidFill>
+                <a:latin typeface="Arial" pitchFamily="34" charset="0"/>
+                <a:ea typeface="Arial" pitchFamily="34" charset="-122"/>
+                <a:cs typeface="Arial" pitchFamily="34" charset="-120"/>
+              </a:rPr>
+              <a:t>Estimulação</a:t>
+            </a:r>
+            <a:endParaRPr lang="en-US" sz="1100" dirty="0"/>
+          </a:p>
+        </p:txBody>
+      </p:sp>
+      <p:sp>
+        <p:nvSpPr>
+          <p:cNvPr id="16" name="Shape 14"/>
+          <p:cNvSpPr/>
+          <p:nvPr/>
+        </p:nvSpPr>
+        <p:spPr>
+          <a:xfrm>
+            <a:off x="5769864" y="1508760"/>
+            <a:ext cx="1591056" cy="1828800"/>
+          </a:xfrm>
+          <a:prstGeom prst="roundRect">
+            <a:avLst>
+              <a:gd name="adj" fmla="val 7471"/>
+            </a:avLst>
+          </a:prstGeom>
+          <a:solidFill>
+            <a:srgbClr val="FFFFFF"/>
+          </a:solidFill>
+          <a:ln/>
+          <a:effectLst>
+            <a:outerShdw sx="100000" sy="100000" kx="0" ky="0" algn="bl" rotWithShape="0" blurRad="139700" dist="38100" dir="5400000">
+              <a:srgbClr val="0F172A">
+                <a:alpha val="8000"/>
+              </a:srgbClr>
+            </a:outerShdw>
+          </a:effectLst>
+        </p:spPr>
+      </p:sp>
+      <p:sp>
+        <p:nvSpPr>
+          <p:cNvPr id="17" name="Text 15"/>
+          <p:cNvSpPr/>
+          <p:nvPr/>
+        </p:nvSpPr>
+        <p:spPr>
+          <a:xfrm>
+            <a:off x="5769864" y="1764792"/>
+            <a:ext cx="1591056" cy="731520"/>
+          </a:xfrm>
+          <a:prstGeom prst="rect">
+            <a:avLst/>
+          </a:prstGeom>
+          <a:noFill/>
+          <a:ln/>
+        </p:spPr>
+        <p:txBody>
+          <a:bodyPr wrap="square" lIns="0" tIns="0" rIns="0" bIns="0" rtlCol="0" anchor="ctr"/>
+          <a:lstStyle/>
+          <a:p>
+            <a:pPr algn="ctr" indent="0" marL="0">
+              <a:buNone/>
+            </a:pPr>
+            <a:r>
+              <a:rPr lang="en-US" sz="4000" b="1" dirty="0">
+                <a:solidFill>
+                  <a:srgbClr val="2563EB"/>
+                </a:solidFill>
+                <a:latin typeface="Arial" pitchFamily="34" charset="0"/>
+                <a:ea typeface="Arial" pitchFamily="34" charset="-122"/>
+                <a:cs typeface="Arial" pitchFamily="34" charset="-120"/>
+              </a:rPr>
+              <a:t>+0,1</a:t>
+            </a:r>
+            <a:endParaRPr lang="en-US" sz="4000" dirty="0"/>
+          </a:p>
+        </p:txBody>
+      </p:sp>
+      <p:sp>
+        <p:nvSpPr>
+          <p:cNvPr id="18" name="Text 16"/>
+          <p:cNvSpPr/>
+          <p:nvPr/>
+        </p:nvSpPr>
+        <p:spPr>
+          <a:xfrm>
+            <a:off x="5769864" y="2532888"/>
+            <a:ext cx="1591056" cy="320040"/>
+          </a:xfrm>
+          <a:prstGeom prst="rect">
+            <a:avLst/>
+          </a:prstGeom>
+          <a:noFill/>
+          <a:ln/>
+        </p:spPr>
+        <p:txBody>
+          <a:bodyPr wrap="square" lIns="0" tIns="0" rIns="0" bIns="0" rtlCol="0" anchor="ctr"/>
+          <a:lstStyle/>
+          <a:p>
+            <a:pPr algn="ctr" indent="0" marL="0">
+              <a:buNone/>
+            </a:pPr>
+            <a:r>
+              <a:rPr lang="en-US" sz="1500" b="1" dirty="0">
+                <a:solidFill>
+                  <a:srgbClr val="0F172A"/>
+                </a:solidFill>
+                <a:latin typeface="Arial" pitchFamily="34" charset="0"/>
+                <a:ea typeface="Arial" pitchFamily="34" charset="-122"/>
+                <a:cs typeface="Arial" pitchFamily="34" charset="-120"/>
+              </a:rPr>
+              <a:t>ATT</a:t>
+            </a:r>
+            <a:endParaRPr lang="en-US" sz="1500" dirty="0"/>
+          </a:p>
+        </p:txBody>
+      </p:sp>
+      <p:sp>
+        <p:nvSpPr>
+          <p:cNvPr id="19" name="Text 17"/>
+          <p:cNvSpPr/>
+          <p:nvPr/>
+        </p:nvSpPr>
+        <p:spPr>
+          <a:xfrm>
+            <a:off x="5769864" y="2862072"/>
+            <a:ext cx="1591056" cy="320040"/>
+          </a:xfrm>
+          <a:prstGeom prst="rect">
+            <a:avLst/>
+          </a:prstGeom>
+          <a:noFill/>
+          <a:ln/>
+        </p:spPr>
+        <p:txBody>
+          <a:bodyPr wrap="square" lIns="0" tIns="0" rIns="0" bIns="0" rtlCol="0" anchor="ctr"/>
+          <a:lstStyle/>
+          <a:p>
+            <a:pPr algn="ctr" indent="0" marL="0">
+              <a:buNone/>
+            </a:pPr>
+            <a:r>
+              <a:rPr lang="en-US" sz="1100" dirty="0">
+                <a:solidFill>
+                  <a:srgbClr val="475569"/>
+                </a:solidFill>
+                <a:latin typeface="Arial" pitchFamily="34" charset="0"/>
+                <a:ea typeface="Arial" pitchFamily="34" charset="-122"/>
+                <a:cs typeface="Arial" pitchFamily="34" charset="-120"/>
+              </a:rPr>
+              <a:t>Atratividade</a:t>
+            </a:r>
+            <a:endParaRPr lang="en-US" sz="1100" dirty="0"/>
+          </a:p>
+        </p:txBody>
+      </p:sp>
+      <p:sp>
+        <p:nvSpPr>
+          <p:cNvPr id="20" name="Shape 18"/>
+          <p:cNvSpPr/>
+          <p:nvPr/>
+        </p:nvSpPr>
+        <p:spPr>
+          <a:xfrm>
+            <a:off x="7525512" y="1508760"/>
+            <a:ext cx="1591056" cy="1828800"/>
+          </a:xfrm>
+          <a:prstGeom prst="roundRect">
+            <a:avLst>
+              <a:gd name="adj" fmla="val 7471"/>
+            </a:avLst>
+          </a:prstGeom>
+          <a:solidFill>
+            <a:srgbClr val="E8F1FF"/>
+          </a:solidFill>
+          <a:ln/>
+          <a:effectLst>
+            <a:outerShdw sx="100000" sy="100000" kx="0" ky="0" algn="bl" rotWithShape="0" blurRad="139700" dist="38100" dir="5400000">
+              <a:srgbClr val="0F172A">
+                <a:alpha val="8000"/>
+              </a:srgbClr>
+            </a:outerShdw>
+          </a:effectLst>
+        </p:spPr>
+      </p:sp>
+      <p:sp>
+        <p:nvSpPr>
+          <p:cNvPr id="21" name="Text 19"/>
+          <p:cNvSpPr/>
+          <p:nvPr/>
+        </p:nvSpPr>
+        <p:spPr>
+          <a:xfrm>
+            <a:off x="7525512" y="1764792"/>
+            <a:ext cx="1591056" cy="731520"/>
+          </a:xfrm>
+          <a:prstGeom prst="rect">
+            <a:avLst/>
+          </a:prstGeom>
+          <a:noFill/>
+          <a:ln/>
+        </p:spPr>
+        <p:txBody>
+          <a:bodyPr wrap="square" lIns="0" tIns="0" rIns="0" bIns="0" rtlCol="0" anchor="ctr"/>
+          <a:lstStyle/>
+          <a:p>
+            <a:pPr algn="ctr" indent="0" marL="0">
+              <a:buNone/>
+            </a:pPr>
+            <a:r>
+              <a:rPr lang="en-US" sz="4000" b="1" dirty="0">
+                <a:solidFill>
+                  <a:srgbClr val="0B1220"/>
+                </a:solidFill>
+                <a:latin typeface="Arial" pitchFamily="34" charset="0"/>
+                <a:ea typeface="Arial" pitchFamily="34" charset="-122"/>
+                <a:cs typeface="Arial" pitchFamily="34" charset="-120"/>
+              </a:rPr>
+              <a:t>+0,1</a:t>
+            </a:r>
+            <a:endParaRPr lang="en-US" sz="4000" dirty="0"/>
+          </a:p>
+        </p:txBody>
+      </p:sp>
+      <p:sp>
+        <p:nvSpPr>
+          <p:cNvPr id="22" name="Text 20"/>
+          <p:cNvSpPr/>
+          <p:nvPr/>
+        </p:nvSpPr>
+        <p:spPr>
+          <a:xfrm>
+            <a:off x="7525512" y="2532888"/>
+            <a:ext cx="1591056" cy="320040"/>
+          </a:xfrm>
+          <a:prstGeom prst="rect">
+            <a:avLst/>
+          </a:prstGeom>
+          <a:noFill/>
+          <a:ln/>
+        </p:spPr>
+        <p:txBody>
+          <a:bodyPr wrap="square" lIns="0" tIns="0" rIns="0" bIns="0" rtlCol="0" anchor="ctr"/>
+          <a:lstStyle/>
+          <a:p>
+            <a:pPr algn="ctr" indent="0" marL="0">
+              <a:buNone/>
+            </a:pPr>
+            <a:r>
+              <a:rPr lang="en-US" sz="1500" b="1" dirty="0">
+                <a:solidFill>
+                  <a:srgbClr val="0F172A"/>
+                </a:solidFill>
+                <a:latin typeface="Arial" pitchFamily="34" charset="0"/>
+                <a:ea typeface="Arial" pitchFamily="34" charset="-122"/>
+                <a:cs typeface="Arial" pitchFamily="34" charset="-120"/>
+              </a:rPr>
+              <a:t>Geral</a:t>
+            </a:r>
+            <a:endParaRPr lang="en-US" sz="1500" dirty="0"/>
+          </a:p>
+        </p:txBody>
+      </p:sp>
+      <p:sp>
+        <p:nvSpPr>
+          <p:cNvPr id="23" name="Text 21"/>
+          <p:cNvSpPr/>
+          <p:nvPr/>
+        </p:nvSpPr>
+        <p:spPr>
+          <a:xfrm>
+            <a:off x="7525512" y="2862072"/>
+            <a:ext cx="1591056" cy="320040"/>
+          </a:xfrm>
+          <a:prstGeom prst="rect">
+            <a:avLst/>
+          </a:prstGeom>
+          <a:noFill/>
+          <a:ln/>
+        </p:spPr>
+        <p:txBody>
+          <a:bodyPr wrap="square" lIns="0" tIns="0" rIns="0" bIns="0" rtlCol="0" anchor="ctr"/>
+          <a:lstStyle/>
+          <a:p>
+            <a:pPr algn="ctr" indent="0" marL="0">
+              <a:buNone/>
+            </a:pPr>
+            <a:r>
+              <a:rPr lang="en-US" sz="1100" dirty="0">
+                <a:solidFill>
+                  <a:srgbClr val="475569"/>
+                </a:solidFill>
+                <a:latin typeface="Arial" pitchFamily="34" charset="0"/>
+                <a:ea typeface="Arial" pitchFamily="34" charset="-122"/>
+                <a:cs typeface="Arial" pitchFamily="34" charset="-120"/>
+              </a:rPr>
+              <a:t>Média global</a:t>
+            </a:r>
+            <a:endParaRPr lang="en-US" sz="1100" dirty="0"/>
+          </a:p>
+        </p:txBody>
+      </p:sp>
+      <p:sp>
+        <p:nvSpPr>
+          <p:cNvPr id="24" name="Text 22"/>
+          <p:cNvSpPr/>
+          <p:nvPr/>
+        </p:nvSpPr>
+        <p:spPr>
+          <a:xfrm>
+            <a:off x="548640" y="3611880"/>
+            <a:ext cx="8092440" cy="914400"/>
+          </a:xfrm>
+          <a:prstGeom prst="rect">
+            <a:avLst/>
+          </a:prstGeom>
+          <a:noFill/>
+          <a:ln/>
+        </p:spPr>
+        <p:txBody>
+          <a:bodyPr wrap="square" lIns="0" tIns="0" rIns="0" bIns="0" rtlCol="0" anchor="ctr"/>
+          <a:lstStyle/>
+          <a:p>
+            <a:pPr indent="0" marL="0">
+              <a:buNone/>
+            </a:pPr>
+            <a:r>
+              <a:rPr lang="en-US" sz="1250" dirty="0">
+                <a:solidFill>
+                  <a:srgbClr val="475569"/>
+                </a:solidFill>
+                <a:latin typeface="Arial" pitchFamily="34" charset="0"/>
+                <a:ea typeface="Arial" pitchFamily="34" charset="-122"/>
+                <a:cs typeface="Arial" pitchFamily="34" charset="-120"/>
+              </a:rPr>
+              <a:t>Escala −3 a +3 (3 participantes). Resultado neutro-positivo: o produto cumpre sua proposta (PQ, ATT e identidade positivos). A estimulação levemente negativa indica oportunidade de diferenciação em versões futuras — comum em apps utilitários de campo.</a:t>
+            </a:r>
+            <a:endParaRPr lang="en-US" sz="1250" dirty="0"/>
+          </a:p>
+        </p:txBody>
+      </p:sp>
+      <p:sp>
+        <p:nvSpPr>
+          <p:cNvPr id="25" name="Text 23"/>
+          <p:cNvSpPr/>
+          <p:nvPr/>
+        </p:nvSpPr>
+        <p:spPr>
+          <a:xfrm>
+            <a:off x="502920" y="4777740"/>
+            <a:ext cx="5486400" cy="274320"/>
+          </a:xfrm>
+          <a:prstGeom prst="rect">
+            <a:avLst/>
+          </a:prstGeom>
+          <a:noFill/>
+          <a:ln/>
+        </p:spPr>
+        <p:txBody>
+          <a:bodyPr wrap="square" lIns="0" tIns="0" rIns="0" bIns="0" rtlCol="0" anchor="ctr"/>
+          <a:lstStyle/>
+          <a:p>
+            <a:pPr algn="l" indent="0" marL="0">
+              <a:buNone/>
+            </a:pPr>
+            <a:r>
+              <a:rPr lang="en-US" sz="900" dirty="0">
+                <a:solidFill>
+                  <a:srgbClr val="64748B"/>
+                </a:solidFill>
+                <a:latin typeface="Arial" pitchFamily="34" charset="0"/>
+                <a:ea typeface="Arial" pitchFamily="34" charset="-122"/>
+                <a:cs typeface="Arial" pitchFamily="34" charset="-120"/>
+              </a:rPr>
+              <a:t>Track Fibra · IHC — UTFPR Campo Mourão</a:t>
+            </a:r>
+            <a:endParaRPr lang="en-US" sz="900" dirty="0"/>
+          </a:p>
+        </p:txBody>
+      </p:sp>
+      <p:sp>
+        <p:nvSpPr>
+          <p:cNvPr id="26" name="Text 24"/>
+          <p:cNvSpPr/>
+          <p:nvPr/>
+        </p:nvSpPr>
+        <p:spPr>
+          <a:xfrm>
+            <a:off x="7726680" y="4777740"/>
+            <a:ext cx="914400" cy="274320"/>
+          </a:xfrm>
+          <a:prstGeom prst="rect">
+            <a:avLst/>
+          </a:prstGeom>
+          <a:noFill/>
+          <a:ln/>
+        </p:spPr>
+        <p:txBody>
+          <a:bodyPr wrap="square" lIns="0" tIns="0" rIns="0" bIns="0" rtlCol="0" anchor="ctr"/>
+          <a:lstStyle/>
+          <a:p>
+            <a:pPr algn="r" indent="0" marL="0">
+              <a:buNone/>
+            </a:pPr>
+            <a:r>
+              <a:rPr lang="en-US" sz="900" dirty="0">
+                <a:solidFill>
+                  <a:srgbClr val="64748B"/>
+                </a:solidFill>
+                <a:latin typeface="Arial" pitchFamily="34" charset="0"/>
+                <a:ea typeface="Arial" pitchFamily="34" charset="-122"/>
+                <a:cs typeface="Arial" pitchFamily="34" charset="-120"/>
+              </a:rPr>
+              <a:t>11 / 12</a:t>
+            </a:r>
+            <a:endParaRPr lang="en-US" sz="900" dirty="0"/>
+          </a:p>
+        </p:txBody>
+      </p:sp>
+    </p:spTree>
+  </p:cSld>
+  <p:clrMapOvr>
+    <a:masterClrMapping/>
+  </p:clrMapOvr>
+</p:sld>
+</file>
+
+<file path=ppt/slides/slide12.xml><?xml version="1.0" encoding="utf-8"?>
+<p:sld xmlns:a="http://schemas.openxmlformats.org/drawingml/2006/main" xmlns:r="http://schemas.openxmlformats.org/officeDocument/2006/relationships" xmlns:p="http://schemas.openxmlformats.org/presentationml/2006/main">
+  <p:cSld name="Slide 12">
     <p:bg>
       <p:bgPr>
         <a:solidFill>
@@ -3021,7 +3963,7 @@
         </p:nvSpPr>
         <p:spPr>
           <a:xfrm>
-            <a:off x="0" y="502920"/>
+            <a:off x="0" y="548640"/>
             <a:ext cx="9144000" cy="731520"/>
           </a:xfrm>
           <a:prstGeom prst="rect">
@@ -3038,14 +3980,17 @@
               <a:buNone/>
             </a:pPr>
             <a:r>
-              <a:rPr lang="en-US" sz="4600" dirty="0">
+              <a:rPr lang="en-US" sz="4400" dirty="0">
                 <a:solidFill>
                   <a:srgbClr val="06B6D4"/>
                 </a:solidFill>
+                <a:latin typeface="Arial" pitchFamily="34" charset="0"/>
+                <a:ea typeface="Arial" pitchFamily="34" charset="-122"/>
+                <a:cs typeface="Arial" pitchFamily="34" charset="-120"/>
               </a:rPr>
               <a:t>≋</a:t>
             </a:r>
-            <a:endParaRPr lang="en-US" sz="4600" dirty="0"/>
+            <a:endParaRPr lang="en-US" sz="4400" dirty="0"/>
           </a:p>
         </p:txBody>
       </p:sp>
@@ -3057,7 +4002,7 @@
         </p:nvSpPr>
         <p:spPr>
           <a:xfrm>
-            <a:off x="0" y="1234440"/>
+            <a:off x="0" y="1280160"/>
             <a:ext cx="9144000" cy="822960"/>
           </a:xfrm>
           <a:prstGeom prst="rect">
@@ -3074,17 +4019,17 @@
               <a:buNone/>
             </a:pPr>
             <a:r>
-              <a:rPr lang="en-US" sz="4600" b="1" dirty="0">
+              <a:rPr lang="en-US" sz="4800" b="1" dirty="0">
                 <a:solidFill>
                   <a:srgbClr val="FFFFFF"/>
                 </a:solidFill>
-                <a:latin typeface="Cambria" pitchFamily="34" charset="0"/>
-                <a:ea typeface="Cambria" pitchFamily="34" charset="-122"/>
-                <a:cs typeface="Cambria" pitchFamily="34" charset="-120"/>
+                <a:latin typeface="Arial" pitchFamily="34" charset="0"/>
+                <a:ea typeface="Arial" pitchFamily="34" charset="-122"/>
+                <a:cs typeface="Arial" pitchFamily="34" charset="-120"/>
               </a:rPr>
               <a:t>Obrigado!</a:t>
             </a:r>
-            <a:endParaRPr lang="en-US" sz="4600" dirty="0"/>
+            <a:endParaRPr lang="en-US" sz="4800" dirty="0"/>
           </a:p>
         </p:txBody>
       </p:sp>
@@ -3096,7 +4041,7 @@
         </p:nvSpPr>
         <p:spPr>
           <a:xfrm>
-            <a:off x="914400" y="2148840"/>
+            <a:off x="914400" y="2194560"/>
             <a:ext cx="7315200" cy="365760"/>
           </a:xfrm>
           <a:prstGeom prst="rect">
@@ -3117,9 +4062,9 @@
                 <a:solidFill>
                   <a:srgbClr val="CBD5E1"/>
                 </a:solidFill>
-                <a:latin typeface="Calibri" pitchFamily="34" charset="0"/>
-                <a:ea typeface="Calibri" pitchFamily="34" charset="-122"/>
-                <a:cs typeface="Calibri" pitchFamily="34" charset="-120"/>
+                <a:latin typeface="Arial" pitchFamily="34" charset="0"/>
+                <a:ea typeface="Arial" pitchFamily="34" charset="-122"/>
+                <a:cs typeface="Arial" pitchFamily="34" charset="-120"/>
               </a:rPr>
               <a:t>A seguir: demonstração da landing page, do vídeo e do protótipo final.</a:t>
             </a:r>
@@ -3135,23 +4080,18 @@
         </p:nvSpPr>
         <p:spPr>
           <a:xfrm>
-            <a:off x="777240" y="2880360"/>
-            <a:ext cx="3657600" cy="1005840"/>
+            <a:off x="777240" y="2926080"/>
+            <a:ext cx="3657600" cy="960120"/>
           </a:xfrm>
           <a:prstGeom prst="roundRect">
             <a:avLst>
-              <a:gd name="adj" fmla="val 7273"/>
+              <a:gd name="adj" fmla="val 9524"/>
             </a:avLst>
           </a:prstGeom>
           <a:solidFill>
             <a:srgbClr val="111A2E"/>
           </a:solidFill>
-          <a:ln w="12700">
-            <a:solidFill>
-              <a:srgbClr val="1E293B"/>
-            </a:solidFill>
-            <a:prstDash val="solid"/>
-          </a:ln>
+          <a:ln/>
         </p:spPr>
       </p:sp>
       <p:sp>
@@ -3162,7 +4102,7 @@
         </p:nvSpPr>
         <p:spPr>
           <a:xfrm>
-            <a:off x="960120" y="3063240"/>
+            <a:off x="1005840" y="3108960"/>
             <a:ext cx="3291840" cy="320040"/>
           </a:xfrm>
           <a:prstGeom prst="rect">
@@ -3183,9 +4123,9 @@
                 <a:solidFill>
                   <a:srgbClr val="06B6D4"/>
                 </a:solidFill>
-                <a:latin typeface="Calibri" pitchFamily="34" charset="0"/>
-                <a:ea typeface="Calibri" pitchFamily="34" charset="-122"/>
-                <a:cs typeface="Calibri" pitchFamily="34" charset="-120"/>
+                <a:latin typeface="Arial" pitchFamily="34" charset="0"/>
+                <a:ea typeface="Arial" pitchFamily="34" charset="-122"/>
+                <a:cs typeface="Arial" pitchFamily="34" charset="-120"/>
               </a:rPr>
               <a:t>Landing page</a:t>
             </a:r>
@@ -3201,7 +4141,7 @@
         </p:nvSpPr>
         <p:spPr>
           <a:xfrm>
-            <a:off x="960120" y="3410712"/>
+            <a:off x="1005840" y="3438144"/>
             <a:ext cx="3291840" cy="320040"/>
           </a:xfrm>
           <a:prstGeom prst="rect">
@@ -3222,9 +4162,9 @@
                 <a:solidFill>
                   <a:srgbClr val="FFFFFF"/>
                 </a:solidFill>
-                <a:latin typeface="Calibri" pitchFamily="34" charset="0"/>
-                <a:ea typeface="Calibri" pitchFamily="34" charset="-122"/>
-                <a:cs typeface="Calibri" pitchFamily="34" charset="-120"/>
+                <a:latin typeface="Arial" pitchFamily="34" charset="0"/>
+                <a:ea typeface="Arial" pitchFamily="34" charset="-122"/>
+                <a:cs typeface="Arial" pitchFamily="34" charset="-120"/>
               </a:rPr>
               <a:t>pedroh-tardivo.github.io/track-fibra</a:t>
             </a:r>
@@ -3240,23 +4180,18 @@
         </p:nvSpPr>
         <p:spPr>
           <a:xfrm>
-            <a:off x="4709160" y="2880360"/>
-            <a:ext cx="3657600" cy="1005840"/>
+            <a:off x="4709160" y="2926080"/>
+            <a:ext cx="3657600" cy="960120"/>
           </a:xfrm>
           <a:prstGeom prst="roundRect">
             <a:avLst>
-              <a:gd name="adj" fmla="val 7273"/>
+              <a:gd name="adj" fmla="val 9524"/>
             </a:avLst>
           </a:prstGeom>
           <a:solidFill>
             <a:srgbClr val="111A2E"/>
           </a:solidFill>
-          <a:ln w="12700">
-            <a:solidFill>
-              <a:srgbClr val="1E293B"/>
-            </a:solidFill>
-            <a:prstDash val="solid"/>
-          </a:ln>
+          <a:ln/>
         </p:spPr>
       </p:sp>
       <p:sp>
@@ -3267,7 +4202,7 @@
         </p:nvSpPr>
         <p:spPr>
           <a:xfrm>
-            <a:off x="4892040" y="3063240"/>
+            <a:off x="4937760" y="3108960"/>
             <a:ext cx="3291840" cy="320040"/>
           </a:xfrm>
           <a:prstGeom prst="rect">
@@ -3288,9 +4223,9 @@
                 <a:solidFill>
                   <a:srgbClr val="06B6D4"/>
                 </a:solidFill>
-                <a:latin typeface="Calibri" pitchFamily="34" charset="0"/>
-                <a:ea typeface="Calibri" pitchFamily="34" charset="-122"/>
-                <a:cs typeface="Calibri" pitchFamily="34" charset="-120"/>
+                <a:latin typeface="Arial" pitchFamily="34" charset="0"/>
+                <a:ea typeface="Arial" pitchFamily="34" charset="-122"/>
+                <a:cs typeface="Arial" pitchFamily="34" charset="-120"/>
               </a:rPr>
               <a:t>Protótipo (Figma)</a:t>
             </a:r>
@@ -3306,7 +4241,7 @@
         </p:nvSpPr>
         <p:spPr>
           <a:xfrm>
-            <a:off x="4892040" y="3410712"/>
+            <a:off x="4937760" y="3438144"/>
             <a:ext cx="3291840" cy="320040"/>
           </a:xfrm>
           <a:prstGeom prst="rect">
@@ -3327,9 +4262,9 @@
                 <a:solidFill>
                   <a:srgbClr val="FFFFFF"/>
                 </a:solidFill>
-                <a:latin typeface="Calibri" pitchFamily="34" charset="0"/>
-                <a:ea typeface="Calibri" pitchFamily="34" charset="-122"/>
-                <a:cs typeface="Calibri" pitchFamily="34" charset="-120"/>
+                <a:latin typeface="Arial" pitchFamily="34" charset="0"/>
+                <a:ea typeface="Arial" pitchFamily="34" charset="-122"/>
+                <a:cs typeface="Arial" pitchFamily="34" charset="-120"/>
               </a:rPr>
               <a:t>figma.com/proto/WlkwUAUbbs0dsNf184dEUv</a:t>
             </a:r>
@@ -3345,7 +4280,7 @@
         </p:nvSpPr>
         <p:spPr>
           <a:xfrm>
-            <a:off x="0" y="4343400"/>
+            <a:off x="0" y="4389120"/>
             <a:ext cx="9144000" cy="320040"/>
           </a:xfrm>
           <a:prstGeom prst="rect">
@@ -3366,9 +4301,9 @@
                 <a:solidFill>
                   <a:srgbClr val="94A3B8"/>
                 </a:solidFill>
-                <a:latin typeface="Calibri" pitchFamily="34" charset="0"/>
-                <a:ea typeface="Calibri" pitchFamily="34" charset="-122"/>
-                <a:cs typeface="Calibri" pitchFamily="34" charset="-120"/>
+                <a:latin typeface="Arial" pitchFamily="34" charset="0"/>
+                <a:ea typeface="Arial" pitchFamily="34" charset="-122"/>
+                <a:cs typeface="Arial" pitchFamily="34" charset="-120"/>
               </a:rPr>
               <a:t>Equipe de IHC — UTFPR Campo Mourão · 2026</a:t>
             </a:r>
@@ -3390,7 +4325,7 @@
     <p:bg>
       <p:bgPr>
         <a:solidFill>
-          <a:srgbClr val="FFFFFF"/>
+          <a:srgbClr val="F8FAFC"/>
         </a:solidFill>
       </p:bgPr>
     </p:bg>
@@ -3416,7 +4351,7 @@
         </p:nvSpPr>
         <p:spPr>
           <a:xfrm>
-            <a:off x="502920" y="301752"/>
+            <a:off x="548640" y="329184"/>
             <a:ext cx="8229600" cy="274320"/>
           </a:xfrm>
           <a:prstGeom prst="rect">
@@ -3433,13 +4368,13 @@
               <a:buNone/>
             </a:pPr>
             <a:r>
-              <a:rPr lang="en-US" sz="1200" b="1" spc="300" kern="0" dirty="0">
+              <a:rPr lang="en-US" sz="1200" b="1" spc="400" kern="0" dirty="0">
                 <a:solidFill>
                   <a:srgbClr val="06B6D4"/>
                 </a:solidFill>
-                <a:latin typeface="Calibri" pitchFamily="34" charset="0"/>
-                <a:ea typeface="Calibri" pitchFamily="34" charset="-122"/>
-                <a:cs typeface="Calibri" pitchFamily="34" charset="-120"/>
+                <a:latin typeface="Arial" pitchFamily="34" charset="0"/>
+                <a:ea typeface="Arial" pitchFamily="34" charset="-122"/>
+                <a:cs typeface="Arial" pitchFamily="34" charset="-120"/>
               </a:rPr>
               <a:t>MOTIVAÇÃO</a:t>
             </a:r>
@@ -3455,7 +4390,7 @@
         </p:nvSpPr>
         <p:spPr>
           <a:xfrm>
-            <a:off x="457200" y="548640"/>
+            <a:off x="502920" y="585216"/>
             <a:ext cx="8229600" cy="640080"/>
           </a:xfrm>
           <a:prstGeom prst="rect">
@@ -3472,17 +4407,17 @@
               <a:buNone/>
             </a:pPr>
             <a:r>
-              <a:rPr lang="en-US" sz="3200" b="1" dirty="0">
+              <a:rPr lang="en-US" sz="3400" b="1" dirty="0">
                 <a:solidFill>
                   <a:srgbClr val="0F172A"/>
                 </a:solidFill>
-                <a:latin typeface="Cambria" pitchFamily="34" charset="0"/>
-                <a:ea typeface="Cambria" pitchFamily="34" charset="-122"/>
-                <a:cs typeface="Cambria" pitchFamily="34" charset="-120"/>
+                <a:latin typeface="Arial" pitchFamily="34" charset="0"/>
+                <a:ea typeface="Arial" pitchFamily="34" charset="-122"/>
+                <a:cs typeface="Arial" pitchFamily="34" charset="-120"/>
               </a:rPr>
               <a:t>O problema</a:t>
             </a:r>
-            <a:endParaRPr lang="en-US" sz="3200" dirty="0"/>
+            <a:endParaRPr lang="en-US" sz="3400" dirty="0"/>
           </a:p>
         </p:txBody>
       </p:sp>
@@ -3494,27 +4429,22 @@
         </p:nvSpPr>
         <p:spPr>
           <a:xfrm>
-            <a:off x="457200" y="1417320"/>
-            <a:ext cx="3977640" cy="1417320"/>
+            <a:off x="502920" y="1463040"/>
+            <a:ext cx="3977640" cy="1371600"/>
           </a:xfrm>
           <a:prstGeom prst="roundRect">
             <a:avLst>
-              <a:gd name="adj" fmla="val 5161"/>
+              <a:gd name="adj" fmla="val 8667"/>
             </a:avLst>
           </a:prstGeom>
           <a:solidFill>
-            <a:srgbClr val="F8FAFC"/>
+            <a:srgbClr val="FFFFFF"/>
           </a:solidFill>
-          <a:ln w="12700">
-            <a:solidFill>
-              <a:srgbClr val="E2E8F0"/>
-            </a:solidFill>
-            <a:prstDash val="solid"/>
-          </a:ln>
+          <a:ln/>
           <a:effectLst>
-            <a:outerShdw sx="100000" sy="100000" kx="0" ky="0" algn="bl" rotWithShape="0" blurRad="88900" dist="38100" dir="5400000">
+            <a:outerShdw sx="100000" sy="100000" kx="0" ky="0" algn="bl" rotWithShape="0" blurRad="139700" dist="38100" dir="5400000">
               <a:srgbClr val="0F172A">
-                <a:alpha val="10000"/>
+                <a:alpha val="8000"/>
               </a:srgbClr>
             </a:outerShdw>
           </a:effectLst>
@@ -3528,14 +4458,14 @@
         </p:nvSpPr>
         <p:spPr>
           <a:xfrm>
-            <a:off x="685800" y="1664208"/>
+            <a:off x="758952" y="1719072"/>
             <a:ext cx="457200" cy="457200"/>
           </a:xfrm>
           <a:prstGeom prst="ellipse">
             <a:avLst/>
           </a:prstGeom>
           <a:solidFill>
-            <a:srgbClr val="1D4ED8"/>
+            <a:srgbClr val="2563EB"/>
           </a:solidFill>
           <a:ln/>
         </p:spPr>
@@ -3548,7 +4478,7 @@
         </p:nvSpPr>
         <p:spPr>
           <a:xfrm>
-            <a:off x="685800" y="1664208"/>
+            <a:off x="758952" y="1719072"/>
             <a:ext cx="457200" cy="457200"/>
           </a:xfrm>
           <a:prstGeom prst="rect">
@@ -3565,17 +4495,17 @@
               <a:buNone/>
             </a:pPr>
             <a:r>
-              <a:rPr lang="en-US" sz="1300" b="1" dirty="0">
+              <a:rPr lang="en-US" sz="1400" b="1" dirty="0">
                 <a:solidFill>
                   <a:srgbClr val="FFFFFF"/>
                 </a:solidFill>
-                <a:latin typeface="Calibri" pitchFamily="34" charset="0"/>
-                <a:ea typeface="Calibri" pitchFamily="34" charset="-122"/>
-                <a:cs typeface="Calibri" pitchFamily="34" charset="-120"/>
+                <a:latin typeface="Arial" pitchFamily="34" charset="0"/>
+                <a:ea typeface="Arial" pitchFamily="34" charset="-122"/>
+                <a:cs typeface="Arial" pitchFamily="34" charset="-120"/>
               </a:rPr>
               <a:t>1</a:t>
             </a:r>
-            <a:endParaRPr lang="en-US" sz="1300" dirty="0"/>
+            <a:endParaRPr lang="en-US" sz="1400" dirty="0"/>
           </a:p>
         </p:txBody>
       </p:sp>
@@ -3587,8 +4517,8 @@
         </p:nvSpPr>
         <p:spPr>
           <a:xfrm>
-            <a:off x="1325880" y="1618488"/>
-            <a:ext cx="2926080" cy="457200"/>
+            <a:off x="1417320" y="1682496"/>
+            <a:ext cx="2880360" cy="457200"/>
           </a:xfrm>
           <a:prstGeom prst="rect">
             <a:avLst/>
@@ -3608,9 +4538,9 @@
                 <a:solidFill>
                   <a:srgbClr val="0F172A"/>
                 </a:solidFill>
-                <a:latin typeface="Calibri" pitchFamily="34" charset="0"/>
-                <a:ea typeface="Calibri" pitchFamily="34" charset="-122"/>
-                <a:cs typeface="Calibri" pitchFamily="34" charset="-120"/>
+                <a:latin typeface="Arial" pitchFamily="34" charset="0"/>
+                <a:ea typeface="Arial" pitchFamily="34" charset="-122"/>
+                <a:cs typeface="Arial" pitchFamily="34" charset="-120"/>
               </a:rPr>
               <a:t>Coordenação por planilha + WhatsApp</a:t>
             </a:r>
@@ -3626,8 +4556,8 @@
         </p:nvSpPr>
         <p:spPr>
           <a:xfrm>
-            <a:off x="1325880" y="2075688"/>
-            <a:ext cx="2926080" cy="640080"/>
+            <a:off x="1417320" y="2139696"/>
+            <a:ext cx="2880360" cy="548640"/>
           </a:xfrm>
           <a:prstGeom prst="rect">
             <a:avLst/>
@@ -3647,9 +4577,9 @@
                 <a:solidFill>
                   <a:srgbClr val="475569"/>
                 </a:solidFill>
-                <a:latin typeface="Calibri" pitchFamily="34" charset="0"/>
-                <a:ea typeface="Calibri" pitchFamily="34" charset="-122"/>
-                <a:cs typeface="Calibri" pitchFamily="34" charset="-120"/>
+                <a:latin typeface="Arial" pitchFamily="34" charset="0"/>
+                <a:ea typeface="Arial" pitchFamily="34" charset="-122"/>
+                <a:cs typeface="Arial" pitchFamily="34" charset="-120"/>
               </a:rPr>
               <a:t>Sem uma fonte única e confiável de informação do dia.</a:t>
             </a:r>
@@ -3665,27 +4595,22 @@
         </p:nvSpPr>
         <p:spPr>
           <a:xfrm>
-            <a:off x="4709160" y="1417320"/>
-            <a:ext cx="3977640" cy="1417320"/>
+            <a:off x="4800600" y="1463040"/>
+            <a:ext cx="3977640" cy="1371600"/>
           </a:xfrm>
           <a:prstGeom prst="roundRect">
             <a:avLst>
-              <a:gd name="adj" fmla="val 5161"/>
+              <a:gd name="adj" fmla="val 8667"/>
             </a:avLst>
           </a:prstGeom>
           <a:solidFill>
-            <a:srgbClr val="F8FAFC"/>
+            <a:srgbClr val="FFFFFF"/>
           </a:solidFill>
-          <a:ln w="12700">
-            <a:solidFill>
-              <a:srgbClr val="E2E8F0"/>
-            </a:solidFill>
-            <a:prstDash val="solid"/>
-          </a:ln>
+          <a:ln/>
           <a:effectLst>
-            <a:outerShdw sx="100000" sy="100000" kx="0" ky="0" algn="bl" rotWithShape="0" blurRad="88900" dist="38100" dir="5400000">
+            <a:outerShdw sx="100000" sy="100000" kx="0" ky="0" algn="bl" rotWithShape="0" blurRad="139700" dist="38100" dir="5400000">
               <a:srgbClr val="0F172A">
-                <a:alpha val="10000"/>
+                <a:alpha val="8000"/>
               </a:srgbClr>
             </a:outerShdw>
           </a:effectLst>
@@ -3699,14 +4624,14 @@
         </p:nvSpPr>
         <p:spPr>
           <a:xfrm>
-            <a:off x="4937760" y="1664208"/>
+            <a:off x="5056632" y="1719072"/>
             <a:ext cx="457200" cy="457200"/>
           </a:xfrm>
           <a:prstGeom prst="ellipse">
             <a:avLst/>
           </a:prstGeom>
           <a:solidFill>
-            <a:srgbClr val="1D4ED8"/>
+            <a:srgbClr val="2563EB"/>
           </a:solidFill>
           <a:ln/>
         </p:spPr>
@@ -3719,7 +4644,7 @@
         </p:nvSpPr>
         <p:spPr>
           <a:xfrm>
-            <a:off x="4937760" y="1664208"/>
+            <a:off x="5056632" y="1719072"/>
             <a:ext cx="457200" cy="457200"/>
           </a:xfrm>
           <a:prstGeom prst="rect">
@@ -3736,17 +4661,17 @@
               <a:buNone/>
             </a:pPr>
             <a:r>
-              <a:rPr lang="en-US" sz="1300" b="1" dirty="0">
+              <a:rPr lang="en-US" sz="1400" b="1" dirty="0">
                 <a:solidFill>
                   <a:srgbClr val="FFFFFF"/>
                 </a:solidFill>
-                <a:latin typeface="Calibri" pitchFamily="34" charset="0"/>
-                <a:ea typeface="Calibri" pitchFamily="34" charset="-122"/>
-                <a:cs typeface="Calibri" pitchFamily="34" charset="-120"/>
+                <a:latin typeface="Arial" pitchFamily="34" charset="0"/>
+                <a:ea typeface="Arial" pitchFamily="34" charset="-122"/>
+                <a:cs typeface="Arial" pitchFamily="34" charset="-120"/>
               </a:rPr>
               <a:t>2</a:t>
             </a:r>
-            <a:endParaRPr lang="en-US" sz="1300" dirty="0"/>
+            <a:endParaRPr lang="en-US" sz="1400" dirty="0"/>
           </a:p>
         </p:txBody>
       </p:sp>
@@ -3758,8 +4683,8 @@
         </p:nvSpPr>
         <p:spPr>
           <a:xfrm>
-            <a:off x="5577840" y="1618488"/>
-            <a:ext cx="2926080" cy="457200"/>
+            <a:off x="5715000" y="1682496"/>
+            <a:ext cx="2880360" cy="457200"/>
           </a:xfrm>
           <a:prstGeom prst="rect">
             <a:avLst/>
@@ -3779,9 +4704,9 @@
                 <a:solidFill>
                   <a:srgbClr val="0F172A"/>
                 </a:solidFill>
-                <a:latin typeface="Calibri" pitchFamily="34" charset="0"/>
-                <a:ea typeface="Calibri" pitchFamily="34" charset="-122"/>
-                <a:cs typeface="Calibri" pitchFamily="34" charset="-120"/>
+                <a:latin typeface="Arial" pitchFamily="34" charset="0"/>
+                <a:ea typeface="Arial" pitchFamily="34" charset="-122"/>
+                <a:cs typeface="Arial" pitchFamily="34" charset="-120"/>
               </a:rPr>
               <a:t>Deslocamento à toa</a:t>
             </a:r>
@@ -3797,8 +4722,8 @@
         </p:nvSpPr>
         <p:spPr>
           <a:xfrm>
-            <a:off x="5577840" y="2075688"/>
-            <a:ext cx="2926080" cy="640080"/>
+            <a:off x="5715000" y="2139696"/>
+            <a:ext cx="2880360" cy="548640"/>
           </a:xfrm>
           <a:prstGeom prst="rect">
             <a:avLst/>
@@ -3818,9 +4743,9 @@
                 <a:solidFill>
                   <a:srgbClr val="475569"/>
                 </a:solidFill>
-                <a:latin typeface="Calibri" pitchFamily="34" charset="0"/>
-                <a:ea typeface="Calibri" pitchFamily="34" charset="-122"/>
-                <a:cs typeface="Calibri" pitchFamily="34" charset="-120"/>
+                <a:latin typeface="Arial" pitchFamily="34" charset="0"/>
+                <a:ea typeface="Arial" pitchFamily="34" charset="-122"/>
+                <a:cs typeface="Arial" pitchFamily="34" charset="-120"/>
               </a:rPr>
               <a:t>O técnico vai ao local e o dado estava errado ou incompleto.</a:t>
             </a:r>
@@ -3836,27 +4761,22 @@
         </p:nvSpPr>
         <p:spPr>
           <a:xfrm>
-            <a:off x="457200" y="3063240"/>
-            <a:ext cx="3977640" cy="1417320"/>
+            <a:off x="502920" y="3090672"/>
+            <a:ext cx="3977640" cy="1371600"/>
           </a:xfrm>
           <a:prstGeom prst="roundRect">
             <a:avLst>
-              <a:gd name="adj" fmla="val 5161"/>
+              <a:gd name="adj" fmla="val 8667"/>
             </a:avLst>
           </a:prstGeom>
           <a:solidFill>
-            <a:srgbClr val="F8FAFC"/>
+            <a:srgbClr val="FFFFFF"/>
           </a:solidFill>
-          <a:ln w="12700">
-            <a:solidFill>
-              <a:srgbClr val="E2E8F0"/>
-            </a:solidFill>
-            <a:prstDash val="solid"/>
-          </a:ln>
+          <a:ln/>
           <a:effectLst>
-            <a:outerShdw sx="100000" sy="100000" kx="0" ky="0" algn="bl" rotWithShape="0" blurRad="88900" dist="38100" dir="5400000">
+            <a:outerShdw sx="100000" sy="100000" kx="0" ky="0" algn="bl" rotWithShape="0" blurRad="139700" dist="38100" dir="5400000">
               <a:srgbClr val="0F172A">
-                <a:alpha val="10000"/>
+                <a:alpha val="8000"/>
               </a:srgbClr>
             </a:outerShdw>
           </a:effectLst>
@@ -3870,14 +4790,14 @@
         </p:nvSpPr>
         <p:spPr>
           <a:xfrm>
-            <a:off x="685800" y="3310128"/>
+            <a:off x="758952" y="3346704"/>
             <a:ext cx="457200" cy="457200"/>
           </a:xfrm>
           <a:prstGeom prst="ellipse">
             <a:avLst/>
           </a:prstGeom>
           <a:solidFill>
-            <a:srgbClr val="1D4ED8"/>
+            <a:srgbClr val="2563EB"/>
           </a:solidFill>
           <a:ln/>
         </p:spPr>
@@ -3890,7 +4810,7 @@
         </p:nvSpPr>
         <p:spPr>
           <a:xfrm>
-            <a:off x="685800" y="3310128"/>
+            <a:off x="758952" y="3346704"/>
             <a:ext cx="457200" cy="457200"/>
           </a:xfrm>
           <a:prstGeom prst="rect">
@@ -3907,17 +4827,17 @@
               <a:buNone/>
             </a:pPr>
             <a:r>
-              <a:rPr lang="en-US" sz="1300" b="1" dirty="0">
+              <a:rPr lang="en-US" sz="1400" b="1" dirty="0">
                 <a:solidFill>
                   <a:srgbClr val="FFFFFF"/>
                 </a:solidFill>
-                <a:latin typeface="Calibri" pitchFamily="34" charset="0"/>
-                <a:ea typeface="Calibri" pitchFamily="34" charset="-122"/>
-                <a:cs typeface="Calibri" pitchFamily="34" charset="-120"/>
+                <a:latin typeface="Arial" pitchFamily="34" charset="0"/>
+                <a:ea typeface="Arial" pitchFamily="34" charset="-122"/>
+                <a:cs typeface="Arial" pitchFamily="34" charset="-120"/>
               </a:rPr>
               <a:t>3</a:t>
             </a:r>
-            <a:endParaRPr lang="en-US" sz="1300" dirty="0"/>
+            <a:endParaRPr lang="en-US" sz="1400" dirty="0"/>
           </a:p>
         </p:txBody>
       </p:sp>
@@ -3929,8 +4849,8 @@
         </p:nvSpPr>
         <p:spPr>
           <a:xfrm>
-            <a:off x="1325880" y="3264408"/>
-            <a:ext cx="2926080" cy="457200"/>
+            <a:off x="1417320" y="3310128"/>
+            <a:ext cx="2880360" cy="457200"/>
           </a:xfrm>
           <a:prstGeom prst="rect">
             <a:avLst/>
@@ -3950,9 +4870,9 @@
                 <a:solidFill>
                   <a:srgbClr val="0F172A"/>
                 </a:solidFill>
-                <a:latin typeface="Calibri" pitchFamily="34" charset="0"/>
-                <a:ea typeface="Calibri" pitchFamily="34" charset="-122"/>
-                <a:cs typeface="Calibri" pitchFamily="34" charset="-120"/>
+                <a:latin typeface="Arial" pitchFamily="34" charset="0"/>
+                <a:ea typeface="Arial" pitchFamily="34" charset="-122"/>
+                <a:cs typeface="Arial" pitchFamily="34" charset="-120"/>
               </a:rPr>
               <a:t>Status sem registro confiável</a:t>
             </a:r>
@@ -3968,8 +4888,8 @@
         </p:nvSpPr>
         <p:spPr>
           <a:xfrm>
-            <a:off x="1325880" y="3721608"/>
-            <a:ext cx="2926080" cy="640080"/>
+            <a:off x="1417320" y="3767328"/>
+            <a:ext cx="2880360" cy="548640"/>
           </a:xfrm>
           <a:prstGeom prst="rect">
             <a:avLst/>
@@ -3989,9 +4909,9 @@
                 <a:solidFill>
                   <a:srgbClr val="475569"/>
                 </a:solidFill>
-                <a:latin typeface="Calibri" pitchFamily="34" charset="0"/>
-                <a:ea typeface="Calibri" pitchFamily="34" charset="-122"/>
-                <a:cs typeface="Calibri" pitchFamily="34" charset="-120"/>
+                <a:latin typeface="Arial" pitchFamily="34" charset="0"/>
+                <a:ea typeface="Arial" pitchFamily="34" charset="-122"/>
+                <a:cs typeface="Arial" pitchFamily="34" charset="-120"/>
               </a:rPr>
               <a:t>Conclusões dependem de mensagens soltas, sem histórico.</a:t>
             </a:r>
@@ -4007,27 +4927,22 @@
         </p:nvSpPr>
         <p:spPr>
           <a:xfrm>
-            <a:off x="4709160" y="3063240"/>
-            <a:ext cx="3977640" cy="1417320"/>
+            <a:off x="4800600" y="3090672"/>
+            <a:ext cx="3977640" cy="1371600"/>
           </a:xfrm>
           <a:prstGeom prst="roundRect">
             <a:avLst>
-              <a:gd name="adj" fmla="val 5161"/>
+              <a:gd name="adj" fmla="val 8667"/>
             </a:avLst>
           </a:prstGeom>
           <a:solidFill>
-            <a:srgbClr val="F8FAFC"/>
+            <a:srgbClr val="FFFFFF"/>
           </a:solidFill>
-          <a:ln w="12700">
-            <a:solidFill>
-              <a:srgbClr val="E2E8F0"/>
-            </a:solidFill>
-            <a:prstDash val="solid"/>
-          </a:ln>
+          <a:ln/>
           <a:effectLst>
-            <a:outerShdw sx="100000" sy="100000" kx="0" ky="0" algn="bl" rotWithShape="0" blurRad="88900" dist="38100" dir="5400000">
+            <a:outerShdw sx="100000" sy="100000" kx="0" ky="0" algn="bl" rotWithShape="0" blurRad="139700" dist="38100" dir="5400000">
               <a:srgbClr val="0F172A">
-                <a:alpha val="10000"/>
+                <a:alpha val="8000"/>
               </a:srgbClr>
             </a:outerShdw>
           </a:effectLst>
@@ -4041,14 +4956,14 @@
         </p:nvSpPr>
         <p:spPr>
           <a:xfrm>
-            <a:off x="4937760" y="3310128"/>
+            <a:off x="5056632" y="3346704"/>
             <a:ext cx="457200" cy="457200"/>
           </a:xfrm>
           <a:prstGeom prst="ellipse">
             <a:avLst/>
           </a:prstGeom>
           <a:solidFill>
-            <a:srgbClr val="1D4ED8"/>
+            <a:srgbClr val="2563EB"/>
           </a:solidFill>
           <a:ln/>
         </p:spPr>
@@ -4061,7 +4976,7 @@
         </p:nvSpPr>
         <p:spPr>
           <a:xfrm>
-            <a:off x="4937760" y="3310128"/>
+            <a:off x="5056632" y="3346704"/>
             <a:ext cx="457200" cy="457200"/>
           </a:xfrm>
           <a:prstGeom prst="rect">
@@ -4078,17 +4993,17 @@
               <a:buNone/>
             </a:pPr>
             <a:r>
-              <a:rPr lang="en-US" sz="1300" b="1" dirty="0">
+              <a:rPr lang="en-US" sz="1400" b="1" dirty="0">
                 <a:solidFill>
                   <a:srgbClr val="FFFFFF"/>
                 </a:solidFill>
-                <a:latin typeface="Calibri" pitchFamily="34" charset="0"/>
-                <a:ea typeface="Calibri" pitchFamily="34" charset="-122"/>
-                <a:cs typeface="Calibri" pitchFamily="34" charset="-120"/>
+                <a:latin typeface="Arial" pitchFamily="34" charset="0"/>
+                <a:ea typeface="Arial" pitchFamily="34" charset="-122"/>
+                <a:cs typeface="Arial" pitchFamily="34" charset="-120"/>
               </a:rPr>
               <a:t>4</a:t>
             </a:r>
-            <a:endParaRPr lang="en-US" sz="1300" dirty="0"/>
+            <a:endParaRPr lang="en-US" sz="1400" dirty="0"/>
           </a:p>
         </p:txBody>
       </p:sp>
@@ -4100,8 +5015,8 @@
         </p:nvSpPr>
         <p:spPr>
           <a:xfrm>
-            <a:off x="5577840" y="3264408"/>
-            <a:ext cx="2926080" cy="457200"/>
+            <a:off x="5715000" y="3310128"/>
+            <a:ext cx="2880360" cy="457200"/>
           </a:xfrm>
           <a:prstGeom prst="rect">
             <a:avLst/>
@@ -4121,9 +5036,9 @@
                 <a:solidFill>
                   <a:srgbClr val="0F172A"/>
                 </a:solidFill>
-                <a:latin typeface="Calibri" pitchFamily="34" charset="0"/>
-                <a:ea typeface="Calibri" pitchFamily="34" charset="-122"/>
-                <a:cs typeface="Calibri" pitchFamily="34" charset="-120"/>
+                <a:latin typeface="Arial" pitchFamily="34" charset="0"/>
+                <a:ea typeface="Arial" pitchFamily="34" charset="-122"/>
+                <a:cs typeface="Arial" pitchFamily="34" charset="-120"/>
               </a:rPr>
               <a:t>Memória e rota desorganizada</a:t>
             </a:r>
@@ -4139,8 +5054,8 @@
         </p:nvSpPr>
         <p:spPr>
           <a:xfrm>
-            <a:off x="5577840" y="3721608"/>
-            <a:ext cx="2926080" cy="640080"/>
+            <a:off x="5715000" y="3767328"/>
+            <a:ext cx="2880360" cy="548640"/>
           </a:xfrm>
           <a:prstGeom prst="rect">
             <a:avLst/>
@@ -4160,9 +5075,9 @@
                 <a:solidFill>
                   <a:srgbClr val="475569"/>
                 </a:solidFill>
-                <a:latin typeface="Calibri" pitchFamily="34" charset="0"/>
-                <a:ea typeface="Calibri" pitchFamily="34" charset="-122"/>
-                <a:cs typeface="Calibri" pitchFamily="34" charset="-120"/>
+                <a:latin typeface="Arial" pitchFamily="34" charset="0"/>
+                <a:ea typeface="Arial" pitchFamily="34" charset="-122"/>
+                <a:cs typeface="Arial" pitchFamily="34" charset="-120"/>
               </a:rPr>
               <a:t>Depender de lembrar a ordem e os endereços dos atendimentos.</a:t>
             </a:r>
@@ -4178,7 +5093,7 @@
         </p:nvSpPr>
         <p:spPr>
           <a:xfrm>
-            <a:off x="457200" y="4759452"/>
+            <a:off x="502920" y="4777740"/>
             <a:ext cx="5486400" cy="274320"/>
           </a:xfrm>
           <a:prstGeom prst="rect">
@@ -4188,7 +5103,7 @@
           <a:ln/>
         </p:spPr>
         <p:txBody>
-          <a:bodyPr wrap="square" rtlCol="0" anchor="ctr"/>
+          <a:bodyPr wrap="square" lIns="0" tIns="0" rIns="0" bIns="0" rtlCol="0" anchor="ctr"/>
           <a:lstStyle/>
           <a:p>
             <a:pPr algn="l" indent="0" marL="0">
@@ -4199,9 +5114,9 @@
                 <a:solidFill>
                   <a:srgbClr val="64748B"/>
                 </a:solidFill>
-                <a:latin typeface="Calibri" pitchFamily="34" charset="0"/>
-                <a:ea typeface="Calibri" pitchFamily="34" charset="-122"/>
-                <a:cs typeface="Calibri" pitchFamily="34" charset="-120"/>
+                <a:latin typeface="Arial" pitchFamily="34" charset="0"/>
+                <a:ea typeface="Arial" pitchFamily="34" charset="-122"/>
+                <a:cs typeface="Arial" pitchFamily="34" charset="-120"/>
               </a:rPr>
               <a:t>Track Fibra · IHC — UTFPR Campo Mourão</a:t>
             </a:r>
@@ -4217,7 +5132,7 @@
         </p:nvSpPr>
         <p:spPr>
           <a:xfrm>
-            <a:off x="7772400" y="4759452"/>
+            <a:off x="7726680" y="4777740"/>
             <a:ext cx="914400" cy="274320"/>
           </a:xfrm>
           <a:prstGeom prst="rect">
@@ -4227,7 +5142,7 @@
           <a:ln/>
         </p:spPr>
         <p:txBody>
-          <a:bodyPr wrap="square" rtlCol="0" anchor="ctr"/>
+          <a:bodyPr wrap="square" lIns="0" tIns="0" rIns="0" bIns="0" rtlCol="0" anchor="ctr"/>
           <a:lstStyle/>
           <a:p>
             <a:pPr algn="r" indent="0" marL="0">
@@ -4238,11 +5153,11 @@
                 <a:solidFill>
                   <a:srgbClr val="64748B"/>
                 </a:solidFill>
-                <a:latin typeface="Calibri" pitchFamily="34" charset="0"/>
-                <a:ea typeface="Calibri" pitchFamily="34" charset="-122"/>
-                <a:cs typeface="Calibri" pitchFamily="34" charset="-120"/>
-              </a:rPr>
-              <a:t>2 / 11</a:t>
+                <a:latin typeface="Arial" pitchFamily="34" charset="0"/>
+                <a:ea typeface="Arial" pitchFamily="34" charset="-122"/>
+                <a:cs typeface="Arial" pitchFamily="34" charset="-120"/>
+              </a:rPr>
+              <a:t>2 / 12</a:t>
             </a:r>
             <a:endParaRPr lang="en-US" sz="900" dirty="0"/>
           </a:p>
@@ -4262,7 +5177,7 @@
     <p:bg>
       <p:bgPr>
         <a:solidFill>
-          <a:srgbClr val="FFFFFF"/>
+          <a:srgbClr val="F8FAFC"/>
         </a:solidFill>
       </p:bgPr>
     </p:bg>
@@ -4288,7 +5203,7 @@
         </p:nvSpPr>
         <p:spPr>
           <a:xfrm>
-            <a:off x="502920" y="301752"/>
+            <a:off x="548640" y="329184"/>
             <a:ext cx="8229600" cy="274320"/>
           </a:xfrm>
           <a:prstGeom prst="rect">
@@ -4305,13 +5220,13 @@
               <a:buNone/>
             </a:pPr>
             <a:r>
-              <a:rPr lang="en-US" sz="1200" b="1" spc="300" kern="0" dirty="0">
+              <a:rPr lang="en-US" sz="1200" b="1" spc="400" kern="0" dirty="0">
                 <a:solidFill>
                   <a:srgbClr val="06B6D4"/>
                 </a:solidFill>
-                <a:latin typeface="Calibri" pitchFamily="34" charset="0"/>
-                <a:ea typeface="Calibri" pitchFamily="34" charset="-122"/>
-                <a:cs typeface="Calibri" pitchFamily="34" charset="-120"/>
+                <a:latin typeface="Arial" pitchFamily="34" charset="0"/>
+                <a:ea typeface="Arial" pitchFamily="34" charset="-122"/>
+                <a:cs typeface="Arial" pitchFamily="34" charset="-120"/>
               </a:rPr>
               <a:t>PRÉ-SPRINT</a:t>
             </a:r>
@@ -4327,7 +5242,7 @@
         </p:nvSpPr>
         <p:spPr>
           <a:xfrm>
-            <a:off x="457200" y="548640"/>
+            <a:off x="502920" y="585216"/>
             <a:ext cx="8229600" cy="640080"/>
           </a:xfrm>
           <a:prstGeom prst="rect">
@@ -4344,17 +5259,17 @@
               <a:buNone/>
             </a:pPr>
             <a:r>
-              <a:rPr lang="en-US" sz="3200" b="1" dirty="0">
+              <a:rPr lang="en-US" sz="3400" b="1" dirty="0">
                 <a:solidFill>
                   <a:srgbClr val="0F172A"/>
                 </a:solidFill>
-                <a:latin typeface="Cambria" pitchFamily="34" charset="0"/>
-                <a:ea typeface="Cambria" pitchFamily="34" charset="-122"/>
-                <a:cs typeface="Cambria" pitchFamily="34" charset="-120"/>
+                <a:latin typeface="Arial" pitchFamily="34" charset="0"/>
+                <a:ea typeface="Arial" pitchFamily="34" charset="-122"/>
+                <a:cs typeface="Arial" pitchFamily="34" charset="-120"/>
               </a:rPr>
               <a:t>O que motivou o projeto</a:t>
             </a:r>
-            <a:endParaRPr lang="en-US" sz="3200" dirty="0"/>
+            <a:endParaRPr lang="en-US" sz="3400" dirty="0"/>
           </a:p>
         </p:txBody>
       </p:sp>
@@ -4366,27 +5281,22 @@
         </p:nvSpPr>
         <p:spPr>
           <a:xfrm>
-            <a:off x="457200" y="1371600"/>
+            <a:off x="502920" y="1417320"/>
             <a:ext cx="1965960" cy="1234440"/>
           </a:xfrm>
           <a:prstGeom prst="roundRect">
             <a:avLst>
-              <a:gd name="adj" fmla="val 5926"/>
+              <a:gd name="adj" fmla="val 9630"/>
             </a:avLst>
           </a:prstGeom>
           <a:solidFill>
-            <a:srgbClr val="F8FAFC"/>
+            <a:srgbClr val="FFFFFF"/>
           </a:solidFill>
-          <a:ln w="12700">
-            <a:solidFill>
-              <a:srgbClr val="E2E8F0"/>
-            </a:solidFill>
-            <a:prstDash val="solid"/>
-          </a:ln>
+          <a:ln/>
           <a:effectLst>
-            <a:outerShdw sx="100000" sy="100000" kx="0" ky="0" algn="bl" rotWithShape="0" blurRad="88900" dist="38100" dir="5400000">
+            <a:outerShdw sx="100000" sy="100000" kx="0" ky="0" algn="bl" rotWithShape="0" blurRad="139700" dist="38100" dir="5400000">
               <a:srgbClr val="0F172A">
-                <a:alpha val="10000"/>
+                <a:alpha val="8000"/>
               </a:srgbClr>
             </a:outerShdw>
           </a:effectLst>
@@ -4400,7 +5310,7 @@
         </p:nvSpPr>
         <p:spPr>
           <a:xfrm>
-            <a:off x="457200" y="1481328"/>
+            <a:off x="502920" y="1554480"/>
             <a:ext cx="1965960" cy="640080"/>
           </a:xfrm>
           <a:prstGeom prst="rect">
@@ -4417,17 +5327,17 @@
               <a:buNone/>
             </a:pPr>
             <a:r>
-              <a:rPr lang="en-US" sz="4000" b="1" dirty="0">
-                <a:solidFill>
-                  <a:srgbClr val="1D4ED8"/>
-                </a:solidFill>
-                <a:latin typeface="Cambria" pitchFamily="34" charset="0"/>
-                <a:ea typeface="Cambria" pitchFamily="34" charset="-122"/>
-                <a:cs typeface="Cambria" pitchFamily="34" charset="-120"/>
+              <a:rPr lang="en-US" sz="4200" b="1" dirty="0">
+                <a:solidFill>
+                  <a:srgbClr val="2563EB"/>
+                </a:solidFill>
+                <a:latin typeface="Arial" pitchFamily="34" charset="0"/>
+                <a:ea typeface="Arial" pitchFamily="34" charset="-122"/>
+                <a:cs typeface="Arial" pitchFamily="34" charset="-120"/>
               </a:rPr>
               <a:t>17</a:t>
             </a:r>
-            <a:endParaRPr lang="en-US" sz="4000" dirty="0"/>
+            <a:endParaRPr lang="en-US" sz="4200" dirty="0"/>
           </a:p>
         </p:txBody>
       </p:sp>
@@ -4439,8 +5349,8 @@
         </p:nvSpPr>
         <p:spPr>
           <a:xfrm>
-            <a:off x="457200" y="2121408"/>
-            <a:ext cx="1965960" cy="457200"/>
+            <a:off x="502920" y="2194560"/>
+            <a:ext cx="1965960" cy="411480"/>
           </a:xfrm>
           <a:prstGeom prst="rect">
             <a:avLst/>
@@ -4460,9 +5370,9 @@
                 <a:solidFill>
                   <a:srgbClr val="475569"/>
                 </a:solidFill>
-                <a:latin typeface="Calibri" pitchFamily="34" charset="0"/>
-                <a:ea typeface="Calibri" pitchFamily="34" charset="-122"/>
-                <a:cs typeface="Calibri" pitchFamily="34" charset="-120"/>
+                <a:latin typeface="Arial" pitchFamily="34" charset="0"/>
+                <a:ea typeface="Arial" pitchFamily="34" charset="-122"/>
+                <a:cs typeface="Arial" pitchFamily="34" charset="-120"/>
               </a:rPr>
               <a:t>respondentes</a:t>
             </a:r>
@@ -4477,9 +5387,9 @@
                 <a:solidFill>
                   <a:srgbClr val="475569"/>
                 </a:solidFill>
-                <a:latin typeface="Calibri" pitchFamily="34" charset="0"/>
-                <a:ea typeface="Calibri" pitchFamily="34" charset="-122"/>
-                <a:cs typeface="Calibri" pitchFamily="34" charset="-120"/>
+                <a:latin typeface="Arial" pitchFamily="34" charset="0"/>
+                <a:ea typeface="Arial" pitchFamily="34" charset="-122"/>
+                <a:cs typeface="Arial" pitchFamily="34" charset="-120"/>
               </a:rPr>
               <a:t>(2 questionários)</a:t>
             </a:r>
@@ -4495,27 +5405,22 @@
         </p:nvSpPr>
         <p:spPr>
           <a:xfrm>
-            <a:off x="2670048" y="1371600"/>
+            <a:off x="2697480" y="1417320"/>
             <a:ext cx="1965960" cy="1234440"/>
           </a:xfrm>
           <a:prstGeom prst="roundRect">
             <a:avLst>
-              <a:gd name="adj" fmla="val 5926"/>
+              <a:gd name="adj" fmla="val 9630"/>
             </a:avLst>
           </a:prstGeom>
           <a:solidFill>
-            <a:srgbClr val="F8FAFC"/>
+            <a:srgbClr val="FFFFFF"/>
           </a:solidFill>
-          <a:ln w="12700">
-            <a:solidFill>
-              <a:srgbClr val="E2E8F0"/>
-            </a:solidFill>
-            <a:prstDash val="solid"/>
-          </a:ln>
+          <a:ln/>
           <a:effectLst>
-            <a:outerShdw sx="100000" sy="100000" kx="0" ky="0" algn="bl" rotWithShape="0" blurRad="88900" dist="38100" dir="5400000">
+            <a:outerShdw sx="100000" sy="100000" kx="0" ky="0" algn="bl" rotWithShape="0" blurRad="139700" dist="38100" dir="5400000">
               <a:srgbClr val="0F172A">
-                <a:alpha val="10000"/>
+                <a:alpha val="8000"/>
               </a:srgbClr>
             </a:outerShdw>
           </a:effectLst>
@@ -4529,7 +5434,7 @@
         </p:nvSpPr>
         <p:spPr>
           <a:xfrm>
-            <a:off x="2670048" y="1481328"/>
+            <a:off x="2697480" y="1554480"/>
             <a:ext cx="1965960" cy="640080"/>
           </a:xfrm>
           <a:prstGeom prst="rect">
@@ -4546,17 +5451,17 @@
               <a:buNone/>
             </a:pPr>
             <a:r>
-              <a:rPr lang="en-US" sz="4000" b="1" dirty="0">
-                <a:solidFill>
-                  <a:srgbClr val="1D4ED8"/>
-                </a:solidFill>
-                <a:latin typeface="Cambria" pitchFamily="34" charset="0"/>
-                <a:ea typeface="Cambria" pitchFamily="34" charset="-122"/>
-                <a:cs typeface="Cambria" pitchFamily="34" charset="-120"/>
+              <a:rPr lang="en-US" sz="4200" b="1" dirty="0">
+                <a:solidFill>
+                  <a:srgbClr val="2563EB"/>
+                </a:solidFill>
+                <a:latin typeface="Arial" pitchFamily="34" charset="0"/>
+                <a:ea typeface="Arial" pitchFamily="34" charset="-122"/>
+                <a:cs typeface="Arial" pitchFamily="34" charset="-120"/>
               </a:rPr>
               <a:t>12</a:t>
             </a:r>
-            <a:endParaRPr lang="en-US" sz="4000" dirty="0"/>
+            <a:endParaRPr lang="en-US" sz="4200" dirty="0"/>
           </a:p>
         </p:txBody>
       </p:sp>
@@ -4568,8 +5473,8 @@
         </p:nvSpPr>
         <p:spPr>
           <a:xfrm>
-            <a:off x="2670048" y="2121408"/>
-            <a:ext cx="1965960" cy="457200"/>
+            <a:off x="2697480" y="2194560"/>
+            <a:ext cx="1965960" cy="411480"/>
           </a:xfrm>
           <a:prstGeom prst="rect">
             <a:avLst/>
@@ -4589,9 +5494,9 @@
                 <a:solidFill>
                   <a:srgbClr val="475569"/>
                 </a:solidFill>
-                <a:latin typeface="Calibri" pitchFamily="34" charset="0"/>
-                <a:ea typeface="Calibri" pitchFamily="34" charset="-122"/>
-                <a:cs typeface="Calibri" pitchFamily="34" charset="-120"/>
+                <a:latin typeface="Arial" pitchFamily="34" charset="0"/>
+                <a:ea typeface="Arial" pitchFamily="34" charset="-122"/>
+                <a:cs typeface="Arial" pitchFamily="34" charset="-120"/>
               </a:rPr>
               <a:t>técnicos</a:t>
             </a:r>
@@ -4606,9 +5511,9 @@
                 <a:solidFill>
                   <a:srgbClr val="475569"/>
                 </a:solidFill>
-                <a:latin typeface="Calibri" pitchFamily="34" charset="0"/>
-                <a:ea typeface="Calibri" pitchFamily="34" charset="-122"/>
-                <a:cs typeface="Calibri" pitchFamily="34" charset="-120"/>
+                <a:latin typeface="Arial" pitchFamily="34" charset="0"/>
+                <a:ea typeface="Arial" pitchFamily="34" charset="-122"/>
+                <a:cs typeface="Arial" pitchFamily="34" charset="-120"/>
               </a:rPr>
               <a:t>de campo</a:t>
             </a:r>
@@ -4624,27 +5529,22 @@
         </p:nvSpPr>
         <p:spPr>
           <a:xfrm>
-            <a:off x="4882896" y="1371600"/>
+            <a:off x="4892040" y="1417320"/>
             <a:ext cx="1965960" cy="1234440"/>
           </a:xfrm>
           <a:prstGeom prst="roundRect">
             <a:avLst>
-              <a:gd name="adj" fmla="val 5926"/>
+              <a:gd name="adj" fmla="val 9630"/>
             </a:avLst>
           </a:prstGeom>
           <a:solidFill>
-            <a:srgbClr val="F8FAFC"/>
+            <a:srgbClr val="FFFFFF"/>
           </a:solidFill>
-          <a:ln w="12700">
-            <a:solidFill>
-              <a:srgbClr val="E2E8F0"/>
-            </a:solidFill>
-            <a:prstDash val="solid"/>
-          </a:ln>
+          <a:ln/>
           <a:effectLst>
-            <a:outerShdw sx="100000" sy="100000" kx="0" ky="0" algn="bl" rotWithShape="0" blurRad="88900" dist="38100" dir="5400000">
+            <a:outerShdw sx="100000" sy="100000" kx="0" ky="0" algn="bl" rotWithShape="0" blurRad="139700" dist="38100" dir="5400000">
               <a:srgbClr val="0F172A">
-                <a:alpha val="10000"/>
+                <a:alpha val="8000"/>
               </a:srgbClr>
             </a:outerShdw>
           </a:effectLst>
@@ -4658,7 +5558,7 @@
         </p:nvSpPr>
         <p:spPr>
           <a:xfrm>
-            <a:off x="4882896" y="1481328"/>
+            <a:off x="4892040" y="1554480"/>
             <a:ext cx="1965960" cy="640080"/>
           </a:xfrm>
           <a:prstGeom prst="rect">
@@ -4675,17 +5575,17 @@
               <a:buNone/>
             </a:pPr>
             <a:r>
-              <a:rPr lang="en-US" sz="4000" b="1" dirty="0">
-                <a:solidFill>
-                  <a:srgbClr val="1D4ED8"/>
-                </a:solidFill>
-                <a:latin typeface="Cambria" pitchFamily="34" charset="0"/>
-                <a:ea typeface="Cambria" pitchFamily="34" charset="-122"/>
-                <a:cs typeface="Cambria" pitchFamily="34" charset="-120"/>
+              <a:rPr lang="en-US" sz="4200" b="1" dirty="0">
+                <a:solidFill>
+                  <a:srgbClr val="2563EB"/>
+                </a:solidFill>
+                <a:latin typeface="Arial" pitchFamily="34" charset="0"/>
+                <a:ea typeface="Arial" pitchFamily="34" charset="-122"/>
+                <a:cs typeface="Arial" pitchFamily="34" charset="-120"/>
               </a:rPr>
               <a:t>5</a:t>
             </a:r>
-            <a:endParaRPr lang="en-US" sz="4000" dirty="0"/>
+            <a:endParaRPr lang="en-US" sz="4200" dirty="0"/>
           </a:p>
         </p:txBody>
       </p:sp>
@@ -4697,8 +5597,8 @@
         </p:nvSpPr>
         <p:spPr>
           <a:xfrm>
-            <a:off x="4882896" y="2121408"/>
-            <a:ext cx="1965960" cy="457200"/>
+            <a:off x="4892040" y="2194560"/>
+            <a:ext cx="1965960" cy="411480"/>
           </a:xfrm>
           <a:prstGeom prst="rect">
             <a:avLst/>
@@ -4718,9 +5618,9 @@
                 <a:solidFill>
                   <a:srgbClr val="475569"/>
                 </a:solidFill>
-                <a:latin typeface="Calibri" pitchFamily="34" charset="0"/>
-                <a:ea typeface="Calibri" pitchFamily="34" charset="-122"/>
-                <a:cs typeface="Calibri" pitchFamily="34" charset="-120"/>
+                <a:latin typeface="Arial" pitchFamily="34" charset="0"/>
+                <a:ea typeface="Arial" pitchFamily="34" charset="-122"/>
+                <a:cs typeface="Arial" pitchFamily="34" charset="-120"/>
               </a:rPr>
               <a:t>supervisores</a:t>
             </a:r>
@@ -4735,9 +5635,9 @@
                 <a:solidFill>
                   <a:srgbClr val="475569"/>
                 </a:solidFill>
-                <a:latin typeface="Calibri" pitchFamily="34" charset="0"/>
-                <a:ea typeface="Calibri" pitchFamily="34" charset="-122"/>
-                <a:cs typeface="Calibri" pitchFamily="34" charset="-120"/>
+                <a:latin typeface="Arial" pitchFamily="34" charset="0"/>
+                <a:ea typeface="Arial" pitchFamily="34" charset="-122"/>
+                <a:cs typeface="Arial" pitchFamily="34" charset="-120"/>
               </a:rPr>
               <a:t>(pesquisa)</a:t>
             </a:r>
@@ -4753,27 +5653,22 @@
         </p:nvSpPr>
         <p:spPr>
           <a:xfrm>
-            <a:off x="7095744" y="1371600"/>
+            <a:off x="7086600" y="1417320"/>
             <a:ext cx="1965960" cy="1234440"/>
           </a:xfrm>
           <a:prstGeom prst="roundRect">
             <a:avLst>
-              <a:gd name="adj" fmla="val 5926"/>
+              <a:gd name="adj" fmla="val 9630"/>
             </a:avLst>
           </a:prstGeom>
           <a:solidFill>
-            <a:srgbClr val="F8FAFC"/>
+            <a:srgbClr val="FFFFFF"/>
           </a:solidFill>
-          <a:ln w="12700">
-            <a:solidFill>
-              <a:srgbClr val="E2E8F0"/>
-            </a:solidFill>
-            <a:prstDash val="solid"/>
-          </a:ln>
+          <a:ln/>
           <a:effectLst>
-            <a:outerShdw sx="100000" sy="100000" kx="0" ky="0" algn="bl" rotWithShape="0" blurRad="88900" dist="38100" dir="5400000">
+            <a:outerShdw sx="100000" sy="100000" kx="0" ky="0" algn="bl" rotWithShape="0" blurRad="139700" dist="38100" dir="5400000">
               <a:srgbClr val="0F172A">
-                <a:alpha val="10000"/>
+                <a:alpha val="8000"/>
               </a:srgbClr>
             </a:outerShdw>
           </a:effectLst>
@@ -4787,7 +5682,7 @@
         </p:nvSpPr>
         <p:spPr>
           <a:xfrm>
-            <a:off x="7095744" y="1481328"/>
+            <a:off x="7086600" y="1554480"/>
             <a:ext cx="1965960" cy="640080"/>
           </a:xfrm>
           <a:prstGeom prst="rect">
@@ -4804,17 +5699,17 @@
               <a:buNone/>
             </a:pPr>
             <a:r>
-              <a:rPr lang="en-US" sz="4000" b="1" dirty="0">
-                <a:solidFill>
-                  <a:srgbClr val="1D4ED8"/>
-                </a:solidFill>
-                <a:latin typeface="Cambria" pitchFamily="34" charset="0"/>
-                <a:ea typeface="Cambria" pitchFamily="34" charset="-122"/>
-                <a:cs typeface="Cambria" pitchFamily="34" charset="-120"/>
+              <a:rPr lang="en-US" sz="4200" b="1" dirty="0">
+                <a:solidFill>
+                  <a:srgbClr val="2563EB"/>
+                </a:solidFill>
+                <a:latin typeface="Arial" pitchFamily="34" charset="0"/>
+                <a:ea typeface="Arial" pitchFamily="34" charset="-122"/>
+                <a:cs typeface="Arial" pitchFamily="34" charset="-120"/>
               </a:rPr>
               <a:t>100%</a:t>
             </a:r>
-            <a:endParaRPr lang="en-US" sz="4000" dirty="0"/>
+            <a:endParaRPr lang="en-US" sz="4200" dirty="0"/>
           </a:p>
         </p:txBody>
       </p:sp>
@@ -4826,8 +5721,8 @@
         </p:nvSpPr>
         <p:spPr>
           <a:xfrm>
-            <a:off x="7095744" y="2121408"/>
-            <a:ext cx="1965960" cy="457200"/>
+            <a:off x="7086600" y="2194560"/>
+            <a:ext cx="1965960" cy="411480"/>
           </a:xfrm>
           <a:prstGeom prst="rect">
             <a:avLst/>
@@ -4847,9 +5742,9 @@
                 <a:solidFill>
                   <a:srgbClr val="475569"/>
                 </a:solidFill>
-                <a:latin typeface="Calibri" pitchFamily="34" charset="0"/>
-                <a:ea typeface="Calibri" pitchFamily="34" charset="-122"/>
-                <a:cs typeface="Calibri" pitchFamily="34" charset="-120"/>
+                <a:latin typeface="Arial" pitchFamily="34" charset="0"/>
+                <a:ea typeface="Arial" pitchFamily="34" charset="-122"/>
+                <a:cs typeface="Arial" pitchFamily="34" charset="-120"/>
               </a:rPr>
               <a:t>na rua</a:t>
             </a:r>
@@ -4864,9 +5759,9 @@
                 <a:solidFill>
                   <a:srgbClr val="475569"/>
                 </a:solidFill>
-                <a:latin typeface="Calibri" pitchFamily="34" charset="0"/>
-                <a:ea typeface="Calibri" pitchFamily="34" charset="-122"/>
-                <a:cs typeface="Calibri" pitchFamily="34" charset="-120"/>
+                <a:latin typeface="Arial" pitchFamily="34" charset="0"/>
+                <a:ea typeface="Arial" pitchFamily="34" charset="-122"/>
+                <a:cs typeface="Arial" pitchFamily="34" charset="-120"/>
               </a:rPr>
               <a:t>o dia todo</a:t>
             </a:r>
@@ -4882,7 +5777,7 @@
         </p:nvSpPr>
         <p:spPr>
           <a:xfrm>
-            <a:off x="502920" y="2880360"/>
+            <a:off x="548640" y="2926080"/>
             <a:ext cx="8229600" cy="320040"/>
           </a:xfrm>
           <a:prstGeom prst="rect">
@@ -4903,9 +5798,9 @@
                 <a:solidFill>
                   <a:srgbClr val="0F172A"/>
                 </a:solidFill>
-                <a:latin typeface="Calibri" pitchFamily="34" charset="0"/>
-                <a:ea typeface="Calibri" pitchFamily="34" charset="-122"/>
-                <a:cs typeface="Calibri" pitchFamily="34" charset="-120"/>
+                <a:latin typeface="Arial" pitchFamily="34" charset="0"/>
+                <a:ea typeface="Arial" pitchFamily="34" charset="-122"/>
+                <a:cs typeface="Arial" pitchFamily="34" charset="-120"/>
               </a:rPr>
               <a:t>Principais dores levantadas</a:t>
             </a:r>
@@ -4921,7 +5816,7 @@
         </p:nvSpPr>
         <p:spPr>
           <a:xfrm>
-            <a:off x="548640" y="3200400"/>
+            <a:off x="594360" y="3246120"/>
             <a:ext cx="8229600" cy="1371600"/>
           </a:xfrm>
           <a:prstGeom prst="rect">
@@ -4934,9 +5829,9 @@
           <a:bodyPr wrap="square" rtlCol="0" anchor="ctr"/>
           <a:lstStyle/>
           <a:p>
-            <a:pPr marL="342900" indent="-342900">
+            <a:pPr marL="177800" indent="-177800">
               <a:spcAft>
-                <a:spcPts val="600"/>
+                <a:spcPts val="700"/>
               </a:spcAft>
               <a:buSzPct val="100000"/>
               <a:buChar char="•"/>
@@ -4946,18 +5841,18 @@
                 <a:solidFill>
                   <a:srgbClr val="475569"/>
                 </a:solidFill>
-                <a:latin typeface="Calibri" pitchFamily="34" charset="0"/>
-                <a:ea typeface="Calibri" pitchFamily="34" charset="-122"/>
-                <a:cs typeface="Calibri" pitchFamily="34" charset="-120"/>
+                <a:latin typeface="Arial" pitchFamily="34" charset="0"/>
+                <a:ea typeface="Arial" pitchFamily="34" charset="-122"/>
+                <a:cs typeface="Arial" pitchFamily="34" charset="-120"/>
               </a:rPr>
               <a:t>Falta de fonte única e confiável de informação</a:t>
             </a:r>
             <a:endParaRPr lang="en-US" sz="1300" dirty="0"/>
           </a:p>
           <a:p>
-            <a:pPr marL="342900" indent="-342900">
+            <a:pPr marL="177800" indent="-177800">
               <a:spcAft>
-                <a:spcPts val="600"/>
+                <a:spcPts val="700"/>
               </a:spcAft>
               <a:buSzPct val="100000"/>
               <a:buChar char="•"/>
@@ -4967,18 +5862,18 @@
                 <a:solidFill>
                   <a:srgbClr val="475569"/>
                 </a:solidFill>
-                <a:latin typeface="Calibri" pitchFamily="34" charset="0"/>
-                <a:ea typeface="Calibri" pitchFamily="34" charset="-122"/>
-                <a:cs typeface="Calibri" pitchFamily="34" charset="-120"/>
+                <a:latin typeface="Arial" pitchFamily="34" charset="0"/>
+                <a:ea typeface="Arial" pitchFamily="34" charset="-122"/>
+                <a:cs typeface="Arial" pitchFamily="34" charset="-120"/>
               </a:rPr>
               <a:t>Falta de visibilidade do andamento dos atendimentos</a:t>
             </a:r>
             <a:endParaRPr lang="en-US" sz="1300" dirty="0"/>
           </a:p>
           <a:p>
-            <a:pPr marL="342900" indent="-342900">
+            <a:pPr marL="177800" indent="-177800">
               <a:spcAft>
-                <a:spcPts val="600"/>
+                <a:spcPts val="700"/>
               </a:spcAft>
               <a:buSzPct val="100000"/>
               <a:buChar char="•"/>
@@ -4988,18 +5883,18 @@
                 <a:solidFill>
                   <a:srgbClr val="475569"/>
                 </a:solidFill>
-                <a:latin typeface="Calibri" pitchFamily="34" charset="0"/>
-                <a:ea typeface="Calibri" pitchFamily="34" charset="-122"/>
-                <a:cs typeface="Calibri" pitchFamily="34" charset="-120"/>
+                <a:latin typeface="Arial" pitchFamily="34" charset="0"/>
+                <a:ea typeface="Arial" pitchFamily="34" charset="-122"/>
+                <a:cs typeface="Arial" pitchFamily="34" charset="-120"/>
               </a:rPr>
               <a:t>Dependência da memória e ausência de rota — o item pior avaliado</a:t>
             </a:r>
             <a:endParaRPr lang="en-US" sz="1300" dirty="0"/>
           </a:p>
           <a:p>
-            <a:pPr marL="342900" indent="-342900">
+            <a:pPr marL="177800" indent="-177800">
               <a:spcAft>
-                <a:spcPts val="600"/>
+                <a:spcPts val="700"/>
               </a:spcAft>
               <a:buSzPct val="100000"/>
               <a:buChar char="•"/>
@@ -5009,9 +5904,9 @@
                 <a:solidFill>
                   <a:srgbClr val="475569"/>
                 </a:solidFill>
-                <a:latin typeface="Calibri" pitchFamily="34" charset="0"/>
-                <a:ea typeface="Calibri" pitchFamily="34" charset="-122"/>
-                <a:cs typeface="Calibri" pitchFamily="34" charset="-120"/>
+                <a:latin typeface="Arial" pitchFamily="34" charset="0"/>
+                <a:ea typeface="Arial" pitchFamily="34" charset="-122"/>
+                <a:cs typeface="Arial" pitchFamily="34" charset="-120"/>
               </a:rPr>
               <a:t>Técnicos trabalham o dia todo na rua → a solução é mobile, no celular</a:t>
             </a:r>
@@ -5027,7 +5922,7 @@
         </p:nvSpPr>
         <p:spPr>
           <a:xfrm>
-            <a:off x="457200" y="4759452"/>
+            <a:off x="502920" y="4777740"/>
             <a:ext cx="5486400" cy="274320"/>
           </a:xfrm>
           <a:prstGeom prst="rect">
@@ -5037,7 +5932,7 @@
           <a:ln/>
         </p:spPr>
         <p:txBody>
-          <a:bodyPr wrap="square" rtlCol="0" anchor="ctr"/>
+          <a:bodyPr wrap="square" lIns="0" tIns="0" rIns="0" bIns="0" rtlCol="0" anchor="ctr"/>
           <a:lstStyle/>
           <a:p>
             <a:pPr algn="l" indent="0" marL="0">
@@ -5048,9 +5943,9 @@
                 <a:solidFill>
                   <a:srgbClr val="64748B"/>
                 </a:solidFill>
-                <a:latin typeface="Calibri" pitchFamily="34" charset="0"/>
-                <a:ea typeface="Calibri" pitchFamily="34" charset="-122"/>
-                <a:cs typeface="Calibri" pitchFamily="34" charset="-120"/>
+                <a:latin typeface="Arial" pitchFamily="34" charset="0"/>
+                <a:ea typeface="Arial" pitchFamily="34" charset="-122"/>
+                <a:cs typeface="Arial" pitchFamily="34" charset="-120"/>
               </a:rPr>
               <a:t>Track Fibra · IHC — UTFPR Campo Mourão</a:t>
             </a:r>
@@ -5066,7 +5961,7 @@
         </p:nvSpPr>
         <p:spPr>
           <a:xfrm>
-            <a:off x="7772400" y="4759452"/>
+            <a:off x="7726680" y="4777740"/>
             <a:ext cx="914400" cy="274320"/>
           </a:xfrm>
           <a:prstGeom prst="rect">
@@ -5076,7 +5971,7 @@
           <a:ln/>
         </p:spPr>
         <p:txBody>
-          <a:bodyPr wrap="square" rtlCol="0" anchor="ctr"/>
+          <a:bodyPr wrap="square" lIns="0" tIns="0" rIns="0" bIns="0" rtlCol="0" anchor="ctr"/>
           <a:lstStyle/>
           <a:p>
             <a:pPr algn="r" indent="0" marL="0">
@@ -5087,11 +5982,11 @@
                 <a:solidFill>
                   <a:srgbClr val="64748B"/>
                 </a:solidFill>
-                <a:latin typeface="Calibri" pitchFamily="34" charset="0"/>
-                <a:ea typeface="Calibri" pitchFamily="34" charset="-122"/>
-                <a:cs typeface="Calibri" pitchFamily="34" charset="-120"/>
-              </a:rPr>
-              <a:t>3 / 11</a:t>
+                <a:latin typeface="Arial" pitchFamily="34" charset="0"/>
+                <a:ea typeface="Arial" pitchFamily="34" charset="-122"/>
+                <a:cs typeface="Arial" pitchFamily="34" charset="-120"/>
+              </a:rPr>
+              <a:t>3 / 12</a:t>
             </a:r>
             <a:endParaRPr lang="en-US" sz="900" dirty="0"/>
           </a:p>
@@ -5111,7 +6006,7 @@
     <p:bg>
       <p:bgPr>
         <a:solidFill>
-          <a:srgbClr val="FFFFFF"/>
+          <a:srgbClr val="F8FAFC"/>
         </a:solidFill>
       </p:bgPr>
     </p:bg>
@@ -5137,7 +6032,7 @@
         </p:nvSpPr>
         <p:spPr>
           <a:xfrm>
-            <a:off x="502920" y="301752"/>
+            <a:off x="548640" y="329184"/>
             <a:ext cx="8229600" cy="274320"/>
           </a:xfrm>
           <a:prstGeom prst="rect">
@@ -5154,13 +6049,13 @@
               <a:buNone/>
             </a:pPr>
             <a:r>
-              <a:rPr lang="en-US" sz="1200" b="1" spc="300" kern="0" dirty="0">
+              <a:rPr lang="en-US" sz="1200" b="1" spc="400" kern="0" dirty="0">
                 <a:solidFill>
                   <a:srgbClr val="06B6D4"/>
                 </a:solidFill>
-                <a:latin typeface="Calibri" pitchFamily="34" charset="0"/>
-                <a:ea typeface="Calibri" pitchFamily="34" charset="-122"/>
-                <a:cs typeface="Calibri" pitchFamily="34" charset="-120"/>
+                <a:latin typeface="Arial" pitchFamily="34" charset="0"/>
+                <a:ea typeface="Arial" pitchFamily="34" charset="-122"/>
+                <a:cs typeface="Arial" pitchFamily="34" charset="-120"/>
               </a:rPr>
               <a:t>A SOLUÇÃO</a:t>
             </a:r>
@@ -5176,7 +6071,7 @@
         </p:nvSpPr>
         <p:spPr>
           <a:xfrm>
-            <a:off x="457200" y="548640"/>
+            <a:off x="502920" y="585216"/>
             <a:ext cx="8229600" cy="640080"/>
           </a:xfrm>
           <a:prstGeom prst="rect">
@@ -5193,17 +6088,17 @@
               <a:buNone/>
             </a:pPr>
             <a:r>
-              <a:rPr lang="en-US" sz="3200" b="1" dirty="0">
+              <a:rPr lang="en-US" sz="3400" b="1" dirty="0">
                 <a:solidFill>
                   <a:srgbClr val="0F172A"/>
                 </a:solidFill>
-                <a:latin typeface="Cambria" pitchFamily="34" charset="0"/>
-                <a:ea typeface="Cambria" pitchFamily="34" charset="-122"/>
-                <a:cs typeface="Cambria" pitchFamily="34" charset="-120"/>
+                <a:latin typeface="Arial" pitchFamily="34" charset="0"/>
+                <a:ea typeface="Arial" pitchFamily="34" charset="-122"/>
+                <a:cs typeface="Arial" pitchFamily="34" charset="-120"/>
               </a:rPr>
               <a:t>Um organizador do dia do técnico</a:t>
             </a:r>
-            <a:endParaRPr lang="en-US" sz="3200" dirty="0"/>
+            <a:endParaRPr lang="en-US" sz="3400" dirty="0"/>
           </a:p>
         </p:txBody>
       </p:sp>
@@ -5215,8 +6110,8 @@
         </p:nvSpPr>
         <p:spPr>
           <a:xfrm>
-            <a:off x="502920" y="1207008"/>
-            <a:ext cx="8229600" cy="457200"/>
+            <a:off x="548640" y="1243584"/>
+            <a:ext cx="8138160" cy="457200"/>
           </a:xfrm>
           <a:prstGeom prst="rect">
             <a:avLst/>
@@ -5236,9 +6131,9 @@
                 <a:solidFill>
                   <a:srgbClr val="475569"/>
                 </a:solidFill>
-                <a:latin typeface="Calibri" pitchFamily="34" charset="0"/>
-                <a:ea typeface="Calibri" pitchFamily="34" charset="-122"/>
-                <a:cs typeface="Calibri" pitchFamily="34" charset="-120"/>
+                <a:latin typeface="Arial" pitchFamily="34" charset="0"/>
+                <a:ea typeface="Arial" pitchFamily="34" charset="-122"/>
+                <a:cs typeface="Arial" pitchFamily="34" charset="-120"/>
               </a:rPr>
               <a:t>App mobile que reúne, num só lugar, tudo o que o técnico precisa em campo — do login à conclusão do chamado.</a:t>
             </a:r>
@@ -5254,27 +6149,22 @@
         </p:nvSpPr>
         <p:spPr>
           <a:xfrm>
-            <a:off x="457200" y="1828800"/>
+            <a:off x="502920" y="1874520"/>
             <a:ext cx="2697480" cy="1874520"/>
           </a:xfrm>
           <a:prstGeom prst="roundRect">
             <a:avLst>
-              <a:gd name="adj" fmla="val 3902"/>
+              <a:gd name="adj" fmla="val 6341"/>
             </a:avLst>
           </a:prstGeom>
           <a:solidFill>
-            <a:srgbClr val="F8FAFC"/>
+            <a:srgbClr val="FFFFFF"/>
           </a:solidFill>
-          <a:ln w="12700">
-            <a:solidFill>
-              <a:srgbClr val="E2E8F0"/>
-            </a:solidFill>
-            <a:prstDash val="solid"/>
-          </a:ln>
+          <a:ln/>
           <a:effectLst>
-            <a:outerShdw sx="100000" sy="100000" kx="0" ky="0" algn="bl" rotWithShape="0" blurRad="88900" dist="38100" dir="5400000">
+            <a:outerShdw sx="100000" sy="100000" kx="0" ky="0" algn="bl" rotWithShape="0" blurRad="139700" dist="38100" dir="5400000">
               <a:srgbClr val="0F172A">
-                <a:alpha val="10000"/>
+                <a:alpha val="8000"/>
               </a:srgbClr>
             </a:outerShdw>
           </a:effectLst>
@@ -5288,8 +6178,8 @@
         </p:nvSpPr>
         <p:spPr>
           <a:xfrm>
-            <a:off x="731520" y="2103120"/>
-            <a:ext cx="502920" cy="502920"/>
+            <a:off x="795528" y="2167128"/>
+            <a:ext cx="548640" cy="548640"/>
           </a:xfrm>
           <a:prstGeom prst="ellipse">
             <a:avLst/>
@@ -5308,8 +6198,8 @@
         </p:nvSpPr>
         <p:spPr>
           <a:xfrm>
-            <a:off x="731520" y="2103120"/>
-            <a:ext cx="502920" cy="502920"/>
+            <a:off x="795528" y="2167128"/>
+            <a:ext cx="548640" cy="548640"/>
           </a:xfrm>
           <a:prstGeom prst="rect">
             <a:avLst/>
@@ -5325,17 +6215,17 @@
               <a:buNone/>
             </a:pPr>
             <a:r>
-              <a:rPr lang="en-US" sz="1300" b="1" dirty="0">
+              <a:rPr lang="en-US" sz="1400" b="1" dirty="0">
                 <a:solidFill>
                   <a:srgbClr val="FFFFFF"/>
                 </a:solidFill>
-                <a:latin typeface="Calibri" pitchFamily="34" charset="0"/>
-                <a:ea typeface="Calibri" pitchFamily="34" charset="-122"/>
-                <a:cs typeface="Calibri" pitchFamily="34" charset="-120"/>
+                <a:latin typeface="Arial" pitchFamily="34" charset="0"/>
+                <a:ea typeface="Arial" pitchFamily="34" charset="-122"/>
+                <a:cs typeface="Arial" pitchFamily="34" charset="-120"/>
               </a:rPr>
               <a:t>1</a:t>
             </a:r>
-            <a:endParaRPr lang="en-US" sz="1300" dirty="0"/>
+            <a:endParaRPr lang="en-US" sz="1400" dirty="0"/>
           </a:p>
         </p:txBody>
       </p:sp>
@@ -5347,7 +6237,7 @@
         </p:nvSpPr>
         <p:spPr>
           <a:xfrm>
-            <a:off x="731520" y="2743200"/>
+            <a:off x="795528" y="2862072"/>
             <a:ext cx="2148840" cy="365760"/>
           </a:xfrm>
           <a:prstGeom prst="rect">
@@ -5368,9 +6258,9 @@
                 <a:solidFill>
                   <a:srgbClr val="0F172A"/>
                 </a:solidFill>
-                <a:latin typeface="Calibri" pitchFamily="34" charset="0"/>
-                <a:ea typeface="Calibri" pitchFamily="34" charset="-122"/>
-                <a:cs typeface="Calibri" pitchFamily="34" charset="-120"/>
+                <a:latin typeface="Arial" pitchFamily="34" charset="0"/>
+                <a:ea typeface="Arial" pitchFamily="34" charset="-122"/>
+                <a:cs typeface="Arial" pitchFamily="34" charset="-120"/>
               </a:rPr>
               <a:t>Lista do dia</a:t>
             </a:r>
@@ -5386,8 +6276,8 @@
         </p:nvSpPr>
         <p:spPr>
           <a:xfrm>
-            <a:off x="731520" y="3127248"/>
-            <a:ext cx="2194560" cy="502920"/>
+            <a:off x="795528" y="3246120"/>
+            <a:ext cx="2148840" cy="457200"/>
           </a:xfrm>
           <a:prstGeom prst="rect">
             <a:avLst/>
@@ -5407,9 +6297,9 @@
                 <a:solidFill>
                   <a:srgbClr val="475569"/>
                 </a:solidFill>
-                <a:latin typeface="Calibri" pitchFamily="34" charset="0"/>
-                <a:ea typeface="Calibri" pitchFamily="34" charset="-122"/>
-                <a:cs typeface="Calibri" pitchFamily="34" charset="-120"/>
+                <a:latin typeface="Arial" pitchFamily="34" charset="0"/>
+                <a:ea typeface="Arial" pitchFamily="34" charset="-122"/>
+                <a:cs typeface="Arial" pitchFamily="34" charset="-120"/>
               </a:rPr>
               <a:t>Chamados sempre atualizados, com status e ordem de atendimento.</a:t>
             </a:r>
@@ -5425,27 +6315,22 @@
         </p:nvSpPr>
         <p:spPr>
           <a:xfrm>
-            <a:off x="3410712" y="1828800"/>
+            <a:off x="3447288" y="1874520"/>
             <a:ext cx="2697480" cy="1874520"/>
           </a:xfrm>
           <a:prstGeom prst="roundRect">
             <a:avLst>
-              <a:gd name="adj" fmla="val 3902"/>
+              <a:gd name="adj" fmla="val 6341"/>
             </a:avLst>
           </a:prstGeom>
           <a:solidFill>
-            <a:srgbClr val="F8FAFC"/>
+            <a:srgbClr val="FFFFFF"/>
           </a:solidFill>
-          <a:ln w="12700">
-            <a:solidFill>
-              <a:srgbClr val="E2E8F0"/>
-            </a:solidFill>
-            <a:prstDash val="solid"/>
-          </a:ln>
+          <a:ln/>
           <a:effectLst>
-            <a:outerShdw sx="100000" sy="100000" kx="0" ky="0" algn="bl" rotWithShape="0" blurRad="88900" dist="38100" dir="5400000">
+            <a:outerShdw sx="100000" sy="100000" kx="0" ky="0" algn="bl" rotWithShape="0" blurRad="139700" dist="38100" dir="5400000">
               <a:srgbClr val="0F172A">
-                <a:alpha val="10000"/>
+                <a:alpha val="8000"/>
               </a:srgbClr>
             </a:outerShdw>
           </a:effectLst>
@@ -5459,8 +6344,8 @@
         </p:nvSpPr>
         <p:spPr>
           <a:xfrm>
-            <a:off x="3685032" y="2103120"/>
-            <a:ext cx="502920" cy="502920"/>
+            <a:off x="3739896" y="2167128"/>
+            <a:ext cx="548640" cy="548640"/>
           </a:xfrm>
           <a:prstGeom prst="ellipse">
             <a:avLst/>
@@ -5479,8 +6364,8 @@
         </p:nvSpPr>
         <p:spPr>
           <a:xfrm>
-            <a:off x="3685032" y="2103120"/>
-            <a:ext cx="502920" cy="502920"/>
+            <a:off x="3739896" y="2167128"/>
+            <a:ext cx="548640" cy="548640"/>
           </a:xfrm>
           <a:prstGeom prst="rect">
             <a:avLst/>
@@ -5496,17 +6381,17 @@
               <a:buNone/>
             </a:pPr>
             <a:r>
-              <a:rPr lang="en-US" sz="1300" b="1" dirty="0">
+              <a:rPr lang="en-US" sz="1400" b="1" dirty="0">
                 <a:solidFill>
                   <a:srgbClr val="FFFFFF"/>
                 </a:solidFill>
-                <a:latin typeface="Calibri" pitchFamily="34" charset="0"/>
-                <a:ea typeface="Calibri" pitchFamily="34" charset="-122"/>
-                <a:cs typeface="Calibri" pitchFamily="34" charset="-120"/>
+                <a:latin typeface="Arial" pitchFamily="34" charset="0"/>
+                <a:ea typeface="Arial" pitchFamily="34" charset="-122"/>
+                <a:cs typeface="Arial" pitchFamily="34" charset="-120"/>
               </a:rPr>
               <a:t>2</a:t>
             </a:r>
-            <a:endParaRPr lang="en-US" sz="1300" dirty="0"/>
+            <a:endParaRPr lang="en-US" sz="1400" dirty="0"/>
           </a:p>
         </p:txBody>
       </p:sp>
@@ -5518,7 +6403,7 @@
         </p:nvSpPr>
         <p:spPr>
           <a:xfrm>
-            <a:off x="3685032" y="2743200"/>
+            <a:off x="3739896" y="2862072"/>
             <a:ext cx="2148840" cy="365760"/>
           </a:xfrm>
           <a:prstGeom prst="rect">
@@ -5539,9 +6424,9 @@
                 <a:solidFill>
                   <a:srgbClr val="0F172A"/>
                 </a:solidFill>
-                <a:latin typeface="Calibri" pitchFamily="34" charset="0"/>
-                <a:ea typeface="Calibri" pitchFamily="34" charset="-122"/>
-                <a:cs typeface="Calibri" pitchFamily="34" charset="-120"/>
+                <a:latin typeface="Arial" pitchFamily="34" charset="0"/>
+                <a:ea typeface="Arial" pitchFamily="34" charset="-122"/>
+                <a:cs typeface="Arial" pitchFamily="34" charset="-120"/>
               </a:rPr>
               <a:t>Rota no mapa</a:t>
             </a:r>
@@ -5557,8 +6442,8 @@
         </p:nvSpPr>
         <p:spPr>
           <a:xfrm>
-            <a:off x="3685032" y="3127248"/>
-            <a:ext cx="2194560" cy="502920"/>
+            <a:off x="3739896" y="3246120"/>
+            <a:ext cx="2148840" cy="457200"/>
           </a:xfrm>
           <a:prstGeom prst="rect">
             <a:avLst/>
@@ -5578,9 +6463,9 @@
                 <a:solidFill>
                   <a:srgbClr val="475569"/>
                 </a:solidFill>
-                <a:latin typeface="Calibri" pitchFamily="34" charset="0"/>
-                <a:ea typeface="Calibri" pitchFamily="34" charset="-122"/>
-                <a:cs typeface="Calibri" pitchFamily="34" charset="-120"/>
+                <a:latin typeface="Arial" pitchFamily="34" charset="0"/>
+                <a:ea typeface="Arial" pitchFamily="34" charset="-122"/>
+                <a:cs typeface="Arial" pitchFamily="34" charset="-120"/>
               </a:rPr>
               <a:t>A próxima parada e o trajeto otimizado até ela.</a:t>
             </a:r>
@@ -5596,27 +6481,22 @@
         </p:nvSpPr>
         <p:spPr>
           <a:xfrm>
-            <a:off x="6364224" y="1828800"/>
+            <a:off x="6391656" y="1874520"/>
             <a:ext cx="2697480" cy="1874520"/>
           </a:xfrm>
           <a:prstGeom prst="roundRect">
             <a:avLst>
-              <a:gd name="adj" fmla="val 3902"/>
+              <a:gd name="adj" fmla="val 6341"/>
             </a:avLst>
           </a:prstGeom>
           <a:solidFill>
-            <a:srgbClr val="F8FAFC"/>
+            <a:srgbClr val="FFFFFF"/>
           </a:solidFill>
-          <a:ln w="12700">
-            <a:solidFill>
-              <a:srgbClr val="E2E8F0"/>
-            </a:solidFill>
-            <a:prstDash val="solid"/>
-          </a:ln>
+          <a:ln/>
           <a:effectLst>
-            <a:outerShdw sx="100000" sy="100000" kx="0" ky="0" algn="bl" rotWithShape="0" blurRad="88900" dist="38100" dir="5400000">
+            <a:outerShdw sx="100000" sy="100000" kx="0" ky="0" algn="bl" rotWithShape="0" blurRad="139700" dist="38100" dir="5400000">
               <a:srgbClr val="0F172A">
-                <a:alpha val="10000"/>
+                <a:alpha val="8000"/>
               </a:srgbClr>
             </a:outerShdw>
           </a:effectLst>
@@ -5630,8 +6510,8 @@
         </p:nvSpPr>
         <p:spPr>
           <a:xfrm>
-            <a:off x="6638544" y="2103120"/>
-            <a:ext cx="502920" cy="502920"/>
+            <a:off x="6684264" y="2167128"/>
+            <a:ext cx="548640" cy="548640"/>
           </a:xfrm>
           <a:prstGeom prst="ellipse">
             <a:avLst/>
@@ -5650,8 +6530,8 @@
         </p:nvSpPr>
         <p:spPr>
           <a:xfrm>
-            <a:off x="6638544" y="2103120"/>
-            <a:ext cx="502920" cy="502920"/>
+            <a:off x="6684264" y="2167128"/>
+            <a:ext cx="548640" cy="548640"/>
           </a:xfrm>
           <a:prstGeom prst="rect">
             <a:avLst/>
@@ -5667,17 +6547,17 @@
               <a:buNone/>
             </a:pPr>
             <a:r>
-              <a:rPr lang="en-US" sz="1300" b="1" dirty="0">
+              <a:rPr lang="en-US" sz="1400" b="1" dirty="0">
                 <a:solidFill>
                   <a:srgbClr val="FFFFFF"/>
                 </a:solidFill>
-                <a:latin typeface="Calibri" pitchFamily="34" charset="0"/>
-                <a:ea typeface="Calibri" pitchFamily="34" charset="-122"/>
-                <a:cs typeface="Calibri" pitchFamily="34" charset="-120"/>
+                <a:latin typeface="Arial" pitchFamily="34" charset="0"/>
+                <a:ea typeface="Arial" pitchFamily="34" charset="-122"/>
+                <a:cs typeface="Arial" pitchFamily="34" charset="-120"/>
               </a:rPr>
               <a:t>3</a:t>
             </a:r>
-            <a:endParaRPr lang="en-US" sz="1300" dirty="0"/>
+            <a:endParaRPr lang="en-US" sz="1400" dirty="0"/>
           </a:p>
         </p:txBody>
       </p:sp>
@@ -5689,7 +6569,7 @@
         </p:nvSpPr>
         <p:spPr>
           <a:xfrm>
-            <a:off x="6638544" y="2743200"/>
+            <a:off x="6684264" y="2862072"/>
             <a:ext cx="2148840" cy="365760"/>
           </a:xfrm>
           <a:prstGeom prst="rect">
@@ -5710,9 +6590,9 @@
                 <a:solidFill>
                   <a:srgbClr val="0F172A"/>
                 </a:solidFill>
-                <a:latin typeface="Calibri" pitchFamily="34" charset="0"/>
-                <a:ea typeface="Calibri" pitchFamily="34" charset="-122"/>
-                <a:cs typeface="Calibri" pitchFamily="34" charset="-120"/>
+                <a:latin typeface="Arial" pitchFamily="34" charset="0"/>
+                <a:ea typeface="Arial" pitchFamily="34" charset="-122"/>
+                <a:cs typeface="Arial" pitchFamily="34" charset="-120"/>
               </a:rPr>
               <a:t>Detalhe + encerrar</a:t>
             </a:r>
@@ -5728,8 +6608,8 @@
         </p:nvSpPr>
         <p:spPr>
           <a:xfrm>
-            <a:off x="6638544" y="3127248"/>
-            <a:ext cx="2194560" cy="502920"/>
+            <a:off x="6684264" y="3246120"/>
+            <a:ext cx="2148840" cy="457200"/>
           </a:xfrm>
           <a:prstGeom prst="rect">
             <a:avLst/>
@@ -5749,9 +6629,9 @@
                 <a:solidFill>
                   <a:srgbClr val="475569"/>
                 </a:solidFill>
-                <a:latin typeface="Calibri" pitchFamily="34" charset="0"/>
-                <a:ea typeface="Calibri" pitchFamily="34" charset="-122"/>
-                <a:cs typeface="Calibri" pitchFamily="34" charset="-120"/>
+                <a:latin typeface="Arial" pitchFamily="34" charset="0"/>
+                <a:ea typeface="Arial" pitchFamily="34" charset="-122"/>
+                <a:cs typeface="Arial" pitchFamily="34" charset="-120"/>
               </a:rPr>
               <a:t>Todas as informações do chamado; finalizar ou reagendar em um toque.</a:t>
             </a:r>
@@ -5767,7 +6647,7 @@
         </p:nvSpPr>
         <p:spPr>
           <a:xfrm>
-            <a:off x="457200" y="3931920"/>
+            <a:off x="457200" y="4023360"/>
             <a:ext cx="8229600" cy="320040"/>
           </a:xfrm>
           <a:prstGeom prst="rect">
@@ -5786,13 +6666,13 @@
             <a:r>
               <a:rPr lang="en-US" sz="1200" i="1" dirty="0">
                 <a:solidFill>
-                  <a:srgbClr val="1D4ED8"/>
-                </a:solidFill>
-                <a:latin typeface="Calibri" pitchFamily="34" charset="0"/>
-                <a:ea typeface="Calibri" pitchFamily="34" charset="-122"/>
-                <a:cs typeface="Calibri" pitchFamily="34" charset="-120"/>
-              </a:rPr>
-              <a:t>3 tipos de chamada: instalação · manutenção · recolhimento</a:t>
+                  <a:srgbClr val="2563EB"/>
+                </a:solidFill>
+                <a:latin typeface="Arial" pitchFamily="34" charset="0"/>
+                <a:ea typeface="Arial" pitchFamily="34" charset="-122"/>
+                <a:cs typeface="Arial" pitchFamily="34" charset="-120"/>
+              </a:rPr>
+              <a:t>3 tipos de chamada:  instalação · manutenção · recolhimento</a:t>
             </a:r>
             <a:endParaRPr lang="en-US" sz="1200" dirty="0"/>
           </a:p>
@@ -5806,7 +6686,7 @@
         </p:nvSpPr>
         <p:spPr>
           <a:xfrm>
-            <a:off x="457200" y="4759452"/>
+            <a:off x="502920" y="4777740"/>
             <a:ext cx="5486400" cy="274320"/>
           </a:xfrm>
           <a:prstGeom prst="rect">
@@ -5816,7 +6696,7 @@
           <a:ln/>
         </p:spPr>
         <p:txBody>
-          <a:bodyPr wrap="square" rtlCol="0" anchor="ctr"/>
+          <a:bodyPr wrap="square" lIns="0" tIns="0" rIns="0" bIns="0" rtlCol="0" anchor="ctr"/>
           <a:lstStyle/>
           <a:p>
             <a:pPr algn="l" indent="0" marL="0">
@@ -5827,9 +6707,9 @@
                 <a:solidFill>
                   <a:srgbClr val="64748B"/>
                 </a:solidFill>
-                <a:latin typeface="Calibri" pitchFamily="34" charset="0"/>
-                <a:ea typeface="Calibri" pitchFamily="34" charset="-122"/>
-                <a:cs typeface="Calibri" pitchFamily="34" charset="-120"/>
+                <a:latin typeface="Arial" pitchFamily="34" charset="0"/>
+                <a:ea typeface="Arial" pitchFamily="34" charset="-122"/>
+                <a:cs typeface="Arial" pitchFamily="34" charset="-120"/>
               </a:rPr>
               <a:t>Track Fibra · IHC — UTFPR Campo Mourão</a:t>
             </a:r>
@@ -5845,7 +6725,7 @@
         </p:nvSpPr>
         <p:spPr>
           <a:xfrm>
-            <a:off x="7772400" y="4759452"/>
+            <a:off x="7726680" y="4777740"/>
             <a:ext cx="914400" cy="274320"/>
           </a:xfrm>
           <a:prstGeom prst="rect">
@@ -5855,7 +6735,7 @@
           <a:ln/>
         </p:spPr>
         <p:txBody>
-          <a:bodyPr wrap="square" rtlCol="0" anchor="ctr"/>
+          <a:bodyPr wrap="square" lIns="0" tIns="0" rIns="0" bIns="0" rtlCol="0" anchor="ctr"/>
           <a:lstStyle/>
           <a:p>
             <a:pPr algn="r" indent="0" marL="0">
@@ -5866,11 +6746,11 @@
                 <a:solidFill>
                   <a:srgbClr val="64748B"/>
                 </a:solidFill>
-                <a:latin typeface="Calibri" pitchFamily="34" charset="0"/>
-                <a:ea typeface="Calibri" pitchFamily="34" charset="-122"/>
-                <a:cs typeface="Calibri" pitchFamily="34" charset="-120"/>
-              </a:rPr>
-              <a:t>4 / 11</a:t>
+                <a:latin typeface="Arial" pitchFamily="34" charset="0"/>
+                <a:ea typeface="Arial" pitchFamily="34" charset="-122"/>
+                <a:cs typeface="Arial" pitchFamily="34" charset="-120"/>
+              </a:rPr>
+              <a:t>4 / 12</a:t>
             </a:r>
             <a:endParaRPr lang="en-US" sz="900" dirty="0"/>
           </a:p>
@@ -5890,7 +6770,7 @@
     <p:bg>
       <p:bgPr>
         <a:solidFill>
-          <a:srgbClr val="FFFFFF"/>
+          <a:srgbClr val="F8FAFC"/>
         </a:solidFill>
       </p:bgPr>
     </p:bg>
@@ -5916,7 +6796,7 @@
         </p:nvSpPr>
         <p:spPr>
           <a:xfrm>
-            <a:off x="502920" y="301752"/>
+            <a:off x="548640" y="329184"/>
             <a:ext cx="8229600" cy="274320"/>
           </a:xfrm>
           <a:prstGeom prst="rect">
@@ -5933,13 +6813,13 @@
               <a:buNone/>
             </a:pPr>
             <a:r>
-              <a:rPr lang="en-US" sz="1200" b="1" spc="300" kern="0" dirty="0">
+              <a:rPr lang="en-US" sz="1200" b="1" spc="400" kern="0" dirty="0">
                 <a:solidFill>
                   <a:srgbClr val="06B6D4"/>
                 </a:solidFill>
-                <a:latin typeface="Calibri" pitchFamily="34" charset="0"/>
-                <a:ea typeface="Calibri" pitchFamily="34" charset="-122"/>
-                <a:cs typeface="Calibri" pitchFamily="34" charset="-120"/>
+                <a:latin typeface="Arial" pitchFamily="34" charset="0"/>
+                <a:ea typeface="Arial" pitchFamily="34" charset="-122"/>
+                <a:cs typeface="Arial" pitchFamily="34" charset="-120"/>
               </a:rPr>
               <a:t>DESIGN SPRINT</a:t>
             </a:r>
@@ -5955,7 +6835,7 @@
         </p:nvSpPr>
         <p:spPr>
           <a:xfrm>
-            <a:off x="457200" y="548640"/>
+            <a:off x="502920" y="585216"/>
             <a:ext cx="8229600" cy="640080"/>
           </a:xfrm>
           <a:prstGeom prst="rect">
@@ -5972,17 +6852,17 @@
               <a:buNone/>
             </a:pPr>
             <a:r>
-              <a:rPr lang="en-US" sz="3200" b="1" dirty="0">
+              <a:rPr lang="en-US" sz="3400" b="1" dirty="0">
                 <a:solidFill>
                   <a:srgbClr val="0F172A"/>
                 </a:solidFill>
-                <a:latin typeface="Cambria" pitchFamily="34" charset="0"/>
-                <a:ea typeface="Cambria" pitchFamily="34" charset="-122"/>
-                <a:cs typeface="Cambria" pitchFamily="34" charset="-120"/>
+                <a:latin typeface="Arial" pitchFamily="34" charset="0"/>
+                <a:ea typeface="Arial" pitchFamily="34" charset="-122"/>
+                <a:cs typeface="Arial" pitchFamily="34" charset="-120"/>
               </a:rPr>
               <a:t>Foco no técnico</a:t>
             </a:r>
-            <a:endParaRPr lang="en-US" sz="3200" dirty="0"/>
+            <a:endParaRPr lang="en-US" sz="3400" dirty="0"/>
           </a:p>
         </p:txBody>
       </p:sp>
@@ -5994,7 +6874,7 @@
         </p:nvSpPr>
         <p:spPr>
           <a:xfrm>
-            <a:off x="548640" y="1417320"/>
+            <a:off x="594360" y="1463040"/>
             <a:ext cx="4572000" cy="2743200"/>
           </a:xfrm>
           <a:prstGeom prst="rect">
@@ -6007,9 +6887,9 @@
           <a:bodyPr wrap="square" rtlCol="0" anchor="ctr"/>
           <a:lstStyle/>
           <a:p>
-            <a:pPr marL="342900" indent="-342900">
+            <a:pPr marL="177800" indent="-177800">
               <a:spcAft>
-                <a:spcPts val="1000"/>
+                <a:spcPts val="1100"/>
               </a:spcAft>
               <a:buSzPct val="100000"/>
               <a:buChar char="•"/>
@@ -6019,18 +6899,18 @@
                 <a:solidFill>
                   <a:srgbClr val="475569"/>
                 </a:solidFill>
-                <a:latin typeface="Calibri" pitchFamily="34" charset="0"/>
-                <a:ea typeface="Calibri" pitchFamily="34" charset="-122"/>
-                <a:cs typeface="Calibri" pitchFamily="34" charset="-120"/>
+                <a:latin typeface="Arial" pitchFamily="34" charset="0"/>
+                <a:ea typeface="Arial" pitchFamily="34" charset="-122"/>
+                <a:cs typeface="Arial" pitchFamily="34" charset="-120"/>
               </a:rPr>
               <a:t>Mapa Usuário → Objetivo do técnico</a:t>
             </a:r>
             <a:endParaRPr lang="en-US" sz="1400" dirty="0"/>
           </a:p>
           <a:p>
-            <a:pPr marL="342900" indent="-342900">
+            <a:pPr marL="177800" indent="-177800">
               <a:spcAft>
-                <a:spcPts val="1000"/>
+                <a:spcPts val="1100"/>
               </a:spcAft>
               <a:buSzPct val="100000"/>
               <a:buChar char="•"/>
@@ -6040,18 +6920,18 @@
                 <a:solidFill>
                   <a:srgbClr val="475569"/>
                 </a:solidFill>
-                <a:latin typeface="Calibri" pitchFamily="34" charset="0"/>
-                <a:ea typeface="Calibri" pitchFamily="34" charset="-122"/>
-                <a:cs typeface="Calibri" pitchFamily="34" charset="-120"/>
+                <a:latin typeface="Arial" pitchFamily="34" charset="0"/>
+                <a:ea typeface="Arial" pitchFamily="34" charset="-122"/>
+                <a:cs typeface="Arial" pitchFamily="34" charset="-120"/>
               </a:rPr>
               <a:t>Objetivo de longo prazo: facilitar o gerenciamento de chamados</a:t>
             </a:r>
             <a:endParaRPr lang="en-US" sz="1400" dirty="0"/>
           </a:p>
           <a:p>
-            <a:pPr marL="342900" indent="-342900">
+            <a:pPr marL="177800" indent="-177800">
               <a:spcAft>
-                <a:spcPts val="1000"/>
+                <a:spcPts val="1100"/>
               </a:spcAft>
               <a:buSzPct val="100000"/>
               <a:buChar char="•"/>
@@ -6061,18 +6941,18 @@
                 <a:solidFill>
                   <a:srgbClr val="475569"/>
                 </a:solidFill>
-                <a:latin typeface="Calibri" pitchFamily="34" charset="0"/>
-                <a:ea typeface="Calibri" pitchFamily="34" charset="-122"/>
-                <a:cs typeface="Calibri" pitchFamily="34" charset="-120"/>
+                <a:latin typeface="Arial" pitchFamily="34" charset="0"/>
+                <a:ea typeface="Arial" pitchFamily="34" charset="-122"/>
+                <a:cs typeface="Arial" pitchFamily="34" charset="-120"/>
               </a:rPr>
               <a:t>HMWs mais votadas: status em tempo real · todas as informações · otimizar rotas</a:t>
             </a:r>
             <a:endParaRPr lang="en-US" sz="1400" dirty="0"/>
           </a:p>
           <a:p>
-            <a:pPr marL="342900" indent="-342900">
+            <a:pPr marL="177800" indent="-177800">
               <a:spcAft>
-                <a:spcPts val="1000"/>
+                <a:spcPts val="1100"/>
               </a:spcAft>
               <a:buSzPct val="100000"/>
               <a:buChar char="•"/>
@@ -6082,9 +6962,9 @@
                 <a:solidFill>
                   <a:srgbClr val="475569"/>
                 </a:solidFill>
-                <a:latin typeface="Calibri" pitchFamily="34" charset="0"/>
-                <a:ea typeface="Calibri" pitchFamily="34" charset="-122"/>
-                <a:cs typeface="Calibri" pitchFamily="34" charset="-120"/>
+                <a:latin typeface="Arial" pitchFamily="34" charset="0"/>
+                <a:ea typeface="Arial" pitchFamily="34" charset="-122"/>
+                <a:cs typeface="Arial" pitchFamily="34" charset="-120"/>
               </a:rPr>
               <a:t>O sprint mirou um único alvo, o técnico em campo — foco e consistência de método</a:t>
             </a:r>
@@ -6101,26 +6981,21 @@
         <p:spPr>
           <a:xfrm>
             <a:off x="5440680" y="1508760"/>
-            <a:ext cx="3246120" cy="2468880"/>
+            <a:ext cx="3246120" cy="2514600"/>
           </a:xfrm>
           <a:prstGeom prst="roundRect">
             <a:avLst>
-              <a:gd name="adj" fmla="val 2963"/>
+              <a:gd name="adj" fmla="val 4727"/>
             </a:avLst>
           </a:prstGeom>
           <a:solidFill>
             <a:srgbClr val="0B1220"/>
           </a:solidFill>
-          <a:ln w="12700">
-            <a:solidFill>
-              <a:srgbClr val="E2E8F0"/>
-            </a:solidFill>
-            <a:prstDash val="solid"/>
-          </a:ln>
+          <a:ln/>
           <a:effectLst>
-            <a:outerShdw sx="100000" sy="100000" kx="0" ky="0" algn="bl" rotWithShape="0" blurRad="88900" dist="38100" dir="5400000">
+            <a:outerShdw sx="100000" sy="100000" kx="0" ky="0" algn="bl" rotWithShape="0" blurRad="139700" dist="38100" dir="5400000">
               <a:srgbClr val="0F172A">
-                <a:alpha val="10000"/>
+                <a:alpha val="8000"/>
               </a:srgbClr>
             </a:outerShdw>
           </a:effectLst>
@@ -6151,13 +7026,13 @@
               <a:buNone/>
             </a:pPr>
             <a:r>
-              <a:rPr lang="en-US" sz="1200" b="1" spc="200" kern="0" dirty="0">
+              <a:rPr lang="en-US" sz="1200" b="1" spc="300" kern="0" dirty="0">
                 <a:solidFill>
                   <a:srgbClr val="06B6D4"/>
                 </a:solidFill>
-                <a:latin typeface="Calibri" pitchFamily="34" charset="0"/>
-                <a:ea typeface="Calibri" pitchFamily="34" charset="-122"/>
-                <a:cs typeface="Calibri" pitchFamily="34" charset="-120"/>
+                <a:latin typeface="Arial" pitchFamily="34" charset="0"/>
+                <a:ea typeface="Arial" pitchFamily="34" charset="-122"/>
+                <a:cs typeface="Arial" pitchFamily="34" charset="-120"/>
               </a:rPr>
               <a:t>FOCO DO SPRINT</a:t>
             </a:r>
@@ -6173,7 +7048,7 @@
         </p:nvSpPr>
         <p:spPr>
           <a:xfrm>
-            <a:off x="5669280" y="2194560"/>
+            <a:off x="5669280" y="2185416"/>
             <a:ext cx="2788920" cy="822960"/>
           </a:xfrm>
           <a:prstGeom prst="rect">
@@ -6194,9 +7069,9 @@
                 <a:solidFill>
                   <a:srgbClr val="FFFFFF"/>
                 </a:solidFill>
-                <a:latin typeface="Cambria" pitchFamily="34" charset="0"/>
-                <a:ea typeface="Cambria" pitchFamily="34" charset="-122"/>
-                <a:cs typeface="Cambria" pitchFamily="34" charset="-120"/>
+                <a:latin typeface="Arial" pitchFamily="34" charset="0"/>
+                <a:ea typeface="Arial" pitchFamily="34" charset="-122"/>
+                <a:cs typeface="Arial" pitchFamily="34" charset="-120"/>
               </a:rPr>
               <a:t>Visualizar os chamados pendentes</a:t>
             </a:r>
@@ -6212,7 +7087,7 @@
         </p:nvSpPr>
         <p:spPr>
           <a:xfrm>
-            <a:off x="5715000" y="3108960"/>
+            <a:off x="5715000" y="3154680"/>
             <a:ext cx="2697480" cy="731520"/>
           </a:xfrm>
           <a:prstGeom prst="rect">
@@ -6233,9 +7108,9 @@
                 <a:solidFill>
                   <a:srgbClr val="CBD5E1"/>
                 </a:solidFill>
-                <a:latin typeface="Calibri" pitchFamily="34" charset="0"/>
-                <a:ea typeface="Calibri" pitchFamily="34" charset="-122"/>
-                <a:cs typeface="Calibri" pitchFamily="34" charset="-120"/>
+                <a:latin typeface="Arial" pitchFamily="34" charset="0"/>
+                <a:ea typeface="Arial" pitchFamily="34" charset="-122"/>
+                <a:cs typeface="Arial" pitchFamily="34" charset="-120"/>
               </a:rPr>
               <a:t>O momento em que o técnico precisa, de forma clara e confiável, de todas as informações do dia.</a:t>
             </a:r>
@@ -6251,7 +7126,7 @@
         </p:nvSpPr>
         <p:spPr>
           <a:xfrm>
-            <a:off x="457200" y="4759452"/>
+            <a:off x="502920" y="4777740"/>
             <a:ext cx="5486400" cy="274320"/>
           </a:xfrm>
           <a:prstGeom prst="rect">
@@ -6261,7 +7136,7 @@
           <a:ln/>
         </p:spPr>
         <p:txBody>
-          <a:bodyPr wrap="square" rtlCol="0" anchor="ctr"/>
+          <a:bodyPr wrap="square" lIns="0" tIns="0" rIns="0" bIns="0" rtlCol="0" anchor="ctr"/>
           <a:lstStyle/>
           <a:p>
             <a:pPr algn="l" indent="0" marL="0">
@@ -6272,9 +7147,9 @@
                 <a:solidFill>
                   <a:srgbClr val="64748B"/>
                 </a:solidFill>
-                <a:latin typeface="Calibri" pitchFamily="34" charset="0"/>
-                <a:ea typeface="Calibri" pitchFamily="34" charset="-122"/>
-                <a:cs typeface="Calibri" pitchFamily="34" charset="-120"/>
+                <a:latin typeface="Arial" pitchFamily="34" charset="0"/>
+                <a:ea typeface="Arial" pitchFamily="34" charset="-122"/>
+                <a:cs typeface="Arial" pitchFamily="34" charset="-120"/>
               </a:rPr>
               <a:t>Track Fibra · IHC — UTFPR Campo Mourão</a:t>
             </a:r>
@@ -6290,7 +7165,7 @@
         </p:nvSpPr>
         <p:spPr>
           <a:xfrm>
-            <a:off x="7772400" y="4759452"/>
+            <a:off x="7726680" y="4777740"/>
             <a:ext cx="914400" cy="274320"/>
           </a:xfrm>
           <a:prstGeom prst="rect">
@@ -6300,7 +7175,7 @@
           <a:ln/>
         </p:spPr>
         <p:txBody>
-          <a:bodyPr wrap="square" rtlCol="0" anchor="ctr"/>
+          <a:bodyPr wrap="square" lIns="0" tIns="0" rIns="0" bIns="0" rtlCol="0" anchor="ctr"/>
           <a:lstStyle/>
           <a:p>
             <a:pPr algn="r" indent="0" marL="0">
@@ -6311,11 +7186,11 @@
                 <a:solidFill>
                   <a:srgbClr val="64748B"/>
                 </a:solidFill>
-                <a:latin typeface="Calibri" pitchFamily="34" charset="0"/>
-                <a:ea typeface="Calibri" pitchFamily="34" charset="-122"/>
-                <a:cs typeface="Calibri" pitchFamily="34" charset="-120"/>
-              </a:rPr>
-              <a:t>5 / 11</a:t>
+                <a:latin typeface="Arial" pitchFamily="34" charset="0"/>
+                <a:ea typeface="Arial" pitchFamily="34" charset="-122"/>
+                <a:cs typeface="Arial" pitchFamily="34" charset="-120"/>
+              </a:rPr>
+              <a:t>5 / 12</a:t>
             </a:r>
             <a:endParaRPr lang="en-US" sz="900" dirty="0"/>
           </a:p>
@@ -6335,7 +7210,7 @@
     <p:bg>
       <p:bgPr>
         <a:solidFill>
-          <a:srgbClr val="FFFFFF"/>
+          <a:srgbClr val="F8FAFC"/>
         </a:solidFill>
       </p:bgPr>
     </p:bg>
@@ -6361,7 +7236,7 @@
         </p:nvSpPr>
         <p:spPr>
           <a:xfrm>
-            <a:off x="502920" y="301752"/>
+            <a:off x="548640" y="329184"/>
             <a:ext cx="8229600" cy="274320"/>
           </a:xfrm>
           <a:prstGeom prst="rect">
@@ -6378,13 +7253,13 @@
               <a:buNone/>
             </a:pPr>
             <a:r>
-              <a:rPr lang="en-US" sz="1200" b="1" spc="300" kern="0" dirty="0">
+              <a:rPr lang="en-US" sz="1200" b="1" spc="400" kern="0" dirty="0">
                 <a:solidFill>
                   <a:srgbClr val="06B6D4"/>
                 </a:solidFill>
-                <a:latin typeface="Calibri" pitchFamily="34" charset="0"/>
-                <a:ea typeface="Calibri" pitchFamily="34" charset="-122"/>
-                <a:cs typeface="Calibri" pitchFamily="34" charset="-120"/>
+                <a:latin typeface="Arial" pitchFamily="34" charset="0"/>
+                <a:ea typeface="Arial" pitchFamily="34" charset="-122"/>
+                <a:cs typeface="Arial" pitchFamily="34" charset="-120"/>
               </a:rPr>
               <a:t>PROTÓTIPO</a:t>
             </a:r>
@@ -6400,7 +7275,7 @@
         </p:nvSpPr>
         <p:spPr>
           <a:xfrm>
-            <a:off x="457200" y="548640"/>
+            <a:off x="502920" y="585216"/>
             <a:ext cx="8229600" cy="640080"/>
           </a:xfrm>
           <a:prstGeom prst="rect">
@@ -6417,17 +7292,17 @@
               <a:buNone/>
             </a:pPr>
             <a:r>
-              <a:rPr lang="en-US" sz="3200" b="1" dirty="0">
+              <a:rPr lang="en-US" sz="3400" b="1" dirty="0">
                 <a:solidFill>
                   <a:srgbClr val="0F172A"/>
                 </a:solidFill>
-                <a:latin typeface="Cambria" pitchFamily="34" charset="0"/>
-                <a:ea typeface="Cambria" pitchFamily="34" charset="-122"/>
-                <a:cs typeface="Cambria" pitchFamily="34" charset="-120"/>
+                <a:latin typeface="Arial" pitchFamily="34" charset="0"/>
+                <a:ea typeface="Arial" pitchFamily="34" charset="-122"/>
+                <a:cs typeface="Arial" pitchFamily="34" charset="-120"/>
               </a:rPr>
               <a:t>Do login à conclusão</a:t>
             </a:r>
-            <a:endParaRPr lang="en-US" sz="3200" dirty="0"/>
+            <a:endParaRPr lang="en-US" sz="3400" dirty="0"/>
           </a:p>
         </p:txBody>
       </p:sp>
@@ -6439,27 +7314,22 @@
         </p:nvSpPr>
         <p:spPr>
           <a:xfrm>
-            <a:off x="457200" y="1691640"/>
+            <a:off x="457200" y="1783080"/>
             <a:ext cx="1828800" cy="1097280"/>
           </a:xfrm>
           <a:prstGeom prst="roundRect">
             <a:avLst>
-              <a:gd name="adj" fmla="val 6667"/>
+              <a:gd name="adj" fmla="val 10833"/>
             </a:avLst>
           </a:prstGeom>
           <a:solidFill>
-            <a:srgbClr val="F8FAFC"/>
+            <a:srgbClr val="FFFFFF"/>
           </a:solidFill>
-          <a:ln w="12700">
-            <a:solidFill>
-              <a:srgbClr val="E2E8F0"/>
-            </a:solidFill>
-            <a:prstDash val="solid"/>
-          </a:ln>
+          <a:ln/>
           <a:effectLst>
-            <a:outerShdw sx="100000" sy="100000" kx="0" ky="0" algn="bl" rotWithShape="0" blurRad="88900" dist="38100" dir="5400000">
+            <a:outerShdw sx="100000" sy="100000" kx="0" ky="0" algn="bl" rotWithShape="0" blurRad="139700" dist="38100" dir="5400000">
               <a:srgbClr val="0F172A">
-                <a:alpha val="10000"/>
+                <a:alpha val="8000"/>
               </a:srgbClr>
             </a:outerShdw>
           </a:effectLst>
@@ -6473,7 +7343,7 @@
         </p:nvSpPr>
         <p:spPr>
           <a:xfrm>
-            <a:off x="548640" y="1691640"/>
+            <a:off x="548640" y="1783080"/>
             <a:ext cx="1645920" cy="1097280"/>
           </a:xfrm>
           <a:prstGeom prst="rect">
@@ -6494,9 +7364,9 @@
                 <a:solidFill>
                   <a:srgbClr val="0F172A"/>
                 </a:solidFill>
-                <a:latin typeface="Calibri" pitchFamily="34" charset="0"/>
-                <a:ea typeface="Calibri" pitchFamily="34" charset="-122"/>
-                <a:cs typeface="Calibri" pitchFamily="34" charset="-120"/>
+                <a:latin typeface="Arial" pitchFamily="34" charset="0"/>
+                <a:ea typeface="Arial" pitchFamily="34" charset="-122"/>
+                <a:cs typeface="Arial" pitchFamily="34" charset="-120"/>
               </a:rPr>
               <a:t>1 · Login</a:t>
             </a:r>
@@ -6512,7 +7382,7 @@
         </p:nvSpPr>
         <p:spPr>
           <a:xfrm>
-            <a:off x="2286000" y="1691640"/>
+            <a:off x="2286000" y="1783080"/>
             <a:ext cx="384048" cy="1097280"/>
           </a:xfrm>
           <a:prstGeom prst="rect">
@@ -6548,27 +7418,22 @@
         </p:nvSpPr>
         <p:spPr>
           <a:xfrm>
-            <a:off x="2670048" y="1691640"/>
+            <a:off x="2670048" y="1783080"/>
             <a:ext cx="1828800" cy="1097280"/>
           </a:xfrm>
           <a:prstGeom prst="roundRect">
             <a:avLst>
-              <a:gd name="adj" fmla="val 6667"/>
+              <a:gd name="adj" fmla="val 10833"/>
             </a:avLst>
           </a:prstGeom>
           <a:solidFill>
-            <a:srgbClr val="EFF6FF"/>
+            <a:srgbClr val="E8F1FF"/>
           </a:solidFill>
-          <a:ln w="12700">
-            <a:solidFill>
-              <a:srgbClr val="E2E8F0"/>
-            </a:solidFill>
-            <a:prstDash val="solid"/>
-          </a:ln>
+          <a:ln/>
           <a:effectLst>
-            <a:outerShdw sx="100000" sy="100000" kx="0" ky="0" algn="bl" rotWithShape="0" blurRad="88900" dist="38100" dir="5400000">
+            <a:outerShdw sx="100000" sy="100000" kx="0" ky="0" algn="bl" rotWithShape="0" blurRad="139700" dist="38100" dir="5400000">
               <a:srgbClr val="0F172A">
-                <a:alpha val="10000"/>
+                <a:alpha val="8000"/>
               </a:srgbClr>
             </a:outerShdw>
           </a:effectLst>
@@ -6582,7 +7447,7 @@
         </p:nvSpPr>
         <p:spPr>
           <a:xfrm>
-            <a:off x="2761488" y="1691640"/>
+            <a:off x="2761488" y="1783080"/>
             <a:ext cx="1645920" cy="1097280"/>
           </a:xfrm>
           <a:prstGeom prst="rect">
@@ -6601,11 +7466,11 @@
             <a:r>
               <a:rPr lang="en-US" sz="1400" b="1" dirty="0">
                 <a:solidFill>
-                  <a:srgbClr val="1D4ED8"/>
-                </a:solidFill>
-                <a:latin typeface="Calibri" pitchFamily="34" charset="0"/>
-                <a:ea typeface="Calibri" pitchFamily="34" charset="-122"/>
-                <a:cs typeface="Calibri" pitchFamily="34" charset="-120"/>
+                  <a:srgbClr val="2563EB"/>
+                </a:solidFill>
+                <a:latin typeface="Arial" pitchFamily="34" charset="0"/>
+                <a:ea typeface="Arial" pitchFamily="34" charset="-122"/>
+                <a:cs typeface="Arial" pitchFamily="34" charset="-120"/>
               </a:rPr>
               <a:t>2 · Chamados do dia</a:t>
             </a:r>
@@ -6621,7 +7486,7 @@
         </p:nvSpPr>
         <p:spPr>
           <a:xfrm>
-            <a:off x="4498848" y="1691640"/>
+            <a:off x="4498848" y="1783080"/>
             <a:ext cx="384048" cy="1097280"/>
           </a:xfrm>
           <a:prstGeom prst="rect">
@@ -6657,27 +7522,22 @@
         </p:nvSpPr>
         <p:spPr>
           <a:xfrm>
-            <a:off x="4882896" y="1691640"/>
+            <a:off x="4882896" y="1783080"/>
             <a:ext cx="1828800" cy="1097280"/>
           </a:xfrm>
           <a:prstGeom prst="roundRect">
             <a:avLst>
-              <a:gd name="adj" fmla="val 6667"/>
+              <a:gd name="adj" fmla="val 10833"/>
             </a:avLst>
           </a:prstGeom>
           <a:solidFill>
-            <a:srgbClr val="F8FAFC"/>
+            <a:srgbClr val="FFFFFF"/>
           </a:solidFill>
-          <a:ln w="12700">
-            <a:solidFill>
-              <a:srgbClr val="E2E8F0"/>
-            </a:solidFill>
-            <a:prstDash val="solid"/>
-          </a:ln>
+          <a:ln/>
           <a:effectLst>
-            <a:outerShdw sx="100000" sy="100000" kx="0" ky="0" algn="bl" rotWithShape="0" blurRad="88900" dist="38100" dir="5400000">
+            <a:outerShdw sx="100000" sy="100000" kx="0" ky="0" algn="bl" rotWithShape="0" blurRad="139700" dist="38100" dir="5400000">
               <a:srgbClr val="0F172A">
-                <a:alpha val="10000"/>
+                <a:alpha val="8000"/>
               </a:srgbClr>
             </a:outerShdw>
           </a:effectLst>
@@ -6691,7 +7551,7 @@
         </p:nvSpPr>
         <p:spPr>
           <a:xfrm>
-            <a:off x="4974336" y="1691640"/>
+            <a:off x="4974336" y="1783080"/>
             <a:ext cx="1645920" cy="1097280"/>
           </a:xfrm>
           <a:prstGeom prst="rect">
@@ -6712,9 +7572,9 @@
                 <a:solidFill>
                   <a:srgbClr val="0F172A"/>
                 </a:solidFill>
-                <a:latin typeface="Calibri" pitchFamily="34" charset="0"/>
-                <a:ea typeface="Calibri" pitchFamily="34" charset="-122"/>
-                <a:cs typeface="Calibri" pitchFamily="34" charset="-120"/>
+                <a:latin typeface="Arial" pitchFamily="34" charset="0"/>
+                <a:ea typeface="Arial" pitchFamily="34" charset="-122"/>
+                <a:cs typeface="Arial" pitchFamily="34" charset="-120"/>
               </a:rPr>
               <a:t>3 · Rota no mapa</a:t>
             </a:r>
@@ -6730,7 +7590,7 @@
         </p:nvSpPr>
         <p:spPr>
           <a:xfrm>
-            <a:off x="6711696" y="1691640"/>
+            <a:off x="6711696" y="1783080"/>
             <a:ext cx="384048" cy="1097280"/>
           </a:xfrm>
           <a:prstGeom prst="rect">
@@ -6766,27 +7626,22 @@
         </p:nvSpPr>
         <p:spPr>
           <a:xfrm>
-            <a:off x="7095744" y="1691640"/>
+            <a:off x="7095744" y="1783080"/>
             <a:ext cx="1828800" cy="1097280"/>
           </a:xfrm>
           <a:prstGeom prst="roundRect">
             <a:avLst>
-              <a:gd name="adj" fmla="val 6667"/>
+              <a:gd name="adj" fmla="val 10833"/>
             </a:avLst>
           </a:prstGeom>
           <a:solidFill>
-            <a:srgbClr val="F8FAFC"/>
+            <a:srgbClr val="FFFFFF"/>
           </a:solidFill>
-          <a:ln w="12700">
-            <a:solidFill>
-              <a:srgbClr val="E2E8F0"/>
-            </a:solidFill>
-            <a:prstDash val="solid"/>
-          </a:ln>
+          <a:ln/>
           <a:effectLst>
-            <a:outerShdw sx="100000" sy="100000" kx="0" ky="0" algn="bl" rotWithShape="0" blurRad="88900" dist="38100" dir="5400000">
+            <a:outerShdw sx="100000" sy="100000" kx="0" ky="0" algn="bl" rotWithShape="0" blurRad="139700" dist="38100" dir="5400000">
               <a:srgbClr val="0F172A">
-                <a:alpha val="10000"/>
+                <a:alpha val="8000"/>
               </a:srgbClr>
             </a:outerShdw>
           </a:effectLst>
@@ -6800,7 +7655,7 @@
         </p:nvSpPr>
         <p:spPr>
           <a:xfrm>
-            <a:off x="7187184" y="1691640"/>
+            <a:off x="7187184" y="1783080"/>
             <a:ext cx="1645920" cy="1097280"/>
           </a:xfrm>
           <a:prstGeom prst="rect">
@@ -6821,9 +7676,9 @@
                 <a:solidFill>
                   <a:srgbClr val="0F172A"/>
                 </a:solidFill>
-                <a:latin typeface="Calibri" pitchFamily="34" charset="0"/>
-                <a:ea typeface="Calibri" pitchFamily="34" charset="-122"/>
-                <a:cs typeface="Calibri" pitchFamily="34" charset="-120"/>
+                <a:latin typeface="Arial" pitchFamily="34" charset="0"/>
+                <a:ea typeface="Arial" pitchFamily="34" charset="-122"/>
+                <a:cs typeface="Arial" pitchFamily="34" charset="-120"/>
               </a:rPr>
               <a:t>4 · Encerrar / Reagendar</a:t>
             </a:r>
@@ -6839,7 +7694,7 @@
         </p:nvSpPr>
         <p:spPr>
           <a:xfrm>
-            <a:off x="457200" y="2971800"/>
+            <a:off x="457200" y="3108960"/>
             <a:ext cx="8229600" cy="320040"/>
           </a:xfrm>
           <a:prstGeom prst="rect">
@@ -6860,9 +7715,9 @@
                 <a:solidFill>
                   <a:srgbClr val="0F172A"/>
                 </a:solidFill>
-                <a:latin typeface="Calibri" pitchFamily="34" charset="0"/>
-                <a:ea typeface="Calibri" pitchFamily="34" charset="-122"/>
-                <a:cs typeface="Calibri" pitchFamily="34" charset="-120"/>
+                <a:latin typeface="Arial" pitchFamily="34" charset="0"/>
+                <a:ea typeface="Arial" pitchFamily="34" charset="-122"/>
+                <a:cs typeface="Arial" pitchFamily="34" charset="-120"/>
               </a:rPr>
               <a:t>Fluxo do técnico (mobile) — foco do sprint em destaque</a:t>
             </a:r>
@@ -6878,7 +7733,7 @@
         </p:nvSpPr>
         <p:spPr>
           <a:xfrm>
-            <a:off x="914400" y="3337560"/>
+            <a:off x="914400" y="3474720"/>
             <a:ext cx="7315200" cy="640080"/>
           </a:xfrm>
           <a:prstGeom prst="rect">
@@ -6899,9 +7754,9 @@
                 <a:solidFill>
                   <a:srgbClr val="475569"/>
                 </a:solidFill>
-                <a:latin typeface="Calibri" pitchFamily="34" charset="0"/>
-                <a:ea typeface="Calibri" pitchFamily="34" charset="-122"/>
-                <a:cs typeface="Calibri" pitchFamily="34" charset="-120"/>
+                <a:latin typeface="Arial" pitchFamily="34" charset="0"/>
+                <a:ea typeface="Arial" pitchFamily="34" charset="-122"/>
+                <a:cs typeface="Arial" pitchFamily="34" charset="-120"/>
               </a:rPr>
               <a:t>Protótipo 100% navegável: todo botão é clicável, como um app de verdade. Telas de alta fidelidade no Figma, com a identidade Sinal &amp; Fibra.</a:t>
             </a:r>
@@ -6917,7 +7772,7 @@
         </p:nvSpPr>
         <p:spPr>
           <a:xfrm>
-            <a:off x="457200" y="4759452"/>
+            <a:off x="502920" y="4777740"/>
             <a:ext cx="5486400" cy="274320"/>
           </a:xfrm>
           <a:prstGeom prst="rect">
@@ -6927,7 +7782,7 @@
           <a:ln/>
         </p:spPr>
         <p:txBody>
-          <a:bodyPr wrap="square" rtlCol="0" anchor="ctr"/>
+          <a:bodyPr wrap="square" lIns="0" tIns="0" rIns="0" bIns="0" rtlCol="0" anchor="ctr"/>
           <a:lstStyle/>
           <a:p>
             <a:pPr algn="l" indent="0" marL="0">
@@ -6938,9 +7793,9 @@
                 <a:solidFill>
                   <a:srgbClr val="64748B"/>
                 </a:solidFill>
-                <a:latin typeface="Calibri" pitchFamily="34" charset="0"/>
-                <a:ea typeface="Calibri" pitchFamily="34" charset="-122"/>
-                <a:cs typeface="Calibri" pitchFamily="34" charset="-120"/>
+                <a:latin typeface="Arial" pitchFamily="34" charset="0"/>
+                <a:ea typeface="Arial" pitchFamily="34" charset="-122"/>
+                <a:cs typeface="Arial" pitchFamily="34" charset="-120"/>
               </a:rPr>
               <a:t>Track Fibra · IHC — UTFPR Campo Mourão</a:t>
             </a:r>
@@ -6956,7 +7811,7 @@
         </p:nvSpPr>
         <p:spPr>
           <a:xfrm>
-            <a:off x="7772400" y="4759452"/>
+            <a:off x="7726680" y="4777740"/>
             <a:ext cx="914400" cy="274320"/>
           </a:xfrm>
           <a:prstGeom prst="rect">
@@ -6966,7 +7821,7 @@
           <a:ln/>
         </p:spPr>
         <p:txBody>
-          <a:bodyPr wrap="square" rtlCol="0" anchor="ctr"/>
+          <a:bodyPr wrap="square" lIns="0" tIns="0" rIns="0" bIns="0" rtlCol="0" anchor="ctr"/>
           <a:lstStyle/>
           <a:p>
             <a:pPr algn="r" indent="0" marL="0">
@@ -6977,11 +7832,11 @@
                 <a:solidFill>
                   <a:srgbClr val="64748B"/>
                 </a:solidFill>
-                <a:latin typeface="Calibri" pitchFamily="34" charset="0"/>
-                <a:ea typeface="Calibri" pitchFamily="34" charset="-122"/>
-                <a:cs typeface="Calibri" pitchFamily="34" charset="-120"/>
-              </a:rPr>
-              <a:t>6 / 11</a:t>
+                <a:latin typeface="Arial" pitchFamily="34" charset="0"/>
+                <a:ea typeface="Arial" pitchFamily="34" charset="-122"/>
+                <a:cs typeface="Arial" pitchFamily="34" charset="-120"/>
+              </a:rPr>
+              <a:t>6 / 12</a:t>
             </a:r>
             <a:endParaRPr lang="en-US" sz="900" dirty="0"/>
           </a:p>
@@ -7001,7 +7856,7 @@
     <p:bg>
       <p:bgPr>
         <a:solidFill>
-          <a:srgbClr val="FFFFFF"/>
+          <a:srgbClr val="F8FAFC"/>
         </a:solidFill>
       </p:bgPr>
     </p:bg>
@@ -7027,7 +7882,7 @@
         </p:nvSpPr>
         <p:spPr>
           <a:xfrm>
-            <a:off x="502920" y="301752"/>
+            <a:off x="548640" y="329184"/>
             <a:ext cx="8229600" cy="274320"/>
           </a:xfrm>
           <a:prstGeom prst="rect">
@@ -7044,13 +7899,13 @@
               <a:buNone/>
             </a:pPr>
             <a:r>
-              <a:rPr lang="en-US" sz="1200" b="1" spc="300" kern="0" dirty="0">
+              <a:rPr lang="en-US" sz="1200" b="1" spc="400" kern="0" dirty="0">
                 <a:solidFill>
                   <a:srgbClr val="06B6D4"/>
                 </a:solidFill>
-                <a:latin typeface="Calibri" pitchFamily="34" charset="0"/>
-                <a:ea typeface="Calibri" pitchFamily="34" charset="-122"/>
-                <a:cs typeface="Calibri" pitchFamily="34" charset="-120"/>
+                <a:latin typeface="Arial" pitchFamily="34" charset="0"/>
+                <a:ea typeface="Arial" pitchFamily="34" charset="-122"/>
+                <a:cs typeface="Arial" pitchFamily="34" charset="-120"/>
               </a:rPr>
               <a:t>TESTE DE USABILIDADE + UX</a:t>
             </a:r>
@@ -7066,7 +7921,7 @@
         </p:nvSpPr>
         <p:spPr>
           <a:xfrm>
-            <a:off x="457200" y="548640"/>
+            <a:off x="502920" y="585216"/>
             <a:ext cx="8229600" cy="640080"/>
           </a:xfrm>
           <a:prstGeom prst="rect">
@@ -7083,17 +7938,17 @@
               <a:buNone/>
             </a:pPr>
             <a:r>
-              <a:rPr lang="en-US" sz="3200" b="1" dirty="0">
+              <a:rPr lang="en-US" sz="3400" b="1" dirty="0">
                 <a:solidFill>
                   <a:srgbClr val="0F172A"/>
                 </a:solidFill>
-                <a:latin typeface="Cambria" pitchFamily="34" charset="0"/>
-                <a:ea typeface="Cambria" pitchFamily="34" charset="-122"/>
-                <a:cs typeface="Cambria" pitchFamily="34" charset="-120"/>
-              </a:rPr>
-              <a:t>Como avaliamos</a:t>
-            </a:r>
-            <a:endParaRPr lang="en-US" sz="3200" dirty="0"/>
+                <a:latin typeface="Arial" pitchFamily="34" charset="0"/>
+                <a:ea typeface="Arial" pitchFamily="34" charset="-122"/>
+                <a:cs typeface="Arial" pitchFamily="34" charset="-120"/>
+              </a:rPr>
+              <a:t>Técnicas e tarefas</a:t>
+            </a:r>
+            <a:endParaRPr lang="en-US" sz="3400" dirty="0"/>
           </a:p>
         </p:txBody>
       </p:sp>
@@ -7105,27 +7960,22 @@
         </p:nvSpPr>
         <p:spPr>
           <a:xfrm>
-            <a:off x="457200" y="1371600"/>
-            <a:ext cx="3977640" cy="1554480"/>
+            <a:off x="502920" y="1417320"/>
+            <a:ext cx="3977640" cy="1600200"/>
           </a:xfrm>
           <a:prstGeom prst="roundRect">
             <a:avLst>
-              <a:gd name="adj" fmla="val 4706"/>
+              <a:gd name="adj" fmla="val 7429"/>
             </a:avLst>
           </a:prstGeom>
           <a:solidFill>
-            <a:srgbClr val="F8FAFC"/>
+            <a:srgbClr val="FFFFFF"/>
           </a:solidFill>
-          <a:ln w="12700">
-            <a:solidFill>
-              <a:srgbClr val="E2E8F0"/>
-            </a:solidFill>
-            <a:prstDash val="solid"/>
-          </a:ln>
+          <a:ln/>
           <a:effectLst>
-            <a:outerShdw sx="100000" sy="100000" kx="0" ky="0" algn="bl" rotWithShape="0" blurRad="88900" dist="38100" dir="5400000">
+            <a:outerShdw sx="100000" sy="100000" kx="0" ky="0" algn="bl" rotWithShape="0" blurRad="139700" dist="38100" dir="5400000">
               <a:srgbClr val="0F172A">
-                <a:alpha val="10000"/>
+                <a:alpha val="8000"/>
               </a:srgbClr>
             </a:outerShdw>
           </a:effectLst>
@@ -7139,7 +7989,7 @@
         </p:nvSpPr>
         <p:spPr>
           <a:xfrm>
-            <a:off x="685800" y="1554480"/>
+            <a:off x="731520" y="1618488"/>
             <a:ext cx="3520440" cy="274320"/>
           </a:xfrm>
           <a:prstGeom prst="rect">
@@ -7160,9 +8010,9 @@
                 <a:solidFill>
                   <a:srgbClr val="06B6D4"/>
                 </a:solidFill>
-                <a:latin typeface="Calibri" pitchFamily="34" charset="0"/>
-                <a:ea typeface="Calibri" pitchFamily="34" charset="-122"/>
-                <a:cs typeface="Calibri" pitchFamily="34" charset="-120"/>
+                <a:latin typeface="Arial" pitchFamily="34" charset="0"/>
+                <a:ea typeface="Arial" pitchFamily="34" charset="-122"/>
+                <a:cs typeface="Arial" pitchFamily="34" charset="-120"/>
               </a:rPr>
               <a:t>USABILIDADE</a:t>
             </a:r>
@@ -7178,7 +8028,7 @@
         </p:nvSpPr>
         <p:spPr>
           <a:xfrm>
-            <a:off x="685800" y="1828800"/>
+            <a:off x="731520" y="1892808"/>
             <a:ext cx="3520440" cy="365760"/>
           </a:xfrm>
           <a:prstGeom prst="rect">
@@ -7199,9 +8049,9 @@
                 <a:solidFill>
                   <a:srgbClr val="0F172A"/>
                 </a:solidFill>
-                <a:latin typeface="Calibri" pitchFamily="34" charset="0"/>
-                <a:ea typeface="Calibri" pitchFamily="34" charset="-122"/>
-                <a:cs typeface="Calibri" pitchFamily="34" charset="-120"/>
+                <a:latin typeface="Arial" pitchFamily="34" charset="0"/>
+                <a:ea typeface="Arial" pitchFamily="34" charset="-122"/>
+                <a:cs typeface="Arial" pitchFamily="34" charset="-120"/>
               </a:rPr>
               <a:t>Teste por tarefas + Think-Aloud</a:t>
             </a:r>
@@ -7217,8 +8067,8 @@
         </p:nvSpPr>
         <p:spPr>
           <a:xfrm>
-            <a:off x="685800" y="2212848"/>
-            <a:ext cx="3520440" cy="640080"/>
+            <a:off x="731520" y="2286000"/>
+            <a:ext cx="3474720" cy="640080"/>
           </a:xfrm>
           <a:prstGeom prst="rect">
             <a:avLst/>
@@ -7238,9 +8088,9 @@
                 <a:solidFill>
                   <a:srgbClr val="475569"/>
                 </a:solidFill>
-                <a:latin typeface="Calibri" pitchFamily="34" charset="0"/>
-                <a:ea typeface="Calibri" pitchFamily="34" charset="-122"/>
-                <a:cs typeface="Calibri" pitchFamily="34" charset="-120"/>
+                <a:latin typeface="Arial" pitchFamily="34" charset="0"/>
+                <a:ea typeface="Arial" pitchFamily="34" charset="-122"/>
+                <a:cs typeface="Arial" pitchFamily="34" charset="-120"/>
               </a:rPr>
               <a:t>O participante executa tarefas reais pensando em voz alta; medimos sucesso, erros e tempo (o que faz).</a:t>
             </a:r>
@@ -7256,27 +8106,22 @@
         </p:nvSpPr>
         <p:spPr>
           <a:xfrm>
-            <a:off x="4709160" y="1371600"/>
-            <a:ext cx="3977640" cy="1554480"/>
+            <a:off x="4663440" y="1417320"/>
+            <a:ext cx="3977640" cy="1600200"/>
           </a:xfrm>
           <a:prstGeom prst="roundRect">
             <a:avLst>
-              <a:gd name="adj" fmla="val 4706"/>
+              <a:gd name="adj" fmla="val 7429"/>
             </a:avLst>
           </a:prstGeom>
           <a:solidFill>
-            <a:srgbClr val="F8FAFC"/>
+            <a:srgbClr val="FFFFFF"/>
           </a:solidFill>
-          <a:ln w="12700">
-            <a:solidFill>
-              <a:srgbClr val="E2E8F0"/>
-            </a:solidFill>
-            <a:prstDash val="solid"/>
-          </a:ln>
+          <a:ln/>
           <a:effectLst>
-            <a:outerShdw sx="100000" sy="100000" kx="0" ky="0" algn="bl" rotWithShape="0" blurRad="88900" dist="38100" dir="5400000">
+            <a:outerShdw sx="100000" sy="100000" kx="0" ky="0" algn="bl" rotWithShape="0" blurRad="139700" dist="38100" dir="5400000">
               <a:srgbClr val="0F172A">
-                <a:alpha val="10000"/>
+                <a:alpha val="8000"/>
               </a:srgbClr>
             </a:outerShdw>
           </a:effectLst>
@@ -7290,7 +8135,7 @@
         </p:nvSpPr>
         <p:spPr>
           <a:xfrm>
-            <a:off x="4937760" y="1554480"/>
+            <a:off x="4892040" y="1618488"/>
             <a:ext cx="3520440" cy="274320"/>
           </a:xfrm>
           <a:prstGeom prst="rect">
@@ -7311,9 +8156,9 @@
                 <a:solidFill>
                   <a:srgbClr val="06B6D4"/>
                 </a:solidFill>
-                <a:latin typeface="Calibri" pitchFamily="34" charset="0"/>
-                <a:ea typeface="Calibri" pitchFamily="34" charset="-122"/>
-                <a:cs typeface="Calibri" pitchFamily="34" charset="-120"/>
+                <a:latin typeface="Arial" pitchFamily="34" charset="0"/>
+                <a:ea typeface="Arial" pitchFamily="34" charset="-122"/>
+                <a:cs typeface="Arial" pitchFamily="34" charset="-120"/>
               </a:rPr>
               <a:t>EXPERIÊNCIA (UX)</a:t>
             </a:r>
@@ -7329,7 +8174,7 @@
         </p:nvSpPr>
         <p:spPr>
           <a:xfrm>
-            <a:off x="4937760" y="1828800"/>
+            <a:off x="4892040" y="1892808"/>
             <a:ext cx="3520440" cy="365760"/>
           </a:xfrm>
           <a:prstGeom prst="rect">
@@ -7350,9 +8195,9 @@
                 <a:solidFill>
                   <a:srgbClr val="0F172A"/>
                 </a:solidFill>
-                <a:latin typeface="Calibri" pitchFamily="34" charset="0"/>
-                <a:ea typeface="Calibri" pitchFamily="34" charset="-122"/>
-                <a:cs typeface="Calibri" pitchFamily="34" charset="-120"/>
+                <a:latin typeface="Arial" pitchFamily="34" charset="0"/>
+                <a:ea typeface="Arial" pitchFamily="34" charset="-122"/>
+                <a:cs typeface="Arial" pitchFamily="34" charset="-120"/>
               </a:rPr>
               <a:t>AttrakDiff</a:t>
             </a:r>
@@ -7368,8 +8213,8 @@
         </p:nvSpPr>
         <p:spPr>
           <a:xfrm>
-            <a:off x="4937760" y="2212848"/>
-            <a:ext cx="3520440" cy="640080"/>
+            <a:off x="4892040" y="2286000"/>
+            <a:ext cx="3474720" cy="640080"/>
           </a:xfrm>
           <a:prstGeom prst="rect">
             <a:avLst/>
@@ -7389,9 +8234,9 @@
                 <a:solidFill>
                   <a:srgbClr val="475569"/>
                 </a:solidFill>
-                <a:latin typeface="Calibri" pitchFamily="34" charset="0"/>
-                <a:ea typeface="Calibri" pitchFamily="34" charset="-122"/>
-                <a:cs typeface="Calibri" pitchFamily="34" charset="-120"/>
+                <a:latin typeface="Arial" pitchFamily="34" charset="0"/>
+                <a:ea typeface="Arial" pitchFamily="34" charset="-122"/>
+                <a:cs typeface="Arial" pitchFamily="34" charset="-120"/>
               </a:rPr>
               <a:t>Questionário de UX (28 pares de adjetivos) em 4 dimensões — PQ, HQ-I, HQ-S e ATT (o que sente).</a:t>
             </a:r>
@@ -7407,8 +8252,8 @@
         </p:nvSpPr>
         <p:spPr>
           <a:xfrm>
-            <a:off x="502920" y="3108960"/>
-            <a:ext cx="8229600" cy="365760"/>
+            <a:off x="548640" y="3246120"/>
+            <a:ext cx="8229600" cy="320040"/>
           </a:xfrm>
           <a:prstGeom prst="rect">
             <a:avLst/>
@@ -7424,83 +8269,30 @@
               <a:buNone/>
             </a:pPr>
             <a:r>
-              <a:rPr lang="en-US" sz="1300" b="1" dirty="0">
+              <a:rPr lang="en-US" sz="1400" b="1" dirty="0">
                 <a:solidFill>
                   <a:srgbClr val="0F172A"/>
                 </a:solidFill>
-                <a:latin typeface="Calibri" pitchFamily="34" charset="0"/>
-                <a:ea typeface="Calibri" pitchFamily="34" charset="-122"/>
-                <a:cs typeface="Calibri" pitchFamily="34" charset="-120"/>
-              </a:rPr>
-              <a:t>Participantes: </a:t>
-            </a:r>
-            <a:pPr indent="0" marL="0">
-              <a:buNone/>
-            </a:pPr>
-            <a:r>
-              <a:rPr lang="en-US" sz="1300" dirty="0">
-                <a:solidFill>
-                  <a:srgbClr val="475569"/>
-                </a:solidFill>
-                <a:latin typeface="Calibri" pitchFamily="34" charset="0"/>
-                <a:ea typeface="Calibri" pitchFamily="34" charset="-122"/>
-                <a:cs typeface="Calibri" pitchFamily="34" charset="-120"/>
-              </a:rPr>
-              <a:t>3 anônimos (P1–P3), todos técnicos de campo de ISP, com faixa etária e familiaridade digital variadas.</a:t>
-            </a:r>
-            <a:endParaRPr lang="en-US" sz="1300" dirty="0"/>
-          </a:p>
-        </p:txBody>
-      </p:sp>
-      <p:sp>
-        <p:nvSpPr>
-          <p:cNvPr id="13" name="Text 11"/>
-          <p:cNvSpPr/>
-          <p:nvPr/>
-        </p:nvSpPr>
-        <p:spPr>
-          <a:xfrm>
-            <a:off x="502920" y="3566160"/>
-            <a:ext cx="1097280" cy="365760"/>
-          </a:xfrm>
-          <a:prstGeom prst="rect">
-            <a:avLst/>
-          </a:prstGeom>
-          <a:noFill/>
-          <a:ln/>
-        </p:spPr>
-        <p:txBody>
-          <a:bodyPr wrap="square" lIns="0" tIns="0" rIns="0" bIns="0" rtlCol="0" anchor="ctr"/>
-          <a:lstStyle/>
-          <a:p>
-            <a:pPr indent="0" marL="0">
-              <a:buNone/>
-            </a:pPr>
-            <a:r>
-              <a:rPr lang="en-US" sz="1300" b="1" dirty="0">
-                <a:solidFill>
-                  <a:srgbClr val="0F172A"/>
-                </a:solidFill>
-                <a:latin typeface="Calibri" pitchFamily="34" charset="0"/>
-                <a:ea typeface="Calibri" pitchFamily="34" charset="-122"/>
-                <a:cs typeface="Calibri" pitchFamily="34" charset="-120"/>
-              </a:rPr>
-              <a:t>Tarefas:</a:t>
-            </a:r>
-            <a:endParaRPr lang="en-US" sz="1300" dirty="0"/>
-          </a:p>
-        </p:txBody>
-      </p:sp>
-      <p:sp>
-        <p:nvSpPr>
-          <p:cNvPr id="14" name="Shape 12"/>
-          <p:cNvSpPr/>
-          <p:nvPr/>
-        </p:nvSpPr>
-        <p:spPr>
-          <a:xfrm>
-            <a:off x="1371600" y="3566160"/>
-            <a:ext cx="855878" cy="365760"/>
+                <a:latin typeface="Arial" pitchFamily="34" charset="0"/>
+                <a:ea typeface="Arial" pitchFamily="34" charset="-122"/>
+                <a:cs typeface="Arial" pitchFamily="34" charset="-120"/>
+              </a:rPr>
+              <a:t>Tarefas do participante</a:t>
+            </a:r>
+            <a:endParaRPr lang="en-US" sz="1400" dirty="0"/>
+          </a:p>
+        </p:txBody>
+      </p:sp>
+      <p:sp>
+        <p:nvSpPr>
+          <p:cNvPr id="13" name="Shape 11"/>
+          <p:cNvSpPr/>
+          <p:nvPr/>
+        </p:nvSpPr>
+        <p:spPr>
+          <a:xfrm>
+            <a:off x="548640" y="3639312"/>
+            <a:ext cx="1225296" cy="402336"/>
           </a:xfrm>
           <a:prstGeom prst="roundRect">
             <a:avLst>
@@ -7508,26 +8300,21 @@
             </a:avLst>
           </a:prstGeom>
           <a:solidFill>
-            <a:srgbClr val="EFF6FF"/>
+            <a:srgbClr val="E8F1FF"/>
           </a:solidFill>
-          <a:ln w="12700">
-            <a:solidFill>
-              <a:srgbClr val="BFDBFE"/>
-            </a:solidFill>
-            <a:prstDash val="solid"/>
-          </a:ln>
-        </p:spPr>
-      </p:sp>
-      <p:sp>
-        <p:nvSpPr>
-          <p:cNvPr id="15" name="Text 13"/>
-          <p:cNvSpPr/>
-          <p:nvPr/>
-        </p:nvSpPr>
-        <p:spPr>
-          <a:xfrm>
-            <a:off x="1371600" y="3566160"/>
-            <a:ext cx="855878" cy="365760"/>
+          <a:ln/>
+        </p:spPr>
+      </p:sp>
+      <p:sp>
+        <p:nvSpPr>
+          <p:cNvPr id="14" name="Text 12"/>
+          <p:cNvSpPr/>
+          <p:nvPr/>
+        </p:nvSpPr>
+        <p:spPr>
+          <a:xfrm>
+            <a:off x="548640" y="3639312"/>
+            <a:ext cx="1225296" cy="402336"/>
           </a:xfrm>
           <a:prstGeom prst="rect">
             <a:avLst/>
@@ -7545,13 +8332,13 @@
             <a:r>
               <a:rPr lang="en-US" sz="1100" b="1" dirty="0">
                 <a:solidFill>
-                  <a:srgbClr val="1D4ED8"/>
-                </a:solidFill>
-                <a:latin typeface="Calibri" pitchFamily="34" charset="0"/>
-                <a:ea typeface="Calibri" pitchFamily="34" charset="-122"/>
-                <a:cs typeface="Calibri" pitchFamily="34" charset="-120"/>
-              </a:rPr>
-              <a:t>T1 Login</a:t>
+                  <a:srgbClr val="2563EB"/>
+                </a:solidFill>
+                <a:latin typeface="Arial" pitchFamily="34" charset="0"/>
+                <a:ea typeface="Arial" pitchFamily="34" charset="-122"/>
+                <a:cs typeface="Arial" pitchFamily="34" charset="-120"/>
+              </a:rPr>
+              <a:t>T1 · Login</a:t>
             </a:r>
             <a:endParaRPr lang="en-US" sz="1100" dirty="0"/>
           </a:p>
@@ -7559,14 +8346,14 @@
       </p:sp>
       <p:sp>
         <p:nvSpPr>
-          <p:cNvPr id="16" name="Shape 14"/>
-          <p:cNvSpPr/>
-          <p:nvPr/>
-        </p:nvSpPr>
-        <p:spPr>
-          <a:xfrm>
-            <a:off x="2392070" y="3566160"/>
-            <a:ext cx="1830629" cy="365760"/>
+          <p:cNvPr id="15" name="Shape 13"/>
+          <p:cNvSpPr/>
+          <p:nvPr/>
+        </p:nvSpPr>
+        <p:spPr>
+          <a:xfrm>
+            <a:off x="1920240" y="3639312"/>
+            <a:ext cx="2342693" cy="402336"/>
           </a:xfrm>
           <a:prstGeom prst="roundRect">
             <a:avLst>
@@ -7574,26 +8361,21 @@
             </a:avLst>
           </a:prstGeom>
           <a:solidFill>
-            <a:srgbClr val="EFF6FF"/>
+            <a:srgbClr val="E8F1FF"/>
           </a:solidFill>
-          <a:ln w="12700">
-            <a:solidFill>
-              <a:srgbClr val="BFDBFE"/>
-            </a:solidFill>
-            <a:prstDash val="solid"/>
-          </a:ln>
-        </p:spPr>
-      </p:sp>
-      <p:sp>
-        <p:nvSpPr>
-          <p:cNvPr id="17" name="Text 15"/>
-          <p:cNvSpPr/>
-          <p:nvPr/>
-        </p:nvSpPr>
-        <p:spPr>
-          <a:xfrm>
-            <a:off x="2392070" y="3566160"/>
-            <a:ext cx="1830629" cy="365760"/>
+          <a:ln/>
+        </p:spPr>
+      </p:sp>
+      <p:sp>
+        <p:nvSpPr>
+          <p:cNvPr id="16" name="Text 14"/>
+          <p:cNvSpPr/>
+          <p:nvPr/>
+        </p:nvSpPr>
+        <p:spPr>
+          <a:xfrm>
+            <a:off x="1920240" y="3639312"/>
+            <a:ext cx="2342693" cy="402336"/>
           </a:xfrm>
           <a:prstGeom prst="rect">
             <a:avLst/>
@@ -7611,13 +8393,13 @@
             <a:r>
               <a:rPr lang="en-US" sz="1100" b="1" dirty="0">
                 <a:solidFill>
-                  <a:srgbClr val="1D4ED8"/>
-                </a:solidFill>
-                <a:latin typeface="Calibri" pitchFamily="34" charset="0"/>
-                <a:ea typeface="Calibri" pitchFamily="34" charset="-122"/>
-                <a:cs typeface="Calibri" pitchFamily="34" charset="-120"/>
-              </a:rPr>
-              <a:t>T2 Chamados pendentes</a:t>
+                  <a:srgbClr val="2563EB"/>
+                </a:solidFill>
+                <a:latin typeface="Arial" pitchFamily="34" charset="0"/>
+                <a:ea typeface="Arial" pitchFamily="34" charset="-122"/>
+                <a:cs typeface="Arial" pitchFamily="34" charset="-120"/>
+              </a:rPr>
+              <a:t>T2 · Chamados pendentes</a:t>
             </a:r>
             <a:endParaRPr lang="en-US" sz="1100" dirty="0"/>
           </a:p>
@@ -7625,14 +8407,14 @@
       </p:sp>
       <p:sp>
         <p:nvSpPr>
-          <p:cNvPr id="18" name="Shape 16"/>
-          <p:cNvSpPr/>
-          <p:nvPr/>
-        </p:nvSpPr>
-        <p:spPr>
-          <a:xfrm>
-            <a:off x="4387291" y="3566160"/>
-            <a:ext cx="1530706" cy="365760"/>
+          <p:cNvPr id="17" name="Shape 15"/>
+          <p:cNvSpPr/>
+          <p:nvPr/>
+        </p:nvSpPr>
+        <p:spPr>
+          <a:xfrm>
+            <a:off x="4409237" y="3639312"/>
+            <a:ext cx="1998878" cy="402336"/>
           </a:xfrm>
           <a:prstGeom prst="roundRect">
             <a:avLst>
@@ -7640,26 +8422,21 @@
             </a:avLst>
           </a:prstGeom>
           <a:solidFill>
-            <a:srgbClr val="EFF6FF"/>
+            <a:srgbClr val="E8F1FF"/>
           </a:solidFill>
-          <a:ln w="12700">
-            <a:solidFill>
-              <a:srgbClr val="BFDBFE"/>
-            </a:solidFill>
-            <a:prstDash val="solid"/>
-          </a:ln>
-        </p:spPr>
-      </p:sp>
-      <p:sp>
-        <p:nvSpPr>
-          <p:cNvPr id="19" name="Text 17"/>
-          <p:cNvSpPr/>
-          <p:nvPr/>
-        </p:nvSpPr>
-        <p:spPr>
-          <a:xfrm>
-            <a:off x="4387291" y="3566160"/>
-            <a:ext cx="1530706" cy="365760"/>
+          <a:ln/>
+        </p:spPr>
+      </p:sp>
+      <p:sp>
+        <p:nvSpPr>
+          <p:cNvPr id="18" name="Text 16"/>
+          <p:cNvSpPr/>
+          <p:nvPr/>
+        </p:nvSpPr>
+        <p:spPr>
+          <a:xfrm>
+            <a:off x="4409237" y="3639312"/>
+            <a:ext cx="1998878" cy="402336"/>
           </a:xfrm>
           <a:prstGeom prst="rect">
             <a:avLst/>
@@ -7677,13 +8454,13 @@
             <a:r>
               <a:rPr lang="en-US" sz="1100" b="1" dirty="0">
                 <a:solidFill>
-                  <a:srgbClr val="1D4ED8"/>
-                </a:solidFill>
-                <a:latin typeface="Calibri" pitchFamily="34" charset="0"/>
-                <a:ea typeface="Calibri" pitchFamily="34" charset="-122"/>
-                <a:cs typeface="Calibri" pitchFamily="34" charset="-120"/>
-              </a:rPr>
-              <a:t>T3 Buscar chamado</a:t>
+                  <a:srgbClr val="2563EB"/>
+                </a:solidFill>
+                <a:latin typeface="Arial" pitchFamily="34" charset="0"/>
+                <a:ea typeface="Arial" pitchFamily="34" charset="-122"/>
+                <a:cs typeface="Arial" pitchFamily="34" charset="-120"/>
+              </a:rPr>
+              <a:t>T3 · Buscar chamado</a:t>
             </a:r>
             <a:endParaRPr lang="en-US" sz="1100" dirty="0"/>
           </a:p>
@@ -7691,14 +8468,14 @@
       </p:sp>
       <p:sp>
         <p:nvSpPr>
-          <p:cNvPr id="20" name="Shape 18"/>
-          <p:cNvSpPr/>
-          <p:nvPr/>
-        </p:nvSpPr>
-        <p:spPr>
-          <a:xfrm>
-            <a:off x="6082589" y="3566160"/>
-            <a:ext cx="780898" cy="365760"/>
+          <p:cNvPr id="19" name="Shape 17"/>
+          <p:cNvSpPr/>
+          <p:nvPr/>
+        </p:nvSpPr>
+        <p:spPr>
+          <a:xfrm>
+            <a:off x="548640" y="4133088"/>
+            <a:ext cx="1826971" cy="402336"/>
           </a:xfrm>
           <a:prstGeom prst="roundRect">
             <a:avLst>
@@ -7706,26 +8483,21 @@
             </a:avLst>
           </a:prstGeom>
           <a:solidFill>
-            <a:srgbClr val="EFF6FF"/>
+            <a:srgbClr val="E8F1FF"/>
           </a:solidFill>
-          <a:ln w="12700">
-            <a:solidFill>
-              <a:srgbClr val="BFDBFE"/>
-            </a:solidFill>
-            <a:prstDash val="solid"/>
-          </a:ln>
-        </p:spPr>
-      </p:sp>
-      <p:sp>
-        <p:nvSpPr>
-          <p:cNvPr id="21" name="Text 19"/>
-          <p:cNvSpPr/>
-          <p:nvPr/>
-        </p:nvSpPr>
-        <p:spPr>
-          <a:xfrm>
-            <a:off x="6082589" y="3566160"/>
-            <a:ext cx="780898" cy="365760"/>
+          <a:ln/>
+        </p:spPr>
+      </p:sp>
+      <p:sp>
+        <p:nvSpPr>
+          <p:cNvPr id="20" name="Text 18"/>
+          <p:cNvSpPr/>
+          <p:nvPr/>
+        </p:nvSpPr>
+        <p:spPr>
+          <a:xfrm>
+            <a:off x="548640" y="4133088"/>
+            <a:ext cx="1826971" cy="402336"/>
           </a:xfrm>
           <a:prstGeom prst="rect">
             <a:avLst/>
@@ -7743,13 +8515,13 @@
             <a:r>
               <a:rPr lang="en-US" sz="1100" b="1" dirty="0">
                 <a:solidFill>
-                  <a:srgbClr val="1D4ED8"/>
-                </a:solidFill>
-                <a:latin typeface="Calibri" pitchFamily="34" charset="0"/>
-                <a:ea typeface="Calibri" pitchFamily="34" charset="-122"/>
-                <a:cs typeface="Calibri" pitchFamily="34" charset="-120"/>
-              </a:rPr>
-              <a:t>T4 Rota</a:t>
+                  <a:srgbClr val="2563EB"/>
+                </a:solidFill>
+                <a:latin typeface="Arial" pitchFamily="34" charset="0"/>
+                <a:ea typeface="Arial" pitchFamily="34" charset="-122"/>
+                <a:cs typeface="Arial" pitchFamily="34" charset="-120"/>
+              </a:rPr>
+              <a:t>T4 · Rota no mapa</a:t>
             </a:r>
             <a:endParaRPr lang="en-US" sz="1100" dirty="0"/>
           </a:p>
@@ -7757,14 +8529,14 @@
       </p:sp>
       <p:sp>
         <p:nvSpPr>
-          <p:cNvPr id="22" name="Shape 20"/>
-          <p:cNvSpPr/>
-          <p:nvPr/>
-        </p:nvSpPr>
-        <p:spPr>
-          <a:xfrm>
-            <a:off x="7028078" y="3566160"/>
-            <a:ext cx="1830629" cy="365760"/>
+          <p:cNvPr id="21" name="Shape 19"/>
+          <p:cNvSpPr/>
+          <p:nvPr/>
+        </p:nvSpPr>
+        <p:spPr>
+          <a:xfrm>
+            <a:off x="2521915" y="4133088"/>
+            <a:ext cx="2514600" cy="402336"/>
           </a:xfrm>
           <a:prstGeom prst="roundRect">
             <a:avLst>
@@ -7772,15 +8544,49 @@
             </a:avLst>
           </a:prstGeom>
           <a:solidFill>
-            <a:srgbClr val="EFF6FF"/>
+            <a:srgbClr val="E8F1FF"/>
           </a:solidFill>
-          <a:ln w="12700">
-            <a:solidFill>
-              <a:srgbClr val="BFDBFE"/>
-            </a:solidFill>
-            <a:prstDash val="solid"/>
-          </a:ln>
-        </p:spPr>
+          <a:ln/>
+        </p:spPr>
+      </p:sp>
+      <p:sp>
+        <p:nvSpPr>
+          <p:cNvPr id="22" name="Text 20"/>
+          <p:cNvSpPr/>
+          <p:nvPr/>
+        </p:nvSpPr>
+        <p:spPr>
+          <a:xfrm>
+            <a:off x="2521915" y="4133088"/>
+            <a:ext cx="2514600" cy="402336"/>
+          </a:xfrm>
+          <a:prstGeom prst="rect">
+            <a:avLst/>
+          </a:prstGeom>
+          <a:noFill/>
+          <a:ln/>
+        </p:spPr>
+        <p:txBody>
+          <a:bodyPr wrap="square" lIns="0" tIns="0" rIns="0" bIns="0" rtlCol="0" anchor="ctr"/>
+          <a:lstStyle/>
+          <a:p>
+            <a:pPr algn="ctr" indent="0" marL="0">
+              <a:buNone/>
+            </a:pPr>
+            <a:r>
+              <a:rPr lang="en-US" sz="1100" b="1" dirty="0">
+                <a:solidFill>
+                  <a:srgbClr val="2563EB"/>
+                </a:solidFill>
+                <a:latin typeface="Arial" pitchFamily="34" charset="0"/>
+                <a:ea typeface="Arial" pitchFamily="34" charset="-122"/>
+                <a:cs typeface="Arial" pitchFamily="34" charset="-120"/>
+              </a:rPr>
+              <a:t>T5 · Encerrar / Reagendar</a:t>
+            </a:r>
+            <a:endParaRPr lang="en-US" sz="1100" dirty="0"/>
+          </a:p>
+        </p:txBody>
       </p:sp>
       <p:sp>
         <p:nvSpPr>
@@ -7790,34 +8596,34 @@
         </p:nvSpPr>
         <p:spPr>
           <a:xfrm>
-            <a:off x="7028078" y="3566160"/>
-            <a:ext cx="1830629" cy="365760"/>
-          </a:xfrm>
-          <a:prstGeom prst="rect">
-            <a:avLst/>
-          </a:prstGeom>
-          <a:noFill/>
-          <a:ln/>
-        </p:spPr>
-        <p:txBody>
-          <a:bodyPr wrap="square" lIns="0" tIns="0" rIns="0" bIns="0" rtlCol="0" anchor="ctr"/>
-          <a:lstStyle/>
-          <a:p>
-            <a:pPr algn="ctr" indent="0" marL="0">
-              <a:buNone/>
-            </a:pPr>
-            <a:r>
-              <a:rPr lang="en-US" sz="1100" b="1" dirty="0">
-                <a:solidFill>
-                  <a:srgbClr val="1D4ED8"/>
-                </a:solidFill>
-                <a:latin typeface="Calibri" pitchFamily="34" charset="0"/>
-                <a:ea typeface="Calibri" pitchFamily="34" charset="-122"/>
-                <a:cs typeface="Calibri" pitchFamily="34" charset="-120"/>
-              </a:rPr>
-              <a:t>T5 Encerrar/Reagendar</a:t>
-            </a:r>
-            <a:endParaRPr lang="en-US" sz="1100" dirty="0"/>
+            <a:off x="502920" y="4777740"/>
+            <a:ext cx="5486400" cy="274320"/>
+          </a:xfrm>
+          <a:prstGeom prst="rect">
+            <a:avLst/>
+          </a:prstGeom>
+          <a:noFill/>
+          <a:ln/>
+        </p:spPr>
+        <p:txBody>
+          <a:bodyPr wrap="square" lIns="0" tIns="0" rIns="0" bIns="0" rtlCol="0" anchor="ctr"/>
+          <a:lstStyle/>
+          <a:p>
+            <a:pPr algn="l" indent="0" marL="0">
+              <a:buNone/>
+            </a:pPr>
+            <a:r>
+              <a:rPr lang="en-US" sz="900" dirty="0">
+                <a:solidFill>
+                  <a:srgbClr val="64748B"/>
+                </a:solidFill>
+                <a:latin typeface="Arial" pitchFamily="34" charset="0"/>
+                <a:ea typeface="Arial" pitchFamily="34" charset="-122"/>
+                <a:cs typeface="Arial" pitchFamily="34" charset="-120"/>
+              </a:rPr>
+              <a:t>Track Fibra · IHC — UTFPR Campo Mourão</a:t>
+            </a:r>
+            <a:endParaRPr lang="en-US" sz="900" dirty="0"/>
           </a:p>
         </p:txBody>
       </p:sp>
@@ -7829,20 +8635,20 @@
         </p:nvSpPr>
         <p:spPr>
           <a:xfrm>
-            <a:off x="457200" y="4759452"/>
-            <a:ext cx="5486400" cy="274320"/>
-          </a:xfrm>
-          <a:prstGeom prst="rect">
-            <a:avLst/>
-          </a:prstGeom>
-          <a:noFill/>
-          <a:ln/>
-        </p:spPr>
-        <p:txBody>
-          <a:bodyPr wrap="square" rtlCol="0" anchor="ctr"/>
-          <a:lstStyle/>
-          <a:p>
-            <a:pPr algn="l" indent="0" marL="0">
+            <a:off x="7726680" y="4777740"/>
+            <a:ext cx="914400" cy="274320"/>
+          </a:xfrm>
+          <a:prstGeom prst="rect">
+            <a:avLst/>
+          </a:prstGeom>
+          <a:noFill/>
+          <a:ln/>
+        </p:spPr>
+        <p:txBody>
+          <a:bodyPr wrap="square" lIns="0" tIns="0" rIns="0" bIns="0" rtlCol="0" anchor="ctr"/>
+          <a:lstStyle/>
+          <a:p>
+            <a:pPr algn="r" indent="0" marL="0">
               <a:buNone/>
             </a:pPr>
             <a:r>
@@ -7850,50 +8656,11 @@
                 <a:solidFill>
                   <a:srgbClr val="64748B"/>
                 </a:solidFill>
-                <a:latin typeface="Calibri" pitchFamily="34" charset="0"/>
-                <a:ea typeface="Calibri" pitchFamily="34" charset="-122"/>
-                <a:cs typeface="Calibri" pitchFamily="34" charset="-120"/>
-              </a:rPr>
-              <a:t>Track Fibra · IHC — UTFPR Campo Mourão</a:t>
-            </a:r>
-            <a:endParaRPr lang="en-US" sz="900" dirty="0"/>
-          </a:p>
-        </p:txBody>
-      </p:sp>
-      <p:sp>
-        <p:nvSpPr>
-          <p:cNvPr id="25" name="Text 23"/>
-          <p:cNvSpPr/>
-          <p:nvPr/>
-        </p:nvSpPr>
-        <p:spPr>
-          <a:xfrm>
-            <a:off x="7772400" y="4759452"/>
-            <a:ext cx="914400" cy="274320"/>
-          </a:xfrm>
-          <a:prstGeom prst="rect">
-            <a:avLst/>
-          </a:prstGeom>
-          <a:noFill/>
-          <a:ln/>
-        </p:spPr>
-        <p:txBody>
-          <a:bodyPr wrap="square" rtlCol="0" anchor="ctr"/>
-          <a:lstStyle/>
-          <a:p>
-            <a:pPr algn="r" indent="0" marL="0">
-              <a:buNone/>
-            </a:pPr>
-            <a:r>
-              <a:rPr lang="en-US" sz="900" dirty="0">
-                <a:solidFill>
-                  <a:srgbClr val="64748B"/>
-                </a:solidFill>
-                <a:latin typeface="Calibri" pitchFamily="34" charset="0"/>
-                <a:ea typeface="Calibri" pitchFamily="34" charset="-122"/>
-                <a:cs typeface="Calibri" pitchFamily="34" charset="-120"/>
-              </a:rPr>
-              <a:t>7 / 11</a:t>
+                <a:latin typeface="Arial" pitchFamily="34" charset="0"/>
+                <a:ea typeface="Arial" pitchFamily="34" charset="-122"/>
+                <a:cs typeface="Arial" pitchFamily="34" charset="-120"/>
+              </a:rPr>
+              <a:t>7 / 12</a:t>
             </a:r>
             <a:endParaRPr lang="en-US" sz="900" dirty="0"/>
           </a:p>
@@ -7913,7 +8680,7 @@
     <p:bg>
       <p:bgPr>
         <a:solidFill>
-          <a:srgbClr val="FFFFFF"/>
+          <a:srgbClr val="F8FAFC"/>
         </a:solidFill>
       </p:bgPr>
     </p:bg>
@@ -7939,7 +8706,7 @@
         </p:nvSpPr>
         <p:spPr>
           <a:xfrm>
-            <a:off x="502920" y="301752"/>
+            <a:off x="548640" y="329184"/>
             <a:ext cx="8229600" cy="274320"/>
           </a:xfrm>
           <a:prstGeom prst="rect">
@@ -7956,13 +8723,1020 @@
               <a:buNone/>
             </a:pPr>
             <a:r>
-              <a:rPr lang="en-US" sz="1200" b="1" spc="300" kern="0" dirty="0">
+              <a:rPr lang="en-US" sz="1200" b="1" spc="400" kern="0" dirty="0">
                 <a:solidFill>
                   <a:srgbClr val="06B6D4"/>
                 </a:solidFill>
-                <a:latin typeface="Calibri" pitchFamily="34" charset="0"/>
-                <a:ea typeface="Calibri" pitchFamily="34" charset="-122"/>
-                <a:cs typeface="Calibri" pitchFamily="34" charset="-120"/>
+                <a:latin typeface="Arial" pitchFamily="34" charset="0"/>
+                <a:ea typeface="Arial" pitchFamily="34" charset="-122"/>
+                <a:cs typeface="Arial" pitchFamily="34" charset="-120"/>
+              </a:rPr>
+              <a:t>TESTE DE USABILIDADE + UX</a:t>
+            </a:r>
+            <a:endParaRPr lang="en-US" sz="1200" dirty="0"/>
+          </a:p>
+        </p:txBody>
+      </p:sp>
+      <p:sp>
+        <p:nvSpPr>
+          <p:cNvPr id="3" name="Text 1"/>
+          <p:cNvSpPr/>
+          <p:nvPr/>
+        </p:nvSpPr>
+        <p:spPr>
+          <a:xfrm>
+            <a:off x="502920" y="585216"/>
+            <a:ext cx="8229600" cy="640080"/>
+          </a:xfrm>
+          <a:prstGeom prst="rect">
+            <a:avLst/>
+          </a:prstGeom>
+          <a:noFill/>
+          <a:ln/>
+        </p:spPr>
+        <p:txBody>
+          <a:bodyPr wrap="square" lIns="0" tIns="0" rIns="0" bIns="0" rtlCol="0" anchor="ctr"/>
+          <a:lstStyle/>
+          <a:p>
+            <a:pPr indent="0" marL="0">
+              <a:buNone/>
+            </a:pPr>
+            <a:r>
+              <a:rPr lang="en-US" sz="3400" b="1" dirty="0">
+                <a:solidFill>
+                  <a:srgbClr val="0F172A"/>
+                </a:solidFill>
+                <a:latin typeface="Arial" pitchFamily="34" charset="0"/>
+                <a:ea typeface="Arial" pitchFamily="34" charset="-122"/>
+                <a:cs typeface="Arial" pitchFamily="34" charset="-120"/>
+              </a:rPr>
+              <a:t>Perfil dos participantes</a:t>
+            </a:r>
+            <a:endParaRPr lang="en-US" sz="3400" dirty="0"/>
+          </a:p>
+        </p:txBody>
+      </p:sp>
+      <p:sp>
+        <p:nvSpPr>
+          <p:cNvPr id="4" name="Text 2"/>
+          <p:cNvSpPr/>
+          <p:nvPr/>
+        </p:nvSpPr>
+        <p:spPr>
+          <a:xfrm>
+            <a:off x="548640" y="1234440"/>
+            <a:ext cx="8138160" cy="365760"/>
+          </a:xfrm>
+          <a:prstGeom prst="rect">
+            <a:avLst/>
+          </a:prstGeom>
+          <a:noFill/>
+          <a:ln/>
+        </p:spPr>
+        <p:txBody>
+          <a:bodyPr wrap="square" lIns="0" tIns="0" rIns="0" bIns="0" rtlCol="0" anchor="ctr"/>
+          <a:lstStyle/>
+          <a:p>
+            <a:pPr indent="0" marL="0">
+              <a:buNone/>
+            </a:pPr>
+            <a:r>
+              <a:rPr lang="en-US" sz="1300" dirty="0">
+                <a:solidFill>
+                  <a:srgbClr val="475569"/>
+                </a:solidFill>
+                <a:latin typeface="Arial" pitchFamily="34" charset="0"/>
+                <a:ea typeface="Arial" pitchFamily="34" charset="-122"/>
+                <a:cs typeface="Arial" pitchFamily="34" charset="-120"/>
+              </a:rPr>
+              <a:t>3 participantes do público-alvo (técnico de campo de ISP) — variando faixa etária e familiaridade digital.</a:t>
+            </a:r>
+            <a:endParaRPr lang="en-US" sz="1300" dirty="0"/>
+          </a:p>
+        </p:txBody>
+      </p:sp>
+      <p:sp>
+        <p:nvSpPr>
+          <p:cNvPr id="5" name="Shape 3"/>
+          <p:cNvSpPr/>
+          <p:nvPr/>
+        </p:nvSpPr>
+        <p:spPr>
+          <a:xfrm>
+            <a:off x="502920" y="1783080"/>
+            <a:ext cx="2697480" cy="2194560"/>
+          </a:xfrm>
+          <a:prstGeom prst="roundRect">
+            <a:avLst>
+              <a:gd name="adj" fmla="val 5417"/>
+            </a:avLst>
+          </a:prstGeom>
+          <a:solidFill>
+            <a:srgbClr val="FFFFFF"/>
+          </a:solidFill>
+          <a:ln/>
+          <a:effectLst>
+            <a:outerShdw sx="100000" sy="100000" kx="0" ky="0" algn="bl" rotWithShape="0" blurRad="139700" dist="38100" dir="5400000">
+              <a:srgbClr val="0F172A">
+                <a:alpha val="8000"/>
+              </a:srgbClr>
+            </a:outerShdw>
+          </a:effectLst>
+        </p:spPr>
+      </p:sp>
+      <p:sp>
+        <p:nvSpPr>
+          <p:cNvPr id="6" name="Shape 4"/>
+          <p:cNvSpPr/>
+          <p:nvPr/>
+        </p:nvSpPr>
+        <p:spPr>
+          <a:xfrm>
+            <a:off x="777240" y="2057400"/>
+            <a:ext cx="566928" cy="566928"/>
+          </a:xfrm>
+          <a:prstGeom prst="ellipse">
+            <a:avLst/>
+          </a:prstGeom>
+          <a:solidFill>
+            <a:srgbClr val="2563EB"/>
+          </a:solidFill>
+          <a:ln/>
+        </p:spPr>
+      </p:sp>
+      <p:sp>
+        <p:nvSpPr>
+          <p:cNvPr id="7" name="Text 5"/>
+          <p:cNvSpPr/>
+          <p:nvPr/>
+        </p:nvSpPr>
+        <p:spPr>
+          <a:xfrm>
+            <a:off x="777240" y="2057400"/>
+            <a:ext cx="566928" cy="566928"/>
+          </a:xfrm>
+          <a:prstGeom prst="rect">
+            <a:avLst/>
+          </a:prstGeom>
+          <a:noFill/>
+          <a:ln/>
+        </p:spPr>
+        <p:txBody>
+          <a:bodyPr wrap="square" lIns="0" tIns="0" rIns="0" bIns="0" rtlCol="0" anchor="ctr"/>
+          <a:lstStyle/>
+          <a:p>
+            <a:pPr algn="ctr" indent="0" marL="0">
+              <a:buNone/>
+            </a:pPr>
+            <a:r>
+              <a:rPr lang="en-US" sz="1400" b="1" dirty="0">
+                <a:solidFill>
+                  <a:srgbClr val="FFFFFF"/>
+                </a:solidFill>
+                <a:latin typeface="Arial" pitchFamily="34" charset="0"/>
+                <a:ea typeface="Arial" pitchFamily="34" charset="-122"/>
+                <a:cs typeface="Arial" pitchFamily="34" charset="-120"/>
+              </a:rPr>
+              <a:t>P1</a:t>
+            </a:r>
+            <a:endParaRPr lang="en-US" sz="1400" dirty="0"/>
+          </a:p>
+        </p:txBody>
+      </p:sp>
+      <p:sp>
+        <p:nvSpPr>
+          <p:cNvPr id="8" name="Text 6"/>
+          <p:cNvSpPr/>
+          <p:nvPr/>
+        </p:nvSpPr>
+        <p:spPr>
+          <a:xfrm>
+            <a:off x="777240" y="2743200"/>
+            <a:ext cx="2148840" cy="502920"/>
+          </a:xfrm>
+          <a:prstGeom prst="rect">
+            <a:avLst/>
+          </a:prstGeom>
+          <a:noFill/>
+          <a:ln/>
+        </p:spPr>
+        <p:txBody>
+          <a:bodyPr wrap="square" lIns="0" tIns="0" rIns="0" bIns="0" rtlCol="0" anchor="ctr"/>
+          <a:lstStyle/>
+          <a:p>
+            <a:pPr indent="0" marL="0">
+              <a:buNone/>
+            </a:pPr>
+            <a:r>
+              <a:rPr lang="en-US" sz="1500" b="1" dirty="0">
+                <a:solidFill>
+                  <a:srgbClr val="0F172A"/>
+                </a:solidFill>
+                <a:latin typeface="Arial" pitchFamily="34" charset="0"/>
+                <a:ea typeface="Arial" pitchFamily="34" charset="-122"/>
+                <a:cs typeface="Arial" pitchFamily="34" charset="-120"/>
+              </a:rPr>
+              <a:t>Técnico de instalação</a:t>
+            </a:r>
+            <a:endParaRPr lang="en-US" sz="1500" dirty="0"/>
+          </a:p>
+        </p:txBody>
+      </p:sp>
+      <p:sp>
+        <p:nvSpPr>
+          <p:cNvPr id="9" name="Text 7"/>
+          <p:cNvSpPr/>
+          <p:nvPr/>
+        </p:nvSpPr>
+        <p:spPr>
+          <a:xfrm>
+            <a:off x="777240" y="3246120"/>
+            <a:ext cx="2194560" cy="685800"/>
+          </a:xfrm>
+          <a:prstGeom prst="rect">
+            <a:avLst/>
+          </a:prstGeom>
+          <a:noFill/>
+          <a:ln/>
+        </p:spPr>
+        <p:txBody>
+          <a:bodyPr wrap="square" lIns="0" tIns="0" rIns="0" bIns="0" rtlCol="0" anchor="ctr"/>
+          <a:lstStyle/>
+          <a:p>
+            <a:pPr indent="0" marL="0">
+              <a:lnSpc>
+                <a:spcPct val="115000"/>
+              </a:lnSpc>
+              <a:buNone/>
+            </a:pPr>
+            <a:r>
+              <a:rPr lang="en-US" sz="1150" dirty="0">
+                <a:solidFill>
+                  <a:srgbClr val="64748B"/>
+                </a:solidFill>
+                <a:latin typeface="Arial" pitchFamily="34" charset="0"/>
+                <a:ea typeface="Arial" pitchFamily="34" charset="-122"/>
+                <a:cs typeface="Arial" pitchFamily="34" charset="-120"/>
+              </a:rPr>
+              <a:t>Idade  </a:t>
+            </a:r>
+            <a:pPr indent="0" marL="0">
+              <a:lnSpc>
+                <a:spcPct val="115000"/>
+              </a:lnSpc>
+              <a:buNone/>
+            </a:pPr>
+            <a:r>
+              <a:rPr lang="en-US" sz="1150" b="1" dirty="0">
+                <a:solidFill>
+                  <a:srgbClr val="0F172A"/>
+                </a:solidFill>
+                <a:latin typeface="Arial" pitchFamily="34" charset="0"/>
+                <a:ea typeface="Arial" pitchFamily="34" charset="-122"/>
+                <a:cs typeface="Arial" pitchFamily="34" charset="-120"/>
+              </a:rPr>
+              <a:t>18–25 anos</a:t>
+            </a:r>
+            <a:endParaRPr lang="en-US" sz="1150" dirty="0"/>
+          </a:p>
+          <a:p>
+            <a:pPr indent="0" marL="0">
+              <a:lnSpc>
+                <a:spcPct val="115000"/>
+              </a:lnSpc>
+              <a:buNone/>
+            </a:pPr>
+            <a:r>
+              <a:rPr lang="en-US" sz="1150" dirty="0">
+                <a:solidFill>
+                  <a:srgbClr val="64748B"/>
+                </a:solidFill>
+                <a:latin typeface="Arial" pitchFamily="34" charset="0"/>
+                <a:ea typeface="Arial" pitchFamily="34" charset="-122"/>
+                <a:cs typeface="Arial" pitchFamily="34" charset="-120"/>
+              </a:rPr>
+              <a:t>Familiaridade digital  </a:t>
+            </a:r>
+            <a:pPr indent="0" marL="0">
+              <a:lnSpc>
+                <a:spcPct val="115000"/>
+              </a:lnSpc>
+              <a:buNone/>
+            </a:pPr>
+            <a:r>
+              <a:rPr lang="en-US" sz="1150" b="1" dirty="0">
+                <a:solidFill>
+                  <a:srgbClr val="0F172A"/>
+                </a:solidFill>
+                <a:latin typeface="Arial" pitchFamily="34" charset="0"/>
+                <a:ea typeface="Arial" pitchFamily="34" charset="-122"/>
+                <a:cs typeface="Arial" pitchFamily="34" charset="-120"/>
+              </a:rPr>
+              <a:t>Alta</a:t>
+            </a:r>
+            <a:endParaRPr lang="en-US" sz="1150" dirty="0"/>
+          </a:p>
+          <a:p>
+            <a:pPr indent="0" marL="0">
+              <a:lnSpc>
+                <a:spcPct val="115000"/>
+              </a:lnSpc>
+              <a:buNone/>
+            </a:pPr>
+            <a:r>
+              <a:rPr lang="en-US" sz="1150" dirty="0">
+                <a:solidFill>
+                  <a:srgbClr val="64748B"/>
+                </a:solidFill>
+                <a:latin typeface="Arial" pitchFamily="34" charset="0"/>
+                <a:ea typeface="Arial" pitchFamily="34" charset="-122"/>
+                <a:cs typeface="Arial" pitchFamily="34" charset="-120"/>
+              </a:rPr>
+              <a:t>Meio atual  </a:t>
+            </a:r>
+            <a:pPr indent="0" marL="0">
+              <a:lnSpc>
+                <a:spcPct val="115000"/>
+              </a:lnSpc>
+              <a:buNone/>
+            </a:pPr>
+            <a:r>
+              <a:rPr lang="en-US" sz="1150" b="1" dirty="0">
+                <a:solidFill>
+                  <a:srgbClr val="0F172A"/>
+                </a:solidFill>
+                <a:latin typeface="Arial" pitchFamily="34" charset="0"/>
+                <a:ea typeface="Arial" pitchFamily="34" charset="-122"/>
+                <a:cs typeface="Arial" pitchFamily="34" charset="-120"/>
+              </a:rPr>
+              <a:t>WhatsApp</a:t>
+            </a:r>
+            <a:endParaRPr lang="en-US" sz="1150" dirty="0"/>
+          </a:p>
+        </p:txBody>
+      </p:sp>
+      <p:sp>
+        <p:nvSpPr>
+          <p:cNvPr id="10" name="Shape 8"/>
+          <p:cNvSpPr/>
+          <p:nvPr/>
+        </p:nvSpPr>
+        <p:spPr>
+          <a:xfrm>
+            <a:off x="3447288" y="1783080"/>
+            <a:ext cx="2697480" cy="2194560"/>
+          </a:xfrm>
+          <a:prstGeom prst="roundRect">
+            <a:avLst>
+              <a:gd name="adj" fmla="val 5417"/>
+            </a:avLst>
+          </a:prstGeom>
+          <a:solidFill>
+            <a:srgbClr val="FFFFFF"/>
+          </a:solidFill>
+          <a:ln/>
+          <a:effectLst>
+            <a:outerShdw sx="100000" sy="100000" kx="0" ky="0" algn="bl" rotWithShape="0" blurRad="139700" dist="38100" dir="5400000">
+              <a:srgbClr val="0F172A">
+                <a:alpha val="8000"/>
+              </a:srgbClr>
+            </a:outerShdw>
+          </a:effectLst>
+        </p:spPr>
+      </p:sp>
+      <p:sp>
+        <p:nvSpPr>
+          <p:cNvPr id="11" name="Shape 9"/>
+          <p:cNvSpPr/>
+          <p:nvPr/>
+        </p:nvSpPr>
+        <p:spPr>
+          <a:xfrm>
+            <a:off x="3721608" y="2057400"/>
+            <a:ext cx="566928" cy="566928"/>
+          </a:xfrm>
+          <a:prstGeom prst="ellipse">
+            <a:avLst/>
+          </a:prstGeom>
+          <a:solidFill>
+            <a:srgbClr val="2563EB"/>
+          </a:solidFill>
+          <a:ln/>
+        </p:spPr>
+      </p:sp>
+      <p:sp>
+        <p:nvSpPr>
+          <p:cNvPr id="12" name="Text 10"/>
+          <p:cNvSpPr/>
+          <p:nvPr/>
+        </p:nvSpPr>
+        <p:spPr>
+          <a:xfrm>
+            <a:off x="3721608" y="2057400"/>
+            <a:ext cx="566928" cy="566928"/>
+          </a:xfrm>
+          <a:prstGeom prst="rect">
+            <a:avLst/>
+          </a:prstGeom>
+          <a:noFill/>
+          <a:ln/>
+        </p:spPr>
+        <p:txBody>
+          <a:bodyPr wrap="square" lIns="0" tIns="0" rIns="0" bIns="0" rtlCol="0" anchor="ctr"/>
+          <a:lstStyle/>
+          <a:p>
+            <a:pPr algn="ctr" indent="0" marL="0">
+              <a:buNone/>
+            </a:pPr>
+            <a:r>
+              <a:rPr lang="en-US" sz="1400" b="1" dirty="0">
+                <a:solidFill>
+                  <a:srgbClr val="FFFFFF"/>
+                </a:solidFill>
+                <a:latin typeface="Arial" pitchFamily="34" charset="0"/>
+                <a:ea typeface="Arial" pitchFamily="34" charset="-122"/>
+                <a:cs typeface="Arial" pitchFamily="34" charset="-120"/>
+              </a:rPr>
+              <a:t>P2</a:t>
+            </a:r>
+            <a:endParaRPr lang="en-US" sz="1400" dirty="0"/>
+          </a:p>
+        </p:txBody>
+      </p:sp>
+      <p:sp>
+        <p:nvSpPr>
+          <p:cNvPr id="13" name="Text 11"/>
+          <p:cNvSpPr/>
+          <p:nvPr/>
+        </p:nvSpPr>
+        <p:spPr>
+          <a:xfrm>
+            <a:off x="3721608" y="2743200"/>
+            <a:ext cx="2148840" cy="502920"/>
+          </a:xfrm>
+          <a:prstGeom prst="rect">
+            <a:avLst/>
+          </a:prstGeom>
+          <a:noFill/>
+          <a:ln/>
+        </p:spPr>
+        <p:txBody>
+          <a:bodyPr wrap="square" lIns="0" tIns="0" rIns="0" bIns="0" rtlCol="0" anchor="ctr"/>
+          <a:lstStyle/>
+          <a:p>
+            <a:pPr indent="0" marL="0">
+              <a:buNone/>
+            </a:pPr>
+            <a:r>
+              <a:rPr lang="en-US" sz="1500" b="1" dirty="0">
+                <a:solidFill>
+                  <a:srgbClr val="0F172A"/>
+                </a:solidFill>
+                <a:latin typeface="Arial" pitchFamily="34" charset="0"/>
+                <a:ea typeface="Arial" pitchFamily="34" charset="-122"/>
+                <a:cs typeface="Arial" pitchFamily="34" charset="-120"/>
+              </a:rPr>
+              <a:t>Técnico de manutenção</a:t>
+            </a:r>
+            <a:endParaRPr lang="en-US" sz="1500" dirty="0"/>
+          </a:p>
+        </p:txBody>
+      </p:sp>
+      <p:sp>
+        <p:nvSpPr>
+          <p:cNvPr id="14" name="Text 12"/>
+          <p:cNvSpPr/>
+          <p:nvPr/>
+        </p:nvSpPr>
+        <p:spPr>
+          <a:xfrm>
+            <a:off x="3721608" y="3246120"/>
+            <a:ext cx="2194560" cy="685800"/>
+          </a:xfrm>
+          <a:prstGeom prst="rect">
+            <a:avLst/>
+          </a:prstGeom>
+          <a:noFill/>
+          <a:ln/>
+        </p:spPr>
+        <p:txBody>
+          <a:bodyPr wrap="square" lIns="0" tIns="0" rIns="0" bIns="0" rtlCol="0" anchor="ctr"/>
+          <a:lstStyle/>
+          <a:p>
+            <a:pPr indent="0" marL="0">
+              <a:lnSpc>
+                <a:spcPct val="115000"/>
+              </a:lnSpc>
+              <a:buNone/>
+            </a:pPr>
+            <a:r>
+              <a:rPr lang="en-US" sz="1150" dirty="0">
+                <a:solidFill>
+                  <a:srgbClr val="64748B"/>
+                </a:solidFill>
+                <a:latin typeface="Arial" pitchFamily="34" charset="0"/>
+                <a:ea typeface="Arial" pitchFamily="34" charset="-122"/>
+                <a:cs typeface="Arial" pitchFamily="34" charset="-120"/>
+              </a:rPr>
+              <a:t>Idade  </a:t>
+            </a:r>
+            <a:pPr indent="0" marL="0">
+              <a:lnSpc>
+                <a:spcPct val="115000"/>
+              </a:lnSpc>
+              <a:buNone/>
+            </a:pPr>
+            <a:r>
+              <a:rPr lang="en-US" sz="1150" b="1" dirty="0">
+                <a:solidFill>
+                  <a:srgbClr val="0F172A"/>
+                </a:solidFill>
+                <a:latin typeface="Arial" pitchFamily="34" charset="0"/>
+                <a:ea typeface="Arial" pitchFamily="34" charset="-122"/>
+                <a:cs typeface="Arial" pitchFamily="34" charset="-120"/>
+              </a:rPr>
+              <a:t>26–35 anos</a:t>
+            </a:r>
+            <a:endParaRPr lang="en-US" sz="1150" dirty="0"/>
+          </a:p>
+          <a:p>
+            <a:pPr indent="0" marL="0">
+              <a:lnSpc>
+                <a:spcPct val="115000"/>
+              </a:lnSpc>
+              <a:buNone/>
+            </a:pPr>
+            <a:r>
+              <a:rPr lang="en-US" sz="1150" dirty="0">
+                <a:solidFill>
+                  <a:srgbClr val="64748B"/>
+                </a:solidFill>
+                <a:latin typeface="Arial" pitchFamily="34" charset="0"/>
+                <a:ea typeface="Arial" pitchFamily="34" charset="-122"/>
+                <a:cs typeface="Arial" pitchFamily="34" charset="-120"/>
+              </a:rPr>
+              <a:t>Familiaridade digital  </a:t>
+            </a:r>
+            <a:pPr indent="0" marL="0">
+              <a:lnSpc>
+                <a:spcPct val="115000"/>
+              </a:lnSpc>
+              <a:buNone/>
+            </a:pPr>
+            <a:r>
+              <a:rPr lang="en-US" sz="1150" b="1" dirty="0">
+                <a:solidFill>
+                  <a:srgbClr val="0F172A"/>
+                </a:solidFill>
+                <a:latin typeface="Arial" pitchFamily="34" charset="0"/>
+                <a:ea typeface="Arial" pitchFamily="34" charset="-122"/>
+                <a:cs typeface="Arial" pitchFamily="34" charset="-120"/>
+              </a:rPr>
+              <a:t>Média</a:t>
+            </a:r>
+            <a:endParaRPr lang="en-US" sz="1150" dirty="0"/>
+          </a:p>
+          <a:p>
+            <a:pPr indent="0" marL="0">
+              <a:lnSpc>
+                <a:spcPct val="115000"/>
+              </a:lnSpc>
+              <a:buNone/>
+            </a:pPr>
+            <a:r>
+              <a:rPr lang="en-US" sz="1150" dirty="0">
+                <a:solidFill>
+                  <a:srgbClr val="64748B"/>
+                </a:solidFill>
+                <a:latin typeface="Arial" pitchFamily="34" charset="0"/>
+                <a:ea typeface="Arial" pitchFamily="34" charset="-122"/>
+                <a:cs typeface="Arial" pitchFamily="34" charset="-120"/>
+              </a:rPr>
+              <a:t>Meio atual  </a:t>
+            </a:r>
+            <a:pPr indent="0" marL="0">
+              <a:lnSpc>
+                <a:spcPct val="115000"/>
+              </a:lnSpc>
+              <a:buNone/>
+            </a:pPr>
+            <a:r>
+              <a:rPr lang="en-US" sz="1150" b="1" dirty="0">
+                <a:solidFill>
+                  <a:srgbClr val="0F172A"/>
+                </a:solidFill>
+                <a:latin typeface="Arial" pitchFamily="34" charset="0"/>
+                <a:ea typeface="Arial" pitchFamily="34" charset="-122"/>
+                <a:cs typeface="Arial" pitchFamily="34" charset="-120"/>
+              </a:rPr>
+              <a:t>WhatsApp</a:t>
+            </a:r>
+            <a:endParaRPr lang="en-US" sz="1150" dirty="0"/>
+          </a:p>
+        </p:txBody>
+      </p:sp>
+      <p:sp>
+        <p:nvSpPr>
+          <p:cNvPr id="15" name="Shape 13"/>
+          <p:cNvSpPr/>
+          <p:nvPr/>
+        </p:nvSpPr>
+        <p:spPr>
+          <a:xfrm>
+            <a:off x="6391656" y="1783080"/>
+            <a:ext cx="2697480" cy="2194560"/>
+          </a:xfrm>
+          <a:prstGeom prst="roundRect">
+            <a:avLst>
+              <a:gd name="adj" fmla="val 5417"/>
+            </a:avLst>
+          </a:prstGeom>
+          <a:solidFill>
+            <a:srgbClr val="FFFFFF"/>
+          </a:solidFill>
+          <a:ln/>
+          <a:effectLst>
+            <a:outerShdw sx="100000" sy="100000" kx="0" ky="0" algn="bl" rotWithShape="0" blurRad="139700" dist="38100" dir="5400000">
+              <a:srgbClr val="0F172A">
+                <a:alpha val="8000"/>
+              </a:srgbClr>
+            </a:outerShdw>
+          </a:effectLst>
+        </p:spPr>
+      </p:sp>
+      <p:sp>
+        <p:nvSpPr>
+          <p:cNvPr id="16" name="Shape 14"/>
+          <p:cNvSpPr/>
+          <p:nvPr/>
+        </p:nvSpPr>
+        <p:spPr>
+          <a:xfrm>
+            <a:off x="6665976" y="2057400"/>
+            <a:ext cx="566928" cy="566928"/>
+          </a:xfrm>
+          <a:prstGeom prst="ellipse">
+            <a:avLst/>
+          </a:prstGeom>
+          <a:solidFill>
+            <a:srgbClr val="2563EB"/>
+          </a:solidFill>
+          <a:ln/>
+        </p:spPr>
+      </p:sp>
+      <p:sp>
+        <p:nvSpPr>
+          <p:cNvPr id="17" name="Text 15"/>
+          <p:cNvSpPr/>
+          <p:nvPr/>
+        </p:nvSpPr>
+        <p:spPr>
+          <a:xfrm>
+            <a:off x="6665976" y="2057400"/>
+            <a:ext cx="566928" cy="566928"/>
+          </a:xfrm>
+          <a:prstGeom prst="rect">
+            <a:avLst/>
+          </a:prstGeom>
+          <a:noFill/>
+          <a:ln/>
+        </p:spPr>
+        <p:txBody>
+          <a:bodyPr wrap="square" lIns="0" tIns="0" rIns="0" bIns="0" rtlCol="0" anchor="ctr"/>
+          <a:lstStyle/>
+          <a:p>
+            <a:pPr algn="ctr" indent="0" marL="0">
+              <a:buNone/>
+            </a:pPr>
+            <a:r>
+              <a:rPr lang="en-US" sz="1400" b="1" dirty="0">
+                <a:solidFill>
+                  <a:srgbClr val="FFFFFF"/>
+                </a:solidFill>
+                <a:latin typeface="Arial" pitchFamily="34" charset="0"/>
+                <a:ea typeface="Arial" pitchFamily="34" charset="-122"/>
+                <a:cs typeface="Arial" pitchFamily="34" charset="-120"/>
+              </a:rPr>
+              <a:t>P3</a:t>
+            </a:r>
+            <a:endParaRPr lang="en-US" sz="1400" dirty="0"/>
+          </a:p>
+        </p:txBody>
+      </p:sp>
+      <p:sp>
+        <p:nvSpPr>
+          <p:cNvPr id="18" name="Text 16"/>
+          <p:cNvSpPr/>
+          <p:nvPr/>
+        </p:nvSpPr>
+        <p:spPr>
+          <a:xfrm>
+            <a:off x="6665976" y="2743200"/>
+            <a:ext cx="2148840" cy="502920"/>
+          </a:xfrm>
+          <a:prstGeom prst="rect">
+            <a:avLst/>
+          </a:prstGeom>
+          <a:noFill/>
+          <a:ln/>
+        </p:spPr>
+        <p:txBody>
+          <a:bodyPr wrap="square" lIns="0" tIns="0" rIns="0" bIns="0" rtlCol="0" anchor="ctr"/>
+          <a:lstStyle/>
+          <a:p>
+            <a:pPr indent="0" marL="0">
+              <a:buNone/>
+            </a:pPr>
+            <a:r>
+              <a:rPr lang="en-US" sz="1500" b="1" dirty="0">
+                <a:solidFill>
+                  <a:srgbClr val="0F172A"/>
+                </a:solidFill>
+                <a:latin typeface="Arial" pitchFamily="34" charset="0"/>
+                <a:ea typeface="Arial" pitchFamily="34" charset="-122"/>
+                <a:cs typeface="Arial" pitchFamily="34" charset="-120"/>
+              </a:rPr>
+              <a:t>Técnico veterano</a:t>
+            </a:r>
+            <a:endParaRPr lang="en-US" sz="1500" dirty="0"/>
+          </a:p>
+        </p:txBody>
+      </p:sp>
+      <p:sp>
+        <p:nvSpPr>
+          <p:cNvPr id="19" name="Text 17"/>
+          <p:cNvSpPr/>
+          <p:nvPr/>
+        </p:nvSpPr>
+        <p:spPr>
+          <a:xfrm>
+            <a:off x="6665976" y="3246120"/>
+            <a:ext cx="2194560" cy="685800"/>
+          </a:xfrm>
+          <a:prstGeom prst="rect">
+            <a:avLst/>
+          </a:prstGeom>
+          <a:noFill/>
+          <a:ln/>
+        </p:spPr>
+        <p:txBody>
+          <a:bodyPr wrap="square" lIns="0" tIns="0" rIns="0" bIns="0" rtlCol="0" anchor="ctr"/>
+          <a:lstStyle/>
+          <a:p>
+            <a:pPr indent="0" marL="0">
+              <a:lnSpc>
+                <a:spcPct val="115000"/>
+              </a:lnSpc>
+              <a:buNone/>
+            </a:pPr>
+            <a:r>
+              <a:rPr lang="en-US" sz="1150" dirty="0">
+                <a:solidFill>
+                  <a:srgbClr val="64748B"/>
+                </a:solidFill>
+                <a:latin typeface="Arial" pitchFamily="34" charset="0"/>
+                <a:ea typeface="Arial" pitchFamily="34" charset="-122"/>
+                <a:cs typeface="Arial" pitchFamily="34" charset="-120"/>
+              </a:rPr>
+              <a:t>Idade  </a:t>
+            </a:r>
+            <a:pPr indent="0" marL="0">
+              <a:lnSpc>
+                <a:spcPct val="115000"/>
+              </a:lnSpc>
+              <a:buNone/>
+            </a:pPr>
+            <a:r>
+              <a:rPr lang="en-US" sz="1150" b="1" dirty="0">
+                <a:solidFill>
+                  <a:srgbClr val="0F172A"/>
+                </a:solidFill>
+                <a:latin typeface="Arial" pitchFamily="34" charset="0"/>
+                <a:ea typeface="Arial" pitchFamily="34" charset="-122"/>
+                <a:cs typeface="Arial" pitchFamily="34" charset="-120"/>
+              </a:rPr>
+              <a:t>36–45 anos</a:t>
+            </a:r>
+            <a:endParaRPr lang="en-US" sz="1150" dirty="0"/>
+          </a:p>
+          <a:p>
+            <a:pPr indent="0" marL="0">
+              <a:lnSpc>
+                <a:spcPct val="115000"/>
+              </a:lnSpc>
+              <a:buNone/>
+            </a:pPr>
+            <a:r>
+              <a:rPr lang="en-US" sz="1150" dirty="0">
+                <a:solidFill>
+                  <a:srgbClr val="64748B"/>
+                </a:solidFill>
+                <a:latin typeface="Arial" pitchFamily="34" charset="0"/>
+                <a:ea typeface="Arial" pitchFamily="34" charset="-122"/>
+                <a:cs typeface="Arial" pitchFamily="34" charset="-120"/>
+              </a:rPr>
+              <a:t>Familiaridade digital  </a:t>
+            </a:r>
+            <a:pPr indent="0" marL="0">
+              <a:lnSpc>
+                <a:spcPct val="115000"/>
+              </a:lnSpc>
+              <a:buNone/>
+            </a:pPr>
+            <a:r>
+              <a:rPr lang="en-US" sz="1150" b="1" dirty="0">
+                <a:solidFill>
+                  <a:srgbClr val="0F172A"/>
+                </a:solidFill>
+                <a:latin typeface="Arial" pitchFamily="34" charset="0"/>
+                <a:ea typeface="Arial" pitchFamily="34" charset="-122"/>
+                <a:cs typeface="Arial" pitchFamily="34" charset="-120"/>
+              </a:rPr>
+              <a:t>Baixa</a:t>
+            </a:r>
+            <a:endParaRPr lang="en-US" sz="1150" dirty="0"/>
+          </a:p>
+          <a:p>
+            <a:pPr indent="0" marL="0">
+              <a:lnSpc>
+                <a:spcPct val="115000"/>
+              </a:lnSpc>
+              <a:buNone/>
+            </a:pPr>
+            <a:r>
+              <a:rPr lang="en-US" sz="1150" dirty="0">
+                <a:solidFill>
+                  <a:srgbClr val="64748B"/>
+                </a:solidFill>
+                <a:latin typeface="Arial" pitchFamily="34" charset="0"/>
+                <a:ea typeface="Arial" pitchFamily="34" charset="-122"/>
+                <a:cs typeface="Arial" pitchFamily="34" charset="-120"/>
+              </a:rPr>
+              <a:t>Meio atual  </a:t>
+            </a:r>
+            <a:pPr indent="0" marL="0">
+              <a:lnSpc>
+                <a:spcPct val="115000"/>
+              </a:lnSpc>
+              <a:buNone/>
+            </a:pPr>
+            <a:r>
+              <a:rPr lang="en-US" sz="1150" b="1" dirty="0">
+                <a:solidFill>
+                  <a:srgbClr val="0F172A"/>
+                </a:solidFill>
+                <a:latin typeface="Arial" pitchFamily="34" charset="0"/>
+                <a:ea typeface="Arial" pitchFamily="34" charset="-122"/>
+                <a:cs typeface="Arial" pitchFamily="34" charset="-120"/>
+              </a:rPr>
+              <a:t>Ligação</a:t>
+            </a:r>
+            <a:endParaRPr lang="en-US" sz="1150" dirty="0"/>
+          </a:p>
+        </p:txBody>
+      </p:sp>
+      <p:sp>
+        <p:nvSpPr>
+          <p:cNvPr id="20" name="Text 18"/>
+          <p:cNvSpPr/>
+          <p:nvPr/>
+        </p:nvSpPr>
+        <p:spPr>
+          <a:xfrm>
+            <a:off x="502920" y="4777740"/>
+            <a:ext cx="5486400" cy="274320"/>
+          </a:xfrm>
+          <a:prstGeom prst="rect">
+            <a:avLst/>
+          </a:prstGeom>
+          <a:noFill/>
+          <a:ln/>
+        </p:spPr>
+        <p:txBody>
+          <a:bodyPr wrap="square" lIns="0" tIns="0" rIns="0" bIns="0" rtlCol="0" anchor="ctr"/>
+          <a:lstStyle/>
+          <a:p>
+            <a:pPr algn="l" indent="0" marL="0">
+              <a:buNone/>
+            </a:pPr>
+            <a:r>
+              <a:rPr lang="en-US" sz="900" dirty="0">
+                <a:solidFill>
+                  <a:srgbClr val="64748B"/>
+                </a:solidFill>
+                <a:latin typeface="Arial" pitchFamily="34" charset="0"/>
+                <a:ea typeface="Arial" pitchFamily="34" charset="-122"/>
+                <a:cs typeface="Arial" pitchFamily="34" charset="-120"/>
+              </a:rPr>
+              <a:t>Track Fibra · IHC — UTFPR Campo Mourão</a:t>
+            </a:r>
+            <a:endParaRPr lang="en-US" sz="900" dirty="0"/>
+          </a:p>
+        </p:txBody>
+      </p:sp>
+      <p:sp>
+        <p:nvSpPr>
+          <p:cNvPr id="21" name="Text 19"/>
+          <p:cNvSpPr/>
+          <p:nvPr/>
+        </p:nvSpPr>
+        <p:spPr>
+          <a:xfrm>
+            <a:off x="7726680" y="4777740"/>
+            <a:ext cx="914400" cy="274320"/>
+          </a:xfrm>
+          <a:prstGeom prst="rect">
+            <a:avLst/>
+          </a:prstGeom>
+          <a:noFill/>
+          <a:ln/>
+        </p:spPr>
+        <p:txBody>
+          <a:bodyPr wrap="square" lIns="0" tIns="0" rIns="0" bIns="0" rtlCol="0" anchor="ctr"/>
+          <a:lstStyle/>
+          <a:p>
+            <a:pPr algn="r" indent="0" marL="0">
+              <a:buNone/>
+            </a:pPr>
+            <a:r>
+              <a:rPr lang="en-US" sz="900" dirty="0">
+                <a:solidFill>
+                  <a:srgbClr val="64748B"/>
+                </a:solidFill>
+                <a:latin typeface="Arial" pitchFamily="34" charset="0"/>
+                <a:ea typeface="Arial" pitchFamily="34" charset="-122"/>
+                <a:cs typeface="Arial" pitchFamily="34" charset="-120"/>
+              </a:rPr>
+              <a:t>8 / 12</a:t>
+            </a:r>
+            <a:endParaRPr lang="en-US" sz="900" dirty="0"/>
+          </a:p>
+        </p:txBody>
+      </p:sp>
+    </p:spTree>
+  </p:cSld>
+  <p:clrMapOvr>
+    <a:masterClrMapping/>
+  </p:clrMapOvr>
+</p:sld>
+</file>
+
+<file path=ppt/slides/slide9.xml><?xml version="1.0" encoding="utf-8"?>
+<p:sld xmlns:a="http://schemas.openxmlformats.org/drawingml/2006/main" xmlns:r="http://schemas.openxmlformats.org/officeDocument/2006/relationships" xmlns:p="http://schemas.openxmlformats.org/presentationml/2006/main">
+  <p:cSld name="Slide 9">
+    <p:bg>
+      <p:bgPr>
+        <a:solidFill>
+          <a:srgbClr val="F8FAFC"/>
+        </a:solidFill>
+      </p:bgPr>
+    </p:bg>
+    <p:spTree>
+      <p:nvGrpSpPr>
+        <p:cNvPr id="1" name=""/>
+        <p:cNvGrpSpPr/>
+        <p:nvPr/>
+      </p:nvGrpSpPr>
+      <p:grpSpPr>
+        <a:xfrm>
+          <a:off x="0" y="0"/>
+          <a:ext cx="0" cy="0"/>
+          <a:chOff x="0" y="0"/>
+          <a:chExt cx="0" cy="0"/>
+        </a:xfrm>
+      </p:grpSpPr>
+      <p:sp>
+        <p:nvSpPr>
+          <p:cNvPr id="2" name="Text 0"/>
+          <p:cNvSpPr/>
+          <p:nvPr/>
+        </p:nvSpPr>
+        <p:spPr>
+          <a:xfrm>
+            <a:off x="548640" y="329184"/>
+            <a:ext cx="8229600" cy="274320"/>
+          </a:xfrm>
+          <a:prstGeom prst="rect">
+            <a:avLst/>
+          </a:prstGeom>
+          <a:noFill/>
+          <a:ln/>
+        </p:spPr>
+        <p:txBody>
+          <a:bodyPr wrap="square" lIns="0" tIns="0" rIns="0" bIns="0" rtlCol="0" anchor="ctr"/>
+          <a:lstStyle/>
+          <a:p>
+            <a:pPr indent="0" marL="0">
+              <a:buNone/>
+            </a:pPr>
+            <a:r>
+              <a:rPr lang="en-US" sz="1200" b="1" spc="400" kern="0" dirty="0">
+                <a:solidFill>
+                  <a:srgbClr val="06B6D4"/>
+                </a:solidFill>
+                <a:latin typeface="Arial" pitchFamily="34" charset="0"/>
+                <a:ea typeface="Arial" pitchFamily="34" charset="-122"/>
+                <a:cs typeface="Arial" pitchFamily="34" charset="-120"/>
               </a:rPr>
               <a:t>RESULTADOS</a:t>
             </a:r>
@@ -7978,7 +9752,7 @@
         </p:nvSpPr>
         <p:spPr>
           <a:xfrm>
-            <a:off x="457200" y="548640"/>
+            <a:off x="502920" y="585216"/>
             <a:ext cx="8229600" cy="640080"/>
           </a:xfrm>
           <a:prstGeom prst="rect">
@@ -7995,23 +9769,23 @@
               <a:buNone/>
             </a:pPr>
             <a:r>
-              <a:rPr lang="en-US" sz="3200" b="1" dirty="0">
+              <a:rPr lang="en-US" sz="3400" b="1" dirty="0">
                 <a:solidFill>
                   <a:srgbClr val="0F172A"/>
                 </a:solidFill>
-                <a:latin typeface="Cambria" pitchFamily="34" charset="0"/>
-                <a:ea typeface="Cambria" pitchFamily="34" charset="-122"/>
-                <a:cs typeface="Cambria" pitchFamily="34" charset="-120"/>
+                <a:latin typeface="Arial" pitchFamily="34" charset="0"/>
+                <a:ea typeface="Arial" pitchFamily="34" charset="-122"/>
+                <a:cs typeface="Arial" pitchFamily="34" charset="-120"/>
               </a:rPr>
               <a:t>Defeitos encontrados (3)</a:t>
             </a:r>
-            <a:endParaRPr lang="en-US" sz="3200" dirty="0"/>
+            <a:endParaRPr lang="en-US" sz="3400" dirty="0"/>
           </a:p>
         </p:txBody>
       </p:sp>
       <p:graphicFrame>
         <p:nvGraphicFramePr>
-          <p:cNvPr id="9" name="Table 0"/>
+          <p:cNvPr id="10" name="Table 0"/>
           <p:cNvGraphicFramePr>
             <a:graphicFrameLocks noGrp="1"/>
           </p:cNvGraphicFramePr>
@@ -8024,19 +9798,19 @@
           </p:nvPr>
         </p:nvGraphicFramePr>
         <p:xfrm>
-          <a:off x="457200" y="1417320"/>
-          <a:ext cx="8229600" cy="914400"/>
+          <a:off x="502920" y="1463040"/>
+          <a:ext cx="8138160" cy="914400"/>
         </p:xfrm>
         <a:graphic>
           <a:graphicData uri="http://schemas.openxmlformats.org/drawingml/2006/table">
             <a:tbl>
               <a:tblPr/>
               <a:tblGrid>
-                <a:gridCol w="502920"/>
-                <a:gridCol w="2743200"/>
-                <a:gridCol w="2057400"/>
+                <a:gridCol w="457200"/>
+                <a:gridCol w="2697480"/>
+                <a:gridCol w="2011680"/>
                 <a:gridCol w="548640"/>
-                <a:gridCol w="2377440"/>
+                <a:gridCol w="2423160"/>
               </a:tblGrid>
               <a:tr h="365760">
                 <a:tc>
@@ -8052,23 +9826,23 @@
                           <a:solidFill>
                             <a:srgbClr val="FFFFFF"/>
                           </a:solidFill>
-                          <a:latin typeface="Calibri" pitchFamily="34" charset="0"/>
-                          <a:ea typeface="Calibri" pitchFamily="34" charset="-122"/>
-                          <a:cs typeface="Calibri" pitchFamily="34" charset="-120"/>
+                          <a:latin typeface="Arial" pitchFamily="34" charset="0"/>
+                          <a:ea typeface="Arial" pitchFamily="34" charset="-122"/>
+                          <a:cs typeface="Arial" pitchFamily="34" charset="-120"/>
                         </a:rPr>
                         <a:t>#</a:t>
                       </a:r>
                       <a:endParaRPr lang="en-US" sz="1150" dirty="0">
-                        <a:latin typeface="Calibri" charset="0"/>
-                        <a:ea typeface="Calibri" charset="0"/>
-                        <a:cs typeface="Calibri" charset="0"/>
+                        <a:latin typeface="Arial" charset="0"/>
+                        <a:ea typeface="Arial" charset="0"/>
+                        <a:cs typeface="Arial" charset="0"/>
                       </a:endParaRPr>
                     </a:p>
                   </a:txBody>
                   <a:tcPr marL="91440" marR="91440" marT="45720" marB="45720" anchor="ctr">
                     <a:lnL w="12700" cap="flat" cmpd="sng" algn="ctr">
                       <a:solidFill>
-                        <a:srgbClr val="E2E8F0"/>
+                        <a:srgbClr val="EEF2F7"/>
                       </a:solidFill>
                       <a:prstDash val="solid"/>
                       <a:round/>
@@ -8077,7 +9851,7 @@
                     </a:lnL>
                     <a:lnR w="12700" cap="flat" cmpd="sng" algn="ctr">
                       <a:solidFill>
-                        <a:srgbClr val="E2E8F0"/>
+                        <a:srgbClr val="EEF2F7"/>
                       </a:solidFill>
                       <a:prstDash val="solid"/>
                       <a:round/>
@@ -8086,7 +9860,7 @@
                     </a:lnR>
                     <a:lnT w="12700" cap="flat" cmpd="sng" algn="ctr">
                       <a:solidFill>
-                        <a:srgbClr val="E2E8F0"/>
+                        <a:srgbClr val="EEF2F7"/>
                       </a:solidFill>
                       <a:prstDash val="solid"/>
                       <a:round/>
@@ -8095,7 +9869,7 @@
                     </a:lnT>
                     <a:lnB w="12700" cap="flat" cmpd="sng" algn="ctr">
                       <a:solidFill>
-                        <a:srgbClr val="E2E8F0"/>
+                        <a:srgbClr val="EEF2F7"/>
                       </a:solidFill>
                       <a:prstDash val="solid"/>
                       <a:round/>
@@ -8120,23 +9894,23 @@
                           <a:solidFill>
                             <a:srgbClr val="FFFFFF"/>
                           </a:solidFill>
-                          <a:latin typeface="Calibri" pitchFamily="34" charset="0"/>
-                          <a:ea typeface="Calibri" pitchFamily="34" charset="-122"/>
-                          <a:cs typeface="Calibri" pitchFamily="34" charset="-120"/>
+                          <a:latin typeface="Arial" pitchFamily="34" charset="0"/>
+                          <a:ea typeface="Arial" pitchFamily="34" charset="-122"/>
+                          <a:cs typeface="Arial" pitchFamily="34" charset="-120"/>
                         </a:rPr>
                         <a:t>Defeito</a:t>
                       </a:r>
                       <a:endParaRPr lang="en-US" sz="1150" dirty="0">
-                        <a:latin typeface="Calibri" charset="0"/>
-                        <a:ea typeface="Calibri" charset="0"/>
-                        <a:cs typeface="Calibri" charset="0"/>
+                        <a:latin typeface="Arial" charset="0"/>
+                        <a:ea typeface="Arial" charset="0"/>
+                        <a:cs typeface="Arial" charset="0"/>
                       </a:endParaRPr>
                     </a:p>
                   </a:txBody>
                   <a:tcPr marL="91440" marR="91440" marT="45720" marB="45720" anchor="ctr">
                     <a:lnL w="12700" cap="flat" cmpd="sng" algn="ctr">
                       <a:solidFill>
-                        <a:srgbClr val="E2E8F0"/>
+                        <a:srgbClr val="EEF2F7"/>
                       </a:solidFill>
                       <a:prstDash val="solid"/>
                       <a:round/>
@@ -8145,7 +9919,7 @@
                     </a:lnL>
                     <a:lnR w="12700" cap="flat" cmpd="sng" algn="ctr">
                       <a:solidFill>
-                        <a:srgbClr val="E2E8F0"/>
+                        <a:srgbClr val="EEF2F7"/>
                       </a:solidFill>
                       <a:prstDash val="solid"/>
                       <a:round/>
@@ -8154,7 +9928,7 @@
                     </a:lnR>
                     <a:lnT w="12700" cap="flat" cmpd="sng" algn="ctr">
                       <a:solidFill>
-                        <a:srgbClr val="E2E8F0"/>
+                        <a:srgbClr val="EEF2F7"/>
                       </a:solidFill>
                       <a:prstDash val="solid"/>
                       <a:round/>
@@ -8163,7 +9937,7 @@
                     </a:lnT>
                     <a:lnB w="12700" cap="flat" cmpd="sng" algn="ctr">
                       <a:solidFill>
-                        <a:srgbClr val="E2E8F0"/>
+                        <a:srgbClr val="EEF2F7"/>
                       </a:solidFill>
                       <a:prstDash val="solid"/>
                       <a:round/>
@@ -8188,23 +9962,23 @@
                           <a:solidFill>
                             <a:srgbClr val="FFFFFF"/>
                           </a:solidFill>
-                          <a:latin typeface="Calibri" pitchFamily="34" charset="0"/>
-                          <a:ea typeface="Calibri" pitchFamily="34" charset="-122"/>
-                          <a:cs typeface="Calibri" pitchFamily="34" charset="-120"/>
+                          <a:latin typeface="Arial" pitchFamily="34" charset="0"/>
+                          <a:ea typeface="Arial" pitchFamily="34" charset="-122"/>
+                          <a:cs typeface="Arial" pitchFamily="34" charset="-120"/>
                         </a:rPr>
                         <a:t>Heurística de Nielsen</a:t>
                       </a:r>
                       <a:endParaRPr lang="en-US" sz="1150" dirty="0">
-                        <a:latin typeface="Calibri" charset="0"/>
-                        <a:ea typeface="Calibri" charset="0"/>
-                        <a:cs typeface="Calibri" charset="0"/>
+                        <a:latin typeface="Arial" charset="0"/>
+                        <a:ea typeface="Arial" charset="0"/>
+                        <a:cs typeface="Arial" charset="0"/>
                       </a:endParaRPr>
                     </a:p>
                   </a:txBody>
                   <a:tcPr marL="91440" marR="91440" marT="45720" marB="45720" anchor="ctr">
                     <a:lnL w="12700" cap="flat" cmpd="sng" algn="ctr">
                       <a:solidFill>
-                        <a:srgbClr val="E2E8F0"/>
+                        <a:srgbClr val="EEF2F7"/>
                       </a:solidFill>
                       <a:prstDash val="solid"/>
                       <a:round/>
@@ -8213,7 +9987,7 @@
                     </a:lnL>
                     <a:lnR w="12700" cap="flat" cmpd="sng" algn="ctr">
                       <a:solidFill>
-                        <a:srgbClr val="E2E8F0"/>
+                        <a:srgbClr val="EEF2F7"/>
                       </a:solidFill>
                       <a:prstDash val="solid"/>
                       <a:round/>
@@ -8222,7 +9996,7 @@
                     </a:lnR>
                     <a:lnT w="12700" cap="flat" cmpd="sng" algn="ctr">
                       <a:solidFill>
-                        <a:srgbClr val="E2E8F0"/>
+                        <a:srgbClr val="EEF2F7"/>
                       </a:solidFill>
                       <a:prstDash val="solid"/>
                       <a:round/>
@@ -8231,7 +10005,7 @@
                     </a:lnT>
                     <a:lnB w="12700" cap="flat" cmpd="sng" algn="ctr">
                       <a:solidFill>
-                        <a:srgbClr val="E2E8F0"/>
+                        <a:srgbClr val="EEF2F7"/>
                       </a:solidFill>
                       <a:prstDash val="solid"/>
                       <a:round/>
@@ -8256,23 +10030,23 @@
                           <a:solidFill>
                             <a:srgbClr val="FFFFFF"/>
                           </a:solidFill>
-                          <a:latin typeface="Calibri" pitchFamily="34" charset="0"/>
-                          <a:ea typeface="Calibri" pitchFamily="34" charset="-122"/>
-                          <a:cs typeface="Calibri" pitchFamily="34" charset="-120"/>
+                          <a:latin typeface="Arial" pitchFamily="34" charset="0"/>
+                          <a:ea typeface="Arial" pitchFamily="34" charset="-122"/>
+                          <a:cs typeface="Arial" pitchFamily="34" charset="-120"/>
                         </a:rPr>
                         <a:t>Sev.</a:t>
                       </a:r>
                       <a:endParaRPr lang="en-US" sz="1150" dirty="0">
-                        <a:latin typeface="Calibri" charset="0"/>
-                        <a:ea typeface="Calibri" charset="0"/>
-                        <a:cs typeface="Calibri" charset="0"/>
+                        <a:latin typeface="Arial" charset="0"/>
+                        <a:ea typeface="Arial" charset="0"/>
+                        <a:cs typeface="Arial" charset="0"/>
                       </a:endParaRPr>
                     </a:p>
                   </a:txBody>
                   <a:tcPr marL="91440" marR="91440" marT="45720" marB="45720" anchor="ctr">
                     <a:lnL w="12700" cap="flat" cmpd="sng" algn="ctr">
                       <a:solidFill>
-                        <a:srgbClr val="E2E8F0"/>
+                        <a:srgbClr val="EEF2F7"/>
                       </a:solidFill>
                       <a:prstDash val="solid"/>
                       <a:round/>
@@ -8281,7 +10055,7 @@
                     </a:lnL>
                     <a:lnR w="12700" cap="flat" cmpd="sng" algn="ctr">
                       <a:solidFill>
-                        <a:srgbClr val="E2E8F0"/>
+                        <a:srgbClr val="EEF2F7"/>
                       </a:solidFill>
                       <a:prstDash val="solid"/>
                       <a:round/>
@@ -8290,7 +10064,7 @@
                     </a:lnR>
                     <a:lnT w="12700" cap="flat" cmpd="sng" algn="ctr">
                       <a:solidFill>
-                        <a:srgbClr val="E2E8F0"/>
+                        <a:srgbClr val="EEF2F7"/>
                       </a:solidFill>
                       <a:prstDash val="solid"/>
                       <a:round/>
@@ -8299,7 +10073,7 @@
                     </a:lnT>
                     <a:lnB w="12700" cap="flat" cmpd="sng" algn="ctr">
                       <a:solidFill>
-                        <a:srgbClr val="E2E8F0"/>
+                        <a:srgbClr val="EEF2F7"/>
                       </a:solidFill>
                       <a:prstDash val="solid"/>
                       <a:round/>
@@ -8324,23 +10098,23 @@
                           <a:solidFill>
                             <a:srgbClr val="FFFFFF"/>
                           </a:solidFill>
-                          <a:latin typeface="Calibri" pitchFamily="34" charset="0"/>
-                          <a:ea typeface="Calibri" pitchFamily="34" charset="-122"/>
-                          <a:cs typeface="Calibri" pitchFamily="34" charset="-120"/>
+                          <a:latin typeface="Arial" pitchFamily="34" charset="0"/>
+                          <a:ea typeface="Arial" pitchFamily="34" charset="-122"/>
+                          <a:cs typeface="Arial" pitchFamily="34" charset="-120"/>
                         </a:rPr>
                         <a:t>Correção no protótipo</a:t>
                       </a:r>
                       <a:endParaRPr lang="en-US" sz="1150" dirty="0">
-                        <a:latin typeface="Calibri" charset="0"/>
-                        <a:ea typeface="Calibri" charset="0"/>
-                        <a:cs typeface="Calibri" charset="0"/>
+                        <a:latin typeface="Arial" charset="0"/>
+                        <a:ea typeface="Arial" charset="0"/>
+                        <a:cs typeface="Arial" charset="0"/>
                       </a:endParaRPr>
                     </a:p>
                   </a:txBody>
                   <a:tcPr marL="91440" marR="91440" marT="45720" marB="45720" anchor="ctr">
                     <a:lnL w="12700" cap="flat" cmpd="sng" algn="ctr">
                       <a:solidFill>
-                        <a:srgbClr val="E2E8F0"/>
+                        <a:srgbClr val="EEF2F7"/>
                       </a:solidFill>
                       <a:prstDash val="solid"/>
                       <a:round/>
@@ -8349,7 +10123,7 @@
                     </a:lnL>
                     <a:lnR w="12700" cap="flat" cmpd="sng" algn="ctr">
                       <a:solidFill>
-                        <a:srgbClr val="E2E8F0"/>
+                        <a:srgbClr val="EEF2F7"/>
                       </a:solidFill>
                       <a:prstDash val="solid"/>
                       <a:round/>
@@ -8358,7 +10132,7 @@
                     </a:lnR>
                     <a:lnT w="12700" cap="flat" cmpd="sng" algn="ctr">
                       <a:solidFill>
-                        <a:srgbClr val="E2E8F0"/>
+                        <a:srgbClr val="EEF2F7"/>
                       </a:solidFill>
                       <a:prstDash val="solid"/>
                       <a:round/>
@@ -8367,7 +10141,7 @@
                     </a:lnT>
                     <a:lnB w="12700" cap="flat" cmpd="sng" algn="ctr">
                       <a:solidFill>
-                        <a:srgbClr val="E2E8F0"/>
+                        <a:srgbClr val="EEF2F7"/>
                       </a:solidFill>
                       <a:prstDash val="solid"/>
                       <a:round/>
@@ -8380,7 +10154,7 @@
                   </a:tcPr>
                 </a:tc>
               </a:tr>
-              <a:tr h="841248">
+              <a:tr h="822960">
                 <a:tc>
                   <a:txBody>
                     <a:bodyPr/>
@@ -8394,23 +10168,23 @@
                           <a:solidFill>
                             <a:srgbClr val="0F172A"/>
                           </a:solidFill>
-                          <a:latin typeface="Calibri" pitchFamily="34" charset="0"/>
-                          <a:ea typeface="Calibri" pitchFamily="34" charset="-122"/>
-                          <a:cs typeface="Calibri" pitchFamily="34" charset="-120"/>
+                          <a:latin typeface="Arial" pitchFamily="34" charset="0"/>
+                          <a:ea typeface="Arial" pitchFamily="34" charset="-122"/>
+                          <a:cs typeface="Arial" pitchFamily="34" charset="-120"/>
                         </a:rPr>
                         <a:t>D1</a:t>
                       </a:r>
                       <a:endParaRPr lang="en-US" sz="1150" dirty="0">
-                        <a:latin typeface="Calibri" charset="0"/>
-                        <a:ea typeface="Calibri" charset="0"/>
-                        <a:cs typeface="Calibri" charset="0"/>
+                        <a:latin typeface="Arial" charset="0"/>
+                        <a:ea typeface="Arial" charset="0"/>
+                        <a:cs typeface="Arial" charset="0"/>
                       </a:endParaRPr>
                     </a:p>
                   </a:txBody>
                   <a:tcPr marL="91440" marR="91440" marT="45720" marB="45720" anchor="ctr">
                     <a:lnL w="12700" cap="flat" cmpd="sng" algn="ctr">
                       <a:solidFill>
-                        <a:srgbClr val="E2E8F0"/>
+                        <a:srgbClr val="EEF2F7"/>
                       </a:solidFill>
                       <a:prstDash val="solid"/>
                       <a:round/>
@@ -8419,7 +10193,7 @@
                     </a:lnL>
                     <a:lnR w="12700" cap="flat" cmpd="sng" algn="ctr">
                       <a:solidFill>
-                        <a:srgbClr val="E2E8F0"/>
+                        <a:srgbClr val="EEF2F7"/>
                       </a:solidFill>
                       <a:prstDash val="solid"/>
                       <a:round/>
@@ -8428,7 +10202,7 @@
                     </a:lnR>
                     <a:lnT w="12700" cap="flat" cmpd="sng" algn="ctr">
                       <a:solidFill>
-                        <a:srgbClr val="E2E8F0"/>
+                        <a:srgbClr val="EEF2F7"/>
                       </a:solidFill>
                       <a:prstDash val="solid"/>
                       <a:round/>
@@ -8437,16 +10211,13 @@
                     </a:lnT>
                     <a:lnB w="12700" cap="flat" cmpd="sng" algn="ctr">
                       <a:solidFill>
-                        <a:srgbClr val="E2E8F0"/>
+                        <a:srgbClr val="EEF2F7"/>
                       </a:solidFill>
                       <a:prstDash val="solid"/>
                       <a:round/>
                       <a:headEnd type="none" w="med" len="med"/>
                       <a:tailEnd type="none" w="med" len="med"/>
                     </a:lnB>
-                    <a:solidFill>
-                      <a:srgbClr val="FFFFFF"/>
-                    </a:solidFill>
                   </a:tcPr>
                 </a:tc>
                 <a:tc>
@@ -8462,23 +10233,23 @@
                           <a:solidFill>
                             <a:srgbClr val="0F172A"/>
                           </a:solidFill>
-                          <a:latin typeface="Calibri" pitchFamily="34" charset="0"/>
-                          <a:ea typeface="Calibri" pitchFamily="34" charset="-122"/>
-                          <a:cs typeface="Calibri" pitchFamily="34" charset="-120"/>
+                          <a:latin typeface="Arial" pitchFamily="34" charset="0"/>
+                          <a:ea typeface="Arial" pitchFamily="34" charset="-122"/>
+                          <a:cs typeface="Arial" pitchFamily="34" charset="-120"/>
                         </a:rPr>
                         <a:t>Sem confirmação ao finalizar o chamado (ação parecia irreversível)</a:t>
                       </a:r>
                       <a:endParaRPr lang="en-US" sz="1150" dirty="0">
-                        <a:latin typeface="Calibri" charset="0"/>
-                        <a:ea typeface="Calibri" charset="0"/>
-                        <a:cs typeface="Calibri" charset="0"/>
+                        <a:latin typeface="Arial" charset="0"/>
+                        <a:ea typeface="Arial" charset="0"/>
+                        <a:cs typeface="Arial" charset="0"/>
                       </a:endParaRPr>
                     </a:p>
                   </a:txBody>
                   <a:tcPr marL="91440" marR="91440" marT="45720" marB="45720" anchor="ctr">
                     <a:lnL w="12700" cap="flat" cmpd="sng" algn="ctr">
                       <a:solidFill>
-                        <a:srgbClr val="E2E8F0"/>
+                        <a:srgbClr val="EEF2F7"/>
                       </a:solidFill>
                       <a:prstDash val="solid"/>
                       <a:round/>
@@ -8487,7 +10258,7 @@
                     </a:lnL>
                     <a:lnR w="12700" cap="flat" cmpd="sng" algn="ctr">
                       <a:solidFill>
-                        <a:srgbClr val="E2E8F0"/>
+                        <a:srgbClr val="EEF2F7"/>
                       </a:solidFill>
                       <a:prstDash val="solid"/>
                       <a:round/>
@@ -8496,7 +10267,7 @@
                     </a:lnR>
                     <a:lnT w="12700" cap="flat" cmpd="sng" algn="ctr">
                       <a:solidFill>
-                        <a:srgbClr val="E2E8F0"/>
+                        <a:srgbClr val="EEF2F7"/>
                       </a:solidFill>
                       <a:prstDash val="solid"/>
                       <a:round/>
@@ -8505,16 +10276,13 @@
                     </a:lnT>
                     <a:lnB w="12700" cap="flat" cmpd="sng" algn="ctr">
                       <a:solidFill>
-                        <a:srgbClr val="E2E8F0"/>
+                        <a:srgbClr val="EEF2F7"/>
                       </a:solidFill>
                       <a:prstDash val="solid"/>
                       <a:round/>
                       <a:headEnd type="none" w="med" len="med"/>
                       <a:tailEnd type="none" w="med" len="med"/>
                     </a:lnB>
-                    <a:solidFill>
-                      <a:srgbClr val="FFFFFF"/>
-                    </a:solidFill>
                   </a:tcPr>
                 </a:tc>
                 <a:tc>
@@ -8530,23 +10298,23 @@
                           <a:solidFill>
                             <a:srgbClr val="0F172A"/>
                           </a:solidFill>
-                          <a:latin typeface="Calibri" pitchFamily="34" charset="0"/>
-                          <a:ea typeface="Calibri" pitchFamily="34" charset="-122"/>
-                          <a:cs typeface="Calibri" pitchFamily="34" charset="-120"/>
+                          <a:latin typeface="Arial" pitchFamily="34" charset="0"/>
+                          <a:ea typeface="Arial" pitchFamily="34" charset="-122"/>
+                          <a:cs typeface="Arial" pitchFamily="34" charset="-120"/>
                         </a:rPr>
                         <a:t>H5 — Prevenção de erros</a:t>
                       </a:r>
                       <a:endParaRPr lang="en-US" sz="1150" dirty="0">
-                        <a:latin typeface="Calibri" charset="0"/>
-                        <a:ea typeface="Calibri" charset="0"/>
-                        <a:cs typeface="Calibri" charset="0"/>
+                        <a:latin typeface="Arial" charset="0"/>
+                        <a:ea typeface="Arial" charset="0"/>
+                        <a:cs typeface="Arial" charset="0"/>
                       </a:endParaRPr>
                     </a:p>
                   </a:txBody>
                   <a:tcPr marL="91440" marR="91440" marT="45720" marB="45720" anchor="ctr">
                     <a:lnL w="12700" cap="flat" cmpd="sng" algn="ctr">
                       <a:solidFill>
-                        <a:srgbClr val="E2E8F0"/>
+                        <a:srgbClr val="EEF2F7"/>
                       </a:solidFill>
                       <a:prstDash val="solid"/>
                       <a:round/>
@@ -8555,7 +10323,7 @@
                     </a:lnL>
                     <a:lnR w="12700" cap="flat" cmpd="sng" algn="ctr">
                       <a:solidFill>
-                        <a:srgbClr val="E2E8F0"/>
+                        <a:srgbClr val="EEF2F7"/>
                       </a:solidFill>
                       <a:prstDash val="solid"/>
                       <a:round/>
@@ -8564,7 +10332,7 @@
                     </a:lnR>
                     <a:lnT w="12700" cap="flat" cmpd="sng" algn="ctr">
                       <a:solidFill>
-                        <a:srgbClr val="E2E8F0"/>
+                        <a:srgbClr val="EEF2F7"/>
                       </a:solidFill>
                       <a:prstDash val="solid"/>
                       <a:round/>
@@ -8573,16 +10341,13 @@
                     </a:lnT>
                     <a:lnB w="12700" cap="flat" cmpd="sng" algn="ctr">
                       <a:solidFill>
-                        <a:srgbClr val="E2E8F0"/>
+                        <a:srgbClr val="EEF2F7"/>
                       </a:solidFill>
                       <a:prstDash val="solid"/>
                       <a:round/>
                       <a:headEnd type="none" w="med" len="med"/>
                       <a:tailEnd type="none" w="med" len="med"/>
                     </a:lnB>
-                    <a:solidFill>
-                      <a:srgbClr val="FFFFFF"/>
-                    </a:solidFill>
                   </a:tcPr>
                 </a:tc>
                 <a:tc>
@@ -8598,23 +10363,23 @@
                           <a:solidFill>
                             <a:srgbClr val="0F172A"/>
                           </a:solidFill>
-                          <a:latin typeface="Calibri" pitchFamily="34" charset="0"/>
-                          <a:ea typeface="Calibri" pitchFamily="34" charset="-122"/>
-                          <a:cs typeface="Calibri" pitchFamily="34" charset="-120"/>
+                          <a:latin typeface="Arial" pitchFamily="34" charset="0"/>
+                          <a:ea typeface="Arial" pitchFamily="34" charset="-122"/>
+                          <a:cs typeface="Arial" pitchFamily="34" charset="-120"/>
                         </a:rPr>
                         <a:t>3</a:t>
                       </a:r>
                       <a:endParaRPr lang="en-US" sz="1150" dirty="0">
-                        <a:latin typeface="Calibri" charset="0"/>
-                        <a:ea typeface="Calibri" charset="0"/>
-                        <a:cs typeface="Calibri" charset="0"/>
+                        <a:latin typeface="Arial" charset="0"/>
+                        <a:ea typeface="Arial" charset="0"/>
+                        <a:cs typeface="Arial" charset="0"/>
                       </a:endParaRPr>
                     </a:p>
                   </a:txBody>
                   <a:tcPr marL="91440" marR="91440" marT="45720" marB="45720" anchor="ctr">
                     <a:lnL w="12700" cap="flat" cmpd="sng" algn="ctr">
                       <a:solidFill>
-                        <a:srgbClr val="E2E8F0"/>
+                        <a:srgbClr val="EEF2F7"/>
                       </a:solidFill>
                       <a:prstDash val="solid"/>
                       <a:round/>
@@ -8623,7 +10388,7 @@
                     </a:lnL>
                     <a:lnR w="12700" cap="flat" cmpd="sng" algn="ctr">
                       <a:solidFill>
-                        <a:srgbClr val="E2E8F0"/>
+                        <a:srgbClr val="EEF2F7"/>
                       </a:solidFill>
                       <a:prstDash val="solid"/>
                       <a:round/>
@@ -8632,7 +10397,7 @@
                     </a:lnR>
                     <a:lnT w="12700" cap="flat" cmpd="sng" algn="ctr">
                       <a:solidFill>
-                        <a:srgbClr val="E2E8F0"/>
+                        <a:srgbClr val="EEF2F7"/>
                       </a:solidFill>
                       <a:prstDash val="solid"/>
                       <a:round/>
@@ -8641,16 +10406,13 @@
                     </a:lnT>
                     <a:lnB w="12700" cap="flat" cmpd="sng" algn="ctr">
                       <a:solidFill>
-                        <a:srgbClr val="E2E8F0"/>
+                        <a:srgbClr val="EEF2F7"/>
                       </a:solidFill>
                       <a:prstDash val="solid"/>
                       <a:round/>
                       <a:headEnd type="none" w="med" len="med"/>
                       <a:tailEnd type="none" w="med" len="med"/>
                     </a:lnB>
-                    <a:solidFill>
-                      <a:srgbClr val="FFFFFF"/>
-                    </a:solidFill>
                   </a:tcPr>
                 </a:tc>
                 <a:tc>
@@ -8666,23 +10428,23 @@
                           <a:solidFill>
                             <a:srgbClr val="0F172A"/>
                           </a:solidFill>
-                          <a:latin typeface="Calibri" pitchFamily="34" charset="0"/>
-                          <a:ea typeface="Calibri" pitchFamily="34" charset="-122"/>
-                          <a:cs typeface="Calibri" pitchFamily="34" charset="-120"/>
+                          <a:latin typeface="Arial" pitchFamily="34" charset="0"/>
+                          <a:ea typeface="Arial" pitchFamily="34" charset="-122"/>
+                          <a:cs typeface="Arial" pitchFamily="34" charset="-120"/>
                         </a:rPr>
                         <a:t>Botão “Desfazer” na tela de chamado finalizado</a:t>
                       </a:r>
                       <a:endParaRPr lang="en-US" sz="1150" dirty="0">
-                        <a:latin typeface="Calibri" charset="0"/>
-                        <a:ea typeface="Calibri" charset="0"/>
-                        <a:cs typeface="Calibri" charset="0"/>
+                        <a:latin typeface="Arial" charset="0"/>
+                        <a:ea typeface="Arial" charset="0"/>
+                        <a:cs typeface="Arial" charset="0"/>
                       </a:endParaRPr>
                     </a:p>
                   </a:txBody>
                   <a:tcPr marL="91440" marR="91440" marT="45720" marB="45720" anchor="ctr">
                     <a:lnL w="12700" cap="flat" cmpd="sng" algn="ctr">
                       <a:solidFill>
-                        <a:srgbClr val="E2E8F0"/>
+                        <a:srgbClr val="EEF2F7"/>
                       </a:solidFill>
                       <a:prstDash val="solid"/>
                       <a:round/>
@@ -8691,7 +10453,7 @@
                     </a:lnL>
                     <a:lnR w="12700" cap="flat" cmpd="sng" algn="ctr">
                       <a:solidFill>
-                        <a:srgbClr val="E2E8F0"/>
+                        <a:srgbClr val="EEF2F7"/>
                       </a:solidFill>
                       <a:prstDash val="solid"/>
                       <a:round/>
@@ -8700,7 +10462,7 @@
                     </a:lnR>
                     <a:lnT w="12700" cap="flat" cmpd="sng" algn="ctr">
                       <a:solidFill>
-                        <a:srgbClr val="E2E8F0"/>
+                        <a:srgbClr val="EEF2F7"/>
                       </a:solidFill>
                       <a:prstDash val="solid"/>
                       <a:round/>
@@ -8709,20 +10471,17 @@
                     </a:lnT>
                     <a:lnB w="12700" cap="flat" cmpd="sng" algn="ctr">
                       <a:solidFill>
-                        <a:srgbClr val="E2E8F0"/>
+                        <a:srgbClr val="EEF2F7"/>
                       </a:solidFill>
                       <a:prstDash val="solid"/>
                       <a:round/>
                       <a:headEnd type="none" w="med" len="med"/>
                       <a:tailEnd type="none" w="med" len="med"/>
                     </a:lnB>
-                    <a:solidFill>
-                      <a:srgbClr val="FFFFFF"/>
-                    </a:solidFill>
                   </a:tcPr>
                 </a:tc>
               </a:tr>
-              <a:tr h="841248">
+              <a:tr h="822960">
                 <a:tc>
                   <a:txBody>
                     <a:bodyPr/>
@@ -8736,23 +10495,23 @@
                           <a:solidFill>
                             <a:srgbClr val="0F172A"/>
                           </a:solidFill>
-                          <a:latin typeface="Calibri" pitchFamily="34" charset="0"/>
-                          <a:ea typeface="Calibri" pitchFamily="34" charset="-122"/>
-                          <a:cs typeface="Calibri" pitchFamily="34" charset="-120"/>
+                          <a:latin typeface="Arial" pitchFamily="34" charset="0"/>
+                          <a:ea typeface="Arial" pitchFamily="34" charset="-122"/>
+                          <a:cs typeface="Arial" pitchFamily="34" charset="-120"/>
                         </a:rPr>
                         <a:t>D2</a:t>
                       </a:r>
                       <a:endParaRPr lang="en-US" sz="1150" dirty="0">
-                        <a:latin typeface="Calibri" charset="0"/>
-                        <a:ea typeface="Calibri" charset="0"/>
-                        <a:cs typeface="Calibri" charset="0"/>
+                        <a:latin typeface="Arial" charset="0"/>
+                        <a:ea typeface="Arial" charset="0"/>
+                        <a:cs typeface="Arial" charset="0"/>
                       </a:endParaRPr>
                     </a:p>
                   </a:txBody>
                   <a:tcPr marL="91440" marR="91440" marT="45720" marB="45720" anchor="ctr">
                     <a:lnL w="12700" cap="flat" cmpd="sng" algn="ctr">
                       <a:solidFill>
-                        <a:srgbClr val="E2E8F0"/>
+                        <a:srgbClr val="EEF2F7"/>
                       </a:solidFill>
                       <a:prstDash val="solid"/>
                       <a:round/>
@@ -8761,7 +10520,7 @@
                     </a:lnL>
                     <a:lnR w="12700" cap="flat" cmpd="sng" algn="ctr">
                       <a:solidFill>
-                        <a:srgbClr val="E2E8F0"/>
+                        <a:srgbClr val="EEF2F7"/>
                       </a:solidFill>
                       <a:prstDash val="solid"/>
                       <a:round/>
@@ -8770,7 +10529,7 @@
                     </a:lnR>
                     <a:lnT w="12700" cap="flat" cmpd="sng" algn="ctr">
                       <a:solidFill>
-                        <a:srgbClr val="E2E8F0"/>
+                        <a:srgbClr val="EEF2F7"/>
                       </a:solidFill>
                       <a:prstDash val="solid"/>
                       <a:round/>
@@ -8779,16 +10538,13 @@
                     </a:lnT>
                     <a:lnB w="12700" cap="flat" cmpd="sng" algn="ctr">
                       <a:solidFill>
-                        <a:srgbClr val="E2E8F0"/>
+                        <a:srgbClr val="EEF2F7"/>
                       </a:solidFill>
                       <a:prstDash val="solid"/>
                       <a:round/>
                       <a:headEnd type="none" w="med" len="med"/>
                       <a:tailEnd type="none" w="med" len="med"/>
                     </a:lnB>
-                    <a:solidFill>
-                      <a:srgbClr val="FFFFFF"/>
-                    </a:solidFill>
                   </a:tcPr>
                 </a:tc>
                 <a:tc>
@@ -8804,23 +10560,23 @@
                           <a:solidFill>
                             <a:srgbClr val="0F172A"/>
                           </a:solidFill>
-                          <a:latin typeface="Calibri" pitchFamily="34" charset="0"/>
-                          <a:ea typeface="Calibri" pitchFamily="34" charset="-122"/>
-                          <a:cs typeface="Calibri" pitchFamily="34" charset="-120"/>
+                          <a:latin typeface="Arial" pitchFamily="34" charset="0"/>
+                          <a:ea typeface="Arial" pitchFamily="34" charset="-122"/>
+                          <a:cs typeface="Arial" pitchFamily="34" charset="-120"/>
                         </a:rPr>
                         <a:t>Telefone do cliente sem ação — tocavam no número esperando discar</a:t>
                       </a:r>
                       <a:endParaRPr lang="en-US" sz="1150" dirty="0">
-                        <a:latin typeface="Calibri" charset="0"/>
-                        <a:ea typeface="Calibri" charset="0"/>
-                        <a:cs typeface="Calibri" charset="0"/>
+                        <a:latin typeface="Arial" charset="0"/>
+                        <a:ea typeface="Arial" charset="0"/>
+                        <a:cs typeface="Arial" charset="0"/>
                       </a:endParaRPr>
                     </a:p>
                   </a:txBody>
                   <a:tcPr marL="91440" marR="91440" marT="45720" marB="45720" anchor="ctr">
                     <a:lnL w="12700" cap="flat" cmpd="sng" algn="ctr">
                       <a:solidFill>
-                        <a:srgbClr val="E2E8F0"/>
+                        <a:srgbClr val="EEF2F7"/>
                       </a:solidFill>
                       <a:prstDash val="solid"/>
                       <a:round/>
@@ -8829,7 +10585,7 @@
                     </a:lnL>
                     <a:lnR w="12700" cap="flat" cmpd="sng" algn="ctr">
                       <a:solidFill>
-                        <a:srgbClr val="E2E8F0"/>
+                        <a:srgbClr val="EEF2F7"/>
                       </a:solidFill>
                       <a:prstDash val="solid"/>
                       <a:round/>
@@ -8838,7 +10594,7 @@
                     </a:lnR>
                     <a:lnT w="12700" cap="flat" cmpd="sng" algn="ctr">
                       <a:solidFill>
-                        <a:srgbClr val="E2E8F0"/>
+                        <a:srgbClr val="EEF2F7"/>
                       </a:solidFill>
                       <a:prstDash val="solid"/>
                       <a:round/>
@@ -8847,16 +10603,13 @@
                     </a:lnT>
                     <a:lnB w="12700" cap="flat" cmpd="sng" algn="ctr">
                       <a:solidFill>
-                        <a:srgbClr val="E2E8F0"/>
+                        <a:srgbClr val="EEF2F7"/>
                       </a:solidFill>
                       <a:prstDash val="solid"/>
                       <a:round/>
                       <a:headEnd type="none" w="med" len="med"/>
                       <a:tailEnd type="none" w="med" len="med"/>
                     </a:lnB>
-                    <a:solidFill>
-                      <a:srgbClr val="FFFFFF"/>
-                    </a:solidFill>
                   </a:tcPr>
                 </a:tc>
                 <a:tc>
@@ -8872,23 +10625,23 @@
                           <a:solidFill>
                             <a:srgbClr val="0F172A"/>
                           </a:solidFill>
-                          <a:latin typeface="Calibri" pitchFamily="34" charset="0"/>
-                          <a:ea typeface="Calibri" pitchFamily="34" charset="-122"/>
-                          <a:cs typeface="Calibri" pitchFamily="34" charset="-120"/>
+                          <a:latin typeface="Arial" pitchFamily="34" charset="0"/>
+                          <a:ea typeface="Arial" pitchFamily="34" charset="-122"/>
+                          <a:cs typeface="Arial" pitchFamily="34" charset="-120"/>
                         </a:rPr>
                         <a:t>H4 — Consistência e padrões</a:t>
                       </a:r>
                       <a:endParaRPr lang="en-US" sz="1150" dirty="0">
-                        <a:latin typeface="Calibri" charset="0"/>
-                        <a:ea typeface="Calibri" charset="0"/>
-                        <a:cs typeface="Calibri" charset="0"/>
+                        <a:latin typeface="Arial" charset="0"/>
+                        <a:ea typeface="Arial" charset="0"/>
+                        <a:cs typeface="Arial" charset="0"/>
                       </a:endParaRPr>
                     </a:p>
                   </a:txBody>
                   <a:tcPr marL="91440" marR="91440" marT="45720" marB="45720" anchor="ctr">
                     <a:lnL w="12700" cap="flat" cmpd="sng" algn="ctr">
                       <a:solidFill>
-                        <a:srgbClr val="E2E8F0"/>
+                        <a:srgbClr val="EEF2F7"/>
                       </a:solidFill>
                       <a:prstDash val="solid"/>
                       <a:round/>
@@ -8897,7 +10650,7 @@
                     </a:lnL>
                     <a:lnR w="12700" cap="flat" cmpd="sng" algn="ctr">
                       <a:solidFill>
-                        <a:srgbClr val="E2E8F0"/>
+                        <a:srgbClr val="EEF2F7"/>
                       </a:solidFill>
                       <a:prstDash val="solid"/>
                       <a:round/>
@@ -8906,7 +10659,7 @@
                     </a:lnR>
                     <a:lnT w="12700" cap="flat" cmpd="sng" algn="ctr">
                       <a:solidFill>
-                        <a:srgbClr val="E2E8F0"/>
+                        <a:srgbClr val="EEF2F7"/>
                       </a:solidFill>
                       <a:prstDash val="solid"/>
                       <a:round/>
@@ -8915,16 +10668,13 @@
                     </a:lnT>
                     <a:lnB w="12700" cap="flat" cmpd="sng" algn="ctr">
                       <a:solidFill>
-                        <a:srgbClr val="E2E8F0"/>
+                        <a:srgbClr val="EEF2F7"/>
                       </a:solidFill>
                       <a:prstDash val="solid"/>
                       <a:round/>
                       <a:headEnd type="none" w="med" len="med"/>
                       <a:tailEnd type="none" w="med" len="med"/>
                     </a:lnB>
-                    <a:solidFill>
-                      <a:srgbClr val="FFFFFF"/>
-                    </a:solidFill>
                   </a:tcPr>
                 </a:tc>
                 <a:tc>
@@ -8940,23 +10690,23 @@
                           <a:solidFill>
                             <a:srgbClr val="0F172A"/>
                           </a:solidFill>
-                          <a:latin typeface="Calibri" pitchFamily="34" charset="0"/>
-                          <a:ea typeface="Calibri" pitchFamily="34" charset="-122"/>
-                          <a:cs typeface="Calibri" pitchFamily="34" charset="-120"/>
+                          <a:latin typeface="Arial" pitchFamily="34" charset="0"/>
+                          <a:ea typeface="Arial" pitchFamily="34" charset="-122"/>
+                          <a:cs typeface="Arial" pitchFamily="34" charset="-120"/>
                         </a:rPr>
                         <a:t>2</a:t>
                       </a:r>
                       <a:endParaRPr lang="en-US" sz="1150" dirty="0">
-                        <a:latin typeface="Calibri" charset="0"/>
-                        <a:ea typeface="Calibri" charset="0"/>
-                        <a:cs typeface="Calibri" charset="0"/>
+                        <a:latin typeface="Arial" charset="0"/>
+                        <a:ea typeface="Arial" charset="0"/>
+                        <a:cs typeface="Arial" charset="0"/>
                       </a:endParaRPr>
                     </a:p>
                   </a:txBody>
                   <a:tcPr marL="91440" marR="91440" marT="45720" marB="45720" anchor="ctr">
                     <a:lnL w="12700" cap="flat" cmpd="sng" algn="ctr">
                       <a:solidFill>
-                        <a:srgbClr val="E2E8F0"/>
+                        <a:srgbClr val="EEF2F7"/>
                       </a:solidFill>
                       <a:prstDash val="solid"/>
                       <a:round/>
@@ -8965,7 +10715,7 @@
                     </a:lnL>
                     <a:lnR w="12700" cap="flat" cmpd="sng" algn="ctr">
                       <a:solidFill>
-                        <a:srgbClr val="E2E8F0"/>
+                        <a:srgbClr val="EEF2F7"/>
                       </a:solidFill>
                       <a:prstDash val="solid"/>
                       <a:round/>
@@ -8974,7 +10724,7 @@
                     </a:lnR>
                     <a:lnT w="12700" cap="flat" cmpd="sng" algn="ctr">
                       <a:solidFill>
-                        <a:srgbClr val="E2E8F0"/>
+                        <a:srgbClr val="EEF2F7"/>
                       </a:solidFill>
                       <a:prstDash val="solid"/>
                       <a:round/>
@@ -8983,16 +10733,13 @@
                     </a:lnT>
                     <a:lnB w="12700" cap="flat" cmpd="sng" algn="ctr">
                       <a:solidFill>
-                        <a:srgbClr val="E2E8F0"/>
+                        <a:srgbClr val="EEF2F7"/>
                       </a:solidFill>
                       <a:prstDash val="solid"/>
                       <a:round/>
                       <a:headEnd type="none" w="med" len="med"/>
                       <a:tailEnd type="none" w="med" len="med"/>
                     </a:lnB>
-                    <a:solidFill>
-                      <a:srgbClr val="FFFFFF"/>
-                    </a:solidFill>
                   </a:tcPr>
                 </a:tc>
                 <a:tc>
@@ -9008,23 +10755,23 @@
                           <a:solidFill>
                             <a:srgbClr val="0F172A"/>
                           </a:solidFill>
-                          <a:latin typeface="Calibri" pitchFamily="34" charset="0"/>
-                          <a:ea typeface="Calibri" pitchFamily="34" charset="-122"/>
-                          <a:cs typeface="Calibri" pitchFamily="34" charset="-120"/>
+                          <a:latin typeface="Arial" pitchFamily="34" charset="0"/>
+                          <a:ea typeface="Arial" pitchFamily="34" charset="-122"/>
+                          <a:cs typeface="Arial" pitchFamily="34" charset="-120"/>
                         </a:rPr>
                         <a:t>Ícone de ligação clicável → tela “Ligando…”</a:t>
                       </a:r>
                       <a:endParaRPr lang="en-US" sz="1150" dirty="0">
-                        <a:latin typeface="Calibri" charset="0"/>
-                        <a:ea typeface="Calibri" charset="0"/>
-                        <a:cs typeface="Calibri" charset="0"/>
+                        <a:latin typeface="Arial" charset="0"/>
+                        <a:ea typeface="Arial" charset="0"/>
+                        <a:cs typeface="Arial" charset="0"/>
                       </a:endParaRPr>
                     </a:p>
                   </a:txBody>
                   <a:tcPr marL="91440" marR="91440" marT="45720" marB="45720" anchor="ctr">
                     <a:lnL w="12700" cap="flat" cmpd="sng" algn="ctr">
                       <a:solidFill>
-                        <a:srgbClr val="E2E8F0"/>
+                        <a:srgbClr val="EEF2F7"/>
                       </a:solidFill>
                       <a:prstDash val="solid"/>
                       <a:round/>
@@ -9033,7 +10780,7 @@
                     </a:lnL>
                     <a:lnR w="12700" cap="flat" cmpd="sng" algn="ctr">
                       <a:solidFill>
-                        <a:srgbClr val="E2E8F0"/>
+                        <a:srgbClr val="EEF2F7"/>
                       </a:solidFill>
                       <a:prstDash val="solid"/>
                       <a:round/>
@@ -9042,7 +10789,7 @@
                     </a:lnR>
                     <a:lnT w="12700" cap="flat" cmpd="sng" algn="ctr">
                       <a:solidFill>
-                        <a:srgbClr val="E2E8F0"/>
+                        <a:srgbClr val="EEF2F7"/>
                       </a:solidFill>
                       <a:prstDash val="solid"/>
                       <a:round/>
@@ -9051,20 +10798,17 @@
                     </a:lnT>
                     <a:lnB w="12700" cap="flat" cmpd="sng" algn="ctr">
                       <a:solidFill>
-                        <a:srgbClr val="E2E8F0"/>
+                        <a:srgbClr val="EEF2F7"/>
                       </a:solidFill>
                       <a:prstDash val="solid"/>
                       <a:round/>
                       <a:headEnd type="none" w="med" len="med"/>
                       <a:tailEnd type="none" w="med" len="med"/>
                     </a:lnB>
-                    <a:solidFill>
-                      <a:srgbClr val="FFFFFF"/>
-                    </a:solidFill>
                   </a:tcPr>
                 </a:tc>
               </a:tr>
-              <a:tr h="841248">
+              <a:tr h="822960">
                 <a:tc>
                   <a:txBody>
                     <a:bodyPr/>
@@ -9078,23 +10822,23 @@
                           <a:solidFill>
                             <a:srgbClr val="0F172A"/>
                           </a:solidFill>
-                          <a:latin typeface="Calibri" pitchFamily="34" charset="0"/>
-                          <a:ea typeface="Calibri" pitchFamily="34" charset="-122"/>
-                          <a:cs typeface="Calibri" pitchFamily="34" charset="-120"/>
+                          <a:latin typeface="Arial" pitchFamily="34" charset="0"/>
+                          <a:ea typeface="Arial" pitchFamily="34" charset="-122"/>
+                          <a:cs typeface="Arial" pitchFamily="34" charset="-120"/>
                         </a:rPr>
                         <a:t>D3</a:t>
                       </a:r>
                       <a:endParaRPr lang="en-US" sz="1150" dirty="0">
-                        <a:latin typeface="Calibri" charset="0"/>
-                        <a:ea typeface="Calibri" charset="0"/>
-                        <a:cs typeface="Calibri" charset="0"/>
+                        <a:latin typeface="Arial" charset="0"/>
+                        <a:ea typeface="Arial" charset="0"/>
+                        <a:cs typeface="Arial" charset="0"/>
                       </a:endParaRPr>
                     </a:p>
                   </a:txBody>
                   <a:tcPr marL="91440" marR="91440" marT="45720" marB="45720" anchor="ctr">
                     <a:lnL w="12700" cap="flat" cmpd="sng" algn="ctr">
                       <a:solidFill>
-                        <a:srgbClr val="E2E8F0"/>
+                        <a:srgbClr val="EEF2F7"/>
                       </a:solidFill>
                       <a:prstDash val="solid"/>
                       <a:round/>
@@ -9103,7 +10847,7 @@
                     </a:lnL>
                     <a:lnR w="12700" cap="flat" cmpd="sng" algn="ctr">
                       <a:solidFill>
-                        <a:srgbClr val="E2E8F0"/>
+                        <a:srgbClr val="EEF2F7"/>
                       </a:solidFill>
                       <a:prstDash val="solid"/>
                       <a:round/>
@@ -9112,7 +10856,7 @@
                     </a:lnR>
                     <a:lnT w="12700" cap="flat" cmpd="sng" algn="ctr">
                       <a:solidFill>
-                        <a:srgbClr val="E2E8F0"/>
+                        <a:srgbClr val="EEF2F7"/>
                       </a:solidFill>
                       <a:prstDash val="solid"/>
                       <a:round/>
@@ -9121,16 +10865,13 @@
                     </a:lnT>
                     <a:lnB w="12700" cap="flat" cmpd="sng" algn="ctr">
                       <a:solidFill>
-                        <a:srgbClr val="E2E8F0"/>
+                        <a:srgbClr val="EEF2F7"/>
                       </a:solidFill>
                       <a:prstDash val="solid"/>
                       <a:round/>
                       <a:headEnd type="none" w="med" len="med"/>
                       <a:tailEnd type="none" w="med" len="med"/>
                     </a:lnB>
-                    <a:solidFill>
-                      <a:srgbClr val="FFFFFF"/>
-                    </a:solidFill>
                   </a:tcPr>
                 </a:tc>
                 <a:tc>
@@ -9146,23 +10887,23 @@
                           <a:solidFill>
                             <a:srgbClr val="0F172A"/>
                           </a:solidFill>
-                          <a:latin typeface="Calibri" pitchFamily="34" charset="0"/>
-                          <a:ea typeface="Calibri" pitchFamily="34" charset="-122"/>
-                          <a:cs typeface="Calibri" pitchFamily="34" charset="-120"/>
+                          <a:latin typeface="Arial" pitchFamily="34" charset="0"/>
+                          <a:ea typeface="Arial" pitchFamily="34" charset="-122"/>
+                          <a:cs typeface="Arial" pitchFamily="34" charset="-120"/>
                         </a:rPr>
                         <a:t>Sem como anexar foto do atendimento para registrar evidência</a:t>
                       </a:r>
                       <a:endParaRPr lang="en-US" sz="1150" dirty="0">
-                        <a:latin typeface="Calibri" charset="0"/>
-                        <a:ea typeface="Calibri" charset="0"/>
-                        <a:cs typeface="Calibri" charset="0"/>
+                        <a:latin typeface="Arial" charset="0"/>
+                        <a:ea typeface="Arial" charset="0"/>
+                        <a:cs typeface="Arial" charset="0"/>
                       </a:endParaRPr>
                     </a:p>
                   </a:txBody>
                   <a:tcPr marL="91440" marR="91440" marT="45720" marB="45720" anchor="ctr">
                     <a:lnL w="12700" cap="flat" cmpd="sng" algn="ctr">
                       <a:solidFill>
-                        <a:srgbClr val="E2E8F0"/>
+                        <a:srgbClr val="EEF2F7"/>
                       </a:solidFill>
                       <a:prstDash val="solid"/>
                       <a:round/>
@@ -9171,7 +10912,7 @@
                     </a:lnL>
                     <a:lnR w="12700" cap="flat" cmpd="sng" algn="ctr">
                       <a:solidFill>
-                        <a:srgbClr val="E2E8F0"/>
+                        <a:srgbClr val="EEF2F7"/>
                       </a:solidFill>
                       <a:prstDash val="solid"/>
                       <a:round/>
@@ -9180,7 +10921,7 @@
                     </a:lnR>
                     <a:lnT w="12700" cap="flat" cmpd="sng" algn="ctr">
                       <a:solidFill>
-                        <a:srgbClr val="E2E8F0"/>
+                        <a:srgbClr val="EEF2F7"/>
                       </a:solidFill>
                       <a:prstDash val="solid"/>
                       <a:round/>
@@ -9189,16 +10930,13 @@
                     </a:lnT>
                     <a:lnB w="12700" cap="flat" cmpd="sng" algn="ctr">
                       <a:solidFill>
-                        <a:srgbClr val="E2E8F0"/>
+                        <a:srgbClr val="EEF2F7"/>
                       </a:solidFill>
                       <a:prstDash val="solid"/>
                       <a:round/>
                       <a:headEnd type="none" w="med" len="med"/>
                       <a:tailEnd type="none" w="med" len="med"/>
                     </a:lnB>
-                    <a:solidFill>
-                      <a:srgbClr val="FFFFFF"/>
-                    </a:solidFill>
                   </a:tcPr>
                 </a:tc>
                 <a:tc>
@@ -9214,23 +10952,23 @@
                           <a:solidFill>
                             <a:srgbClr val="0F172A"/>
                           </a:solidFill>
-                          <a:latin typeface="Calibri" pitchFamily="34" charset="0"/>
-                          <a:ea typeface="Calibri" pitchFamily="34" charset="-122"/>
-                          <a:cs typeface="Calibri" pitchFamily="34" charset="-120"/>
+                          <a:latin typeface="Arial" pitchFamily="34" charset="0"/>
+                          <a:ea typeface="Arial" pitchFamily="34" charset="-122"/>
+                          <a:cs typeface="Arial" pitchFamily="34" charset="-120"/>
                         </a:rPr>
                         <a:t>H7 — Flexibilidade e eficiência</a:t>
                       </a:r>
                       <a:endParaRPr lang="en-US" sz="1150" dirty="0">
-                        <a:latin typeface="Calibri" charset="0"/>
-                        <a:ea typeface="Calibri" charset="0"/>
-                        <a:cs typeface="Calibri" charset="0"/>
+                        <a:latin typeface="Arial" charset="0"/>
+                        <a:ea typeface="Arial" charset="0"/>
+                        <a:cs typeface="Arial" charset="0"/>
                       </a:endParaRPr>
                     </a:p>
                   </a:txBody>
                   <a:tcPr marL="91440" marR="91440" marT="45720" marB="45720" anchor="ctr">
                     <a:lnL w="12700" cap="flat" cmpd="sng" algn="ctr">
                       <a:solidFill>
-                        <a:srgbClr val="E2E8F0"/>
+                        <a:srgbClr val="EEF2F7"/>
                       </a:solidFill>
                       <a:prstDash val="solid"/>
                       <a:round/>
@@ -9239,7 +10977,7 @@
                     </a:lnL>
                     <a:lnR w="12700" cap="flat" cmpd="sng" algn="ctr">
                       <a:solidFill>
-                        <a:srgbClr val="E2E8F0"/>
+                        <a:srgbClr val="EEF2F7"/>
                       </a:solidFill>
                       <a:prstDash val="solid"/>
                       <a:round/>
@@ -9248,7 +10986,7 @@
                     </a:lnR>
                     <a:lnT w="12700" cap="flat" cmpd="sng" algn="ctr">
                       <a:solidFill>
-                        <a:srgbClr val="E2E8F0"/>
+                        <a:srgbClr val="EEF2F7"/>
                       </a:solidFill>
                       <a:prstDash val="solid"/>
                       <a:round/>
@@ -9257,16 +10995,13 @@
                     </a:lnT>
                     <a:lnB w="12700" cap="flat" cmpd="sng" algn="ctr">
                       <a:solidFill>
-                        <a:srgbClr val="E2E8F0"/>
+                        <a:srgbClr val="EEF2F7"/>
                       </a:solidFill>
                       <a:prstDash val="solid"/>
                       <a:round/>
                       <a:headEnd type="none" w="med" len="med"/>
                       <a:tailEnd type="none" w="med" len="med"/>
                     </a:lnB>
-                    <a:solidFill>
-                      <a:srgbClr val="FFFFFF"/>
-                    </a:solidFill>
                   </a:tcPr>
                 </a:tc>
                 <a:tc>
@@ -9282,23 +11017,23 @@
                           <a:solidFill>
                             <a:srgbClr val="0F172A"/>
                           </a:solidFill>
-                          <a:latin typeface="Calibri" pitchFamily="34" charset="0"/>
-                          <a:ea typeface="Calibri" pitchFamily="34" charset="-122"/>
-                          <a:cs typeface="Calibri" pitchFamily="34" charset="-120"/>
+                          <a:latin typeface="Arial" pitchFamily="34" charset="0"/>
+                          <a:ea typeface="Arial" pitchFamily="34" charset="-122"/>
+                          <a:cs typeface="Arial" pitchFamily="34" charset="-120"/>
                         </a:rPr>
                         <a:t>2</a:t>
                       </a:r>
                       <a:endParaRPr lang="en-US" sz="1150" dirty="0">
-                        <a:latin typeface="Calibri" charset="0"/>
-                        <a:ea typeface="Calibri" charset="0"/>
-                        <a:cs typeface="Calibri" charset="0"/>
+                        <a:latin typeface="Arial" charset="0"/>
+                        <a:ea typeface="Arial" charset="0"/>
+                        <a:cs typeface="Arial" charset="0"/>
                       </a:endParaRPr>
                     </a:p>
                   </a:txBody>
                   <a:tcPr marL="91440" marR="91440" marT="45720" marB="45720" anchor="ctr">
                     <a:lnL w="12700" cap="flat" cmpd="sng" algn="ctr">
                       <a:solidFill>
-                        <a:srgbClr val="E2E8F0"/>
+                        <a:srgbClr val="EEF2F7"/>
                       </a:solidFill>
                       <a:prstDash val="solid"/>
                       <a:round/>
@@ -9307,7 +11042,7 @@
                     </a:lnL>
                     <a:lnR w="12700" cap="flat" cmpd="sng" algn="ctr">
                       <a:solidFill>
-                        <a:srgbClr val="E2E8F0"/>
+                        <a:srgbClr val="EEF2F7"/>
                       </a:solidFill>
                       <a:prstDash val="solid"/>
                       <a:round/>
@@ -9316,7 +11051,7 @@
                     </a:lnR>
                     <a:lnT w="12700" cap="flat" cmpd="sng" algn="ctr">
                       <a:solidFill>
-                        <a:srgbClr val="E2E8F0"/>
+                        <a:srgbClr val="EEF2F7"/>
                       </a:solidFill>
                       <a:prstDash val="solid"/>
                       <a:round/>
@@ -9325,16 +11060,13 @@
                     </a:lnT>
                     <a:lnB w="12700" cap="flat" cmpd="sng" algn="ctr">
                       <a:solidFill>
-                        <a:srgbClr val="E2E8F0"/>
+                        <a:srgbClr val="EEF2F7"/>
                       </a:solidFill>
                       <a:prstDash val="solid"/>
                       <a:round/>
                       <a:headEnd type="none" w="med" len="med"/>
                       <a:tailEnd type="none" w="med" len="med"/>
                     </a:lnB>
-                    <a:solidFill>
-                      <a:srgbClr val="FFFFFF"/>
-                    </a:solidFill>
                   </a:tcPr>
                 </a:tc>
                 <a:tc>
@@ -9350,23 +11082,23 @@
                           <a:solidFill>
                             <a:srgbClr val="0F172A"/>
                           </a:solidFill>
-                          <a:latin typeface="Calibri" pitchFamily="34" charset="0"/>
-                          <a:ea typeface="Calibri" pitchFamily="34" charset="-122"/>
-                          <a:cs typeface="Calibri" pitchFamily="34" charset="-120"/>
+                          <a:latin typeface="Arial" pitchFamily="34" charset="0"/>
+                          <a:ea typeface="Arial" pitchFamily="34" charset="-122"/>
+                          <a:cs typeface="Arial" pitchFamily="34" charset="-120"/>
                         </a:rPr>
                         <a:t>Botão “Adicionar foto” na tela de detalhe</a:t>
                       </a:r>
                       <a:endParaRPr lang="en-US" sz="1150" dirty="0">
-                        <a:latin typeface="Calibri" charset="0"/>
-                        <a:ea typeface="Calibri" charset="0"/>
-                        <a:cs typeface="Calibri" charset="0"/>
+                        <a:latin typeface="Arial" charset="0"/>
+                        <a:ea typeface="Arial" charset="0"/>
+                        <a:cs typeface="Arial" charset="0"/>
                       </a:endParaRPr>
                     </a:p>
                   </a:txBody>
                   <a:tcPr marL="91440" marR="91440" marT="45720" marB="45720" anchor="ctr">
                     <a:lnL w="12700" cap="flat" cmpd="sng" algn="ctr">
                       <a:solidFill>
-                        <a:srgbClr val="E2E8F0"/>
+                        <a:srgbClr val="EEF2F7"/>
                       </a:solidFill>
                       <a:prstDash val="solid"/>
                       <a:round/>
@@ -9375,7 +11107,7 @@
                     </a:lnL>
                     <a:lnR w="12700" cap="flat" cmpd="sng" algn="ctr">
                       <a:solidFill>
-                        <a:srgbClr val="E2E8F0"/>
+                        <a:srgbClr val="EEF2F7"/>
                       </a:solidFill>
                       <a:prstDash val="solid"/>
                       <a:round/>
@@ -9384,7 +11116,7 @@
                     </a:lnR>
                     <a:lnT w="12700" cap="flat" cmpd="sng" algn="ctr">
                       <a:solidFill>
-                        <a:srgbClr val="E2E8F0"/>
+                        <a:srgbClr val="EEF2F7"/>
                       </a:solidFill>
                       <a:prstDash val="solid"/>
                       <a:round/>
@@ -9393,16 +11125,13 @@
                     </a:lnT>
                     <a:lnB w="12700" cap="flat" cmpd="sng" algn="ctr">
                       <a:solidFill>
-                        <a:srgbClr val="E2E8F0"/>
+                        <a:srgbClr val="EEF2F7"/>
                       </a:solidFill>
                       <a:prstDash val="solid"/>
                       <a:round/>
                       <a:headEnd type="none" w="med" len="med"/>
                       <a:tailEnd type="none" w="med" len="med"/>
                     </a:lnB>
-                    <a:solidFill>
-                      <a:srgbClr val="FFFFFF"/>
-                    </a:solidFill>
                   </a:tcPr>
                 </a:tc>
               </a:tr>
@@ -9418,34 +11147,34 @@
         </p:nvSpPr>
         <p:spPr>
           <a:xfrm>
-            <a:off x="457200" y="4343400"/>
-            <a:ext cx="8229600" cy="320040"/>
-          </a:xfrm>
-          <a:prstGeom prst="rect">
-            <a:avLst/>
-          </a:prstGeom>
-          <a:noFill/>
-          <a:ln/>
-        </p:spPr>
-        <p:txBody>
-          <a:bodyPr wrap="square" rtlCol="0" anchor="ctr"/>
-          <a:lstStyle/>
-          <a:p>
-            <a:pPr indent="0" marL="0">
-              <a:buNone/>
-            </a:pPr>
-            <a:r>
-              <a:rPr lang="en-US" sz="1100" i="1" dirty="0">
+            <a:off x="502920" y="4777740"/>
+            <a:ext cx="5486400" cy="274320"/>
+          </a:xfrm>
+          <a:prstGeom prst="rect">
+            <a:avLst/>
+          </a:prstGeom>
+          <a:noFill/>
+          <a:ln/>
+        </p:spPr>
+        <p:txBody>
+          <a:bodyPr wrap="square" lIns="0" tIns="0" rIns="0" bIns="0" rtlCol="0" anchor="ctr"/>
+          <a:lstStyle/>
+          <a:p>
+            <a:pPr algn="l" indent="0" marL="0">
+              <a:buNone/>
+            </a:pPr>
+            <a:r>
+              <a:rPr lang="en-US" sz="900" dirty="0">
                 <a:solidFill>
                   <a:srgbClr val="64748B"/>
                 </a:solidFill>
-                <a:latin typeface="Calibri" pitchFamily="34" charset="0"/>
-                <a:ea typeface="Calibri" pitchFamily="34" charset="-122"/>
-                <a:cs typeface="Calibri" pitchFamily="34" charset="-120"/>
-              </a:rPr>
-              <a:t>Os 3 defeitos vieram do teste e foram mapeados às heurísticas de Nielsen (severidade 0–4). Todos já corrigidos.</a:t>
-            </a:r>
-            <a:endParaRPr lang="en-US" sz="1100" dirty="0"/>
+                <a:latin typeface="Arial" pitchFamily="34" charset="0"/>
+                <a:ea typeface="Arial" pitchFamily="34" charset="-122"/>
+                <a:cs typeface="Arial" pitchFamily="34" charset="-120"/>
+              </a:rPr>
+              <a:t>Track Fibra · IHC — UTFPR Campo Mourão</a:t>
+            </a:r>
+            <a:endParaRPr lang="en-US" sz="900" dirty="0"/>
           </a:p>
         </p:txBody>
       </p:sp>
@@ -9457,20 +11186,20 @@
         </p:nvSpPr>
         <p:spPr>
           <a:xfrm>
-            <a:off x="457200" y="4759452"/>
-            <a:ext cx="5486400" cy="274320"/>
-          </a:xfrm>
-          <a:prstGeom prst="rect">
-            <a:avLst/>
-          </a:prstGeom>
-          <a:noFill/>
-          <a:ln/>
-        </p:spPr>
-        <p:txBody>
-          <a:bodyPr wrap="square" rtlCol="0" anchor="ctr"/>
-          <a:lstStyle/>
-          <a:p>
-            <a:pPr algn="l" indent="0" marL="0">
+            <a:off x="7726680" y="4777740"/>
+            <a:ext cx="914400" cy="274320"/>
+          </a:xfrm>
+          <a:prstGeom prst="rect">
+            <a:avLst/>
+          </a:prstGeom>
+          <a:noFill/>
+          <a:ln/>
+        </p:spPr>
+        <p:txBody>
+          <a:bodyPr wrap="square" lIns="0" tIns="0" rIns="0" bIns="0" rtlCol="0" anchor="ctr"/>
+          <a:lstStyle/>
+          <a:p>
+            <a:pPr algn="r" indent="0" marL="0">
               <a:buNone/>
             </a:pPr>
             <a:r>
@@ -9478,943 +11207,11 @@
                 <a:solidFill>
                   <a:srgbClr val="64748B"/>
                 </a:solidFill>
-                <a:latin typeface="Calibri" pitchFamily="34" charset="0"/>
-                <a:ea typeface="Calibri" pitchFamily="34" charset="-122"/>
-                <a:cs typeface="Calibri" pitchFamily="34" charset="-120"/>
-              </a:rPr>
-              <a:t>Track Fibra · IHC — UTFPR Campo Mourão</a:t>
-            </a:r>
-            <a:endParaRPr lang="en-US" sz="900" dirty="0"/>
-          </a:p>
-        </p:txBody>
-      </p:sp>
-      <p:sp>
-        <p:nvSpPr>
-          <p:cNvPr id="7" name="Text 4"/>
-          <p:cNvSpPr/>
-          <p:nvPr/>
-        </p:nvSpPr>
-        <p:spPr>
-          <a:xfrm>
-            <a:off x="7772400" y="4759452"/>
-            <a:ext cx="914400" cy="274320"/>
-          </a:xfrm>
-          <a:prstGeom prst="rect">
-            <a:avLst/>
-          </a:prstGeom>
-          <a:noFill/>
-          <a:ln/>
-        </p:spPr>
-        <p:txBody>
-          <a:bodyPr wrap="square" rtlCol="0" anchor="ctr"/>
-          <a:lstStyle/>
-          <a:p>
-            <a:pPr algn="r" indent="0" marL="0">
-              <a:buNone/>
-            </a:pPr>
-            <a:r>
-              <a:rPr lang="en-US" sz="900" dirty="0">
-                <a:solidFill>
-                  <a:srgbClr val="64748B"/>
-                </a:solidFill>
-                <a:latin typeface="Calibri" pitchFamily="34" charset="0"/>
-                <a:ea typeface="Calibri" pitchFamily="34" charset="-122"/>
-                <a:cs typeface="Calibri" pitchFamily="34" charset="-120"/>
-              </a:rPr>
-              <a:t>8 / 11</a:t>
-            </a:r>
-            <a:endParaRPr lang="en-US" sz="900" dirty="0"/>
-          </a:p>
-        </p:txBody>
-      </p:sp>
-    </p:spTree>
-  </p:cSld>
-  <p:clrMapOvr>
-    <a:masterClrMapping/>
-  </p:clrMapOvr>
-</p:sld>
-</file>
-
-<file path=ppt/slides/slide9.xml><?xml version="1.0" encoding="utf-8"?>
-<p:sld xmlns:a="http://schemas.openxmlformats.org/drawingml/2006/main" xmlns:r="http://schemas.openxmlformats.org/officeDocument/2006/relationships" xmlns:p="http://schemas.openxmlformats.org/presentationml/2006/main">
-  <p:cSld name="Slide 9">
-    <p:bg>
-      <p:bgPr>
-        <a:solidFill>
-          <a:srgbClr val="FFFFFF"/>
-        </a:solidFill>
-      </p:bgPr>
-    </p:bg>
-    <p:spTree>
-      <p:nvGrpSpPr>
-        <p:cNvPr id="1" name=""/>
-        <p:cNvGrpSpPr/>
-        <p:nvPr/>
-      </p:nvGrpSpPr>
-      <p:grpSpPr>
-        <a:xfrm>
-          <a:off x="0" y="0"/>
-          <a:ext cx="0" cy="0"/>
-          <a:chOff x="0" y="0"/>
-          <a:chExt cx="0" cy="0"/>
-        </a:xfrm>
-      </p:grpSpPr>
-      <p:sp>
-        <p:nvSpPr>
-          <p:cNvPr id="2" name="Text 0"/>
-          <p:cNvSpPr/>
-          <p:nvPr/>
-        </p:nvSpPr>
-        <p:spPr>
-          <a:xfrm>
-            <a:off x="502920" y="301752"/>
-            <a:ext cx="8229600" cy="274320"/>
-          </a:xfrm>
-          <a:prstGeom prst="rect">
-            <a:avLst/>
-          </a:prstGeom>
-          <a:noFill/>
-          <a:ln/>
-        </p:spPr>
-        <p:txBody>
-          <a:bodyPr wrap="square" lIns="0" tIns="0" rIns="0" bIns="0" rtlCol="0" anchor="ctr"/>
-          <a:lstStyle/>
-          <a:p>
-            <a:pPr indent="0" marL="0">
-              <a:buNone/>
-            </a:pPr>
-            <a:r>
-              <a:rPr lang="en-US" sz="1200" b="1" spc="300" kern="0" dirty="0">
-                <a:solidFill>
-                  <a:srgbClr val="06B6D4"/>
-                </a:solidFill>
-                <a:latin typeface="Calibri" pitchFamily="34" charset="0"/>
-                <a:ea typeface="Calibri" pitchFamily="34" charset="-122"/>
-                <a:cs typeface="Calibri" pitchFamily="34" charset="-120"/>
-              </a:rPr>
-              <a:t>MELHORIAS NO PROTÓTIPO</a:t>
-            </a:r>
-            <a:endParaRPr lang="en-US" sz="1200" dirty="0"/>
-          </a:p>
-        </p:txBody>
-      </p:sp>
-      <p:sp>
-        <p:nvSpPr>
-          <p:cNvPr id="3" name="Text 1"/>
-          <p:cNvSpPr/>
-          <p:nvPr/>
-        </p:nvSpPr>
-        <p:spPr>
-          <a:xfrm>
-            <a:off x="457200" y="548640"/>
-            <a:ext cx="8229600" cy="640080"/>
-          </a:xfrm>
-          <a:prstGeom prst="rect">
-            <a:avLst/>
-          </a:prstGeom>
-          <a:noFill/>
-          <a:ln/>
-        </p:spPr>
-        <p:txBody>
-          <a:bodyPr wrap="square" lIns="0" tIns="0" rIns="0" bIns="0" rtlCol="0" anchor="ctr"/>
-          <a:lstStyle/>
-          <a:p>
-            <a:pPr indent="0" marL="0">
-              <a:buNone/>
-            </a:pPr>
-            <a:r>
-              <a:rPr lang="en-US" sz="3200" b="1" dirty="0">
-                <a:solidFill>
-                  <a:srgbClr val="0F172A"/>
-                </a:solidFill>
-                <a:latin typeface="Cambria" pitchFamily="34" charset="0"/>
-                <a:ea typeface="Cambria" pitchFamily="34" charset="-122"/>
-                <a:cs typeface="Cambria" pitchFamily="34" charset="-120"/>
-              </a:rPr>
-              <a:t>Antes → Depois</a:t>
-            </a:r>
-            <a:endParaRPr lang="en-US" sz="3200" dirty="0"/>
-          </a:p>
-        </p:txBody>
-      </p:sp>
-      <p:sp>
-        <p:nvSpPr>
-          <p:cNvPr id="4" name="Shape 2"/>
-          <p:cNvSpPr/>
-          <p:nvPr/>
-        </p:nvSpPr>
-        <p:spPr>
-          <a:xfrm>
-            <a:off x="347472" y="960120"/>
-            <a:ext cx="2688336" cy="3429000"/>
-          </a:xfrm>
-          <a:prstGeom prst="roundRect">
-            <a:avLst>
-              <a:gd name="adj" fmla="val 2721"/>
-            </a:avLst>
-          </a:prstGeom>
-          <a:solidFill>
-            <a:srgbClr val="F8FAFC"/>
-          </a:solidFill>
-          <a:ln w="12700">
-            <a:solidFill>
-              <a:srgbClr val="E2E8F0"/>
-            </a:solidFill>
-            <a:prstDash val="solid"/>
-          </a:ln>
-          <a:effectLst>
-            <a:outerShdw sx="100000" sy="100000" kx="0" ky="0" algn="bl" rotWithShape="0" blurRad="88900" dist="38100" dir="5400000">
-              <a:srgbClr val="0F172A">
-                <a:alpha val="10000"/>
-              </a:srgbClr>
-            </a:outerShdw>
-          </a:effectLst>
-        </p:spPr>
-      </p:sp>
-      <p:sp>
-        <p:nvSpPr>
-          <p:cNvPr id="5" name="Text 3"/>
-          <p:cNvSpPr/>
-          <p:nvPr/>
-        </p:nvSpPr>
-        <p:spPr>
-          <a:xfrm>
-            <a:off x="411480" y="1051560"/>
-            <a:ext cx="2651760" cy="320040"/>
-          </a:xfrm>
-          <a:prstGeom prst="rect">
-            <a:avLst/>
-          </a:prstGeom>
-          <a:noFill/>
-          <a:ln/>
-        </p:spPr>
-        <p:txBody>
-          <a:bodyPr wrap="square" lIns="0" tIns="0" rIns="0" bIns="0" rtlCol="0" anchor="ctr"/>
-          <a:lstStyle/>
-          <a:p>
-            <a:pPr algn="ctr" indent="0" marL="0">
-              <a:buNone/>
-            </a:pPr>
-            <a:r>
-              <a:rPr lang="en-US" sz="1250" b="1" dirty="0">
-                <a:solidFill>
-                  <a:srgbClr val="1D4ED8"/>
-                </a:solidFill>
-                <a:latin typeface="Calibri" pitchFamily="34" charset="0"/>
-                <a:ea typeface="Calibri" pitchFamily="34" charset="-122"/>
-                <a:cs typeface="Calibri" pitchFamily="34" charset="-120"/>
-              </a:rPr>
-              <a:t>D1 · Confirmação ao finalizar</a:t>
-            </a:r>
-            <a:endParaRPr lang="en-US" sz="1250" dirty="0"/>
-          </a:p>
-        </p:txBody>
-      </p:sp>
-      <p:pic>
-        <p:nvPicPr>
-          <p:cNvPr id="6" name="Image 0" descr="assets/antes-d1-finalizado-sem-desfazer.png">    </p:cNvPr>
-          <p:cNvPicPr>
-            <a:picLocks noChangeAspect="1"/>
-          </p:cNvPicPr>
-          <p:nvPr/>
-        </p:nvPicPr>
-        <p:blipFill>
-          <a:blip r:embed="rId1"/>
-          <a:stretch>
-            <a:fillRect/>
-          </a:stretch>
-        </p:blipFill>
-        <p:spPr>
-          <a:xfrm>
-            <a:off x="502920" y="1508760"/>
-            <a:ext cx="1092647" cy="2377440"/>
-          </a:xfrm>
-          <a:prstGeom prst="rect">
-            <a:avLst/>
-          </a:prstGeom>
-        </p:spPr>
-      </p:pic>
-      <p:pic>
-        <p:nvPicPr>
-          <p:cNvPr id="7" name="Image 1" descr="assets/depois-d1-finalizado-com-desfazer.png">    </p:cNvPr>
-          <p:cNvPicPr>
-            <a:picLocks noChangeAspect="1"/>
-          </p:cNvPicPr>
-          <p:nvPr/>
-        </p:nvPicPr>
-        <p:blipFill>
-          <a:blip r:embed="rId2"/>
-          <a:stretch>
-            <a:fillRect/>
-          </a:stretch>
-        </p:blipFill>
-        <p:spPr>
-          <a:xfrm>
-            <a:off x="1986114" y="1508760"/>
-            <a:ext cx="1077126" cy="2377440"/>
-          </a:xfrm>
-          <a:prstGeom prst="rect">
-            <a:avLst/>
-          </a:prstGeom>
-        </p:spPr>
-      </p:pic>
-      <p:sp>
-        <p:nvSpPr>
-          <p:cNvPr id="8" name="Text 4"/>
-          <p:cNvSpPr/>
-          <p:nvPr/>
-        </p:nvSpPr>
-        <p:spPr>
-          <a:xfrm>
-            <a:off x="1595567" y="1508760"/>
-            <a:ext cx="390547" cy="2377440"/>
-          </a:xfrm>
-          <a:prstGeom prst="rect">
-            <a:avLst/>
-          </a:prstGeom>
-          <a:noFill/>
-          <a:ln/>
-        </p:spPr>
-        <p:txBody>
-          <a:bodyPr wrap="square" lIns="0" tIns="0" rIns="0" bIns="0" rtlCol="0" anchor="ctr"/>
-          <a:lstStyle/>
-          <a:p>
-            <a:pPr algn="ctr" indent="0" marL="0">
-              <a:buNone/>
-            </a:pPr>
-            <a:r>
-              <a:rPr lang="en-US" sz="2000" b="1" dirty="0">
-                <a:solidFill>
-                  <a:srgbClr val="06B6D4"/>
-                </a:solidFill>
-              </a:rPr>
-              <a:t>→</a:t>
-            </a:r>
-            <a:endParaRPr lang="en-US" sz="2000" dirty="0"/>
-          </a:p>
-        </p:txBody>
-      </p:sp>
-      <p:sp>
-        <p:nvSpPr>
-          <p:cNvPr id="9" name="Text 5"/>
-          <p:cNvSpPr/>
-          <p:nvPr/>
-        </p:nvSpPr>
-        <p:spPr>
-          <a:xfrm>
-            <a:off x="502920" y="3904488"/>
-            <a:ext cx="1092647" cy="228600"/>
-          </a:xfrm>
-          <a:prstGeom prst="rect">
-            <a:avLst/>
-          </a:prstGeom>
-          <a:noFill/>
-          <a:ln/>
-        </p:spPr>
-        <p:txBody>
-          <a:bodyPr wrap="square" lIns="0" tIns="0" rIns="0" bIns="0" rtlCol="0" anchor="ctr"/>
-          <a:lstStyle/>
-          <a:p>
-            <a:pPr algn="ctr" indent="0" marL="0">
-              <a:buNone/>
-            </a:pPr>
-            <a:r>
-              <a:rPr lang="en-US" sz="900" dirty="0">
-                <a:solidFill>
-                  <a:srgbClr val="64748B"/>
-                </a:solidFill>
-                <a:latin typeface="Calibri" pitchFamily="34" charset="0"/>
-                <a:ea typeface="Calibri" pitchFamily="34" charset="-122"/>
-                <a:cs typeface="Calibri" pitchFamily="34" charset="-120"/>
-              </a:rPr>
-              <a:t>Antes</a:t>
-            </a:r>
-            <a:endParaRPr lang="en-US" sz="900" dirty="0"/>
-          </a:p>
-        </p:txBody>
-      </p:sp>
-      <p:sp>
-        <p:nvSpPr>
-          <p:cNvPr id="10" name="Text 6"/>
-          <p:cNvSpPr/>
-          <p:nvPr/>
-        </p:nvSpPr>
-        <p:spPr>
-          <a:xfrm>
-            <a:off x="1986114" y="3904488"/>
-            <a:ext cx="1077126" cy="228600"/>
-          </a:xfrm>
-          <a:prstGeom prst="rect">
-            <a:avLst/>
-          </a:prstGeom>
-          <a:noFill/>
-          <a:ln/>
-        </p:spPr>
-        <p:txBody>
-          <a:bodyPr wrap="square" lIns="0" tIns="0" rIns="0" bIns="0" rtlCol="0" anchor="ctr"/>
-          <a:lstStyle/>
-          <a:p>
-            <a:pPr algn="ctr" indent="0" marL="0">
-              <a:buNone/>
-            </a:pPr>
-            <a:r>
-              <a:rPr lang="en-US" sz="900" b="1" dirty="0">
-                <a:solidFill>
-                  <a:srgbClr val="059669"/>
-                </a:solidFill>
-                <a:latin typeface="Calibri" pitchFamily="34" charset="0"/>
-                <a:ea typeface="Calibri" pitchFamily="34" charset="-122"/>
-                <a:cs typeface="Calibri" pitchFamily="34" charset="-120"/>
-              </a:rPr>
-              <a:t>Depois</a:t>
-            </a:r>
-            <a:endParaRPr lang="en-US" sz="900" dirty="0"/>
-          </a:p>
-        </p:txBody>
-      </p:sp>
-      <p:sp>
-        <p:nvSpPr>
-          <p:cNvPr id="11" name="Shape 7"/>
-          <p:cNvSpPr/>
-          <p:nvPr/>
-        </p:nvSpPr>
-        <p:spPr>
-          <a:xfrm>
-            <a:off x="3136392" y="960120"/>
-            <a:ext cx="2688336" cy="3429000"/>
-          </a:xfrm>
-          <a:prstGeom prst="roundRect">
-            <a:avLst>
-              <a:gd name="adj" fmla="val 2721"/>
-            </a:avLst>
-          </a:prstGeom>
-          <a:solidFill>
-            <a:srgbClr val="F8FAFC"/>
-          </a:solidFill>
-          <a:ln w="12700">
-            <a:solidFill>
-              <a:srgbClr val="E2E8F0"/>
-            </a:solidFill>
-            <a:prstDash val="solid"/>
-          </a:ln>
-          <a:effectLst>
-            <a:outerShdw sx="100000" sy="100000" kx="0" ky="0" algn="bl" rotWithShape="0" blurRad="88900" dist="38100" dir="5400000">
-              <a:srgbClr val="0F172A">
-                <a:alpha val="10000"/>
-              </a:srgbClr>
-            </a:outerShdw>
-          </a:effectLst>
-        </p:spPr>
-      </p:sp>
-      <p:sp>
-        <p:nvSpPr>
-          <p:cNvPr id="12" name="Text 8"/>
-          <p:cNvSpPr/>
-          <p:nvPr/>
-        </p:nvSpPr>
-        <p:spPr>
-          <a:xfrm>
-            <a:off x="3200400" y="1051560"/>
-            <a:ext cx="2651760" cy="320040"/>
-          </a:xfrm>
-          <a:prstGeom prst="rect">
-            <a:avLst/>
-          </a:prstGeom>
-          <a:noFill/>
-          <a:ln/>
-        </p:spPr>
-        <p:txBody>
-          <a:bodyPr wrap="square" lIns="0" tIns="0" rIns="0" bIns="0" rtlCol="0" anchor="ctr"/>
-          <a:lstStyle/>
-          <a:p>
-            <a:pPr algn="ctr" indent="0" marL="0">
-              <a:buNone/>
-            </a:pPr>
-            <a:r>
-              <a:rPr lang="en-US" sz="1250" b="1" dirty="0">
-                <a:solidFill>
-                  <a:srgbClr val="1D4ED8"/>
-                </a:solidFill>
-                <a:latin typeface="Calibri" pitchFamily="34" charset="0"/>
-                <a:ea typeface="Calibri" pitchFamily="34" charset="-122"/>
-                <a:cs typeface="Calibri" pitchFamily="34" charset="-120"/>
-              </a:rPr>
-              <a:t>D2 · Telefone clicável</a:t>
-            </a:r>
-            <a:endParaRPr lang="en-US" sz="1250" dirty="0"/>
-          </a:p>
-        </p:txBody>
-      </p:sp>
-      <p:pic>
-        <p:nvPicPr>
-          <p:cNvPr id="13" name="Image 2" descr="assets/antes-d2d3-detalhe-sem-icone-sem-foto.png">    </p:cNvPr>
-          <p:cNvPicPr>
-            <a:picLocks noChangeAspect="1"/>
-          </p:cNvPicPr>
-          <p:nvPr/>
-        </p:nvPicPr>
-        <p:blipFill>
-          <a:blip r:embed="rId3"/>
-          <a:stretch>
-            <a:fillRect/>
-          </a:stretch>
-        </p:blipFill>
-        <p:spPr>
-          <a:xfrm>
-            <a:off x="3291840" y="1508760"/>
-            <a:ext cx="1080760" cy="2377440"/>
-          </a:xfrm>
-          <a:prstGeom prst="rect">
-            <a:avLst/>
-          </a:prstGeom>
-        </p:spPr>
-      </p:pic>
-      <p:pic>
-        <p:nvPicPr>
-          <p:cNvPr id="14" name="Image 3" descr="assets/depois-d2-detalhe-com-icone-ligar.png">    </p:cNvPr>
-          <p:cNvPicPr>
-            <a:picLocks noChangeAspect="1"/>
-          </p:cNvPicPr>
-          <p:nvPr/>
-        </p:nvPicPr>
-        <p:blipFill>
-          <a:blip r:embed="rId4"/>
-          <a:stretch>
-            <a:fillRect/>
-          </a:stretch>
-        </p:blipFill>
-        <p:spPr>
-          <a:xfrm>
-            <a:off x="4753371" y="1508760"/>
-            <a:ext cx="1098789" cy="2377440"/>
-          </a:xfrm>
-          <a:prstGeom prst="rect">
-            <a:avLst/>
-          </a:prstGeom>
-        </p:spPr>
-      </p:pic>
-      <p:sp>
-        <p:nvSpPr>
-          <p:cNvPr id="15" name="Text 9"/>
-          <p:cNvSpPr/>
-          <p:nvPr/>
-        </p:nvSpPr>
-        <p:spPr>
-          <a:xfrm>
-            <a:off x="4372600" y="1508760"/>
-            <a:ext cx="380771" cy="2377440"/>
-          </a:xfrm>
-          <a:prstGeom prst="rect">
-            <a:avLst/>
-          </a:prstGeom>
-          <a:noFill/>
-          <a:ln/>
-        </p:spPr>
-        <p:txBody>
-          <a:bodyPr wrap="square" lIns="0" tIns="0" rIns="0" bIns="0" rtlCol="0" anchor="ctr"/>
-          <a:lstStyle/>
-          <a:p>
-            <a:pPr algn="ctr" indent="0" marL="0">
-              <a:buNone/>
-            </a:pPr>
-            <a:r>
-              <a:rPr lang="en-US" sz="2000" b="1" dirty="0">
-                <a:solidFill>
-                  <a:srgbClr val="06B6D4"/>
-                </a:solidFill>
-              </a:rPr>
-              <a:t>→</a:t>
-            </a:r>
-            <a:endParaRPr lang="en-US" sz="2000" dirty="0"/>
-          </a:p>
-        </p:txBody>
-      </p:sp>
-      <p:sp>
-        <p:nvSpPr>
-          <p:cNvPr id="16" name="Text 10"/>
-          <p:cNvSpPr/>
-          <p:nvPr/>
-        </p:nvSpPr>
-        <p:spPr>
-          <a:xfrm>
-            <a:off x="3291840" y="3904488"/>
-            <a:ext cx="1080760" cy="228600"/>
-          </a:xfrm>
-          <a:prstGeom prst="rect">
-            <a:avLst/>
-          </a:prstGeom>
-          <a:noFill/>
-          <a:ln/>
-        </p:spPr>
-        <p:txBody>
-          <a:bodyPr wrap="square" lIns="0" tIns="0" rIns="0" bIns="0" rtlCol="0" anchor="ctr"/>
-          <a:lstStyle/>
-          <a:p>
-            <a:pPr algn="ctr" indent="0" marL="0">
-              <a:buNone/>
-            </a:pPr>
-            <a:r>
-              <a:rPr lang="en-US" sz="900" dirty="0">
-                <a:solidFill>
-                  <a:srgbClr val="64748B"/>
-                </a:solidFill>
-                <a:latin typeface="Calibri" pitchFamily="34" charset="0"/>
-                <a:ea typeface="Calibri" pitchFamily="34" charset="-122"/>
-                <a:cs typeface="Calibri" pitchFamily="34" charset="-120"/>
-              </a:rPr>
-              <a:t>Antes</a:t>
-            </a:r>
-            <a:endParaRPr lang="en-US" sz="900" dirty="0"/>
-          </a:p>
-        </p:txBody>
-      </p:sp>
-      <p:sp>
-        <p:nvSpPr>
-          <p:cNvPr id="17" name="Text 11"/>
-          <p:cNvSpPr/>
-          <p:nvPr/>
-        </p:nvSpPr>
-        <p:spPr>
-          <a:xfrm>
-            <a:off x="4753371" y="3904488"/>
-            <a:ext cx="1098789" cy="228600"/>
-          </a:xfrm>
-          <a:prstGeom prst="rect">
-            <a:avLst/>
-          </a:prstGeom>
-          <a:noFill/>
-          <a:ln/>
-        </p:spPr>
-        <p:txBody>
-          <a:bodyPr wrap="square" lIns="0" tIns="0" rIns="0" bIns="0" rtlCol="0" anchor="ctr"/>
-          <a:lstStyle/>
-          <a:p>
-            <a:pPr algn="ctr" indent="0" marL="0">
-              <a:buNone/>
-            </a:pPr>
-            <a:r>
-              <a:rPr lang="en-US" sz="900" b="1" dirty="0">
-                <a:solidFill>
-                  <a:srgbClr val="059669"/>
-                </a:solidFill>
-                <a:latin typeface="Calibri" pitchFamily="34" charset="0"/>
-                <a:ea typeface="Calibri" pitchFamily="34" charset="-122"/>
-                <a:cs typeface="Calibri" pitchFamily="34" charset="-120"/>
-              </a:rPr>
-              <a:t>Depois</a:t>
-            </a:r>
-            <a:endParaRPr lang="en-US" sz="900" dirty="0"/>
-          </a:p>
-        </p:txBody>
-      </p:sp>
-      <p:sp>
-        <p:nvSpPr>
-          <p:cNvPr id="18" name="Shape 12"/>
-          <p:cNvSpPr/>
-          <p:nvPr/>
-        </p:nvSpPr>
-        <p:spPr>
-          <a:xfrm>
-            <a:off x="5925312" y="960120"/>
-            <a:ext cx="2688336" cy="3429000"/>
-          </a:xfrm>
-          <a:prstGeom prst="roundRect">
-            <a:avLst>
-              <a:gd name="adj" fmla="val 2721"/>
-            </a:avLst>
-          </a:prstGeom>
-          <a:solidFill>
-            <a:srgbClr val="F8FAFC"/>
-          </a:solidFill>
-          <a:ln w="12700">
-            <a:solidFill>
-              <a:srgbClr val="E2E8F0"/>
-            </a:solidFill>
-            <a:prstDash val="solid"/>
-          </a:ln>
-          <a:effectLst>
-            <a:outerShdw sx="100000" sy="100000" kx="0" ky="0" algn="bl" rotWithShape="0" blurRad="88900" dist="38100" dir="5400000">
-              <a:srgbClr val="0F172A">
-                <a:alpha val="10000"/>
-              </a:srgbClr>
-            </a:outerShdw>
-          </a:effectLst>
-        </p:spPr>
-      </p:sp>
-      <p:sp>
-        <p:nvSpPr>
-          <p:cNvPr id="19" name="Text 13"/>
-          <p:cNvSpPr/>
-          <p:nvPr/>
-        </p:nvSpPr>
-        <p:spPr>
-          <a:xfrm>
-            <a:off x="5989320" y="1051560"/>
-            <a:ext cx="2651760" cy="320040"/>
-          </a:xfrm>
-          <a:prstGeom prst="rect">
-            <a:avLst/>
-          </a:prstGeom>
-          <a:noFill/>
-          <a:ln/>
-        </p:spPr>
-        <p:txBody>
-          <a:bodyPr wrap="square" lIns="0" tIns="0" rIns="0" bIns="0" rtlCol="0" anchor="ctr"/>
-          <a:lstStyle/>
-          <a:p>
-            <a:pPr algn="ctr" indent="0" marL="0">
-              <a:buNone/>
-            </a:pPr>
-            <a:r>
-              <a:rPr lang="en-US" sz="1250" b="1" dirty="0">
-                <a:solidFill>
-                  <a:srgbClr val="1D4ED8"/>
-                </a:solidFill>
-                <a:latin typeface="Calibri" pitchFamily="34" charset="0"/>
-                <a:ea typeface="Calibri" pitchFamily="34" charset="-122"/>
-                <a:cs typeface="Calibri" pitchFamily="34" charset="-120"/>
-              </a:rPr>
-              <a:t>D3 · Adicionar foto</a:t>
-            </a:r>
-            <a:endParaRPr lang="en-US" sz="1250" dirty="0"/>
-          </a:p>
-        </p:txBody>
-      </p:sp>
-      <p:pic>
-        <p:nvPicPr>
-          <p:cNvPr id="20" name="Image 4" descr="assets/antes-d2d3-detalhe-sem-icone-sem-foto.png">    </p:cNvPr>
-          <p:cNvPicPr>
-            <a:picLocks noChangeAspect="1"/>
-          </p:cNvPicPr>
-          <p:nvPr/>
-        </p:nvPicPr>
-        <p:blipFill>
-          <a:blip r:embed="rId5"/>
-          <a:stretch>
-            <a:fillRect/>
-          </a:stretch>
-        </p:blipFill>
-        <p:spPr>
-          <a:xfrm>
-            <a:off x="6080760" y="1508760"/>
-            <a:ext cx="1080760" cy="2377440"/>
-          </a:xfrm>
-          <a:prstGeom prst="rect">
-            <a:avLst/>
-          </a:prstGeom>
-        </p:spPr>
-      </p:pic>
-      <p:pic>
-        <p:nvPicPr>
-          <p:cNvPr id="21" name="Image 5" descr="assets/antes-d2-depois-d3-detalhe-com-foto.png">    </p:cNvPr>
-          <p:cNvPicPr>
-            <a:picLocks noChangeAspect="1"/>
-          </p:cNvPicPr>
-          <p:nvPr/>
-        </p:nvPicPr>
-        <p:blipFill>
-          <a:blip r:embed="rId6"/>
-          <a:stretch>
-            <a:fillRect/>
-          </a:stretch>
-        </p:blipFill>
-        <p:spPr>
-          <a:xfrm>
-            <a:off x="7558088" y="1508760"/>
-            <a:ext cx="1082993" cy="2377440"/>
-          </a:xfrm>
-          <a:prstGeom prst="rect">
-            <a:avLst/>
-          </a:prstGeom>
-        </p:spPr>
-      </p:pic>
-      <p:sp>
-        <p:nvSpPr>
-          <p:cNvPr id="22" name="Text 14"/>
-          <p:cNvSpPr/>
-          <p:nvPr/>
-        </p:nvSpPr>
-        <p:spPr>
-          <a:xfrm>
-            <a:off x="7161520" y="1508760"/>
-            <a:ext cx="396567" cy="2377440"/>
-          </a:xfrm>
-          <a:prstGeom prst="rect">
-            <a:avLst/>
-          </a:prstGeom>
-          <a:noFill/>
-          <a:ln/>
-        </p:spPr>
-        <p:txBody>
-          <a:bodyPr wrap="square" lIns="0" tIns="0" rIns="0" bIns="0" rtlCol="0" anchor="ctr"/>
-          <a:lstStyle/>
-          <a:p>
-            <a:pPr algn="ctr" indent="0" marL="0">
-              <a:buNone/>
-            </a:pPr>
-            <a:r>
-              <a:rPr lang="en-US" sz="2000" b="1" dirty="0">
-                <a:solidFill>
-                  <a:srgbClr val="06B6D4"/>
-                </a:solidFill>
-              </a:rPr>
-              <a:t>→</a:t>
-            </a:r>
-            <a:endParaRPr lang="en-US" sz="2000" dirty="0"/>
-          </a:p>
-        </p:txBody>
-      </p:sp>
-      <p:sp>
-        <p:nvSpPr>
-          <p:cNvPr id="23" name="Text 15"/>
-          <p:cNvSpPr/>
-          <p:nvPr/>
-        </p:nvSpPr>
-        <p:spPr>
-          <a:xfrm>
-            <a:off x="6080760" y="3904488"/>
-            <a:ext cx="1080760" cy="228600"/>
-          </a:xfrm>
-          <a:prstGeom prst="rect">
-            <a:avLst/>
-          </a:prstGeom>
-          <a:noFill/>
-          <a:ln/>
-        </p:spPr>
-        <p:txBody>
-          <a:bodyPr wrap="square" lIns="0" tIns="0" rIns="0" bIns="0" rtlCol="0" anchor="ctr"/>
-          <a:lstStyle/>
-          <a:p>
-            <a:pPr algn="ctr" indent="0" marL="0">
-              <a:buNone/>
-            </a:pPr>
-            <a:r>
-              <a:rPr lang="en-US" sz="900" dirty="0">
-                <a:solidFill>
-                  <a:srgbClr val="64748B"/>
-                </a:solidFill>
-                <a:latin typeface="Calibri" pitchFamily="34" charset="0"/>
-                <a:ea typeface="Calibri" pitchFamily="34" charset="-122"/>
-                <a:cs typeface="Calibri" pitchFamily="34" charset="-120"/>
-              </a:rPr>
-              <a:t>Antes</a:t>
-            </a:r>
-            <a:endParaRPr lang="en-US" sz="900" dirty="0"/>
-          </a:p>
-        </p:txBody>
-      </p:sp>
-      <p:sp>
-        <p:nvSpPr>
-          <p:cNvPr id="24" name="Text 16"/>
-          <p:cNvSpPr/>
-          <p:nvPr/>
-        </p:nvSpPr>
-        <p:spPr>
-          <a:xfrm>
-            <a:off x="7558088" y="3904488"/>
-            <a:ext cx="1082993" cy="228600"/>
-          </a:xfrm>
-          <a:prstGeom prst="rect">
-            <a:avLst/>
-          </a:prstGeom>
-          <a:noFill/>
-          <a:ln/>
-        </p:spPr>
-        <p:txBody>
-          <a:bodyPr wrap="square" lIns="0" tIns="0" rIns="0" bIns="0" rtlCol="0" anchor="ctr"/>
-          <a:lstStyle/>
-          <a:p>
-            <a:pPr algn="ctr" indent="0" marL="0">
-              <a:buNone/>
-            </a:pPr>
-            <a:r>
-              <a:rPr lang="en-US" sz="900" b="1" dirty="0">
-                <a:solidFill>
-                  <a:srgbClr val="059669"/>
-                </a:solidFill>
-                <a:latin typeface="Calibri" pitchFamily="34" charset="0"/>
-                <a:ea typeface="Calibri" pitchFamily="34" charset="-122"/>
-                <a:cs typeface="Calibri" pitchFamily="34" charset="-120"/>
-              </a:rPr>
-              <a:t>Depois</a:t>
-            </a:r>
-            <a:endParaRPr lang="en-US" sz="900" dirty="0"/>
-          </a:p>
-        </p:txBody>
-      </p:sp>
-      <p:sp>
-        <p:nvSpPr>
-          <p:cNvPr id="25" name="Text 17"/>
-          <p:cNvSpPr/>
-          <p:nvPr/>
-        </p:nvSpPr>
-        <p:spPr>
-          <a:xfrm>
-            <a:off x="457200" y="4759452"/>
-            <a:ext cx="5486400" cy="274320"/>
-          </a:xfrm>
-          <a:prstGeom prst="rect">
-            <a:avLst/>
-          </a:prstGeom>
-          <a:noFill/>
-          <a:ln/>
-        </p:spPr>
-        <p:txBody>
-          <a:bodyPr wrap="square" rtlCol="0" anchor="ctr"/>
-          <a:lstStyle/>
-          <a:p>
-            <a:pPr algn="l" indent="0" marL="0">
-              <a:buNone/>
-            </a:pPr>
-            <a:r>
-              <a:rPr lang="en-US" sz="900" dirty="0">
-                <a:solidFill>
-                  <a:srgbClr val="64748B"/>
-                </a:solidFill>
-                <a:latin typeface="Calibri" pitchFamily="34" charset="0"/>
-                <a:ea typeface="Calibri" pitchFamily="34" charset="-122"/>
-                <a:cs typeface="Calibri" pitchFamily="34" charset="-120"/>
-              </a:rPr>
-              <a:t>Track Fibra · IHC — UTFPR Campo Mourão</a:t>
-            </a:r>
-            <a:endParaRPr lang="en-US" sz="900" dirty="0"/>
-          </a:p>
-        </p:txBody>
-      </p:sp>
-      <p:sp>
-        <p:nvSpPr>
-          <p:cNvPr id="26" name="Text 18"/>
-          <p:cNvSpPr/>
-          <p:nvPr/>
-        </p:nvSpPr>
-        <p:spPr>
-          <a:xfrm>
-            <a:off x="7772400" y="4759452"/>
-            <a:ext cx="914400" cy="274320"/>
-          </a:xfrm>
-          <a:prstGeom prst="rect">
-            <a:avLst/>
-          </a:prstGeom>
-          <a:noFill/>
-          <a:ln/>
-        </p:spPr>
-        <p:txBody>
-          <a:bodyPr wrap="square" rtlCol="0" anchor="ctr"/>
-          <a:lstStyle/>
-          <a:p>
-            <a:pPr algn="r" indent="0" marL="0">
-              <a:buNone/>
-            </a:pPr>
-            <a:r>
-              <a:rPr lang="en-US" sz="900" dirty="0">
-                <a:solidFill>
-                  <a:srgbClr val="64748B"/>
-                </a:solidFill>
-                <a:latin typeface="Calibri" pitchFamily="34" charset="0"/>
-                <a:ea typeface="Calibri" pitchFamily="34" charset="-122"/>
-                <a:cs typeface="Calibri" pitchFamily="34" charset="-120"/>
-              </a:rPr>
-              <a:t>9 / 11</a:t>
+                <a:latin typeface="Arial" pitchFamily="34" charset="0"/>
+                <a:ea typeface="Arial" pitchFamily="34" charset="-122"/>
+                <a:cs typeface="Arial" pitchFamily="34" charset="-120"/>
+              </a:rPr>
+              <a:t>9 / 12</a:t>
             </a:r>
             <a:endParaRPr lang="en-US" sz="900" dirty="0"/>
           </a:p>
